--- a/presentation/Copper_Forecast_For_Director.pptx
+++ b/presentation/Copper_Forecast_For_Director.pptx
@@ -21,9 +21,10 @@
     <p:sldId id="269" r:id="rId15"/>
     <p:sldId id="270" r:id="rId16"/>
     <p:sldId id="271" r:id="rId17"/>
+    <p:sldId id="272" r:id="rId18"/>
   </p:sldIdLst>
   <p:notesMasterIdLst>
-    <p:notesMasterId r:id="rId18"/>
+    <p:notesMasterId r:id="rId19"/>
   </p:notesMasterIdLst>
   <p:sldSz cx="9144000" cy="5143500"/>
   <p:notesSz cx="5143500" cy="9144000"/>
@@ -229,6 +230,16 @@
               <a:effectLst/>
             </c:spPr>
           </c:dPt>
+          <c:dPt>
+            <c:idx val="7"/>
+            <c:bubble3D val="0"/>
+            <c:spPr>
+              <a:solidFill>
+                <a:srgbClr val="8DA1B9"/>
+              </a:solidFill>
+              <a:effectLst/>
+            </c:spPr>
+          </c:dPt>
           <c:dLbls>
             <c:dLbl>
               <c:idx val="0"/>
@@ -239,7 +250,7 @@
                 <a:lstStyle/>
                 <a:p>
                   <a:pPr>
-                    <a:defRPr sz="1100" b="0" i="0" u="none" strike="noStrike">
+                    <a:defRPr sz="1000" b="0" i="0" u="none" strike="noStrike">
                       <a:solidFill>
                         <a:srgbClr val="FFFFFF"/>
                       </a:solidFill>
@@ -264,7 +275,7 @@
                 <a:lstStyle/>
                 <a:p>
                   <a:pPr>
-                    <a:defRPr sz="1100" b="0" i="0" u="none" strike="noStrike">
+                    <a:defRPr sz="1000" b="0" i="0" u="none" strike="noStrike">
                       <a:solidFill>
                         <a:srgbClr val="FFFFFF"/>
                       </a:solidFill>
@@ -289,7 +300,7 @@
                 <a:lstStyle/>
                 <a:p>
                   <a:pPr>
-                    <a:defRPr sz="1100" b="0" i="0" u="none" strike="noStrike">
+                    <a:defRPr sz="1000" b="0" i="0" u="none" strike="noStrike">
                       <a:solidFill>
                         <a:srgbClr val="FFFFFF"/>
                       </a:solidFill>
@@ -314,7 +325,7 @@
                 <a:lstStyle/>
                 <a:p>
                   <a:pPr>
-                    <a:defRPr sz="1100" b="0" i="0" u="none" strike="noStrike">
+                    <a:defRPr sz="1000" b="0" i="0" u="none" strike="noStrike">
                       <a:solidFill>
                         <a:srgbClr val="FFFFFF"/>
                       </a:solidFill>
@@ -339,7 +350,7 @@
                 <a:lstStyle/>
                 <a:p>
                   <a:pPr>
-                    <a:defRPr sz="1100" b="0" i="0" u="none" strike="noStrike">
+                    <a:defRPr sz="1000" b="0" i="0" u="none" strike="noStrike">
                       <a:solidFill>
                         <a:srgbClr val="FFFFFF"/>
                       </a:solidFill>
@@ -364,7 +375,7 @@
                 <a:lstStyle/>
                 <a:p>
                   <a:pPr>
-                    <a:defRPr sz="1100" b="0" i="0" u="none" strike="noStrike">
+                    <a:defRPr sz="1000" b="0" i="0" u="none" strike="noStrike">
                       <a:solidFill>
                         <a:srgbClr val="FFFFFF"/>
                       </a:solidFill>
@@ -389,7 +400,32 @@
                 <a:lstStyle/>
                 <a:p>
                   <a:pPr>
-                    <a:defRPr sz="1100" b="0" i="0" u="none" strike="noStrike">
+                    <a:defRPr sz="1000" b="0" i="0" u="none" strike="noStrike">
+                      <a:solidFill>
+                        <a:srgbClr val="FFFFFF"/>
+                      </a:solidFill>
+                      <a:latin typeface="Arial"/>
+                    </a:defRPr>
+                  </a:pPr>
+                </a:p>
+              </c:txPr>
+              <c:showLegendKey val="0"/>
+              <c:showVal val="0"/>
+              <c:showCatName val="0"/>
+              <c:showSerName val="0"/>
+              <c:showPercent val="1"/>
+              <c:showBubbleSize val="0"/>
+            </c:dLbl>
+            <c:dLbl>
+              <c:idx val="7"/>
+              <c:numFmt formatCode="0%" sourceLinked="0"/>
+              <c:spPr/>
+              <c:txPr>
+                <a:bodyPr/>
+                <a:lstStyle/>
+                <a:p>
+                  <a:pPr>
+                    <a:defRPr sz="1000" b="0" i="0" u="none" strike="noStrike">
                       <a:solidFill>
                         <a:srgbClr val="FFFFFF"/>
                       </a:solidFill>
@@ -431,9 +467,9 @@
           </c:dLbls>
           <c:cat>
             <c:strRef>
-              <c:f>Sheet1!$A$2:$A$8</c:f>
+              <c:f>Sheet1!$A$2:$A$9</c:f>
               <c:strCache>
-                <c:ptCount val="7"/>
+                <c:ptCount val="8"/>
                 <c:pt idx="0">
                   <c:v>① История цены</c:v>
                 </c:pt>
@@ -441,33 +477,36 @@
                   <c:v>④ Спекулянты (COT)</c:v>
                 </c:pt>
                 <c:pt idx="2">
-                  <c:v>② Доллар DXY</c:v>
+                  <c:v>② Валюты</c:v>
                 </c:pt>
                 <c:pt idx="3">
-                  <c:v>③ Связанные товары</c:v>
+                  <c:v>⑤ LME + запасы</c:v>
                 </c:pt>
                 <c:pt idx="4">
-                  <c:v>⑥ Технические</c:v>
+                  <c:v>③ Mining ETFs + риск</c:v>
                 </c:pt>
                 <c:pt idx="5">
-                  <c:v>⑤ Запасы LME</c:v>
+                  <c:v>⑥ Связанные товары</c:v>
                 </c:pt>
                 <c:pt idx="6">
-                  <c:v>⑦ Календарь/режим</c:v>
+                  <c:v>⑦ Технические</c:v>
+                </c:pt>
+                <c:pt idx="7">
+                  <c:v>⑧ Новости + сентимент</c:v>
                 </c:pt>
               </c:strCache>
             </c:strRef>
           </c:cat>
           <c:val>
             <c:numRef>
-              <c:f>Sheet1!$B$2:$B$8</c:f>
+              <c:f>Sheet1!$B$2:$B$9</c:f>
               <c:numCache>
-                <c:ptCount val="7"/>
+                <c:ptCount val="8"/>
                 <c:pt idx="0">
-                  <c:v>40</c:v>
+                  <c:v>35</c:v>
                 </c:pt>
                 <c:pt idx="1">
-                  <c:v>15</c:v>
+                  <c:v>13</c:v>
                 </c:pt>
                 <c:pt idx="2">
                   <c:v>12</c:v>
@@ -482,6 +521,9 @@
                   <c:v>8</c:v>
                 </c:pt>
                 <c:pt idx="6">
+                  <c:v>7</c:v>
+                </c:pt>
+                <c:pt idx="7">
                   <c:v>5</c:v>
                 </c:pt>
               </c:numCache>
@@ -1555,6 +1597,94 @@
             <a:fld id="{F7021451-1387-4CA6-816F-3879F97B5CBC}" type="slidenum">
               <a:rPr lang="en-US"/>
               <a:t>16</a:t>
+            </a:fld>
+            <a:endParaRPr lang="en-US"/>
+          </a:p>
+        </p:txBody>
+      </p:sp>
+    </p:spTree>
+    <p:extLst>
+      <p:ext uri="{BB962C8B-B14F-4D97-AF65-F5344CB8AC3E}">
+        <p14:creationId xmlns:p14="http://schemas.microsoft.com/office/powerpoint/2010/main" val="1024086991"/>
+      </p:ext>
+    </p:extLst>
+  </p:cSld>
+  <p:clrMapOvr>
+    <a:masterClrMapping/>
+  </p:clrMapOvr>
+</p:notes>
+</file>
+
+<file path=ppt/notesSlides/notesSlide17.xml><?xml version="1.0" encoding="utf-8"?>
+<p:notes xmlns:a="http://schemas.openxmlformats.org/drawingml/2006/main" xmlns:r="http://schemas.openxmlformats.org/officeDocument/2006/relationships" xmlns:p="http://schemas.openxmlformats.org/presentationml/2006/main">
+  <p:cSld>
+    <p:spTree>
+      <p:nvGrpSpPr>
+        <p:cNvPr id="1" name=""/>
+        <p:cNvGrpSpPr/>
+        <p:nvPr/>
+      </p:nvGrpSpPr>
+      <p:grpSpPr>
+        <a:xfrm>
+          <a:off x="0" y="0"/>
+          <a:ext cx="0" cy="0"/>
+          <a:chOff x="0" y="0"/>
+          <a:chExt cx="0" cy="0"/>
+        </a:xfrm>
+      </p:grpSpPr>
+      <p:sp>
+        <p:nvSpPr>
+          <p:cNvPr id="2" name="Slide Image Placeholder 1"/>
+          <p:cNvSpPr>
+            <a:spLocks noGrp="1" noRot="1" noChangeAspect="1"/>
+          </p:cNvSpPr>
+          <p:nvPr>
+            <p:ph type="sldImg"/>
+          </p:nvPr>
+        </p:nvSpPr>
+        <p:spPr/>
+      </p:sp>
+      <p:sp>
+        <p:nvSpPr>
+          <p:cNvPr id="3" name="Notes Placeholder 2"/>
+          <p:cNvSpPr>
+            <a:spLocks noGrp="1"/>
+          </p:cNvSpPr>
+          <p:nvPr>
+            <p:ph type="body" idx="1"/>
+          </p:nvPr>
+        </p:nvSpPr>
+        <p:spPr/>
+        <p:txBody>
+          <a:bodyPr/>
+          <a:lstStyle/>
+          <a:p>
+            <a:r>
+              <a:rPr lang="en-US" dirty="0"/>
+              <a:t/>
+            </a:r>
+            <a:endParaRPr lang="en-US" dirty="0"/>
+          </a:p>
+        </p:txBody>
+      </p:sp>
+      <p:sp>
+        <p:nvSpPr>
+          <p:cNvPr id="4" name="Slide Number Placeholder 3"/>
+          <p:cNvSpPr>
+            <a:spLocks noGrp="1"/>
+          </p:cNvSpPr>
+          <p:nvPr>
+            <p:ph type="sldNum" sz="quarter" idx="10"/>
+          </p:nvPr>
+        </p:nvSpPr>
+        <p:spPr/>
+        <p:txBody>
+          <a:bodyPr/>
+          <a:lstStyle/>
+          <a:p>
+            <a:fld id="{F7021451-1387-4CA6-816F-3879F97B5CBC}" type="slidenum">
+              <a:rPr lang="en-US"/>
+              <a:t>17</a:t>
             </a:fld>
             <a:endParaRPr lang="en-US"/>
           </a:p>
@@ -2847,7 +2977,7 @@
                 <a:ea typeface="Calibri" pitchFamily="34" charset="-122"/>
                 <a:cs typeface="Calibri" pitchFamily="34" charset="-120"/>
               </a:rPr>
-              <a:t>Доклад для руководства · 7 минут чтения · 16 слайдов</a:t>
+              <a:t>Доклад для руководства · 8 минут чтения · 17 слайдов · v2</a:t>
             </a:r>
             <a:endParaRPr lang="en-US" sz="1300" dirty="0"/>
           </a:p>
@@ -3700,7 +3830,7 @@
                 <a:ea typeface="Calibri" pitchFamily="34" charset="-122"/>
                 <a:cs typeface="Calibri" pitchFamily="34" charset="-120"/>
               </a:rPr>
-              <a:t>10 / 16</a:t>
+              <a:t>10 / 17</a:t>
             </a:r>
             <a:endParaRPr lang="en-US" sz="900" dirty="0"/>
           </a:p>
@@ -3933,7 +4063,7 @@
                 <a:ea typeface="Calibri" pitchFamily="34" charset="-122"/>
                 <a:cs typeface="Calibri" pitchFamily="34" charset="-120"/>
               </a:rPr>
-              <a:t>Более половины (55 %) — цена и спекулянты. Это «душа» рынка.</a:t>
+              <a:t>Около половины (48 %) — цена и спекулянты. Это «душа» рынка.</a:t>
             </a:r>
             <a:endParaRPr lang="en-US" sz="1200" dirty="0"/>
           </a:p>
@@ -3954,7 +4084,7 @@
                 <a:ea typeface="Calibri" pitchFamily="34" charset="-122"/>
                 <a:cs typeface="Calibri" pitchFamily="34" charset="-120"/>
               </a:rPr>
-              <a:t>Макро (доллар + связанные товары + ставки) — четверть веса.</a:t>
+              <a:t>Макро (валюты + Mining ETFs + связанные товары) — 30 %.</a:t>
             </a:r>
             <a:endParaRPr lang="en-US" sz="1200" dirty="0"/>
           </a:p>
@@ -3975,7 +4105,7 @@
                 <a:ea typeface="Calibri" pitchFamily="34" charset="-122"/>
                 <a:cs typeface="Calibri" pitchFamily="34" charset="-120"/>
               </a:rPr>
-              <a:t>Технические и календарные — около 15 %.</a:t>
+              <a:t>Глобальный baseline LME 3M + физические запасы — 10 %.</a:t>
             </a:r>
             <a:endParaRPr lang="en-US" sz="1200" dirty="0"/>
           </a:p>
@@ -3996,7 +4126,7 @@
                 <a:ea typeface="Calibri" pitchFamily="34" charset="-122"/>
                 <a:cs typeface="Calibri" pitchFamily="34" charset="-120"/>
               </a:rPr>
-              <a:t>Физические запасы пока 8 % — будет расти при накоплении истории.</a:t>
+              <a:t>Технические + новости с сентиментом — 12 %.</a:t>
             </a:r>
             <a:endParaRPr lang="en-US" sz="1200" dirty="0"/>
           </a:p>
@@ -4035,7 +4165,7 @@
                 <a:ea typeface="Calibri" pitchFamily="34" charset="-122"/>
                 <a:cs typeface="Calibri" pitchFamily="34" charset="-120"/>
               </a:rPr>
-              <a:t>Веса корректируются автоматически каждые 20 бизнес-дней при переобучении.</a:t>
+              <a:t>Веса корректируются автоматически: при включении адаптивного режима — по сигналу Markov-модели.</a:t>
             </a:r>
             <a:endParaRPr lang="en-US" sz="1100" dirty="0"/>
           </a:p>
@@ -4113,7 +4243,7 @@
                 <a:ea typeface="Calibri" pitchFamily="34" charset="-122"/>
                 <a:cs typeface="Calibri" pitchFamily="34" charset="-120"/>
               </a:rPr>
-              <a:t>11 / 16</a:t>
+              <a:t>11 / 17</a:t>
             </a:r>
             <a:endParaRPr lang="en-US" sz="900" dirty="0"/>
           </a:p>
@@ -4955,7 +5085,7 @@
                 <a:ea typeface="Calibri" pitchFamily="34" charset="-122"/>
                 <a:cs typeface="Calibri" pitchFamily="34" charset="-120"/>
               </a:rPr>
-              <a:t>Итоговый прогноз = средневзвешенное всех 4 моделей в логарифмическом пространстве. Коридор p10-p90 — естественная неопределённость, проверенная на 5 годах истории.</a:t>
+              <a:t>⚙️  Веса меняются автоматически: в спокойном рынке доверяем ML (XGB 45 %), в шоках — переключаемся на ARIMA/GBM (75 %). Решает «ломку» моделей в нестабильные периоды.</a:t>
             </a:r>
             <a:endParaRPr lang="en-US" sz="1100" dirty="0"/>
           </a:p>
@@ -5033,7 +5163,7 @@
                 <a:ea typeface="Calibri" pitchFamily="34" charset="-122"/>
                 <a:cs typeface="Calibri" pitchFamily="34" charset="-120"/>
               </a:rPr>
-              <a:t>12 / 16</a:t>
+              <a:t>12 / 17</a:t>
             </a:r>
             <a:endParaRPr lang="en-US" sz="900" dirty="0"/>
           </a:p>
@@ -5129,7 +5259,7 @@
                 <a:ea typeface="Calibri" pitchFamily="34" charset="-122"/>
                 <a:cs typeface="Calibri" pitchFamily="34" charset="-120"/>
               </a:rPr>
-              <a:t>Где модель сильна, а где беспомощна</a:t>
+              <a:t>Инструменты эксперта — что нового в v2</a:t>
             </a:r>
             <a:endParaRPr lang="en-US" sz="3000" dirty="0"/>
           </a:p>
@@ -5168,7 +5298,7 @@
                 <a:ea typeface="Calibri" pitchFamily="34" charset="-122"/>
                 <a:cs typeface="Calibri" pitchFamily="34" charset="-120"/>
               </a:rPr>
-              <a:t>Честная карта возможностей</a:t>
+              <a:t>Прогноз перестал быть «чёрным ящиком». Теперь видно, ПОЧЕМУ.</a:t>
             </a:r>
             <a:endParaRPr lang="en-US" sz="1400" dirty="0"/>
           </a:p>
@@ -5182,8 +5312,8 @@
         </p:nvSpPr>
         <p:spPr>
           <a:xfrm>
-            <a:off x="457200" y="1280160"/>
-            <a:ext cx="4023360" cy="3383280"/>
+            <a:off x="365760" y="1280160"/>
+            <a:ext cx="4023360" cy="1554480"/>
           </a:xfrm>
           <a:prstGeom prst="rect">
             <a:avLst/>
@@ -5191,9 +5321,9 @@
           <a:solidFill>
             <a:srgbClr val="F7F8FB"/>
           </a:solidFill>
-          <a:ln w="25400">
+          <a:ln w="12700">
             <a:solidFill>
-              <a:srgbClr val="0F9D58"/>
+              <a:srgbClr val="CADCFC"/>
             </a:solidFill>
             <a:prstDash val="solid"/>
           </a:ln>
@@ -5201,42 +5331,28 @@
       </p:sp>
       <p:sp>
         <p:nvSpPr>
-          <p:cNvPr id="6" name="Text 4"/>
-          <p:cNvSpPr/>
-          <p:nvPr/>
-        </p:nvSpPr>
-        <p:spPr>
-          <a:xfrm>
-            <a:off x="640080" y="1417320"/>
-            <a:ext cx="3657600" cy="320040"/>
-          </a:xfrm>
-          <a:prstGeom prst="rect">
-            <a:avLst/>
-          </a:prstGeom>
-          <a:noFill/>
-          <a:ln/>
-        </p:spPr>
-        <p:txBody>
-          <a:bodyPr wrap="square" lIns="0" tIns="0" rIns="0" bIns="0" rtlCol="0" anchor="ctr"/>
-          <a:lstStyle/>
-          <a:p>
-            <a:pPr indent="0" marL="0">
-              <a:buNone/>
-            </a:pPr>
-            <a:r>
-              <a:rPr lang="en-US" sz="1500" b="1" dirty="0">
-                <a:solidFill>
-                  <a:srgbClr val="0F9D58"/>
-                </a:solidFill>
-                <a:latin typeface="Calibri" pitchFamily="34" charset="0"/>
-                <a:ea typeface="Calibri" pitchFamily="34" charset="-122"/>
-                <a:cs typeface="Calibri" pitchFamily="34" charset="-120"/>
-              </a:rPr>
-              <a:t>✅  Что модель видит хорошо</a:t>
-            </a:r>
-            <a:endParaRPr lang="en-US" sz="1500" dirty="0"/>
-          </a:p>
-        </p:txBody>
+          <p:cNvPr id="6" name="Shape 4"/>
+          <p:cNvSpPr/>
+          <p:nvPr/>
+        </p:nvSpPr>
+        <p:spPr>
+          <a:xfrm>
+            <a:off x="365760" y="1280160"/>
+            <a:ext cx="73152" cy="1554480"/>
+          </a:xfrm>
+          <a:prstGeom prst="rect">
+            <a:avLst/>
+          </a:prstGeom>
+          <a:solidFill>
+            <a:srgbClr val="B87333"/>
+          </a:solidFill>
+          <a:ln w="12700">
+            <a:solidFill>
+              <a:srgbClr val="B87333"/>
+            </a:solidFill>
+            <a:prstDash val="solid"/>
+          </a:ln>
+        </p:spPr>
       </p:sp>
       <p:sp>
         <p:nvSpPr>
@@ -5246,28 +5362,63 @@
         </p:nvSpPr>
         <p:spPr>
           <a:xfrm>
-            <a:off x="640080" y="1783080"/>
-            <a:ext cx="3657600" cy="2743200"/>
-          </a:xfrm>
-          <a:prstGeom prst="rect">
-            <a:avLst/>
-          </a:prstGeom>
-          <a:noFill/>
-          <a:ln/>
-        </p:spPr>
-        <p:txBody>
-          <a:bodyPr wrap="square" lIns="0" tIns="0" rIns="0" bIns="0" rtlCol="0" anchor="t"/>
-          <a:lstStyle/>
-          <a:p>
-            <a:pPr marL="342900" indent="-342900">
-              <a:spcAft>
-                <a:spcPts val="600"/>
-              </a:spcAft>
-              <a:buSzPct val="100000"/>
-              <a:buChar char="■"/>
-            </a:pPr>
-            <a:r>
-              <a:rPr lang="en-US" sz="1100" dirty="0">
+            <a:off x="530352" y="1389888"/>
+            <a:ext cx="3749040" cy="320040"/>
+          </a:xfrm>
+          <a:prstGeom prst="rect">
+            <a:avLst/>
+          </a:prstGeom>
+          <a:noFill/>
+          <a:ln/>
+        </p:spPr>
+        <p:txBody>
+          <a:bodyPr wrap="square" lIns="0" tIns="0" rIns="0" bIns="0" rtlCol="0" anchor="ctr"/>
+          <a:lstStyle/>
+          <a:p>
+            <a:pPr indent="0" marL="0">
+              <a:buNone/>
+            </a:pPr>
+            <a:r>
+              <a:rPr lang="en-US" sz="1400" b="1" dirty="0">
+                <a:solidFill>
+                  <a:srgbClr val="1E2761"/>
+                </a:solidFill>
+                <a:latin typeface="Calibri" pitchFamily="34" charset="0"/>
+                <a:ea typeface="Calibri" pitchFamily="34" charset="-122"/>
+                <a:cs typeface="Calibri" pitchFamily="34" charset="-120"/>
+              </a:rPr>
+              <a:t>🔍 SHAP: почему такой прогноз?</a:t>
+            </a:r>
+            <a:endParaRPr lang="en-US" sz="1400" dirty="0"/>
+          </a:p>
+        </p:txBody>
+      </p:sp>
+      <p:sp>
+        <p:nvSpPr>
+          <p:cNvPr id="8" name="Text 6"/>
+          <p:cNvSpPr/>
+          <p:nvPr/>
+        </p:nvSpPr>
+        <p:spPr>
+          <a:xfrm>
+            <a:off x="530352" y="1737360"/>
+            <a:ext cx="3749040" cy="640080"/>
+          </a:xfrm>
+          <a:prstGeom prst="rect">
+            <a:avLst/>
+          </a:prstGeom>
+          <a:noFill/>
+          <a:ln/>
+        </p:spPr>
+        <p:txBody>
+          <a:bodyPr wrap="square" lIns="0" tIns="0" rIns="0" bIns="0" rtlCol="0" anchor="ctr"/>
+          <a:lstStyle/>
+          <a:p>
+            <a:pPr indent="0" marL="0">
+              <a:buNone/>
+            </a:pPr>
+            <a:r>
+              <a:rPr lang="en-US" sz="1000" dirty="0">
                 <a:solidFill>
                   <a:srgbClr val="242938"/>
                 </a:solidFill>
@@ -5275,127 +5426,61 @@
                 <a:ea typeface="Calibri" pitchFamily="34" charset="-122"/>
                 <a:cs typeface="Calibri" pitchFamily="34" charset="-120"/>
               </a:rPr>
-              <a:t>Тренды и инерцию рынка (последние 1-3 месяца)</a:t>
-            </a:r>
-            <a:endParaRPr lang="en-US" sz="1100" dirty="0"/>
-          </a:p>
-          <a:p>
-            <a:pPr marL="342900" indent="-342900">
-              <a:spcAft>
-                <a:spcPts val="600"/>
-              </a:spcAft>
-              <a:buSzPct val="100000"/>
-              <a:buChar char="■"/>
-            </a:pPr>
-            <a:r>
-              <a:rPr lang="en-US" sz="1100" dirty="0">
-                <a:solidFill>
-                  <a:srgbClr val="242938"/>
-                </a:solidFill>
-                <a:latin typeface="Calibri" pitchFamily="34" charset="0"/>
-                <a:ea typeface="Calibri" pitchFamily="34" charset="-122"/>
-                <a:cs typeface="Calibri" pitchFamily="34" charset="-120"/>
-              </a:rPr>
-              <a:t>Сезонные циклы (китайский Новый год, отчёты ФРС)</a:t>
-            </a:r>
-            <a:endParaRPr lang="en-US" sz="1100" dirty="0"/>
-          </a:p>
-          <a:p>
-            <a:pPr marL="342900" indent="-342900">
-              <a:spcAft>
-                <a:spcPts val="600"/>
-              </a:spcAft>
-              <a:buSzPct val="100000"/>
-              <a:buChar char="■"/>
-            </a:pPr>
-            <a:r>
-              <a:rPr lang="en-US" sz="1100" dirty="0">
-                <a:solidFill>
-                  <a:srgbClr val="242938"/>
-                </a:solidFill>
-                <a:latin typeface="Calibri" pitchFamily="34" charset="0"/>
-                <a:ea typeface="Calibri" pitchFamily="34" charset="-122"/>
-                <a:cs typeface="Calibri" pitchFamily="34" charset="-120"/>
-              </a:rPr>
-              <a:t>Перегрев / перепроданность через RSI и Bollinger</a:t>
-            </a:r>
-            <a:endParaRPr lang="en-US" sz="1100" dirty="0"/>
-          </a:p>
-          <a:p>
-            <a:pPr marL="342900" indent="-342900">
-              <a:spcAft>
-                <a:spcPts val="600"/>
-              </a:spcAft>
-              <a:buSzPct val="100000"/>
-              <a:buChar char="■"/>
-            </a:pPr>
-            <a:r>
-              <a:rPr lang="en-US" sz="1100" dirty="0">
-                <a:solidFill>
-                  <a:srgbClr val="242938"/>
-                </a:solidFill>
-                <a:latin typeface="Calibri" pitchFamily="34" charset="0"/>
-                <a:ea typeface="Calibri" pitchFamily="34" charset="-122"/>
-                <a:cs typeface="Calibri" pitchFamily="34" charset="-120"/>
-              </a:rPr>
-              <a:t>Скрытые режимы — переходы спокойный ↔ турбулентный</a:t>
-            </a:r>
-            <a:endParaRPr lang="en-US" sz="1100" dirty="0"/>
-          </a:p>
-          <a:p>
-            <a:pPr marL="342900" indent="-342900">
-              <a:spcAft>
-                <a:spcPts val="600"/>
-              </a:spcAft>
-              <a:buSzPct val="100000"/>
-              <a:buChar char="■"/>
-            </a:pPr>
-            <a:r>
-              <a:rPr lang="en-US" sz="1100" dirty="0">
-                <a:solidFill>
-                  <a:srgbClr val="242938"/>
-                </a:solidFill>
-                <a:latin typeface="Calibri" pitchFamily="34" charset="0"/>
-                <a:ea typeface="Calibri" pitchFamily="34" charset="-122"/>
-                <a:cs typeface="Calibri" pitchFamily="34" charset="-120"/>
-              </a:rPr>
-              <a:t>Опережающие сигналы от хедж-фондов через COT</a:t>
-            </a:r>
-            <a:endParaRPr lang="en-US" sz="1100" dirty="0"/>
-          </a:p>
-          <a:p>
-            <a:pPr marL="342900" indent="-342900">
-              <a:spcAft>
-                <a:spcPts val="600"/>
-              </a:spcAft>
-              <a:buSzPct val="100000"/>
-              <a:buChar char="■"/>
-            </a:pPr>
-            <a:r>
-              <a:rPr lang="en-US" sz="1100" dirty="0">
-                <a:solidFill>
-                  <a:srgbClr val="242938"/>
-                </a:solidFill>
-                <a:latin typeface="Calibri" pitchFamily="34" charset="0"/>
-                <a:ea typeface="Calibri" pitchFamily="34" charset="-122"/>
-                <a:cs typeface="Calibri" pitchFamily="34" charset="-120"/>
-              </a:rPr>
-              <a:t>Связи с долларом, золотом, нефтью</a:t>
-            </a:r>
-            <a:endParaRPr lang="en-US" sz="1100" dirty="0"/>
-          </a:p>
-        </p:txBody>
-      </p:sp>
-      <p:sp>
-        <p:nvSpPr>
-          <p:cNvPr id="8" name="Shape 6"/>
+              <a:t>На любой прогноз модель показывает топ-10 факторов, которые тянут цену вверх (зелёные) или вниз (красные). Видно вклад каждого: DXY, COT, RSI, корреляции.</a:t>
+            </a:r>
+            <a:endParaRPr lang="en-US" sz="1000" dirty="0"/>
+          </a:p>
+        </p:txBody>
+      </p:sp>
+      <p:sp>
+        <p:nvSpPr>
+          <p:cNvPr id="9" name="Text 7"/>
+          <p:cNvSpPr/>
+          <p:nvPr/>
+        </p:nvSpPr>
+        <p:spPr>
+          <a:xfrm>
+            <a:off x="530352" y="2395728"/>
+            <a:ext cx="3749040" cy="365760"/>
+          </a:xfrm>
+          <a:prstGeom prst="rect">
+            <a:avLst/>
+          </a:prstGeom>
+          <a:noFill/>
+          <a:ln/>
+        </p:spPr>
+        <p:txBody>
+          <a:bodyPr wrap="square" lIns="0" tIns="0" rIns="0" bIns="0" rtlCol="0" anchor="ctr"/>
+          <a:lstStyle/>
+          <a:p>
+            <a:pPr indent="0" marL="0">
+              <a:buNone/>
+            </a:pPr>
+            <a:r>
+              <a:rPr lang="en-US" sz="950" i="1" dirty="0">
+                <a:solidFill>
+                  <a:srgbClr val="B87333"/>
+                </a:solidFill>
+                <a:latin typeface="Calibri" pitchFamily="34" charset="0"/>
+                <a:ea typeface="Calibri" pitchFamily="34" charset="-122"/>
+                <a:cs typeface="Calibri" pitchFamily="34" charset="-120"/>
+              </a:rPr>
+              <a:t>💡 Перестали верить «вслепую» — теперь решение опирается на видимые причины.</a:t>
+            </a:r>
+            <a:endParaRPr lang="en-US" sz="950" dirty="0"/>
+          </a:p>
+        </p:txBody>
+      </p:sp>
+      <p:sp>
+        <p:nvSpPr>
+          <p:cNvPr id="10" name="Shape 8"/>
           <p:cNvSpPr/>
           <p:nvPr/>
         </p:nvSpPr>
         <p:spPr>
           <a:xfrm>
             <a:off x="4663440" y="1280160"/>
-            <a:ext cx="4023360" cy="3383280"/>
+            <a:ext cx="4023360" cy="1554480"/>
           </a:xfrm>
           <a:prstGeom prst="rect">
             <a:avLst/>
@@ -5403,9 +5488,9 @@
           <a:solidFill>
             <a:srgbClr val="F7F8FB"/>
           </a:solidFill>
-          <a:ln w="25400">
+          <a:ln w="12700">
             <a:solidFill>
-              <a:srgbClr val="D93025"/>
+              <a:srgbClr val="CADCFC"/>
             </a:solidFill>
             <a:prstDash val="solid"/>
           </a:ln>
@@ -5413,73 +5498,94 @@
       </p:sp>
       <p:sp>
         <p:nvSpPr>
-          <p:cNvPr id="9" name="Text 7"/>
-          <p:cNvSpPr/>
-          <p:nvPr/>
-        </p:nvSpPr>
-        <p:spPr>
-          <a:xfrm>
-            <a:off x="4846320" y="1417320"/>
-            <a:ext cx="3657600" cy="320040"/>
-          </a:xfrm>
-          <a:prstGeom prst="rect">
-            <a:avLst/>
-          </a:prstGeom>
-          <a:noFill/>
-          <a:ln/>
-        </p:spPr>
-        <p:txBody>
-          <a:bodyPr wrap="square" lIns="0" tIns="0" rIns="0" bIns="0" rtlCol="0" anchor="ctr"/>
-          <a:lstStyle/>
-          <a:p>
-            <a:pPr indent="0" marL="0">
-              <a:buNone/>
-            </a:pPr>
-            <a:r>
-              <a:rPr lang="en-US" sz="1500" b="1" dirty="0">
-                <a:solidFill>
-                  <a:srgbClr val="D93025"/>
-                </a:solidFill>
-                <a:latin typeface="Calibri" pitchFamily="34" charset="0"/>
-                <a:ea typeface="Calibri" pitchFamily="34" charset="-122"/>
-                <a:cs typeface="Calibri" pitchFamily="34" charset="-120"/>
-              </a:rPr>
-              <a:t>❌  Чего модель не видит</a:t>
-            </a:r>
-            <a:endParaRPr lang="en-US" sz="1500" dirty="0"/>
-          </a:p>
-        </p:txBody>
-      </p:sp>
-      <p:sp>
-        <p:nvSpPr>
-          <p:cNvPr id="10" name="Text 8"/>
-          <p:cNvSpPr/>
-          <p:nvPr/>
-        </p:nvSpPr>
-        <p:spPr>
-          <a:xfrm>
-            <a:off x="4846320" y="1783080"/>
-            <a:ext cx="3657600" cy="2743200"/>
-          </a:xfrm>
-          <a:prstGeom prst="rect">
-            <a:avLst/>
-          </a:prstGeom>
-          <a:noFill/>
-          <a:ln/>
-        </p:spPr>
-        <p:txBody>
-          <a:bodyPr wrap="square" lIns="0" tIns="0" rIns="0" bIns="0" rtlCol="0" anchor="t"/>
-          <a:lstStyle/>
-          <a:p>
-            <a:pPr marL="342900" indent="-342900">
-              <a:spcAft>
-                <a:spcPts val="600"/>
-              </a:spcAft>
-              <a:buSzPct val="100000"/>
-              <a:buChar char="■"/>
-            </a:pPr>
-            <a:r>
-              <a:rPr lang="en-US" sz="1100" dirty="0">
+          <p:cNvPr id="11" name="Shape 9"/>
+          <p:cNvSpPr/>
+          <p:nvPr/>
+        </p:nvSpPr>
+        <p:spPr>
+          <a:xfrm>
+            <a:off x="4663440" y="1280160"/>
+            <a:ext cx="73152" cy="1554480"/>
+          </a:xfrm>
+          <a:prstGeom prst="rect">
+            <a:avLst/>
+          </a:prstGeom>
+          <a:solidFill>
+            <a:srgbClr val="B87333"/>
+          </a:solidFill>
+          <a:ln w="12700">
+            <a:solidFill>
+              <a:srgbClr val="B87333"/>
+            </a:solidFill>
+            <a:prstDash val="solid"/>
+          </a:ln>
+        </p:spPr>
+      </p:sp>
+      <p:sp>
+        <p:nvSpPr>
+          <p:cNvPr id="12" name="Text 10"/>
+          <p:cNvSpPr/>
+          <p:nvPr/>
+        </p:nvSpPr>
+        <p:spPr>
+          <a:xfrm>
+            <a:off x="4828032" y="1389888"/>
+            <a:ext cx="3749040" cy="320040"/>
+          </a:xfrm>
+          <a:prstGeom prst="rect">
+            <a:avLst/>
+          </a:prstGeom>
+          <a:noFill/>
+          <a:ln/>
+        </p:spPr>
+        <p:txBody>
+          <a:bodyPr wrap="square" lIns="0" tIns="0" rIns="0" bIns="0" rtlCol="0" anchor="ctr"/>
+          <a:lstStyle/>
+          <a:p>
+            <a:pPr indent="0" marL="0">
+              <a:buNone/>
+            </a:pPr>
+            <a:r>
+              <a:rPr lang="en-US" sz="1400" b="1" dirty="0">
+                <a:solidFill>
+                  <a:srgbClr val="1E2761"/>
+                </a:solidFill>
+                <a:latin typeface="Calibri" pitchFamily="34" charset="0"/>
+                <a:ea typeface="Calibri" pitchFamily="34" charset="-122"/>
+                <a:cs typeface="Calibri" pitchFamily="34" charset="-120"/>
+              </a:rPr>
+              <a:t>🔮 What-if: симуляция сценариев</a:t>
+            </a:r>
+            <a:endParaRPr lang="en-US" sz="1400" dirty="0"/>
+          </a:p>
+        </p:txBody>
+      </p:sp>
+      <p:sp>
+        <p:nvSpPr>
+          <p:cNvPr id="13" name="Text 11"/>
+          <p:cNvSpPr/>
+          <p:nvPr/>
+        </p:nvSpPr>
+        <p:spPr>
+          <a:xfrm>
+            <a:off x="4828032" y="1737360"/>
+            <a:ext cx="3749040" cy="640080"/>
+          </a:xfrm>
+          <a:prstGeom prst="rect">
+            <a:avLst/>
+          </a:prstGeom>
+          <a:noFill/>
+          <a:ln/>
+        </p:spPr>
+        <p:txBody>
+          <a:bodyPr wrap="square" lIns="0" tIns="0" rIns="0" bIns="0" rtlCol="0" anchor="ctr"/>
+          <a:lstStyle/>
+          <a:p>
+            <a:pPr indent="0" marL="0">
+              <a:buNone/>
+            </a:pPr>
+            <a:r>
+              <a:rPr lang="en-US" sz="1000" dirty="0">
                 <a:solidFill>
                   <a:srgbClr val="242938"/>
                 </a:solidFill>
@@ -5487,20 +5593,166 @@
                 <a:ea typeface="Calibri" pitchFamily="34" charset="-122"/>
                 <a:cs typeface="Calibri" pitchFamily="34" charset="-120"/>
               </a:rPr>
-              <a:t>Будущие забастовки на рудниках (Escondida 2024, +4 %)</a:t>
-            </a:r>
-            <a:endParaRPr lang="en-US" sz="1100" dirty="0"/>
-          </a:p>
-          <a:p>
-            <a:pPr marL="342900" indent="-342900">
-              <a:spcAft>
-                <a:spcPts val="600"/>
-              </a:spcAft>
-              <a:buSzPct val="100000"/>
-              <a:buChar char="■"/>
-            </a:pPr>
-            <a:r>
-              <a:rPr lang="en-US" sz="1100" dirty="0">
+              <a:t>6 слайдеров: DXY, нефть, VIX, Mining ETFs, юань, позиции хедж-фондов. Сдвиг — мгновенный пересчёт прогноза.</a:t>
+            </a:r>
+            <a:endParaRPr lang="en-US" sz="1000" dirty="0"/>
+          </a:p>
+        </p:txBody>
+      </p:sp>
+      <p:sp>
+        <p:nvSpPr>
+          <p:cNvPr id="14" name="Text 12"/>
+          <p:cNvSpPr/>
+          <p:nvPr/>
+        </p:nvSpPr>
+        <p:spPr>
+          <a:xfrm>
+            <a:off x="4828032" y="2395728"/>
+            <a:ext cx="3749040" cy="365760"/>
+          </a:xfrm>
+          <a:prstGeom prst="rect">
+            <a:avLst/>
+          </a:prstGeom>
+          <a:noFill/>
+          <a:ln/>
+        </p:spPr>
+        <p:txBody>
+          <a:bodyPr wrap="square" lIns="0" tIns="0" rIns="0" bIns="0" rtlCol="0" anchor="ctr"/>
+          <a:lstStyle/>
+          <a:p>
+            <a:pPr indent="0" marL="0">
+              <a:buNone/>
+            </a:pPr>
+            <a:r>
+              <a:rPr lang="en-US" sz="950" i="1" dirty="0">
+                <a:solidFill>
+                  <a:srgbClr val="B87333"/>
+                </a:solidFill>
+                <a:latin typeface="Calibri" pitchFamily="34" charset="0"/>
+                <a:ea typeface="Calibri" pitchFamily="34" charset="-122"/>
+                <a:cs typeface="Calibri" pitchFamily="34" charset="-120"/>
+              </a:rPr>
+              <a:t>💡 Проигрывайте «что если CPI выйдет горячее на 0.3 %» прямо в окне.</a:t>
+            </a:r>
+            <a:endParaRPr lang="en-US" sz="950" dirty="0"/>
+          </a:p>
+        </p:txBody>
+      </p:sp>
+      <p:sp>
+        <p:nvSpPr>
+          <p:cNvPr id="15" name="Shape 13"/>
+          <p:cNvSpPr/>
+          <p:nvPr/>
+        </p:nvSpPr>
+        <p:spPr>
+          <a:xfrm>
+            <a:off x="365760" y="2971800"/>
+            <a:ext cx="4023360" cy="1554480"/>
+          </a:xfrm>
+          <a:prstGeom prst="rect">
+            <a:avLst/>
+          </a:prstGeom>
+          <a:solidFill>
+            <a:srgbClr val="F7F8FB"/>
+          </a:solidFill>
+          <a:ln w="12700">
+            <a:solidFill>
+              <a:srgbClr val="CADCFC"/>
+            </a:solidFill>
+            <a:prstDash val="solid"/>
+          </a:ln>
+        </p:spPr>
+      </p:sp>
+      <p:sp>
+        <p:nvSpPr>
+          <p:cNvPr id="16" name="Shape 14"/>
+          <p:cNvSpPr/>
+          <p:nvPr/>
+        </p:nvSpPr>
+        <p:spPr>
+          <a:xfrm>
+            <a:off x="365760" y="2971800"/>
+            <a:ext cx="73152" cy="1554480"/>
+          </a:xfrm>
+          <a:prstGeom prst="rect">
+            <a:avLst/>
+          </a:prstGeom>
+          <a:solidFill>
+            <a:srgbClr val="B87333"/>
+          </a:solidFill>
+          <a:ln w="12700">
+            <a:solidFill>
+              <a:srgbClr val="B87333"/>
+            </a:solidFill>
+            <a:prstDash val="solid"/>
+          </a:ln>
+        </p:spPr>
+      </p:sp>
+      <p:sp>
+        <p:nvSpPr>
+          <p:cNvPr id="17" name="Text 15"/>
+          <p:cNvSpPr/>
+          <p:nvPr/>
+        </p:nvSpPr>
+        <p:spPr>
+          <a:xfrm>
+            <a:off x="530352" y="3081528"/>
+            <a:ext cx="3749040" cy="320040"/>
+          </a:xfrm>
+          <a:prstGeom prst="rect">
+            <a:avLst/>
+          </a:prstGeom>
+          <a:noFill/>
+          <a:ln/>
+        </p:spPr>
+        <p:txBody>
+          <a:bodyPr wrap="square" lIns="0" tIns="0" rIns="0" bIns="0" rtlCol="0" anchor="ctr"/>
+          <a:lstStyle/>
+          <a:p>
+            <a:pPr indent="0" marL="0">
+              <a:buNone/>
+            </a:pPr>
+            <a:r>
+              <a:rPr lang="en-US" sz="1400" b="1" dirty="0">
+                <a:solidFill>
+                  <a:srgbClr val="1E2761"/>
+                </a:solidFill>
+                <a:latin typeface="Calibri" pitchFamily="34" charset="0"/>
+                <a:ea typeface="Calibri" pitchFamily="34" charset="-122"/>
+                <a:cs typeface="Calibri" pitchFamily="34" charset="-120"/>
+              </a:rPr>
+              <a:t>🔥 Стресс-тесты</a:t>
+            </a:r>
+            <a:endParaRPr lang="en-US" sz="1400" dirty="0"/>
+          </a:p>
+        </p:txBody>
+      </p:sp>
+      <p:sp>
+        <p:nvSpPr>
+          <p:cNvPr id="18" name="Text 16"/>
+          <p:cNvSpPr/>
+          <p:nvPr/>
+        </p:nvSpPr>
+        <p:spPr>
+          <a:xfrm>
+            <a:off x="530352" y="3429000"/>
+            <a:ext cx="3749040" cy="640080"/>
+          </a:xfrm>
+          <a:prstGeom prst="rect">
+            <a:avLst/>
+          </a:prstGeom>
+          <a:noFill/>
+          <a:ln/>
+        </p:spPr>
+        <p:txBody>
+          <a:bodyPr wrap="square" lIns="0" tIns="0" rIns="0" bIns="0" rtlCol="0" anchor="ctr"/>
+          <a:lstStyle/>
+          <a:p>
+            <a:pPr indent="0" marL="0">
+              <a:buNone/>
+            </a:pPr>
+            <a:r>
+              <a:rPr lang="en-US" sz="1000" dirty="0">
                 <a:solidFill>
                   <a:srgbClr val="242938"/>
                 </a:solidFill>
@@ -5508,20 +5760,166 @@
                 <a:ea typeface="Calibri" pitchFamily="34" charset="-122"/>
                 <a:cs typeface="Calibri" pitchFamily="34" charset="-120"/>
               </a:rPr>
-              <a:t>Политические тарифы и санкции (Трамп, июль 2025, ±25 %)</a:t>
-            </a:r>
-            <a:endParaRPr lang="en-US" sz="1100" dirty="0"/>
-          </a:p>
-          <a:p>
-            <a:pPr marL="342900" indent="-342900">
-              <a:spcAft>
-                <a:spcPts val="600"/>
-              </a:spcAft>
-              <a:buSzPct val="100000"/>
-              <a:buChar char="■"/>
-            </a:pPr>
-            <a:r>
-              <a:rPr lang="en-US" sz="1100" dirty="0">
+              <a:t>5 готовых сценариев: Cobre Panamá, Escondida, тариф 30 %, COVID, China stimulus. Накладываем шок на текущий прогноз — видим downside.</a:t>
+            </a:r>
+            <a:endParaRPr lang="en-US" sz="1000" dirty="0"/>
+          </a:p>
+        </p:txBody>
+      </p:sp>
+      <p:sp>
+        <p:nvSpPr>
+          <p:cNvPr id="19" name="Text 17"/>
+          <p:cNvSpPr/>
+          <p:nvPr/>
+        </p:nvSpPr>
+        <p:spPr>
+          <a:xfrm>
+            <a:off x="530352" y="4087368"/>
+            <a:ext cx="3749040" cy="365760"/>
+          </a:xfrm>
+          <a:prstGeom prst="rect">
+            <a:avLst/>
+          </a:prstGeom>
+          <a:noFill/>
+          <a:ln/>
+        </p:spPr>
+        <p:txBody>
+          <a:bodyPr wrap="square" lIns="0" tIns="0" rIns="0" bIns="0" rtlCol="0" anchor="ctr"/>
+          <a:lstStyle/>
+          <a:p>
+            <a:pPr indent="0" marL="0">
+              <a:buNone/>
+            </a:pPr>
+            <a:r>
+              <a:rPr lang="en-US" sz="950" i="1" dirty="0">
+                <a:solidFill>
+                  <a:srgbClr val="B87333"/>
+                </a:solidFill>
+                <a:latin typeface="Calibri" pitchFamily="34" charset="0"/>
+                <a:ea typeface="Calibri" pitchFamily="34" charset="-122"/>
+                <a:cs typeface="Calibri" pitchFamily="34" charset="-120"/>
+              </a:rPr>
+              <a:t>💡 Перед крупной закупкой — сразу видно худший сценарий.</a:t>
+            </a:r>
+            <a:endParaRPr lang="en-US" sz="950" dirty="0"/>
+          </a:p>
+        </p:txBody>
+      </p:sp>
+      <p:sp>
+        <p:nvSpPr>
+          <p:cNvPr id="20" name="Shape 18"/>
+          <p:cNvSpPr/>
+          <p:nvPr/>
+        </p:nvSpPr>
+        <p:spPr>
+          <a:xfrm>
+            <a:off x="4663440" y="2971800"/>
+            <a:ext cx="4023360" cy="1554480"/>
+          </a:xfrm>
+          <a:prstGeom prst="rect">
+            <a:avLst/>
+          </a:prstGeom>
+          <a:solidFill>
+            <a:srgbClr val="F7F8FB"/>
+          </a:solidFill>
+          <a:ln w="12700">
+            <a:solidFill>
+              <a:srgbClr val="CADCFC"/>
+            </a:solidFill>
+            <a:prstDash val="solid"/>
+          </a:ln>
+        </p:spPr>
+      </p:sp>
+      <p:sp>
+        <p:nvSpPr>
+          <p:cNvPr id="21" name="Shape 19"/>
+          <p:cNvSpPr/>
+          <p:nvPr/>
+        </p:nvSpPr>
+        <p:spPr>
+          <a:xfrm>
+            <a:off x="4663440" y="2971800"/>
+            <a:ext cx="73152" cy="1554480"/>
+          </a:xfrm>
+          <a:prstGeom prst="rect">
+            <a:avLst/>
+          </a:prstGeom>
+          <a:solidFill>
+            <a:srgbClr val="B87333"/>
+          </a:solidFill>
+          <a:ln w="12700">
+            <a:solidFill>
+              <a:srgbClr val="B87333"/>
+            </a:solidFill>
+            <a:prstDash val="solid"/>
+          </a:ln>
+        </p:spPr>
+      </p:sp>
+      <p:sp>
+        <p:nvSpPr>
+          <p:cNvPr id="22" name="Text 20"/>
+          <p:cNvSpPr/>
+          <p:nvPr/>
+        </p:nvSpPr>
+        <p:spPr>
+          <a:xfrm>
+            <a:off x="4828032" y="3081528"/>
+            <a:ext cx="3749040" cy="320040"/>
+          </a:xfrm>
+          <a:prstGeom prst="rect">
+            <a:avLst/>
+          </a:prstGeom>
+          <a:noFill/>
+          <a:ln/>
+        </p:spPr>
+        <p:txBody>
+          <a:bodyPr wrap="square" lIns="0" tIns="0" rIns="0" bIns="0" rtlCol="0" anchor="ctr"/>
+          <a:lstStyle/>
+          <a:p>
+            <a:pPr indent="0" marL="0">
+              <a:buNone/>
+            </a:pPr>
+            <a:r>
+              <a:rPr lang="en-US" sz="1400" b="1" dirty="0">
+                <a:solidFill>
+                  <a:srgbClr val="1E2761"/>
+                </a:solidFill>
+                <a:latin typeface="Calibri" pitchFamily="34" charset="0"/>
+                <a:ea typeface="Calibri" pitchFamily="34" charset="-122"/>
+                <a:cs typeface="Calibri" pitchFamily="34" charset="-120"/>
+              </a:rPr>
+              <a:t>📄 PDF-отчёт одной кнопкой</a:t>
+            </a:r>
+            <a:endParaRPr lang="en-US" sz="1400" dirty="0"/>
+          </a:p>
+        </p:txBody>
+      </p:sp>
+      <p:sp>
+        <p:nvSpPr>
+          <p:cNvPr id="23" name="Text 21"/>
+          <p:cNvSpPr/>
+          <p:nvPr/>
+        </p:nvSpPr>
+        <p:spPr>
+          <a:xfrm>
+            <a:off x="4828032" y="3429000"/>
+            <a:ext cx="3749040" cy="640080"/>
+          </a:xfrm>
+          <a:prstGeom prst="rect">
+            <a:avLst/>
+          </a:prstGeom>
+          <a:noFill/>
+          <a:ln/>
+        </p:spPr>
+        <p:txBody>
+          <a:bodyPr wrap="square" lIns="0" tIns="0" rIns="0" bIns="0" rtlCol="0" anchor="ctr"/>
+          <a:lstStyle/>
+          <a:p>
+            <a:pPr indent="0" marL="0">
+              <a:buNone/>
+            </a:pPr>
+            <a:r>
+              <a:rPr lang="en-US" sz="1000" dirty="0">
                 <a:solidFill>
                   <a:srgbClr val="242938"/>
                 </a:solidFill>
@@ -5529,99 +5927,54 @@
                 <a:ea typeface="Calibri" pitchFamily="34" charset="-122"/>
                 <a:cs typeface="Calibri" pitchFamily="34" charset="-120"/>
               </a:rPr>
-              <a:t>Землетрясения, аварии, природные катастрофы</a:t>
-            </a:r>
-            <a:endParaRPr lang="en-US" sz="1100" dirty="0"/>
-          </a:p>
-          <a:p>
-            <a:pPr marL="342900" indent="-342900">
-              <a:spcAft>
-                <a:spcPts val="600"/>
-              </a:spcAft>
-              <a:buSzPct val="100000"/>
-              <a:buChar char="■"/>
-            </a:pPr>
-            <a:r>
-              <a:rPr lang="en-US" sz="1100" dirty="0">
-                <a:solidFill>
-                  <a:srgbClr val="242938"/>
-                </a:solidFill>
-                <a:latin typeface="Calibri" pitchFamily="34" charset="0"/>
-                <a:ea typeface="Calibri" pitchFamily="34" charset="-122"/>
-                <a:cs typeface="Calibri" pitchFamily="34" charset="-120"/>
-              </a:rPr>
-              <a:t>Решения OPEC, ФРС, Банка Китая до их объявления</a:t>
-            </a:r>
-            <a:endParaRPr lang="en-US" sz="1100" dirty="0"/>
-          </a:p>
-          <a:p>
-            <a:pPr marL="342900" indent="-342900">
-              <a:spcAft>
-                <a:spcPts val="600"/>
-              </a:spcAft>
-              <a:buSzPct val="100000"/>
-              <a:buChar char="■"/>
-            </a:pPr>
-            <a:r>
-              <a:rPr lang="en-US" sz="1100" dirty="0">
-                <a:solidFill>
-                  <a:srgbClr val="242938"/>
-                </a:solidFill>
-                <a:latin typeface="Calibri" pitchFamily="34" charset="0"/>
-                <a:ea typeface="Calibri" pitchFamily="34" charset="-122"/>
-                <a:cs typeface="Calibri" pitchFamily="34" charset="-120"/>
-              </a:rPr>
-              <a:t>Долгосрочные контракты вашей компании с поставщиками</a:t>
-            </a:r>
-            <a:endParaRPr lang="en-US" sz="1100" dirty="0"/>
-          </a:p>
-          <a:p>
-            <a:pPr marL="342900" indent="-342900">
-              <a:spcAft>
-                <a:spcPts val="600"/>
-              </a:spcAft>
-              <a:buSzPct val="100000"/>
-              <a:buChar char="■"/>
-            </a:pPr>
-            <a:r>
-              <a:rPr lang="en-US" sz="1100" dirty="0">
-                <a:solidFill>
-                  <a:srgbClr val="242938"/>
-                </a:solidFill>
-                <a:latin typeface="Calibri" pitchFamily="34" charset="0"/>
-                <a:ea typeface="Calibri" pitchFamily="34" charset="-122"/>
-                <a:cs typeface="Calibri" pitchFamily="34" charset="-120"/>
-              </a:rPr>
-              <a:t>Условия скидок, объёмов и сезонность вашей закупки</a:t>
-            </a:r>
-            <a:endParaRPr lang="en-US" sz="1100" dirty="0"/>
-          </a:p>
-          <a:p>
-            <a:pPr marL="342900" indent="-342900">
-              <a:spcAft>
-                <a:spcPts val="600"/>
-              </a:spcAft>
-              <a:buSzPct val="100000"/>
-              <a:buChar char="■"/>
-            </a:pPr>
-            <a:r>
-              <a:rPr lang="en-US" sz="1100" dirty="0">
-                <a:solidFill>
-                  <a:srgbClr val="242938"/>
-                </a:solidFill>
-                <a:latin typeface="Calibri" pitchFamily="34" charset="0"/>
-                <a:ea typeface="Calibri" pitchFamily="34" charset="-122"/>
-                <a:cs typeface="Calibri" pitchFamily="34" charset="-120"/>
-              </a:rPr>
-              <a:t>Геополитику и санкционные риски РФ</a:t>
-            </a:r>
-            <a:endParaRPr lang="en-US" sz="1100" dirty="0"/>
-          </a:p>
-        </p:txBody>
-      </p:sp>
-      <p:sp>
-        <p:nvSpPr>
-          <p:cNvPr id="11" name="Text 9"/>
+              <a:t>Все ключевые метрики, прогноз на 5 горизонтов, события на месяц — в 1-2 страничном PDF.</a:t>
+            </a:r>
+            <a:endParaRPr lang="en-US" sz="1000" dirty="0"/>
+          </a:p>
+        </p:txBody>
+      </p:sp>
+      <p:sp>
+        <p:nvSpPr>
+          <p:cNvPr id="24" name="Text 22"/>
+          <p:cNvSpPr/>
+          <p:nvPr/>
+        </p:nvSpPr>
+        <p:spPr>
+          <a:xfrm>
+            <a:off x="4828032" y="4087368"/>
+            <a:ext cx="3749040" cy="365760"/>
+          </a:xfrm>
+          <a:prstGeom prst="rect">
+            <a:avLst/>
+          </a:prstGeom>
+          <a:noFill/>
+          <a:ln/>
+        </p:spPr>
+        <p:txBody>
+          <a:bodyPr wrap="square" lIns="0" tIns="0" rIns="0" bIns="0" rtlCol="0" anchor="ctr"/>
+          <a:lstStyle/>
+          <a:p>
+            <a:pPr indent="0" marL="0">
+              <a:buNone/>
+            </a:pPr>
+            <a:r>
+              <a:rPr lang="en-US" sz="950" i="1" dirty="0">
+                <a:solidFill>
+                  <a:srgbClr val="B87333"/>
+                </a:solidFill>
+                <a:latin typeface="Calibri" pitchFamily="34" charset="0"/>
+                <a:ea typeface="Calibri" pitchFamily="34" charset="-122"/>
+                <a:cs typeface="Calibri" pitchFamily="34" charset="-120"/>
+              </a:rPr>
+              <a:t>💡 Еженедельная отправка руководству — больше не задача на полдня.</a:t>
+            </a:r>
+            <a:endParaRPr lang="en-US" sz="950" dirty="0"/>
+          </a:p>
+        </p:txBody>
+      </p:sp>
+      <p:sp>
+        <p:nvSpPr>
+          <p:cNvPr id="25" name="Text 23"/>
           <p:cNvSpPr/>
           <p:nvPr/>
         </p:nvSpPr>
@@ -5660,7 +6013,7 @@
       </p:sp>
       <p:sp>
         <p:nvSpPr>
-          <p:cNvPr id="12" name="Text 10"/>
+          <p:cNvPr id="26" name="Text 24"/>
           <p:cNvSpPr/>
           <p:nvPr/>
         </p:nvSpPr>
@@ -5691,7 +6044,7 @@
                 <a:ea typeface="Calibri" pitchFamily="34" charset="-122"/>
                 <a:cs typeface="Calibri" pitchFamily="34" charset="-120"/>
               </a:rPr>
-              <a:t>13 / 16</a:t>
+              <a:t>13 / 17</a:t>
             </a:r>
             <a:endParaRPr lang="en-US" sz="900" dirty="0"/>
           </a:p>
@@ -5787,7 +6140,7 @@
                 <a:ea typeface="Calibri" pitchFamily="34" charset="-122"/>
                 <a:cs typeface="Calibri" pitchFamily="34" charset="-120"/>
               </a:rPr>
-              <a:t>Зачем нужен эксперт с многолетним опытом</a:t>
+              <a:t>Где модель сильна, а где беспомощна</a:t>
             </a:r>
             <a:endParaRPr lang="en-US" sz="3000" dirty="0"/>
           </a:p>
@@ -5826,7 +6179,7 @@
                 <a:ea typeface="Calibri" pitchFamily="34" charset="-122"/>
                 <a:cs typeface="Calibri" pitchFamily="34" charset="-120"/>
               </a:rPr>
-              <a:t>Половина решения — модель. Вторая половина — человек, который её ведёт</a:t>
+              <a:t>Честная карта возможностей</a:t>
             </a:r>
             <a:endParaRPr lang="en-US" sz="1400" dirty="0"/>
           </a:p>
@@ -5840,8 +6193,8 @@
         </p:nvSpPr>
         <p:spPr>
           <a:xfrm>
-            <a:off x="365760" y="1280160"/>
-            <a:ext cx="2743200" cy="1554480"/>
+            <a:off x="457200" y="1280160"/>
+            <a:ext cx="4023360" cy="3383280"/>
           </a:xfrm>
           <a:prstGeom prst="rect">
             <a:avLst/>
@@ -5849,9 +6202,9 @@
           <a:solidFill>
             <a:srgbClr val="F7F8FB"/>
           </a:solidFill>
-          <a:ln w="12700">
+          <a:ln w="25400">
             <a:solidFill>
-              <a:srgbClr val="CADCFC"/>
+              <a:srgbClr val="0F9D58"/>
             </a:solidFill>
             <a:prstDash val="solid"/>
           </a:ln>
@@ -5859,24 +6212,211 @@
       </p:sp>
       <p:sp>
         <p:nvSpPr>
-          <p:cNvPr id="6" name="Shape 4"/>
-          <p:cNvSpPr/>
-          <p:nvPr/>
-        </p:nvSpPr>
-        <p:spPr>
-          <a:xfrm>
-            <a:off x="502920" y="1444752"/>
-            <a:ext cx="457200" cy="457200"/>
-          </a:xfrm>
-          <a:prstGeom prst="ellipse">
+          <p:cNvPr id="6" name="Text 4"/>
+          <p:cNvSpPr/>
+          <p:nvPr/>
+        </p:nvSpPr>
+        <p:spPr>
+          <a:xfrm>
+            <a:off x="640080" y="1417320"/>
+            <a:ext cx="3657600" cy="320040"/>
+          </a:xfrm>
+          <a:prstGeom prst="rect">
+            <a:avLst/>
+          </a:prstGeom>
+          <a:noFill/>
+          <a:ln/>
+        </p:spPr>
+        <p:txBody>
+          <a:bodyPr wrap="square" lIns="0" tIns="0" rIns="0" bIns="0" rtlCol="0" anchor="ctr"/>
+          <a:lstStyle/>
+          <a:p>
+            <a:pPr indent="0" marL="0">
+              <a:buNone/>
+            </a:pPr>
+            <a:r>
+              <a:rPr lang="en-US" sz="1500" b="1" dirty="0">
+                <a:solidFill>
+                  <a:srgbClr val="0F9D58"/>
+                </a:solidFill>
+                <a:latin typeface="Calibri" pitchFamily="34" charset="0"/>
+                <a:ea typeface="Calibri" pitchFamily="34" charset="-122"/>
+                <a:cs typeface="Calibri" pitchFamily="34" charset="-120"/>
+              </a:rPr>
+              <a:t>✅  Что модель видит хорошо</a:t>
+            </a:r>
+            <a:endParaRPr lang="en-US" sz="1500" dirty="0"/>
+          </a:p>
+        </p:txBody>
+      </p:sp>
+      <p:sp>
+        <p:nvSpPr>
+          <p:cNvPr id="7" name="Text 5"/>
+          <p:cNvSpPr/>
+          <p:nvPr/>
+        </p:nvSpPr>
+        <p:spPr>
+          <a:xfrm>
+            <a:off x="640080" y="1783080"/>
+            <a:ext cx="3657600" cy="2743200"/>
+          </a:xfrm>
+          <a:prstGeom prst="rect">
+            <a:avLst/>
+          </a:prstGeom>
+          <a:noFill/>
+          <a:ln/>
+        </p:spPr>
+        <p:txBody>
+          <a:bodyPr wrap="square" lIns="0" tIns="0" rIns="0" bIns="0" rtlCol="0" anchor="t"/>
+          <a:lstStyle/>
+          <a:p>
+            <a:pPr marL="342900" indent="-342900">
+              <a:spcAft>
+                <a:spcPts val="600"/>
+              </a:spcAft>
+              <a:buSzPct val="100000"/>
+              <a:buChar char="■"/>
+            </a:pPr>
+            <a:r>
+              <a:rPr lang="en-US" sz="1100" dirty="0">
+                <a:solidFill>
+                  <a:srgbClr val="242938"/>
+                </a:solidFill>
+                <a:latin typeface="Calibri" pitchFamily="34" charset="0"/>
+                <a:ea typeface="Calibri" pitchFamily="34" charset="-122"/>
+                <a:cs typeface="Calibri" pitchFamily="34" charset="-120"/>
+              </a:rPr>
+              <a:t>Тренды и инерцию рынка (последние 1-3 месяца)</a:t>
+            </a:r>
+            <a:endParaRPr lang="en-US" sz="1100" dirty="0"/>
+          </a:p>
+          <a:p>
+            <a:pPr marL="342900" indent="-342900">
+              <a:spcAft>
+                <a:spcPts val="600"/>
+              </a:spcAft>
+              <a:buSzPct val="100000"/>
+              <a:buChar char="■"/>
+            </a:pPr>
+            <a:r>
+              <a:rPr lang="en-US" sz="1100" dirty="0">
+                <a:solidFill>
+                  <a:srgbClr val="242938"/>
+                </a:solidFill>
+                <a:latin typeface="Calibri" pitchFamily="34" charset="0"/>
+                <a:ea typeface="Calibri" pitchFamily="34" charset="-122"/>
+                <a:cs typeface="Calibri" pitchFamily="34" charset="-120"/>
+              </a:rPr>
+              <a:t>Сезонные циклы (китайский Новый год, отчёты ФРС)</a:t>
+            </a:r>
+            <a:endParaRPr lang="en-US" sz="1100" dirty="0"/>
+          </a:p>
+          <a:p>
+            <a:pPr marL="342900" indent="-342900">
+              <a:spcAft>
+                <a:spcPts val="600"/>
+              </a:spcAft>
+              <a:buSzPct val="100000"/>
+              <a:buChar char="■"/>
+            </a:pPr>
+            <a:r>
+              <a:rPr lang="en-US" sz="1100" dirty="0">
+                <a:solidFill>
+                  <a:srgbClr val="242938"/>
+                </a:solidFill>
+                <a:latin typeface="Calibri" pitchFamily="34" charset="0"/>
+                <a:ea typeface="Calibri" pitchFamily="34" charset="-122"/>
+                <a:cs typeface="Calibri" pitchFamily="34" charset="-120"/>
+              </a:rPr>
+              <a:t>Перегрев / перепроданность через RSI и Bollinger</a:t>
+            </a:r>
+            <a:endParaRPr lang="en-US" sz="1100" dirty="0"/>
+          </a:p>
+          <a:p>
+            <a:pPr marL="342900" indent="-342900">
+              <a:spcAft>
+                <a:spcPts val="600"/>
+              </a:spcAft>
+              <a:buSzPct val="100000"/>
+              <a:buChar char="■"/>
+            </a:pPr>
+            <a:r>
+              <a:rPr lang="en-US" sz="1100" dirty="0">
+                <a:solidFill>
+                  <a:srgbClr val="242938"/>
+                </a:solidFill>
+                <a:latin typeface="Calibri" pitchFamily="34" charset="0"/>
+                <a:ea typeface="Calibri" pitchFamily="34" charset="-122"/>
+                <a:cs typeface="Calibri" pitchFamily="34" charset="-120"/>
+              </a:rPr>
+              <a:t>Скрытые режимы — переходы спокойный ↔ турбулентный</a:t>
+            </a:r>
+            <a:endParaRPr lang="en-US" sz="1100" dirty="0"/>
+          </a:p>
+          <a:p>
+            <a:pPr marL="342900" indent="-342900">
+              <a:spcAft>
+                <a:spcPts val="600"/>
+              </a:spcAft>
+              <a:buSzPct val="100000"/>
+              <a:buChar char="■"/>
+            </a:pPr>
+            <a:r>
+              <a:rPr lang="en-US" sz="1100" dirty="0">
+                <a:solidFill>
+                  <a:srgbClr val="242938"/>
+                </a:solidFill>
+                <a:latin typeface="Calibri" pitchFamily="34" charset="0"/>
+                <a:ea typeface="Calibri" pitchFamily="34" charset="-122"/>
+                <a:cs typeface="Calibri" pitchFamily="34" charset="-120"/>
+              </a:rPr>
+              <a:t>Опережающие сигналы от хедж-фондов через COT</a:t>
+            </a:r>
+            <a:endParaRPr lang="en-US" sz="1100" dirty="0"/>
+          </a:p>
+          <a:p>
+            <a:pPr marL="342900" indent="-342900">
+              <a:spcAft>
+                <a:spcPts val="600"/>
+              </a:spcAft>
+              <a:buSzPct val="100000"/>
+              <a:buChar char="■"/>
+            </a:pPr>
+            <a:r>
+              <a:rPr lang="en-US" sz="1100" dirty="0">
+                <a:solidFill>
+                  <a:srgbClr val="242938"/>
+                </a:solidFill>
+                <a:latin typeface="Calibri" pitchFamily="34" charset="0"/>
+                <a:ea typeface="Calibri" pitchFamily="34" charset="-122"/>
+                <a:cs typeface="Calibri" pitchFamily="34" charset="-120"/>
+              </a:rPr>
+              <a:t>Связи с долларом, золотом, нефтью</a:t>
+            </a:r>
+            <a:endParaRPr lang="en-US" sz="1100" dirty="0"/>
+          </a:p>
+        </p:txBody>
+      </p:sp>
+      <p:sp>
+        <p:nvSpPr>
+          <p:cNvPr id="8" name="Shape 6"/>
+          <p:cNvSpPr/>
+          <p:nvPr/>
+        </p:nvSpPr>
+        <p:spPr>
+          <a:xfrm>
+            <a:off x="4663440" y="1280160"/>
+            <a:ext cx="4023360" cy="3383280"/>
+          </a:xfrm>
+          <a:prstGeom prst="rect">
             <a:avLst/>
           </a:prstGeom>
           <a:solidFill>
-            <a:srgbClr val="B87333"/>
+            <a:srgbClr val="F7F8FB"/>
           </a:solidFill>
-          <a:ln w="12700">
+          <a:ln w="25400">
             <a:solidFill>
-              <a:srgbClr val="B87333"/>
+              <a:srgbClr val="D93025"/>
             </a:solidFill>
             <a:prstDash val="solid"/>
           </a:ln>
@@ -5884,108 +6424,73 @@
       </p:sp>
       <p:sp>
         <p:nvSpPr>
-          <p:cNvPr id="7" name="Text 5"/>
-          <p:cNvSpPr/>
-          <p:nvPr/>
-        </p:nvSpPr>
-        <p:spPr>
-          <a:xfrm>
-            <a:off x="502920" y="1444752"/>
-            <a:ext cx="457200" cy="457200"/>
-          </a:xfrm>
-          <a:prstGeom prst="rect">
-            <a:avLst/>
-          </a:prstGeom>
-          <a:noFill/>
-          <a:ln/>
-        </p:spPr>
-        <p:txBody>
-          <a:bodyPr wrap="square" lIns="0" tIns="0" rIns="0" bIns="0" rtlCol="0" anchor="ctr"/>
-          <a:lstStyle/>
-          <a:p>
-            <a:pPr algn="ctr" indent="0" marL="0">
-              <a:buNone/>
-            </a:pPr>
-            <a:r>
-              <a:rPr lang="en-US" sz="1600" b="1" dirty="0">
-                <a:solidFill>
-                  <a:srgbClr val="FFFFFF"/>
-                </a:solidFill>
-                <a:latin typeface="Calibri" pitchFamily="34" charset="0"/>
-                <a:ea typeface="Calibri" pitchFamily="34" charset="-122"/>
-                <a:cs typeface="Calibri" pitchFamily="34" charset="-120"/>
-              </a:rPr>
-              <a:t>1</a:t>
-            </a:r>
-            <a:endParaRPr lang="en-US" sz="1600" dirty="0"/>
-          </a:p>
-        </p:txBody>
-      </p:sp>
-      <p:sp>
-        <p:nvSpPr>
-          <p:cNvPr id="8" name="Text 6"/>
-          <p:cNvSpPr/>
-          <p:nvPr/>
-        </p:nvSpPr>
-        <p:spPr>
-          <a:xfrm>
-            <a:off x="1051560" y="1417320"/>
-            <a:ext cx="1965960" cy="502920"/>
-          </a:xfrm>
-          <a:prstGeom prst="rect">
-            <a:avLst/>
-          </a:prstGeom>
-          <a:noFill/>
-          <a:ln/>
-        </p:spPr>
-        <p:txBody>
-          <a:bodyPr wrap="square" lIns="0" tIns="0" rIns="0" bIns="0" rtlCol="0" anchor="ctr"/>
-          <a:lstStyle/>
-          <a:p>
-            <a:pPr indent="0" marL="0">
-              <a:buNone/>
-            </a:pPr>
-            <a:r>
-              <a:rPr lang="en-US" sz="1200" b="1" dirty="0">
-                <a:solidFill>
-                  <a:srgbClr val="1E2761"/>
-                </a:solidFill>
-                <a:latin typeface="Calibri" pitchFamily="34" charset="0"/>
-                <a:ea typeface="Calibri" pitchFamily="34" charset="-122"/>
-                <a:cs typeface="Calibri" pitchFamily="34" charset="-120"/>
-              </a:rPr>
-              <a:t>Контекст и здравый смысл</a:t>
-            </a:r>
-            <a:endParaRPr lang="en-US" sz="1200" dirty="0"/>
-          </a:p>
-        </p:txBody>
-      </p:sp>
-      <p:sp>
-        <p:nvSpPr>
           <p:cNvPr id="9" name="Text 7"/>
           <p:cNvSpPr/>
           <p:nvPr/>
         </p:nvSpPr>
         <p:spPr>
           <a:xfrm>
-            <a:off x="502920" y="1993392"/>
-            <a:ext cx="2514600" cy="777240"/>
-          </a:xfrm>
-          <a:prstGeom prst="rect">
-            <a:avLst/>
-          </a:prstGeom>
-          <a:noFill/>
-          <a:ln/>
-        </p:spPr>
-        <p:txBody>
-          <a:bodyPr wrap="square" lIns="0" tIns="0" rIns="0" bIns="0" rtlCol="0" anchor="ctr"/>
-          <a:lstStyle/>
-          <a:p>
-            <a:pPr indent="0" marL="0">
-              <a:buNone/>
-            </a:pPr>
-            <a:r>
-              <a:rPr lang="en-US" sz="950" dirty="0">
+            <a:off x="4846320" y="1417320"/>
+            <a:ext cx="3657600" cy="320040"/>
+          </a:xfrm>
+          <a:prstGeom prst="rect">
+            <a:avLst/>
+          </a:prstGeom>
+          <a:noFill/>
+          <a:ln/>
+        </p:spPr>
+        <p:txBody>
+          <a:bodyPr wrap="square" lIns="0" tIns="0" rIns="0" bIns="0" rtlCol="0" anchor="ctr"/>
+          <a:lstStyle/>
+          <a:p>
+            <a:pPr indent="0" marL="0">
+              <a:buNone/>
+            </a:pPr>
+            <a:r>
+              <a:rPr lang="en-US" sz="1500" b="1" dirty="0">
+                <a:solidFill>
+                  <a:srgbClr val="D93025"/>
+                </a:solidFill>
+                <a:latin typeface="Calibri" pitchFamily="34" charset="0"/>
+                <a:ea typeface="Calibri" pitchFamily="34" charset="-122"/>
+                <a:cs typeface="Calibri" pitchFamily="34" charset="-120"/>
+              </a:rPr>
+              <a:t>❌  Чего модель не видит</a:t>
+            </a:r>
+            <a:endParaRPr lang="en-US" sz="1500" dirty="0"/>
+          </a:p>
+        </p:txBody>
+      </p:sp>
+      <p:sp>
+        <p:nvSpPr>
+          <p:cNvPr id="10" name="Text 8"/>
+          <p:cNvSpPr/>
+          <p:nvPr/>
+        </p:nvSpPr>
+        <p:spPr>
+          <a:xfrm>
+            <a:off x="4846320" y="1783080"/>
+            <a:ext cx="3657600" cy="2743200"/>
+          </a:xfrm>
+          <a:prstGeom prst="rect">
+            <a:avLst/>
+          </a:prstGeom>
+          <a:noFill/>
+          <a:ln/>
+        </p:spPr>
+        <p:txBody>
+          <a:bodyPr wrap="square" lIns="0" tIns="0" rIns="0" bIns="0" rtlCol="0" anchor="t"/>
+          <a:lstStyle/>
+          <a:p>
+            <a:pPr marL="342900" indent="-342900">
+              <a:spcAft>
+                <a:spcPts val="600"/>
+              </a:spcAft>
+              <a:buSzPct val="100000"/>
+              <a:buChar char="■"/>
+            </a:pPr>
+            <a:r>
+              <a:rPr lang="en-US" sz="1100" dirty="0">
                 <a:solidFill>
                   <a:srgbClr val="242938"/>
                 </a:solidFill>
@@ -5993,166 +6498,20 @@
                 <a:ea typeface="Calibri" pitchFamily="34" charset="-122"/>
                 <a:cs typeface="Calibri" pitchFamily="34" charset="-120"/>
               </a:rPr>
-              <a:t>Модель показывает прогноз +25 %. Эксперт спрашивает: «А что случилось? Землетрясение? Тарифы?». Без контекста нельзя действовать.</a:t>
-            </a:r>
-            <a:endParaRPr lang="en-US" sz="950" dirty="0"/>
-          </a:p>
-        </p:txBody>
-      </p:sp>
-      <p:sp>
-        <p:nvSpPr>
-          <p:cNvPr id="10" name="Shape 8"/>
-          <p:cNvSpPr/>
-          <p:nvPr/>
-        </p:nvSpPr>
-        <p:spPr>
-          <a:xfrm>
-            <a:off x="3291840" y="1280160"/>
-            <a:ext cx="2743200" cy="1554480"/>
-          </a:xfrm>
-          <a:prstGeom prst="rect">
-            <a:avLst/>
-          </a:prstGeom>
-          <a:solidFill>
-            <a:srgbClr val="F7F8FB"/>
-          </a:solidFill>
-          <a:ln w="12700">
-            <a:solidFill>
-              <a:srgbClr val="CADCFC"/>
-            </a:solidFill>
-            <a:prstDash val="solid"/>
-          </a:ln>
-        </p:spPr>
-      </p:sp>
-      <p:sp>
-        <p:nvSpPr>
-          <p:cNvPr id="11" name="Shape 9"/>
-          <p:cNvSpPr/>
-          <p:nvPr/>
-        </p:nvSpPr>
-        <p:spPr>
-          <a:xfrm>
-            <a:off x="3429000" y="1444752"/>
-            <a:ext cx="457200" cy="457200"/>
-          </a:xfrm>
-          <a:prstGeom prst="ellipse">
-            <a:avLst/>
-          </a:prstGeom>
-          <a:solidFill>
-            <a:srgbClr val="B87333"/>
-          </a:solidFill>
-          <a:ln w="12700">
-            <a:solidFill>
-              <a:srgbClr val="B87333"/>
-            </a:solidFill>
-            <a:prstDash val="solid"/>
-          </a:ln>
-        </p:spPr>
-      </p:sp>
-      <p:sp>
-        <p:nvSpPr>
-          <p:cNvPr id="12" name="Text 10"/>
-          <p:cNvSpPr/>
-          <p:nvPr/>
-        </p:nvSpPr>
-        <p:spPr>
-          <a:xfrm>
-            <a:off x="3429000" y="1444752"/>
-            <a:ext cx="457200" cy="457200"/>
-          </a:xfrm>
-          <a:prstGeom prst="rect">
-            <a:avLst/>
-          </a:prstGeom>
-          <a:noFill/>
-          <a:ln/>
-        </p:spPr>
-        <p:txBody>
-          <a:bodyPr wrap="square" lIns="0" tIns="0" rIns="0" bIns="0" rtlCol="0" anchor="ctr"/>
-          <a:lstStyle/>
-          <a:p>
-            <a:pPr algn="ctr" indent="0" marL="0">
-              <a:buNone/>
-            </a:pPr>
-            <a:r>
-              <a:rPr lang="en-US" sz="1600" b="1" dirty="0">
-                <a:solidFill>
-                  <a:srgbClr val="FFFFFF"/>
-                </a:solidFill>
-                <a:latin typeface="Calibri" pitchFamily="34" charset="0"/>
-                <a:ea typeface="Calibri" pitchFamily="34" charset="-122"/>
-                <a:cs typeface="Calibri" pitchFamily="34" charset="-120"/>
-              </a:rPr>
-              <a:t>2</a:t>
-            </a:r>
-            <a:endParaRPr lang="en-US" sz="1600" dirty="0"/>
-          </a:p>
-        </p:txBody>
-      </p:sp>
-      <p:sp>
-        <p:nvSpPr>
-          <p:cNvPr id="13" name="Text 11"/>
-          <p:cNvSpPr/>
-          <p:nvPr/>
-        </p:nvSpPr>
-        <p:spPr>
-          <a:xfrm>
-            <a:off x="3977640" y="1417320"/>
-            <a:ext cx="1965960" cy="502920"/>
-          </a:xfrm>
-          <a:prstGeom prst="rect">
-            <a:avLst/>
-          </a:prstGeom>
-          <a:noFill/>
-          <a:ln/>
-        </p:spPr>
-        <p:txBody>
-          <a:bodyPr wrap="square" lIns="0" tIns="0" rIns="0" bIns="0" rtlCol="0" anchor="ctr"/>
-          <a:lstStyle/>
-          <a:p>
-            <a:pPr indent="0" marL="0">
-              <a:buNone/>
-            </a:pPr>
-            <a:r>
-              <a:rPr lang="en-US" sz="1200" b="1" dirty="0">
-                <a:solidFill>
-                  <a:srgbClr val="1E2761"/>
-                </a:solidFill>
-                <a:latin typeface="Calibri" pitchFamily="34" charset="0"/>
-                <a:ea typeface="Calibri" pitchFamily="34" charset="-122"/>
-                <a:cs typeface="Calibri" pitchFamily="34" charset="-120"/>
-              </a:rPr>
-              <a:t>Связи с поставщиками</a:t>
-            </a:r>
-            <a:endParaRPr lang="en-US" sz="1200" dirty="0"/>
-          </a:p>
-        </p:txBody>
-      </p:sp>
-      <p:sp>
-        <p:nvSpPr>
-          <p:cNvPr id="14" name="Text 12"/>
-          <p:cNvSpPr/>
-          <p:nvPr/>
-        </p:nvSpPr>
-        <p:spPr>
-          <a:xfrm>
-            <a:off x="3429000" y="1993392"/>
-            <a:ext cx="2514600" cy="777240"/>
-          </a:xfrm>
-          <a:prstGeom prst="rect">
-            <a:avLst/>
-          </a:prstGeom>
-          <a:noFill/>
-          <a:ln/>
-        </p:spPr>
-        <p:txBody>
-          <a:bodyPr wrap="square" lIns="0" tIns="0" rIns="0" bIns="0" rtlCol="0" anchor="ctr"/>
-          <a:lstStyle/>
-          <a:p>
-            <a:pPr indent="0" marL="0">
-              <a:buNone/>
-            </a:pPr>
-            <a:r>
-              <a:rPr lang="en-US" sz="950" dirty="0">
+              <a:t>Будущие забастовки на рудниках (Escondida 2024, +4 %)</a:t>
+            </a:r>
+            <a:endParaRPr lang="en-US" sz="1100" dirty="0"/>
+          </a:p>
+          <a:p>
+            <a:pPr marL="342900" indent="-342900">
+              <a:spcAft>
+                <a:spcPts val="600"/>
+              </a:spcAft>
+              <a:buSzPct val="100000"/>
+              <a:buChar char="■"/>
+            </a:pPr>
+            <a:r>
+              <a:rPr lang="en-US" sz="1100" dirty="0">
                 <a:solidFill>
                   <a:srgbClr val="242938"/>
                 </a:solidFill>
@@ -6160,166 +6519,20 @@
                 <a:ea typeface="Calibri" pitchFamily="34" charset="-122"/>
                 <a:cs typeface="Calibri" pitchFamily="34" charset="-120"/>
               </a:rPr>
-              <a:t>Знает, кому позвонить в Codelco или Glencore. Знает спецификации, объёмы, скидки за лояльность.</a:t>
-            </a:r>
-            <a:endParaRPr lang="en-US" sz="950" dirty="0"/>
-          </a:p>
-        </p:txBody>
-      </p:sp>
-      <p:sp>
-        <p:nvSpPr>
-          <p:cNvPr id="15" name="Shape 13"/>
-          <p:cNvSpPr/>
-          <p:nvPr/>
-        </p:nvSpPr>
-        <p:spPr>
-          <a:xfrm>
-            <a:off x="6217920" y="1280160"/>
-            <a:ext cx="2743200" cy="1554480"/>
-          </a:xfrm>
-          <a:prstGeom prst="rect">
-            <a:avLst/>
-          </a:prstGeom>
-          <a:solidFill>
-            <a:srgbClr val="F7F8FB"/>
-          </a:solidFill>
-          <a:ln w="12700">
-            <a:solidFill>
-              <a:srgbClr val="CADCFC"/>
-            </a:solidFill>
-            <a:prstDash val="solid"/>
-          </a:ln>
-        </p:spPr>
-      </p:sp>
-      <p:sp>
-        <p:nvSpPr>
-          <p:cNvPr id="16" name="Shape 14"/>
-          <p:cNvSpPr/>
-          <p:nvPr/>
-        </p:nvSpPr>
-        <p:spPr>
-          <a:xfrm>
-            <a:off x="6355080" y="1444752"/>
-            <a:ext cx="457200" cy="457200"/>
-          </a:xfrm>
-          <a:prstGeom prst="ellipse">
-            <a:avLst/>
-          </a:prstGeom>
-          <a:solidFill>
-            <a:srgbClr val="B87333"/>
-          </a:solidFill>
-          <a:ln w="12700">
-            <a:solidFill>
-              <a:srgbClr val="B87333"/>
-            </a:solidFill>
-            <a:prstDash val="solid"/>
-          </a:ln>
-        </p:spPr>
-      </p:sp>
-      <p:sp>
-        <p:nvSpPr>
-          <p:cNvPr id="17" name="Text 15"/>
-          <p:cNvSpPr/>
-          <p:nvPr/>
-        </p:nvSpPr>
-        <p:spPr>
-          <a:xfrm>
-            <a:off x="6355080" y="1444752"/>
-            <a:ext cx="457200" cy="457200"/>
-          </a:xfrm>
-          <a:prstGeom prst="rect">
-            <a:avLst/>
-          </a:prstGeom>
-          <a:noFill/>
-          <a:ln/>
-        </p:spPr>
-        <p:txBody>
-          <a:bodyPr wrap="square" lIns="0" tIns="0" rIns="0" bIns="0" rtlCol="0" anchor="ctr"/>
-          <a:lstStyle/>
-          <a:p>
-            <a:pPr algn="ctr" indent="0" marL="0">
-              <a:buNone/>
-            </a:pPr>
-            <a:r>
-              <a:rPr lang="en-US" sz="1600" b="1" dirty="0">
-                <a:solidFill>
-                  <a:srgbClr val="FFFFFF"/>
-                </a:solidFill>
-                <a:latin typeface="Calibri" pitchFamily="34" charset="0"/>
-                <a:ea typeface="Calibri" pitchFamily="34" charset="-122"/>
-                <a:cs typeface="Calibri" pitchFamily="34" charset="-120"/>
-              </a:rPr>
-              <a:t>3</a:t>
-            </a:r>
-            <a:endParaRPr lang="en-US" sz="1600" dirty="0"/>
-          </a:p>
-        </p:txBody>
-      </p:sp>
-      <p:sp>
-        <p:nvSpPr>
-          <p:cNvPr id="18" name="Text 16"/>
-          <p:cNvSpPr/>
-          <p:nvPr/>
-        </p:nvSpPr>
-        <p:spPr>
-          <a:xfrm>
-            <a:off x="6903720" y="1417320"/>
-            <a:ext cx="1965960" cy="502920"/>
-          </a:xfrm>
-          <a:prstGeom prst="rect">
-            <a:avLst/>
-          </a:prstGeom>
-          <a:noFill/>
-          <a:ln/>
-        </p:spPr>
-        <p:txBody>
-          <a:bodyPr wrap="square" lIns="0" tIns="0" rIns="0" bIns="0" rtlCol="0" anchor="ctr"/>
-          <a:lstStyle/>
-          <a:p>
-            <a:pPr indent="0" marL="0">
-              <a:buNone/>
-            </a:pPr>
-            <a:r>
-              <a:rPr lang="en-US" sz="1200" b="1" dirty="0">
-                <a:solidFill>
-                  <a:srgbClr val="1E2761"/>
-                </a:solidFill>
-                <a:latin typeface="Calibri" pitchFamily="34" charset="0"/>
-                <a:ea typeface="Calibri" pitchFamily="34" charset="-122"/>
-                <a:cs typeface="Calibri" pitchFamily="34" charset="-120"/>
-              </a:rPr>
-              <a:t>Качественные сигналы</a:t>
-            </a:r>
-            <a:endParaRPr lang="en-US" sz="1200" dirty="0"/>
-          </a:p>
-        </p:txBody>
-      </p:sp>
-      <p:sp>
-        <p:nvSpPr>
-          <p:cNvPr id="19" name="Text 17"/>
-          <p:cNvSpPr/>
-          <p:nvPr/>
-        </p:nvSpPr>
-        <p:spPr>
-          <a:xfrm>
-            <a:off x="6355080" y="1993392"/>
-            <a:ext cx="2514600" cy="777240"/>
-          </a:xfrm>
-          <a:prstGeom prst="rect">
-            <a:avLst/>
-          </a:prstGeom>
-          <a:noFill/>
-          <a:ln/>
-        </p:spPr>
-        <p:txBody>
-          <a:bodyPr wrap="square" lIns="0" tIns="0" rIns="0" bIns="0" rtlCol="0" anchor="ctr"/>
-          <a:lstStyle/>
-          <a:p>
-            <a:pPr indent="0" marL="0">
-              <a:buNone/>
-            </a:pPr>
-            <a:r>
-              <a:rPr lang="en-US" sz="950" dirty="0">
+              <a:t>Политические тарифы и санкции (Трамп, июль 2025, ±25 %)</a:t>
+            </a:r>
+            <a:endParaRPr lang="en-US" sz="1100" dirty="0"/>
+          </a:p>
+          <a:p>
+            <a:pPr marL="342900" indent="-342900">
+              <a:spcAft>
+                <a:spcPts val="600"/>
+              </a:spcAft>
+              <a:buSzPct val="100000"/>
+              <a:buChar char="■"/>
+            </a:pPr>
+            <a:r>
+              <a:rPr lang="en-US" sz="1100" dirty="0">
                 <a:solidFill>
                   <a:srgbClr val="242938"/>
                 </a:solidFill>
@@ -6327,166 +6540,20 @@
                 <a:ea typeface="Calibri" pitchFamily="34" charset="-122"/>
                 <a:cs typeface="Calibri" pitchFamily="34" charset="-120"/>
               </a:rPr>
-              <a:t>Слухи в отрасли, разговоры на конференциях, отношения между менеджерами BHP и закупщиками — этого нет в открытых данных.</a:t>
-            </a:r>
-            <a:endParaRPr lang="en-US" sz="950" dirty="0"/>
-          </a:p>
-        </p:txBody>
-      </p:sp>
-      <p:sp>
-        <p:nvSpPr>
-          <p:cNvPr id="20" name="Shape 18"/>
-          <p:cNvSpPr/>
-          <p:nvPr/>
-        </p:nvSpPr>
-        <p:spPr>
-          <a:xfrm>
-            <a:off x="365760" y="2971800"/>
-            <a:ext cx="2743200" cy="1554480"/>
-          </a:xfrm>
-          <a:prstGeom prst="rect">
-            <a:avLst/>
-          </a:prstGeom>
-          <a:solidFill>
-            <a:srgbClr val="F7F8FB"/>
-          </a:solidFill>
-          <a:ln w="12700">
-            <a:solidFill>
-              <a:srgbClr val="CADCFC"/>
-            </a:solidFill>
-            <a:prstDash val="solid"/>
-          </a:ln>
-        </p:spPr>
-      </p:sp>
-      <p:sp>
-        <p:nvSpPr>
-          <p:cNvPr id="21" name="Shape 19"/>
-          <p:cNvSpPr/>
-          <p:nvPr/>
-        </p:nvSpPr>
-        <p:spPr>
-          <a:xfrm>
-            <a:off x="502920" y="3136392"/>
-            <a:ext cx="457200" cy="457200"/>
-          </a:xfrm>
-          <a:prstGeom prst="ellipse">
-            <a:avLst/>
-          </a:prstGeom>
-          <a:solidFill>
-            <a:srgbClr val="B87333"/>
-          </a:solidFill>
-          <a:ln w="12700">
-            <a:solidFill>
-              <a:srgbClr val="B87333"/>
-            </a:solidFill>
-            <a:prstDash val="solid"/>
-          </a:ln>
-        </p:spPr>
-      </p:sp>
-      <p:sp>
-        <p:nvSpPr>
-          <p:cNvPr id="22" name="Text 20"/>
-          <p:cNvSpPr/>
-          <p:nvPr/>
-        </p:nvSpPr>
-        <p:spPr>
-          <a:xfrm>
-            <a:off x="502920" y="3136392"/>
-            <a:ext cx="457200" cy="457200"/>
-          </a:xfrm>
-          <a:prstGeom prst="rect">
-            <a:avLst/>
-          </a:prstGeom>
-          <a:noFill/>
-          <a:ln/>
-        </p:spPr>
-        <p:txBody>
-          <a:bodyPr wrap="square" lIns="0" tIns="0" rIns="0" bIns="0" rtlCol="0" anchor="ctr"/>
-          <a:lstStyle/>
-          <a:p>
-            <a:pPr algn="ctr" indent="0" marL="0">
-              <a:buNone/>
-            </a:pPr>
-            <a:r>
-              <a:rPr lang="en-US" sz="1600" b="1" dirty="0">
-                <a:solidFill>
-                  <a:srgbClr val="FFFFFF"/>
-                </a:solidFill>
-                <a:latin typeface="Calibri" pitchFamily="34" charset="0"/>
-                <a:ea typeface="Calibri" pitchFamily="34" charset="-122"/>
-                <a:cs typeface="Calibri" pitchFamily="34" charset="-120"/>
-              </a:rPr>
-              <a:t>4</a:t>
-            </a:r>
-            <a:endParaRPr lang="en-US" sz="1600" dirty="0"/>
-          </a:p>
-        </p:txBody>
-      </p:sp>
-      <p:sp>
-        <p:nvSpPr>
-          <p:cNvPr id="23" name="Text 21"/>
-          <p:cNvSpPr/>
-          <p:nvPr/>
-        </p:nvSpPr>
-        <p:spPr>
-          <a:xfrm>
-            <a:off x="1051560" y="3108960"/>
-            <a:ext cx="1965960" cy="502920"/>
-          </a:xfrm>
-          <a:prstGeom prst="rect">
-            <a:avLst/>
-          </a:prstGeom>
-          <a:noFill/>
-          <a:ln/>
-        </p:spPr>
-        <p:txBody>
-          <a:bodyPr wrap="square" lIns="0" tIns="0" rIns="0" bIns="0" rtlCol="0" anchor="ctr"/>
-          <a:lstStyle/>
-          <a:p>
-            <a:pPr indent="0" marL="0">
-              <a:buNone/>
-            </a:pPr>
-            <a:r>
-              <a:rPr lang="en-US" sz="1200" b="1" dirty="0">
-                <a:solidFill>
-                  <a:srgbClr val="1E2761"/>
-                </a:solidFill>
-                <a:latin typeface="Calibri" pitchFamily="34" charset="0"/>
-                <a:ea typeface="Calibri" pitchFamily="34" charset="-122"/>
-                <a:cs typeface="Calibri" pitchFamily="34" charset="-120"/>
-              </a:rPr>
-              <a:t>Управление рисками</a:t>
-            </a:r>
-            <a:endParaRPr lang="en-US" sz="1200" dirty="0"/>
-          </a:p>
-        </p:txBody>
-      </p:sp>
-      <p:sp>
-        <p:nvSpPr>
-          <p:cNvPr id="24" name="Text 22"/>
-          <p:cNvSpPr/>
-          <p:nvPr/>
-        </p:nvSpPr>
-        <p:spPr>
-          <a:xfrm>
-            <a:off x="502920" y="3685032"/>
-            <a:ext cx="2514600" cy="777240"/>
-          </a:xfrm>
-          <a:prstGeom prst="rect">
-            <a:avLst/>
-          </a:prstGeom>
-          <a:noFill/>
-          <a:ln/>
-        </p:spPr>
-        <p:txBody>
-          <a:bodyPr wrap="square" lIns="0" tIns="0" rIns="0" bIns="0" rtlCol="0" anchor="ctr"/>
-          <a:lstStyle/>
-          <a:p>
-            <a:pPr indent="0" marL="0">
-              <a:buNone/>
-            </a:pPr>
-            <a:r>
-              <a:rPr lang="en-US" sz="950" dirty="0">
+              <a:t>Землетрясения, аварии, природные катастрофы</a:t>
+            </a:r>
+            <a:endParaRPr lang="en-US" sz="1100" dirty="0"/>
+          </a:p>
+          <a:p>
+            <a:pPr marL="342900" indent="-342900">
+              <a:spcAft>
+                <a:spcPts val="600"/>
+              </a:spcAft>
+              <a:buSzPct val="100000"/>
+              <a:buChar char="■"/>
+            </a:pPr>
+            <a:r>
+              <a:rPr lang="en-US" sz="1100" dirty="0">
                 <a:solidFill>
                   <a:srgbClr val="242938"/>
                 </a:solidFill>
@@ -6494,166 +6561,20 @@
                 <a:ea typeface="Calibri" pitchFamily="34" charset="-122"/>
                 <a:cs typeface="Calibri" pitchFamily="34" charset="-120"/>
               </a:rPr>
-              <a:t>Когда хеджировать форвардом, когда брать спот, как разделить объёмы по поставщикам. Это вопрос опыта, не статистики.</a:t>
-            </a:r>
-            <a:endParaRPr lang="en-US" sz="950" dirty="0"/>
-          </a:p>
-        </p:txBody>
-      </p:sp>
-      <p:sp>
-        <p:nvSpPr>
-          <p:cNvPr id="25" name="Shape 23"/>
-          <p:cNvSpPr/>
-          <p:nvPr/>
-        </p:nvSpPr>
-        <p:spPr>
-          <a:xfrm>
-            <a:off x="3291840" y="2971800"/>
-            <a:ext cx="2743200" cy="1554480"/>
-          </a:xfrm>
-          <a:prstGeom prst="rect">
-            <a:avLst/>
-          </a:prstGeom>
-          <a:solidFill>
-            <a:srgbClr val="F7F8FB"/>
-          </a:solidFill>
-          <a:ln w="12700">
-            <a:solidFill>
-              <a:srgbClr val="CADCFC"/>
-            </a:solidFill>
-            <a:prstDash val="solid"/>
-          </a:ln>
-        </p:spPr>
-      </p:sp>
-      <p:sp>
-        <p:nvSpPr>
-          <p:cNvPr id="26" name="Shape 24"/>
-          <p:cNvSpPr/>
-          <p:nvPr/>
-        </p:nvSpPr>
-        <p:spPr>
-          <a:xfrm>
-            <a:off x="3429000" y="3136392"/>
-            <a:ext cx="457200" cy="457200"/>
-          </a:xfrm>
-          <a:prstGeom prst="ellipse">
-            <a:avLst/>
-          </a:prstGeom>
-          <a:solidFill>
-            <a:srgbClr val="B87333"/>
-          </a:solidFill>
-          <a:ln w="12700">
-            <a:solidFill>
-              <a:srgbClr val="B87333"/>
-            </a:solidFill>
-            <a:prstDash val="solid"/>
-          </a:ln>
-        </p:spPr>
-      </p:sp>
-      <p:sp>
-        <p:nvSpPr>
-          <p:cNvPr id="27" name="Text 25"/>
-          <p:cNvSpPr/>
-          <p:nvPr/>
-        </p:nvSpPr>
-        <p:spPr>
-          <a:xfrm>
-            <a:off x="3429000" y="3136392"/>
-            <a:ext cx="457200" cy="457200"/>
-          </a:xfrm>
-          <a:prstGeom prst="rect">
-            <a:avLst/>
-          </a:prstGeom>
-          <a:noFill/>
-          <a:ln/>
-        </p:spPr>
-        <p:txBody>
-          <a:bodyPr wrap="square" lIns="0" tIns="0" rIns="0" bIns="0" rtlCol="0" anchor="ctr"/>
-          <a:lstStyle/>
-          <a:p>
-            <a:pPr algn="ctr" indent="0" marL="0">
-              <a:buNone/>
-            </a:pPr>
-            <a:r>
-              <a:rPr lang="en-US" sz="1600" b="1" dirty="0">
-                <a:solidFill>
-                  <a:srgbClr val="FFFFFF"/>
-                </a:solidFill>
-                <a:latin typeface="Calibri" pitchFamily="34" charset="0"/>
-                <a:ea typeface="Calibri" pitchFamily="34" charset="-122"/>
-                <a:cs typeface="Calibri" pitchFamily="34" charset="-120"/>
-              </a:rPr>
-              <a:t>5</a:t>
-            </a:r>
-            <a:endParaRPr lang="en-US" sz="1600" dirty="0"/>
-          </a:p>
-        </p:txBody>
-      </p:sp>
-      <p:sp>
-        <p:nvSpPr>
-          <p:cNvPr id="28" name="Text 26"/>
-          <p:cNvSpPr/>
-          <p:nvPr/>
-        </p:nvSpPr>
-        <p:spPr>
-          <a:xfrm>
-            <a:off x="3977640" y="3108960"/>
-            <a:ext cx="1965960" cy="502920"/>
-          </a:xfrm>
-          <a:prstGeom prst="rect">
-            <a:avLst/>
-          </a:prstGeom>
-          <a:noFill/>
-          <a:ln/>
-        </p:spPr>
-        <p:txBody>
-          <a:bodyPr wrap="square" lIns="0" tIns="0" rIns="0" bIns="0" rtlCol="0" anchor="ctr"/>
-          <a:lstStyle/>
-          <a:p>
-            <a:pPr indent="0" marL="0">
-              <a:buNone/>
-            </a:pPr>
-            <a:r>
-              <a:rPr lang="en-US" sz="1200" b="1" dirty="0">
-                <a:solidFill>
-                  <a:srgbClr val="1E2761"/>
-                </a:solidFill>
-                <a:latin typeface="Calibri" pitchFamily="34" charset="0"/>
-                <a:ea typeface="Calibri" pitchFamily="34" charset="-122"/>
-                <a:cs typeface="Calibri" pitchFamily="34" charset="-120"/>
-              </a:rPr>
-              <a:t>Адаптация модели</a:t>
-            </a:r>
-            <a:endParaRPr lang="en-US" sz="1200" dirty="0"/>
-          </a:p>
-        </p:txBody>
-      </p:sp>
-      <p:sp>
-        <p:nvSpPr>
-          <p:cNvPr id="29" name="Text 27"/>
-          <p:cNvSpPr/>
-          <p:nvPr/>
-        </p:nvSpPr>
-        <p:spPr>
-          <a:xfrm>
-            <a:off x="3429000" y="3685032"/>
-            <a:ext cx="2514600" cy="777240"/>
-          </a:xfrm>
-          <a:prstGeom prst="rect">
-            <a:avLst/>
-          </a:prstGeom>
-          <a:noFill/>
-          <a:ln/>
-        </p:spPr>
-        <p:txBody>
-          <a:bodyPr wrap="square" lIns="0" tIns="0" rIns="0" bIns="0" rtlCol="0" anchor="ctr"/>
-          <a:lstStyle/>
-          <a:p>
-            <a:pPr indent="0" marL="0">
-              <a:buNone/>
-            </a:pPr>
-            <a:r>
-              <a:rPr lang="en-US" sz="950" dirty="0">
+              <a:t>Решения OPEC, ФРС, Банка Китая до их объявления</a:t>
+            </a:r>
+            <a:endParaRPr lang="en-US" sz="1100" dirty="0"/>
+          </a:p>
+          <a:p>
+            <a:pPr marL="342900" indent="-342900">
+              <a:spcAft>
+                <a:spcPts val="600"/>
+              </a:spcAft>
+              <a:buSzPct val="100000"/>
+              <a:buChar char="■"/>
+            </a:pPr>
+            <a:r>
+              <a:rPr lang="en-US" sz="1100" dirty="0">
                 <a:solidFill>
                   <a:srgbClr val="242938"/>
                 </a:solidFill>
@@ -6661,166 +6582,20 @@
                 <a:ea typeface="Calibri" pitchFamily="34" charset="-122"/>
                 <a:cs typeface="Calibri" pitchFamily="34" charset="-120"/>
               </a:rPr>
-              <a:t>После каждого шока — настроить веса, добавить новые показатели, отключить устаревшие. Модель не обновится сама.</a:t>
-            </a:r>
-            <a:endParaRPr lang="en-US" sz="950" dirty="0"/>
-          </a:p>
-        </p:txBody>
-      </p:sp>
-      <p:sp>
-        <p:nvSpPr>
-          <p:cNvPr id="30" name="Shape 28"/>
-          <p:cNvSpPr/>
-          <p:nvPr/>
-        </p:nvSpPr>
-        <p:spPr>
-          <a:xfrm>
-            <a:off x="6217920" y="2971800"/>
-            <a:ext cx="2743200" cy="1554480"/>
-          </a:xfrm>
-          <a:prstGeom prst="rect">
-            <a:avLst/>
-          </a:prstGeom>
-          <a:solidFill>
-            <a:srgbClr val="F7F8FB"/>
-          </a:solidFill>
-          <a:ln w="12700">
-            <a:solidFill>
-              <a:srgbClr val="CADCFC"/>
-            </a:solidFill>
-            <a:prstDash val="solid"/>
-          </a:ln>
-        </p:spPr>
-      </p:sp>
-      <p:sp>
-        <p:nvSpPr>
-          <p:cNvPr id="31" name="Shape 29"/>
-          <p:cNvSpPr/>
-          <p:nvPr/>
-        </p:nvSpPr>
-        <p:spPr>
-          <a:xfrm>
-            <a:off x="6355080" y="3136392"/>
-            <a:ext cx="457200" cy="457200"/>
-          </a:xfrm>
-          <a:prstGeom prst="ellipse">
-            <a:avLst/>
-          </a:prstGeom>
-          <a:solidFill>
-            <a:srgbClr val="B87333"/>
-          </a:solidFill>
-          <a:ln w="12700">
-            <a:solidFill>
-              <a:srgbClr val="B87333"/>
-            </a:solidFill>
-            <a:prstDash val="solid"/>
-          </a:ln>
-        </p:spPr>
-      </p:sp>
-      <p:sp>
-        <p:nvSpPr>
-          <p:cNvPr id="32" name="Text 30"/>
-          <p:cNvSpPr/>
-          <p:nvPr/>
-        </p:nvSpPr>
-        <p:spPr>
-          <a:xfrm>
-            <a:off x="6355080" y="3136392"/>
-            <a:ext cx="457200" cy="457200"/>
-          </a:xfrm>
-          <a:prstGeom prst="rect">
-            <a:avLst/>
-          </a:prstGeom>
-          <a:noFill/>
-          <a:ln/>
-        </p:spPr>
-        <p:txBody>
-          <a:bodyPr wrap="square" lIns="0" tIns="0" rIns="0" bIns="0" rtlCol="0" anchor="ctr"/>
-          <a:lstStyle/>
-          <a:p>
-            <a:pPr algn="ctr" indent="0" marL="0">
-              <a:buNone/>
-            </a:pPr>
-            <a:r>
-              <a:rPr lang="en-US" sz="1600" b="1" dirty="0">
-                <a:solidFill>
-                  <a:srgbClr val="FFFFFF"/>
-                </a:solidFill>
-                <a:latin typeface="Calibri" pitchFamily="34" charset="0"/>
-                <a:ea typeface="Calibri" pitchFamily="34" charset="-122"/>
-                <a:cs typeface="Calibri" pitchFamily="34" charset="-120"/>
-              </a:rPr>
-              <a:t>6</a:t>
-            </a:r>
-            <a:endParaRPr lang="en-US" sz="1600" dirty="0"/>
-          </a:p>
-        </p:txBody>
-      </p:sp>
-      <p:sp>
-        <p:nvSpPr>
-          <p:cNvPr id="33" name="Text 31"/>
-          <p:cNvSpPr/>
-          <p:nvPr/>
-        </p:nvSpPr>
-        <p:spPr>
-          <a:xfrm>
-            <a:off x="6903720" y="3108960"/>
-            <a:ext cx="1965960" cy="502920"/>
-          </a:xfrm>
-          <a:prstGeom prst="rect">
-            <a:avLst/>
-          </a:prstGeom>
-          <a:noFill/>
-          <a:ln/>
-        </p:spPr>
-        <p:txBody>
-          <a:bodyPr wrap="square" lIns="0" tIns="0" rIns="0" bIns="0" rtlCol="0" anchor="ctr"/>
-          <a:lstStyle/>
-          <a:p>
-            <a:pPr indent="0" marL="0">
-              <a:buNone/>
-            </a:pPr>
-            <a:r>
-              <a:rPr lang="en-US" sz="1200" b="1" dirty="0">
-                <a:solidFill>
-                  <a:srgbClr val="1E2761"/>
-                </a:solidFill>
-                <a:latin typeface="Calibri" pitchFamily="34" charset="0"/>
-                <a:ea typeface="Calibri" pitchFamily="34" charset="-122"/>
-                <a:cs typeface="Calibri" pitchFamily="34" charset="-120"/>
-              </a:rPr>
-              <a:t>Защита от ошибок</a:t>
-            </a:r>
-            <a:endParaRPr lang="en-US" sz="1200" dirty="0"/>
-          </a:p>
-        </p:txBody>
-      </p:sp>
-      <p:sp>
-        <p:nvSpPr>
-          <p:cNvPr id="34" name="Text 32"/>
-          <p:cNvSpPr/>
-          <p:nvPr/>
-        </p:nvSpPr>
-        <p:spPr>
-          <a:xfrm>
-            <a:off x="6355080" y="3685032"/>
-            <a:ext cx="2514600" cy="777240"/>
-          </a:xfrm>
-          <a:prstGeom prst="rect">
-            <a:avLst/>
-          </a:prstGeom>
-          <a:noFill/>
-          <a:ln/>
-        </p:spPr>
-        <p:txBody>
-          <a:bodyPr wrap="square" lIns="0" tIns="0" rIns="0" bIns="0" rtlCol="0" anchor="ctr"/>
-          <a:lstStyle/>
-          <a:p>
-            <a:pPr indent="0" marL="0">
-              <a:buNone/>
-            </a:pPr>
-            <a:r>
-              <a:rPr lang="en-US" sz="950" dirty="0">
+              <a:t>Долгосрочные контракты вашей компании с поставщиками</a:t>
+            </a:r>
+            <a:endParaRPr lang="en-US" sz="1100" dirty="0"/>
+          </a:p>
+          <a:p>
+            <a:pPr marL="342900" indent="-342900">
+              <a:spcAft>
+                <a:spcPts val="600"/>
+              </a:spcAft>
+              <a:buSzPct val="100000"/>
+              <a:buChar char="■"/>
+            </a:pPr>
+            <a:r>
+              <a:rPr lang="en-US" sz="1100" dirty="0">
                 <a:solidFill>
                   <a:srgbClr val="242938"/>
                 </a:solidFill>
@@ -6828,15 +6603,36 @@
                 <a:ea typeface="Calibri" pitchFamily="34" charset="-122"/>
                 <a:cs typeface="Calibri" pitchFamily="34" charset="-120"/>
               </a:rPr>
-              <a:t>Когда модель говорит «купи сейчас», но опыт говорит «подожди до решения OPEC» — слушать опыт. Эксперт — последний фильтр.</a:t>
-            </a:r>
-            <a:endParaRPr lang="en-US" sz="950" dirty="0"/>
-          </a:p>
-        </p:txBody>
-      </p:sp>
-      <p:sp>
-        <p:nvSpPr>
-          <p:cNvPr id="35" name="Text 33"/>
+              <a:t>Условия скидок, объёмов и сезонность вашей закупки</a:t>
+            </a:r>
+            <a:endParaRPr lang="en-US" sz="1100" dirty="0"/>
+          </a:p>
+          <a:p>
+            <a:pPr marL="342900" indent="-342900">
+              <a:spcAft>
+                <a:spcPts val="600"/>
+              </a:spcAft>
+              <a:buSzPct val="100000"/>
+              <a:buChar char="■"/>
+            </a:pPr>
+            <a:r>
+              <a:rPr lang="en-US" sz="1100" dirty="0">
+                <a:solidFill>
+                  <a:srgbClr val="242938"/>
+                </a:solidFill>
+                <a:latin typeface="Calibri" pitchFamily="34" charset="0"/>
+                <a:ea typeface="Calibri" pitchFamily="34" charset="-122"/>
+                <a:cs typeface="Calibri" pitchFamily="34" charset="-120"/>
+              </a:rPr>
+              <a:t>Геополитику и санкционные риски РФ</a:t>
+            </a:r>
+            <a:endParaRPr lang="en-US" sz="1100" dirty="0"/>
+          </a:p>
+        </p:txBody>
+      </p:sp>
+      <p:sp>
+        <p:nvSpPr>
+          <p:cNvPr id="11" name="Text 9"/>
           <p:cNvSpPr/>
           <p:nvPr/>
         </p:nvSpPr>
@@ -6875,7 +6671,7 @@
       </p:sp>
       <p:sp>
         <p:nvSpPr>
-          <p:cNvPr id="36" name="Text 34"/>
+          <p:cNvPr id="12" name="Text 10"/>
           <p:cNvSpPr/>
           <p:nvPr/>
         </p:nvSpPr>
@@ -6906,7 +6702,7 @@
                 <a:ea typeface="Calibri" pitchFamily="34" charset="-122"/>
                 <a:cs typeface="Calibri" pitchFamily="34" charset="-120"/>
               </a:rPr>
-              <a:t>14 / 16</a:t>
+              <a:t>14 / 17</a:t>
             </a:r>
             <a:endParaRPr lang="en-US" sz="900" dirty="0"/>
           </a:p>
@@ -7002,7 +6798,7 @@
                 <a:ea typeface="Calibri" pitchFamily="34" charset="-122"/>
                 <a:cs typeface="Calibri" pitchFamily="34" charset="-120"/>
               </a:rPr>
-              <a:t>Что улучшать дальше</a:t>
+              <a:t>Зачем нужен эксперт с многолетним опытом</a:t>
             </a:r>
             <a:endParaRPr lang="en-US" sz="3000" dirty="0"/>
           </a:p>
@@ -7041,7 +6837,7 @@
                 <a:ea typeface="Calibri" pitchFamily="34" charset="-122"/>
                 <a:cs typeface="Calibri" pitchFamily="34" charset="-120"/>
               </a:rPr>
-              <a:t>Roadmap на 6-12 месяцев</a:t>
+              <a:t>Половина решения — модель. Вторая половина — человек, который её ведёт</a:t>
             </a:r>
             <a:endParaRPr lang="en-US" sz="1400" dirty="0"/>
           </a:p>
@@ -7056,7 +6852,7 @@
         <p:spPr>
           <a:xfrm>
             <a:off x="365760" y="1280160"/>
-            <a:ext cx="2743200" cy="3291840"/>
+            <a:ext cx="2743200" cy="1554480"/>
           </a:xfrm>
           <a:prstGeom prst="rect">
             <a:avLst/>
@@ -7080,18 +6876,18 @@
         </p:nvSpPr>
         <p:spPr>
           <a:xfrm>
-            <a:off x="365760" y="1280160"/>
-            <a:ext cx="2743200" cy="457200"/>
-          </a:xfrm>
-          <a:prstGeom prst="rect">
+            <a:off x="502920" y="1444752"/>
+            <a:ext cx="457200" cy="457200"/>
+          </a:xfrm>
+          <a:prstGeom prst="ellipse">
             <a:avLst/>
           </a:prstGeom>
           <a:solidFill>
-            <a:srgbClr val="0F9D58"/>
+            <a:srgbClr val="B87333"/>
           </a:solidFill>
           <a:ln w="12700">
             <a:solidFill>
-              <a:srgbClr val="0F9D58"/>
+              <a:srgbClr val="B87333"/>
             </a:solidFill>
             <a:prstDash val="solid"/>
           </a:ln>
@@ -7105,8 +6901,8 @@
         </p:nvSpPr>
         <p:spPr>
           <a:xfrm>
-            <a:off x="365760" y="1280160"/>
-            <a:ext cx="2743200" cy="457200"/>
+            <a:off x="502920" y="1444752"/>
+            <a:ext cx="457200" cy="457200"/>
           </a:xfrm>
           <a:prstGeom prst="rect">
             <a:avLst/>
@@ -7122,7 +6918,7 @@
               <a:buNone/>
             </a:pPr>
             <a:r>
-              <a:rPr lang="en-US" sz="1400" b="1" dirty="0">
+              <a:rPr lang="en-US" sz="1600" b="1" dirty="0">
                 <a:solidFill>
                   <a:srgbClr val="FFFFFF"/>
                 </a:solidFill>
@@ -7130,9 +6926,9 @@
                 <a:ea typeface="Calibri" pitchFamily="34" charset="-122"/>
                 <a:cs typeface="Calibri" pitchFamily="34" charset="-120"/>
               </a:rPr>
-              <a:t>СЕЙЧАС → 3 мес</a:t>
-            </a:r>
-            <a:endParaRPr lang="en-US" sz="1400" dirty="0"/>
+              <a:t>1</a:t>
+            </a:r>
+            <a:endParaRPr lang="en-US" sz="1600" dirty="0"/>
           </a:p>
         </p:txBody>
       </p:sp>
@@ -7144,28 +6940,63 @@
         </p:nvSpPr>
         <p:spPr>
           <a:xfrm>
-            <a:off x="548640" y="1874520"/>
-            <a:ext cx="2377440" cy="2606040"/>
-          </a:xfrm>
-          <a:prstGeom prst="rect">
-            <a:avLst/>
-          </a:prstGeom>
-          <a:noFill/>
-          <a:ln/>
-        </p:spPr>
-        <p:txBody>
-          <a:bodyPr wrap="square" lIns="0" tIns="0" rIns="0" bIns="0" rtlCol="0" anchor="t"/>
-          <a:lstStyle/>
-          <a:p>
-            <a:pPr marL="342900" indent="-342900">
-              <a:spcAft>
-                <a:spcPts val="600"/>
-              </a:spcAft>
-              <a:buSzPct val="100000"/>
-              <a:buChar char="■"/>
-            </a:pPr>
-            <a:r>
-              <a:rPr lang="en-US" sz="1050" dirty="0">
+            <a:off x="1051560" y="1417320"/>
+            <a:ext cx="1965960" cy="502920"/>
+          </a:xfrm>
+          <a:prstGeom prst="rect">
+            <a:avLst/>
+          </a:prstGeom>
+          <a:noFill/>
+          <a:ln/>
+        </p:spPr>
+        <p:txBody>
+          <a:bodyPr wrap="square" lIns="0" tIns="0" rIns="0" bIns="0" rtlCol="0" anchor="ctr"/>
+          <a:lstStyle/>
+          <a:p>
+            <a:pPr indent="0" marL="0">
+              <a:buNone/>
+            </a:pPr>
+            <a:r>
+              <a:rPr lang="en-US" sz="1200" b="1" dirty="0">
+                <a:solidFill>
+                  <a:srgbClr val="1E2761"/>
+                </a:solidFill>
+                <a:latin typeface="Calibri" pitchFamily="34" charset="0"/>
+                <a:ea typeface="Calibri" pitchFamily="34" charset="-122"/>
+                <a:cs typeface="Calibri" pitchFamily="34" charset="-120"/>
+              </a:rPr>
+              <a:t>Контекст и здравый смысл</a:t>
+            </a:r>
+            <a:endParaRPr lang="en-US" sz="1200" dirty="0"/>
+          </a:p>
+        </p:txBody>
+      </p:sp>
+      <p:sp>
+        <p:nvSpPr>
+          <p:cNvPr id="9" name="Text 7"/>
+          <p:cNvSpPr/>
+          <p:nvPr/>
+        </p:nvSpPr>
+        <p:spPr>
+          <a:xfrm>
+            <a:off x="502920" y="1993392"/>
+            <a:ext cx="2514600" cy="777240"/>
+          </a:xfrm>
+          <a:prstGeom prst="rect">
+            <a:avLst/>
+          </a:prstGeom>
+          <a:noFill/>
+          <a:ln/>
+        </p:spPr>
+        <p:txBody>
+          <a:bodyPr wrap="square" lIns="0" tIns="0" rIns="0" bIns="0" rtlCol="0" anchor="ctr"/>
+          <a:lstStyle/>
+          <a:p>
+            <a:pPr indent="0" marL="0">
+              <a:buNone/>
+            </a:pPr>
+            <a:r>
+              <a:rPr lang="en-US" sz="950" dirty="0">
                 <a:solidFill>
                   <a:srgbClr val="242938"/>
                 </a:solidFill>
@@ -7173,85 +7004,22 @@
                 <a:ea typeface="Calibri" pitchFamily="34" charset="-122"/>
                 <a:cs typeface="Calibri" pitchFamily="34" charset="-120"/>
               </a:rPr>
-              <a:t>Накопить историю запасов LME (3 мес = полезная история)</a:t>
-            </a:r>
-            <a:endParaRPr lang="en-US" sz="1050" dirty="0"/>
-          </a:p>
-          <a:p>
-            <a:pPr marL="342900" indent="-342900">
-              <a:spcAft>
-                <a:spcPts val="600"/>
-              </a:spcAft>
-              <a:buSzPct val="100000"/>
-              <a:buChar char="■"/>
-            </a:pPr>
-            <a:r>
-              <a:rPr lang="en-US" sz="1050" dirty="0">
-                <a:solidFill>
-                  <a:srgbClr val="242938"/>
-                </a:solidFill>
-                <a:latin typeface="Calibri" pitchFamily="34" charset="0"/>
-                <a:ea typeface="Calibri" pitchFamily="34" charset="-122"/>
-                <a:cs typeface="Calibri" pitchFamily="34" charset="-120"/>
-              </a:rPr>
-              <a:t>Добавить курс юаня и Caixin PMI через FRED API</a:t>
-            </a:r>
-            <a:endParaRPr lang="en-US" sz="1050" dirty="0"/>
-          </a:p>
-          <a:p>
-            <a:pPr marL="342900" indent="-342900">
-              <a:spcAft>
-                <a:spcPts val="600"/>
-              </a:spcAft>
-              <a:buSzPct val="100000"/>
-              <a:buChar char="■"/>
-            </a:pPr>
-            <a:r>
-              <a:rPr lang="en-US" sz="1050" dirty="0">
-                <a:solidFill>
-                  <a:srgbClr val="242938"/>
-                </a:solidFill>
-                <a:latin typeface="Calibri" pitchFamily="34" charset="0"/>
-                <a:ea typeface="Calibri" pitchFamily="34" charset="-122"/>
-                <a:cs typeface="Calibri" pitchFamily="34" charset="-120"/>
-              </a:rPr>
-              <a:t>Адаптивные веса моделей по текущему режиму</a:t>
-            </a:r>
-            <a:endParaRPr lang="en-US" sz="1050" dirty="0"/>
-          </a:p>
-          <a:p>
-            <a:pPr marL="342900" indent="-342900">
-              <a:spcAft>
-                <a:spcPts val="600"/>
-              </a:spcAft>
-              <a:buSzPct val="100000"/>
-              <a:buChar char="■"/>
-            </a:pPr>
-            <a:r>
-              <a:rPr lang="en-US" sz="1050" dirty="0">
-                <a:solidFill>
-                  <a:srgbClr val="242938"/>
-                </a:solidFill>
-                <a:latin typeface="Calibri" pitchFamily="34" charset="0"/>
-                <a:ea typeface="Calibri" pitchFamily="34" charset="-122"/>
-                <a:cs typeface="Calibri" pitchFamily="34" charset="-120"/>
-              </a:rPr>
-              <a:t>NLP-сентимент свежих новостей (положительный/отрицательный тон)</a:t>
-            </a:r>
-            <a:endParaRPr lang="en-US" sz="1050" dirty="0"/>
-          </a:p>
-        </p:txBody>
-      </p:sp>
-      <p:sp>
-        <p:nvSpPr>
-          <p:cNvPr id="9" name="Shape 7"/>
+              <a:t>Модель показывает прогноз +25 %. Эксперт спрашивает: «А что случилось? Землетрясение? Тарифы?». Без контекста нельзя действовать.</a:t>
+            </a:r>
+            <a:endParaRPr lang="en-US" sz="950" dirty="0"/>
+          </a:p>
+        </p:txBody>
+      </p:sp>
+      <p:sp>
+        <p:nvSpPr>
+          <p:cNvPr id="10" name="Shape 8"/>
           <p:cNvSpPr/>
           <p:nvPr/>
         </p:nvSpPr>
         <p:spPr>
           <a:xfrm>
             <a:off x="3291840" y="1280160"/>
-            <a:ext cx="2743200" cy="3291840"/>
+            <a:ext cx="2743200" cy="1554480"/>
           </a:xfrm>
           <a:prstGeom prst="rect">
             <a:avLst/>
@@ -7269,16 +7037,16 @@
       </p:sp>
       <p:sp>
         <p:nvSpPr>
-          <p:cNvPr id="10" name="Shape 8"/>
-          <p:cNvSpPr/>
-          <p:nvPr/>
-        </p:nvSpPr>
-        <p:spPr>
-          <a:xfrm>
-            <a:off x="3291840" y="1280160"/>
-            <a:ext cx="2743200" cy="457200"/>
-          </a:xfrm>
-          <a:prstGeom prst="rect">
+          <p:cNvPr id="11" name="Shape 9"/>
+          <p:cNvSpPr/>
+          <p:nvPr/>
+        </p:nvSpPr>
+        <p:spPr>
+          <a:xfrm>
+            <a:off x="3429000" y="1444752"/>
+            <a:ext cx="457200" cy="457200"/>
+          </a:xfrm>
+          <a:prstGeom prst="ellipse">
             <a:avLst/>
           </a:prstGeom>
           <a:solidFill>
@@ -7294,14 +7062,14 @@
       </p:sp>
       <p:sp>
         <p:nvSpPr>
-          <p:cNvPr id="11" name="Text 9"/>
-          <p:cNvSpPr/>
-          <p:nvPr/>
-        </p:nvSpPr>
-        <p:spPr>
-          <a:xfrm>
-            <a:off x="3291840" y="1280160"/>
-            <a:ext cx="2743200" cy="457200"/>
+          <p:cNvPr id="12" name="Text 10"/>
+          <p:cNvSpPr/>
+          <p:nvPr/>
+        </p:nvSpPr>
+        <p:spPr>
+          <a:xfrm>
+            <a:off x="3429000" y="1444752"/>
+            <a:ext cx="457200" cy="457200"/>
           </a:xfrm>
           <a:prstGeom prst="rect">
             <a:avLst/>
@@ -7317,7 +7085,7 @@
               <a:buNone/>
             </a:pPr>
             <a:r>
-              <a:rPr lang="en-US" sz="1400" b="1" dirty="0">
+              <a:rPr lang="en-US" sz="1600" b="1" dirty="0">
                 <a:solidFill>
                   <a:srgbClr val="FFFFFF"/>
                 </a:solidFill>
@@ -7325,42 +7093,77 @@
                 <a:ea typeface="Calibri" pitchFamily="34" charset="-122"/>
                 <a:cs typeface="Calibri" pitchFamily="34" charset="-120"/>
               </a:rPr>
-              <a:t>3 → 6 мес</a:t>
-            </a:r>
-            <a:endParaRPr lang="en-US" sz="1400" dirty="0"/>
-          </a:p>
-        </p:txBody>
-      </p:sp>
-      <p:sp>
-        <p:nvSpPr>
-          <p:cNvPr id="12" name="Text 10"/>
-          <p:cNvSpPr/>
-          <p:nvPr/>
-        </p:nvSpPr>
-        <p:spPr>
-          <a:xfrm>
-            <a:off x="3474720" y="1874520"/>
-            <a:ext cx="2377440" cy="2606040"/>
-          </a:xfrm>
-          <a:prstGeom prst="rect">
-            <a:avLst/>
-          </a:prstGeom>
-          <a:noFill/>
-          <a:ln/>
-        </p:spPr>
-        <p:txBody>
-          <a:bodyPr wrap="square" lIns="0" tIns="0" rIns="0" bIns="0" rtlCol="0" anchor="t"/>
-          <a:lstStyle/>
-          <a:p>
-            <a:pPr marL="342900" indent="-342900">
-              <a:spcAft>
-                <a:spcPts val="600"/>
-              </a:spcAft>
-              <a:buSzPct val="100000"/>
-              <a:buChar char="■"/>
-            </a:pPr>
-            <a:r>
-              <a:rPr lang="en-US" sz="1050" dirty="0">
+              <a:t>2</a:t>
+            </a:r>
+            <a:endParaRPr lang="en-US" sz="1600" dirty="0"/>
+          </a:p>
+        </p:txBody>
+      </p:sp>
+      <p:sp>
+        <p:nvSpPr>
+          <p:cNvPr id="13" name="Text 11"/>
+          <p:cNvSpPr/>
+          <p:nvPr/>
+        </p:nvSpPr>
+        <p:spPr>
+          <a:xfrm>
+            <a:off x="3977640" y="1417320"/>
+            <a:ext cx="1965960" cy="502920"/>
+          </a:xfrm>
+          <a:prstGeom prst="rect">
+            <a:avLst/>
+          </a:prstGeom>
+          <a:noFill/>
+          <a:ln/>
+        </p:spPr>
+        <p:txBody>
+          <a:bodyPr wrap="square" lIns="0" tIns="0" rIns="0" bIns="0" rtlCol="0" anchor="ctr"/>
+          <a:lstStyle/>
+          <a:p>
+            <a:pPr indent="0" marL="0">
+              <a:buNone/>
+            </a:pPr>
+            <a:r>
+              <a:rPr lang="en-US" sz="1200" b="1" dirty="0">
+                <a:solidFill>
+                  <a:srgbClr val="1E2761"/>
+                </a:solidFill>
+                <a:latin typeface="Calibri" pitchFamily="34" charset="0"/>
+                <a:ea typeface="Calibri" pitchFamily="34" charset="-122"/>
+                <a:cs typeface="Calibri" pitchFamily="34" charset="-120"/>
+              </a:rPr>
+              <a:t>Связи с поставщиками</a:t>
+            </a:r>
+            <a:endParaRPr lang="en-US" sz="1200" dirty="0"/>
+          </a:p>
+        </p:txBody>
+      </p:sp>
+      <p:sp>
+        <p:nvSpPr>
+          <p:cNvPr id="14" name="Text 12"/>
+          <p:cNvSpPr/>
+          <p:nvPr/>
+        </p:nvSpPr>
+        <p:spPr>
+          <a:xfrm>
+            <a:off x="3429000" y="1993392"/>
+            <a:ext cx="2514600" cy="777240"/>
+          </a:xfrm>
+          <a:prstGeom prst="rect">
+            <a:avLst/>
+          </a:prstGeom>
+          <a:noFill/>
+          <a:ln/>
+        </p:spPr>
+        <p:txBody>
+          <a:bodyPr wrap="square" lIns="0" tIns="0" rIns="0" bIns="0" rtlCol="0" anchor="ctr"/>
+          <a:lstStyle/>
+          <a:p>
+            <a:pPr indent="0" marL="0">
+              <a:buNone/>
+            </a:pPr>
+            <a:r>
+              <a:rPr lang="en-US" sz="950" dirty="0">
                 <a:solidFill>
                   <a:srgbClr val="242938"/>
                 </a:solidFill>
@@ -7368,85 +7171,22 @@
                 <a:ea typeface="Calibri" pitchFamily="34" charset="-122"/>
                 <a:cs typeface="Calibri" pitchFamily="34" charset="-120"/>
               </a:rPr>
-              <a:t>Интеграция с ERP — автоматическая привязка прогноза к плану закупок</a:t>
-            </a:r>
-            <a:endParaRPr lang="en-US" sz="1050" dirty="0"/>
-          </a:p>
-          <a:p>
-            <a:pPr marL="342900" indent="-342900">
-              <a:spcAft>
-                <a:spcPts val="600"/>
-              </a:spcAft>
-              <a:buSzPct val="100000"/>
-              <a:buChar char="■"/>
-            </a:pPr>
-            <a:r>
-              <a:rPr lang="en-US" sz="1050" dirty="0">
-                <a:solidFill>
-                  <a:srgbClr val="242938"/>
-                </a:solidFill>
-                <a:latin typeface="Calibri" pitchFamily="34" charset="0"/>
-                <a:ea typeface="Calibri" pitchFamily="34" charset="-122"/>
-                <a:cs typeface="Calibri" pitchFamily="34" charset="-120"/>
-              </a:rPr>
-              <a:t>Прогноз цены в рублях через интеграцию с курсом ЦБ</a:t>
-            </a:r>
-            <a:endParaRPr lang="en-US" sz="1050" dirty="0"/>
-          </a:p>
-          <a:p>
-            <a:pPr marL="342900" indent="-342900">
-              <a:spcAft>
-                <a:spcPts val="600"/>
-              </a:spcAft>
-              <a:buSzPct val="100000"/>
-              <a:buChar char="■"/>
-            </a:pPr>
-            <a:r>
-              <a:rPr lang="en-US" sz="1050" dirty="0">
-                <a:solidFill>
-                  <a:srgbClr val="242938"/>
-                </a:solidFill>
-                <a:latin typeface="Calibri" pitchFamily="34" charset="0"/>
-                <a:ea typeface="Calibri" pitchFamily="34" charset="-122"/>
-                <a:cs typeface="Calibri" pitchFamily="34" charset="-120"/>
-              </a:rPr>
-              <a:t>Учёт условий долгосрочных контрактов (формулы, базы, премии)</a:t>
-            </a:r>
-            <a:endParaRPr lang="en-US" sz="1050" dirty="0"/>
-          </a:p>
-          <a:p>
-            <a:pPr marL="342900" indent="-342900">
-              <a:spcAft>
-                <a:spcPts val="600"/>
-              </a:spcAft>
-              <a:buSzPct val="100000"/>
-              <a:buChar char="■"/>
-            </a:pPr>
-            <a:r>
-              <a:rPr lang="en-US" sz="1050" dirty="0">
-                <a:solidFill>
-                  <a:srgbClr val="242938"/>
-                </a:solidFill>
-                <a:latin typeface="Calibri" pitchFamily="34" charset="0"/>
-                <a:ea typeface="Calibri" pitchFamily="34" charset="-122"/>
-                <a:cs typeface="Calibri" pitchFamily="34" charset="-120"/>
-              </a:rPr>
-              <a:t>Алерты в Telegram/Email при изменении режима или critical-новостях</a:t>
-            </a:r>
-            <a:endParaRPr lang="en-US" sz="1050" dirty="0"/>
-          </a:p>
-        </p:txBody>
-      </p:sp>
-      <p:sp>
-        <p:nvSpPr>
-          <p:cNvPr id="13" name="Shape 11"/>
+              <a:t>Знает, кому позвонить в Codelco или Glencore. Знает спецификации, объёмы, скидки за лояльность.</a:t>
+            </a:r>
+            <a:endParaRPr lang="en-US" sz="950" dirty="0"/>
+          </a:p>
+        </p:txBody>
+      </p:sp>
+      <p:sp>
+        <p:nvSpPr>
+          <p:cNvPr id="15" name="Shape 13"/>
           <p:cNvSpPr/>
           <p:nvPr/>
         </p:nvSpPr>
         <p:spPr>
           <a:xfrm>
             <a:off x="6217920" y="1280160"/>
-            <a:ext cx="2743200" cy="3291840"/>
+            <a:ext cx="2743200" cy="1554480"/>
           </a:xfrm>
           <a:prstGeom prst="rect">
             <a:avLst/>
@@ -7464,24 +7204,24 @@
       </p:sp>
       <p:sp>
         <p:nvSpPr>
-          <p:cNvPr id="14" name="Shape 12"/>
-          <p:cNvSpPr/>
-          <p:nvPr/>
-        </p:nvSpPr>
-        <p:spPr>
-          <a:xfrm>
-            <a:off x="6217920" y="1280160"/>
-            <a:ext cx="2743200" cy="457200"/>
-          </a:xfrm>
-          <a:prstGeom prst="rect">
+          <p:cNvPr id="16" name="Shape 14"/>
+          <p:cNvSpPr/>
+          <p:nvPr/>
+        </p:nvSpPr>
+        <p:spPr>
+          <a:xfrm>
+            <a:off x="6355080" y="1444752"/>
+            <a:ext cx="457200" cy="457200"/>
+          </a:xfrm>
+          <a:prstGeom prst="ellipse">
             <a:avLst/>
           </a:prstGeom>
           <a:solidFill>
-            <a:srgbClr val="1E2761"/>
+            <a:srgbClr val="B87333"/>
           </a:solidFill>
           <a:ln w="12700">
             <a:solidFill>
-              <a:srgbClr val="1E2761"/>
+              <a:srgbClr val="B87333"/>
             </a:solidFill>
             <a:prstDash val="solid"/>
           </a:ln>
@@ -7489,14 +7229,14 @@
       </p:sp>
       <p:sp>
         <p:nvSpPr>
-          <p:cNvPr id="15" name="Text 13"/>
-          <p:cNvSpPr/>
-          <p:nvPr/>
-        </p:nvSpPr>
-        <p:spPr>
-          <a:xfrm>
-            <a:off x="6217920" y="1280160"/>
-            <a:ext cx="2743200" cy="457200"/>
+          <p:cNvPr id="17" name="Text 15"/>
+          <p:cNvSpPr/>
+          <p:nvPr/>
+        </p:nvSpPr>
+        <p:spPr>
+          <a:xfrm>
+            <a:off x="6355080" y="1444752"/>
+            <a:ext cx="457200" cy="457200"/>
           </a:xfrm>
           <a:prstGeom prst="rect">
             <a:avLst/>
@@ -7512,7 +7252,7 @@
               <a:buNone/>
             </a:pPr>
             <a:r>
-              <a:rPr lang="en-US" sz="1400" b="1" dirty="0">
+              <a:rPr lang="en-US" sz="1600" b="1" dirty="0">
                 <a:solidFill>
                   <a:srgbClr val="FFFFFF"/>
                 </a:solidFill>
@@ -7520,42 +7260,77 @@
                 <a:ea typeface="Calibri" pitchFamily="34" charset="-122"/>
                 <a:cs typeface="Calibri" pitchFamily="34" charset="-120"/>
               </a:rPr>
-              <a:t>6 → 12 мес</a:t>
-            </a:r>
-            <a:endParaRPr lang="en-US" sz="1400" dirty="0"/>
-          </a:p>
-        </p:txBody>
-      </p:sp>
-      <p:sp>
-        <p:nvSpPr>
-          <p:cNvPr id="16" name="Text 14"/>
-          <p:cNvSpPr/>
-          <p:nvPr/>
-        </p:nvSpPr>
-        <p:spPr>
-          <a:xfrm>
-            <a:off x="6400800" y="1874520"/>
-            <a:ext cx="2377440" cy="2606040"/>
-          </a:xfrm>
-          <a:prstGeom prst="rect">
-            <a:avLst/>
-          </a:prstGeom>
-          <a:noFill/>
-          <a:ln/>
-        </p:spPr>
-        <p:txBody>
-          <a:bodyPr wrap="square" lIns="0" tIns="0" rIns="0" bIns="0" rtlCol="0" anchor="t"/>
-          <a:lstStyle/>
-          <a:p>
-            <a:pPr marL="342900" indent="-342900">
-              <a:spcAft>
-                <a:spcPts val="600"/>
-              </a:spcAft>
-              <a:buSzPct val="100000"/>
-              <a:buChar char="■"/>
-            </a:pPr>
-            <a:r>
-              <a:rPr lang="en-US" sz="1050" dirty="0">
+              <a:t>3</a:t>
+            </a:r>
+            <a:endParaRPr lang="en-US" sz="1600" dirty="0"/>
+          </a:p>
+        </p:txBody>
+      </p:sp>
+      <p:sp>
+        <p:nvSpPr>
+          <p:cNvPr id="18" name="Text 16"/>
+          <p:cNvSpPr/>
+          <p:nvPr/>
+        </p:nvSpPr>
+        <p:spPr>
+          <a:xfrm>
+            <a:off x="6903720" y="1417320"/>
+            <a:ext cx="1965960" cy="502920"/>
+          </a:xfrm>
+          <a:prstGeom prst="rect">
+            <a:avLst/>
+          </a:prstGeom>
+          <a:noFill/>
+          <a:ln/>
+        </p:spPr>
+        <p:txBody>
+          <a:bodyPr wrap="square" lIns="0" tIns="0" rIns="0" bIns="0" rtlCol="0" anchor="ctr"/>
+          <a:lstStyle/>
+          <a:p>
+            <a:pPr indent="0" marL="0">
+              <a:buNone/>
+            </a:pPr>
+            <a:r>
+              <a:rPr lang="en-US" sz="1200" b="1" dirty="0">
+                <a:solidFill>
+                  <a:srgbClr val="1E2761"/>
+                </a:solidFill>
+                <a:latin typeface="Calibri" pitchFamily="34" charset="0"/>
+                <a:ea typeface="Calibri" pitchFamily="34" charset="-122"/>
+                <a:cs typeface="Calibri" pitchFamily="34" charset="-120"/>
+              </a:rPr>
+              <a:t>Качественные сигналы</a:t>
+            </a:r>
+            <a:endParaRPr lang="en-US" sz="1200" dirty="0"/>
+          </a:p>
+        </p:txBody>
+      </p:sp>
+      <p:sp>
+        <p:nvSpPr>
+          <p:cNvPr id="19" name="Text 17"/>
+          <p:cNvSpPr/>
+          <p:nvPr/>
+        </p:nvSpPr>
+        <p:spPr>
+          <a:xfrm>
+            <a:off x="6355080" y="1993392"/>
+            <a:ext cx="2514600" cy="777240"/>
+          </a:xfrm>
+          <a:prstGeom prst="rect">
+            <a:avLst/>
+          </a:prstGeom>
+          <a:noFill/>
+          <a:ln/>
+        </p:spPr>
+        <p:txBody>
+          <a:bodyPr wrap="square" lIns="0" tIns="0" rIns="0" bIns="0" rtlCol="0" anchor="ctr"/>
+          <a:lstStyle/>
+          <a:p>
+            <a:pPr indent="0" marL="0">
+              <a:buNone/>
+            </a:pPr>
+            <a:r>
+              <a:rPr lang="en-US" sz="950" dirty="0">
                 <a:solidFill>
                   <a:srgbClr val="242938"/>
                 </a:solidFill>
@@ -7563,20 +7338,166 @@
                 <a:ea typeface="Calibri" pitchFamily="34" charset="-122"/>
                 <a:cs typeface="Calibri" pitchFamily="34" charset="-120"/>
               </a:rPr>
-              <a:t>Платные источники: ICSG Monthly Bulletin, LME 3M, SMM Yangshan</a:t>
-            </a:r>
-            <a:endParaRPr lang="en-US" sz="1050" dirty="0"/>
-          </a:p>
-          <a:p>
-            <a:pPr marL="342900" indent="-342900">
-              <a:spcAft>
-                <a:spcPts val="600"/>
-              </a:spcAft>
-              <a:buSzPct val="100000"/>
-              <a:buChar char="■"/>
-            </a:pPr>
-            <a:r>
-              <a:rPr lang="en-US" sz="1050" dirty="0">
+              <a:t>Слухи в отрасли, разговоры на конференциях, отношения между менеджерами BHP и закупщиками — этого нет в открытых данных.</a:t>
+            </a:r>
+            <a:endParaRPr lang="en-US" sz="950" dirty="0"/>
+          </a:p>
+        </p:txBody>
+      </p:sp>
+      <p:sp>
+        <p:nvSpPr>
+          <p:cNvPr id="20" name="Shape 18"/>
+          <p:cNvSpPr/>
+          <p:nvPr/>
+        </p:nvSpPr>
+        <p:spPr>
+          <a:xfrm>
+            <a:off x="365760" y="2971800"/>
+            <a:ext cx="2743200" cy="1554480"/>
+          </a:xfrm>
+          <a:prstGeom prst="rect">
+            <a:avLst/>
+          </a:prstGeom>
+          <a:solidFill>
+            <a:srgbClr val="F7F8FB"/>
+          </a:solidFill>
+          <a:ln w="12700">
+            <a:solidFill>
+              <a:srgbClr val="CADCFC"/>
+            </a:solidFill>
+            <a:prstDash val="solid"/>
+          </a:ln>
+        </p:spPr>
+      </p:sp>
+      <p:sp>
+        <p:nvSpPr>
+          <p:cNvPr id="21" name="Shape 19"/>
+          <p:cNvSpPr/>
+          <p:nvPr/>
+        </p:nvSpPr>
+        <p:spPr>
+          <a:xfrm>
+            <a:off x="502920" y="3136392"/>
+            <a:ext cx="457200" cy="457200"/>
+          </a:xfrm>
+          <a:prstGeom prst="ellipse">
+            <a:avLst/>
+          </a:prstGeom>
+          <a:solidFill>
+            <a:srgbClr val="B87333"/>
+          </a:solidFill>
+          <a:ln w="12700">
+            <a:solidFill>
+              <a:srgbClr val="B87333"/>
+            </a:solidFill>
+            <a:prstDash val="solid"/>
+          </a:ln>
+        </p:spPr>
+      </p:sp>
+      <p:sp>
+        <p:nvSpPr>
+          <p:cNvPr id="22" name="Text 20"/>
+          <p:cNvSpPr/>
+          <p:nvPr/>
+        </p:nvSpPr>
+        <p:spPr>
+          <a:xfrm>
+            <a:off x="502920" y="3136392"/>
+            <a:ext cx="457200" cy="457200"/>
+          </a:xfrm>
+          <a:prstGeom prst="rect">
+            <a:avLst/>
+          </a:prstGeom>
+          <a:noFill/>
+          <a:ln/>
+        </p:spPr>
+        <p:txBody>
+          <a:bodyPr wrap="square" lIns="0" tIns="0" rIns="0" bIns="0" rtlCol="0" anchor="ctr"/>
+          <a:lstStyle/>
+          <a:p>
+            <a:pPr algn="ctr" indent="0" marL="0">
+              <a:buNone/>
+            </a:pPr>
+            <a:r>
+              <a:rPr lang="en-US" sz="1600" b="1" dirty="0">
+                <a:solidFill>
+                  <a:srgbClr val="FFFFFF"/>
+                </a:solidFill>
+                <a:latin typeface="Calibri" pitchFamily="34" charset="0"/>
+                <a:ea typeface="Calibri" pitchFamily="34" charset="-122"/>
+                <a:cs typeface="Calibri" pitchFamily="34" charset="-120"/>
+              </a:rPr>
+              <a:t>4</a:t>
+            </a:r>
+            <a:endParaRPr lang="en-US" sz="1600" dirty="0"/>
+          </a:p>
+        </p:txBody>
+      </p:sp>
+      <p:sp>
+        <p:nvSpPr>
+          <p:cNvPr id="23" name="Text 21"/>
+          <p:cNvSpPr/>
+          <p:nvPr/>
+        </p:nvSpPr>
+        <p:spPr>
+          <a:xfrm>
+            <a:off x="1051560" y="3108960"/>
+            <a:ext cx="1965960" cy="502920"/>
+          </a:xfrm>
+          <a:prstGeom prst="rect">
+            <a:avLst/>
+          </a:prstGeom>
+          <a:noFill/>
+          <a:ln/>
+        </p:spPr>
+        <p:txBody>
+          <a:bodyPr wrap="square" lIns="0" tIns="0" rIns="0" bIns="0" rtlCol="0" anchor="ctr"/>
+          <a:lstStyle/>
+          <a:p>
+            <a:pPr indent="0" marL="0">
+              <a:buNone/>
+            </a:pPr>
+            <a:r>
+              <a:rPr lang="en-US" sz="1200" b="1" dirty="0">
+                <a:solidFill>
+                  <a:srgbClr val="1E2761"/>
+                </a:solidFill>
+                <a:latin typeface="Calibri" pitchFamily="34" charset="0"/>
+                <a:ea typeface="Calibri" pitchFamily="34" charset="-122"/>
+                <a:cs typeface="Calibri" pitchFamily="34" charset="-120"/>
+              </a:rPr>
+              <a:t>Управление рисками</a:t>
+            </a:r>
+            <a:endParaRPr lang="en-US" sz="1200" dirty="0"/>
+          </a:p>
+        </p:txBody>
+      </p:sp>
+      <p:sp>
+        <p:nvSpPr>
+          <p:cNvPr id="24" name="Text 22"/>
+          <p:cNvSpPr/>
+          <p:nvPr/>
+        </p:nvSpPr>
+        <p:spPr>
+          <a:xfrm>
+            <a:off x="502920" y="3685032"/>
+            <a:ext cx="2514600" cy="777240"/>
+          </a:xfrm>
+          <a:prstGeom prst="rect">
+            <a:avLst/>
+          </a:prstGeom>
+          <a:noFill/>
+          <a:ln/>
+        </p:spPr>
+        <p:txBody>
+          <a:bodyPr wrap="square" lIns="0" tIns="0" rIns="0" bIns="0" rtlCol="0" anchor="ctr"/>
+          <a:lstStyle/>
+          <a:p>
+            <a:pPr indent="0" marL="0">
+              <a:buNone/>
+            </a:pPr>
+            <a:r>
+              <a:rPr lang="en-US" sz="950" dirty="0">
                 <a:solidFill>
                   <a:srgbClr val="242938"/>
                 </a:solidFill>
@@ -7584,20 +7505,166 @@
                 <a:ea typeface="Calibri" pitchFamily="34" charset="-122"/>
                 <a:cs typeface="Calibri" pitchFamily="34" charset="-120"/>
               </a:rPr>
-              <a:t>Глубокие модели (LSTM, Temporal Fusion Transformer)</a:t>
-            </a:r>
-            <a:endParaRPr lang="en-US" sz="1050" dirty="0"/>
-          </a:p>
-          <a:p>
-            <a:pPr marL="342900" indent="-342900">
-              <a:spcAft>
-                <a:spcPts val="600"/>
-              </a:spcAft>
-              <a:buSzPct val="100000"/>
-              <a:buChar char="■"/>
-            </a:pPr>
-            <a:r>
-              <a:rPr lang="en-US" sz="1050" dirty="0">
+              <a:t>Когда хеджировать форвардом, когда брать спот, как разделить объёмы по поставщикам. Это вопрос опыта, не статистики.</a:t>
+            </a:r>
+            <a:endParaRPr lang="en-US" sz="950" dirty="0"/>
+          </a:p>
+        </p:txBody>
+      </p:sp>
+      <p:sp>
+        <p:nvSpPr>
+          <p:cNvPr id="25" name="Shape 23"/>
+          <p:cNvSpPr/>
+          <p:nvPr/>
+        </p:nvSpPr>
+        <p:spPr>
+          <a:xfrm>
+            <a:off x="3291840" y="2971800"/>
+            <a:ext cx="2743200" cy="1554480"/>
+          </a:xfrm>
+          <a:prstGeom prst="rect">
+            <a:avLst/>
+          </a:prstGeom>
+          <a:solidFill>
+            <a:srgbClr val="F7F8FB"/>
+          </a:solidFill>
+          <a:ln w="12700">
+            <a:solidFill>
+              <a:srgbClr val="CADCFC"/>
+            </a:solidFill>
+            <a:prstDash val="solid"/>
+          </a:ln>
+        </p:spPr>
+      </p:sp>
+      <p:sp>
+        <p:nvSpPr>
+          <p:cNvPr id="26" name="Shape 24"/>
+          <p:cNvSpPr/>
+          <p:nvPr/>
+        </p:nvSpPr>
+        <p:spPr>
+          <a:xfrm>
+            <a:off x="3429000" y="3136392"/>
+            <a:ext cx="457200" cy="457200"/>
+          </a:xfrm>
+          <a:prstGeom prst="ellipse">
+            <a:avLst/>
+          </a:prstGeom>
+          <a:solidFill>
+            <a:srgbClr val="B87333"/>
+          </a:solidFill>
+          <a:ln w="12700">
+            <a:solidFill>
+              <a:srgbClr val="B87333"/>
+            </a:solidFill>
+            <a:prstDash val="solid"/>
+          </a:ln>
+        </p:spPr>
+      </p:sp>
+      <p:sp>
+        <p:nvSpPr>
+          <p:cNvPr id="27" name="Text 25"/>
+          <p:cNvSpPr/>
+          <p:nvPr/>
+        </p:nvSpPr>
+        <p:spPr>
+          <a:xfrm>
+            <a:off x="3429000" y="3136392"/>
+            <a:ext cx="457200" cy="457200"/>
+          </a:xfrm>
+          <a:prstGeom prst="rect">
+            <a:avLst/>
+          </a:prstGeom>
+          <a:noFill/>
+          <a:ln/>
+        </p:spPr>
+        <p:txBody>
+          <a:bodyPr wrap="square" lIns="0" tIns="0" rIns="0" bIns="0" rtlCol="0" anchor="ctr"/>
+          <a:lstStyle/>
+          <a:p>
+            <a:pPr algn="ctr" indent="0" marL="0">
+              <a:buNone/>
+            </a:pPr>
+            <a:r>
+              <a:rPr lang="en-US" sz="1600" b="1" dirty="0">
+                <a:solidFill>
+                  <a:srgbClr val="FFFFFF"/>
+                </a:solidFill>
+                <a:latin typeface="Calibri" pitchFamily="34" charset="0"/>
+                <a:ea typeface="Calibri" pitchFamily="34" charset="-122"/>
+                <a:cs typeface="Calibri" pitchFamily="34" charset="-120"/>
+              </a:rPr>
+              <a:t>5</a:t>
+            </a:r>
+            <a:endParaRPr lang="en-US" sz="1600" dirty="0"/>
+          </a:p>
+        </p:txBody>
+      </p:sp>
+      <p:sp>
+        <p:nvSpPr>
+          <p:cNvPr id="28" name="Text 26"/>
+          <p:cNvSpPr/>
+          <p:nvPr/>
+        </p:nvSpPr>
+        <p:spPr>
+          <a:xfrm>
+            <a:off x="3977640" y="3108960"/>
+            <a:ext cx="1965960" cy="502920"/>
+          </a:xfrm>
+          <a:prstGeom prst="rect">
+            <a:avLst/>
+          </a:prstGeom>
+          <a:noFill/>
+          <a:ln/>
+        </p:spPr>
+        <p:txBody>
+          <a:bodyPr wrap="square" lIns="0" tIns="0" rIns="0" bIns="0" rtlCol="0" anchor="ctr"/>
+          <a:lstStyle/>
+          <a:p>
+            <a:pPr indent="0" marL="0">
+              <a:buNone/>
+            </a:pPr>
+            <a:r>
+              <a:rPr lang="en-US" sz="1200" b="1" dirty="0">
+                <a:solidFill>
+                  <a:srgbClr val="1E2761"/>
+                </a:solidFill>
+                <a:latin typeface="Calibri" pitchFamily="34" charset="0"/>
+                <a:ea typeface="Calibri" pitchFamily="34" charset="-122"/>
+                <a:cs typeface="Calibri" pitchFamily="34" charset="-120"/>
+              </a:rPr>
+              <a:t>Адаптация модели</a:t>
+            </a:r>
+            <a:endParaRPr lang="en-US" sz="1200" dirty="0"/>
+          </a:p>
+        </p:txBody>
+      </p:sp>
+      <p:sp>
+        <p:nvSpPr>
+          <p:cNvPr id="29" name="Text 27"/>
+          <p:cNvSpPr/>
+          <p:nvPr/>
+        </p:nvSpPr>
+        <p:spPr>
+          <a:xfrm>
+            <a:off x="3429000" y="3685032"/>
+            <a:ext cx="2514600" cy="777240"/>
+          </a:xfrm>
+          <a:prstGeom prst="rect">
+            <a:avLst/>
+          </a:prstGeom>
+          <a:noFill/>
+          <a:ln/>
+        </p:spPr>
+        <p:txBody>
+          <a:bodyPr wrap="square" lIns="0" tIns="0" rIns="0" bIns="0" rtlCol="0" anchor="ctr"/>
+          <a:lstStyle/>
+          <a:p>
+            <a:pPr indent="0" marL="0">
+              <a:buNone/>
+            </a:pPr>
+            <a:r>
+              <a:rPr lang="en-US" sz="950" dirty="0">
                 <a:solidFill>
                   <a:srgbClr val="242938"/>
                 </a:solidFill>
@@ -7605,20 +7672,166 @@
                 <a:ea typeface="Calibri" pitchFamily="34" charset="-122"/>
                 <a:cs typeface="Calibri" pitchFamily="34" charset="-120"/>
               </a:rPr>
-              <a:t>Event study — автоматическая привязка новостей к ценовым движениям</a:t>
-            </a:r>
-            <a:endParaRPr lang="en-US" sz="1050" dirty="0"/>
-          </a:p>
-          <a:p>
-            <a:pPr marL="342900" indent="-342900">
-              <a:spcAft>
-                <a:spcPts val="600"/>
-              </a:spcAft>
-              <a:buSzPct val="100000"/>
-              <a:buChar char="■"/>
-            </a:pPr>
-            <a:r>
-              <a:rPr lang="en-US" sz="1050" dirty="0">
+              <a:t>После каждого шока — настроить веса, добавить новые показатели, отключить устаревшие. Модель не обновится сама.</a:t>
+            </a:r>
+            <a:endParaRPr lang="en-US" sz="950" dirty="0"/>
+          </a:p>
+        </p:txBody>
+      </p:sp>
+      <p:sp>
+        <p:nvSpPr>
+          <p:cNvPr id="30" name="Shape 28"/>
+          <p:cNvSpPr/>
+          <p:nvPr/>
+        </p:nvSpPr>
+        <p:spPr>
+          <a:xfrm>
+            <a:off x="6217920" y="2971800"/>
+            <a:ext cx="2743200" cy="1554480"/>
+          </a:xfrm>
+          <a:prstGeom prst="rect">
+            <a:avLst/>
+          </a:prstGeom>
+          <a:solidFill>
+            <a:srgbClr val="F7F8FB"/>
+          </a:solidFill>
+          <a:ln w="12700">
+            <a:solidFill>
+              <a:srgbClr val="CADCFC"/>
+            </a:solidFill>
+            <a:prstDash val="solid"/>
+          </a:ln>
+        </p:spPr>
+      </p:sp>
+      <p:sp>
+        <p:nvSpPr>
+          <p:cNvPr id="31" name="Shape 29"/>
+          <p:cNvSpPr/>
+          <p:nvPr/>
+        </p:nvSpPr>
+        <p:spPr>
+          <a:xfrm>
+            <a:off x="6355080" y="3136392"/>
+            <a:ext cx="457200" cy="457200"/>
+          </a:xfrm>
+          <a:prstGeom prst="ellipse">
+            <a:avLst/>
+          </a:prstGeom>
+          <a:solidFill>
+            <a:srgbClr val="B87333"/>
+          </a:solidFill>
+          <a:ln w="12700">
+            <a:solidFill>
+              <a:srgbClr val="B87333"/>
+            </a:solidFill>
+            <a:prstDash val="solid"/>
+          </a:ln>
+        </p:spPr>
+      </p:sp>
+      <p:sp>
+        <p:nvSpPr>
+          <p:cNvPr id="32" name="Text 30"/>
+          <p:cNvSpPr/>
+          <p:nvPr/>
+        </p:nvSpPr>
+        <p:spPr>
+          <a:xfrm>
+            <a:off x="6355080" y="3136392"/>
+            <a:ext cx="457200" cy="457200"/>
+          </a:xfrm>
+          <a:prstGeom prst="rect">
+            <a:avLst/>
+          </a:prstGeom>
+          <a:noFill/>
+          <a:ln/>
+        </p:spPr>
+        <p:txBody>
+          <a:bodyPr wrap="square" lIns="0" tIns="0" rIns="0" bIns="0" rtlCol="0" anchor="ctr"/>
+          <a:lstStyle/>
+          <a:p>
+            <a:pPr algn="ctr" indent="0" marL="0">
+              <a:buNone/>
+            </a:pPr>
+            <a:r>
+              <a:rPr lang="en-US" sz="1600" b="1" dirty="0">
+                <a:solidFill>
+                  <a:srgbClr val="FFFFFF"/>
+                </a:solidFill>
+                <a:latin typeface="Calibri" pitchFamily="34" charset="0"/>
+                <a:ea typeface="Calibri" pitchFamily="34" charset="-122"/>
+                <a:cs typeface="Calibri" pitchFamily="34" charset="-120"/>
+              </a:rPr>
+              <a:t>6</a:t>
+            </a:r>
+            <a:endParaRPr lang="en-US" sz="1600" dirty="0"/>
+          </a:p>
+        </p:txBody>
+      </p:sp>
+      <p:sp>
+        <p:nvSpPr>
+          <p:cNvPr id="33" name="Text 31"/>
+          <p:cNvSpPr/>
+          <p:nvPr/>
+        </p:nvSpPr>
+        <p:spPr>
+          <a:xfrm>
+            <a:off x="6903720" y="3108960"/>
+            <a:ext cx="1965960" cy="502920"/>
+          </a:xfrm>
+          <a:prstGeom prst="rect">
+            <a:avLst/>
+          </a:prstGeom>
+          <a:noFill/>
+          <a:ln/>
+        </p:spPr>
+        <p:txBody>
+          <a:bodyPr wrap="square" lIns="0" tIns="0" rIns="0" bIns="0" rtlCol="0" anchor="ctr"/>
+          <a:lstStyle/>
+          <a:p>
+            <a:pPr indent="0" marL="0">
+              <a:buNone/>
+            </a:pPr>
+            <a:r>
+              <a:rPr lang="en-US" sz="1200" b="1" dirty="0">
+                <a:solidFill>
+                  <a:srgbClr val="1E2761"/>
+                </a:solidFill>
+                <a:latin typeface="Calibri" pitchFamily="34" charset="0"/>
+                <a:ea typeface="Calibri" pitchFamily="34" charset="-122"/>
+                <a:cs typeface="Calibri" pitchFamily="34" charset="-120"/>
+              </a:rPr>
+              <a:t>Защита от ошибок</a:t>
+            </a:r>
+            <a:endParaRPr lang="en-US" sz="1200" dirty="0"/>
+          </a:p>
+        </p:txBody>
+      </p:sp>
+      <p:sp>
+        <p:nvSpPr>
+          <p:cNvPr id="34" name="Text 32"/>
+          <p:cNvSpPr/>
+          <p:nvPr/>
+        </p:nvSpPr>
+        <p:spPr>
+          <a:xfrm>
+            <a:off x="6355080" y="3685032"/>
+            <a:ext cx="2514600" cy="777240"/>
+          </a:xfrm>
+          <a:prstGeom prst="rect">
+            <a:avLst/>
+          </a:prstGeom>
+          <a:noFill/>
+          <a:ln/>
+        </p:spPr>
+        <p:txBody>
+          <a:bodyPr wrap="square" lIns="0" tIns="0" rIns="0" bIns="0" rtlCol="0" anchor="ctr"/>
+          <a:lstStyle/>
+          <a:p>
+            <a:pPr indent="0" marL="0">
+              <a:buNone/>
+            </a:pPr>
+            <a:r>
+              <a:rPr lang="en-US" sz="950" dirty="0">
                 <a:solidFill>
                   <a:srgbClr val="242938"/>
                 </a:solidFill>
@@ -7626,54 +7839,15 @@
                 <a:ea typeface="Calibri" pitchFamily="34" charset="-122"/>
                 <a:cs typeface="Calibri" pitchFamily="34" charset="-120"/>
               </a:rPr>
-              <a:t>Оптимизация портфеля закупок (хедж + спот + контракты)</a:t>
-            </a:r>
-            <a:endParaRPr lang="en-US" sz="1050" dirty="0"/>
-          </a:p>
-        </p:txBody>
-      </p:sp>
-      <p:sp>
-        <p:nvSpPr>
-          <p:cNvPr id="17" name="Text 15"/>
-          <p:cNvSpPr/>
-          <p:nvPr/>
-        </p:nvSpPr>
-        <p:spPr>
-          <a:xfrm>
-            <a:off x="457200" y="4617720"/>
-            <a:ext cx="8229600" cy="365760"/>
-          </a:xfrm>
-          <a:prstGeom prst="rect">
-            <a:avLst/>
-          </a:prstGeom>
-          <a:noFill/>
-          <a:ln/>
-        </p:spPr>
-        <p:txBody>
-          <a:bodyPr wrap="square" lIns="0" tIns="0" rIns="0" bIns="0" rtlCol="0" anchor="ctr"/>
-          <a:lstStyle/>
-          <a:p>
-            <a:pPr indent="0" marL="0">
-              <a:buNone/>
-            </a:pPr>
-            <a:r>
-              <a:rPr lang="en-US" sz="1100" i="1" dirty="0">
-                <a:solidFill>
-                  <a:srgbClr val="5A6378"/>
-                </a:solidFill>
-                <a:latin typeface="Calibri" pitchFamily="34" charset="0"/>
-                <a:ea typeface="Calibri" pitchFamily="34" charset="-122"/>
-                <a:cs typeface="Calibri" pitchFamily="34" charset="-120"/>
-              </a:rPr>
-              <a:t>Бюджет: первая фаза — без затрат (опираемся на бесплатные данные). Платные источники — со второй половины года.</a:t>
-            </a:r>
-            <a:endParaRPr lang="en-US" sz="1100" dirty="0"/>
-          </a:p>
-        </p:txBody>
-      </p:sp>
-      <p:sp>
-        <p:nvSpPr>
-          <p:cNvPr id="18" name="Text 16"/>
+              <a:t>Когда модель говорит «купи сейчас», но опыт говорит «подожди до решения OPEC» — слушать опыт. Эксперт — последний фильтр.</a:t>
+            </a:r>
+            <a:endParaRPr lang="en-US" sz="950" dirty="0"/>
+          </a:p>
+        </p:txBody>
+      </p:sp>
+      <p:sp>
+        <p:nvSpPr>
+          <p:cNvPr id="35" name="Text 33"/>
           <p:cNvSpPr/>
           <p:nvPr/>
         </p:nvSpPr>
@@ -7712,7 +7886,7 @@
       </p:sp>
       <p:sp>
         <p:nvSpPr>
-          <p:cNvPr id="19" name="Text 17"/>
+          <p:cNvPr id="36" name="Text 34"/>
           <p:cNvSpPr/>
           <p:nvPr/>
         </p:nvSpPr>
@@ -7743,7 +7917,7 @@
                 <a:ea typeface="Calibri" pitchFamily="34" charset="-122"/>
                 <a:cs typeface="Calibri" pitchFamily="34" charset="-120"/>
               </a:rPr>
-              <a:t>15 / 16</a:t>
+              <a:t>15 / 17</a:t>
             </a:r>
             <a:endParaRPr lang="en-US" sz="900" dirty="0"/>
           </a:p>
@@ -7760,6 +7934,927 @@
 <file path=ppt/slides/slide16.xml><?xml version="1.0" encoding="utf-8"?>
 <p:sld xmlns:a="http://schemas.openxmlformats.org/drawingml/2006/main" xmlns:r="http://schemas.openxmlformats.org/officeDocument/2006/relationships" xmlns:p="http://schemas.openxmlformats.org/presentationml/2006/main">
   <p:cSld name="Slide 16">
+    <p:bg>
+      <p:bgPr>
+        <a:solidFill>
+          <a:srgbClr val="FFFFFF"/>
+        </a:solidFill>
+      </p:bgPr>
+    </p:bg>
+    <p:spTree>
+      <p:nvGrpSpPr>
+        <p:cNvPr id="1" name=""/>
+        <p:cNvGrpSpPr/>
+        <p:nvPr/>
+      </p:nvGrpSpPr>
+      <p:grpSpPr>
+        <a:xfrm>
+          <a:off x="0" y="0"/>
+          <a:ext cx="0" cy="0"/>
+          <a:chOff x="0" y="0"/>
+          <a:chExt cx="0" cy="0"/>
+        </a:xfrm>
+      </p:grpSpPr>
+      <p:sp>
+        <p:nvSpPr>
+          <p:cNvPr id="2" name="Shape 0"/>
+          <p:cNvSpPr/>
+          <p:nvPr/>
+        </p:nvSpPr>
+        <p:spPr>
+          <a:xfrm>
+            <a:off x="0" y="0"/>
+            <a:ext cx="109728" cy="5143500"/>
+          </a:xfrm>
+          <a:prstGeom prst="rect">
+            <a:avLst/>
+          </a:prstGeom>
+          <a:solidFill>
+            <a:srgbClr val="B87333"/>
+          </a:solidFill>
+          <a:ln w="12700">
+            <a:solidFill>
+              <a:srgbClr val="B87333"/>
+            </a:solidFill>
+            <a:prstDash val="solid"/>
+          </a:ln>
+        </p:spPr>
+      </p:sp>
+      <p:sp>
+        <p:nvSpPr>
+          <p:cNvPr id="3" name="Text 1"/>
+          <p:cNvSpPr/>
+          <p:nvPr/>
+        </p:nvSpPr>
+        <p:spPr>
+          <a:xfrm>
+            <a:off x="457200" y="256032"/>
+            <a:ext cx="8321040" cy="502920"/>
+          </a:xfrm>
+          <a:prstGeom prst="rect">
+            <a:avLst/>
+          </a:prstGeom>
+          <a:noFill/>
+          <a:ln/>
+        </p:spPr>
+        <p:txBody>
+          <a:bodyPr wrap="square" lIns="0" tIns="0" rIns="0" bIns="0" rtlCol="0" anchor="ctr"/>
+          <a:lstStyle/>
+          <a:p>
+            <a:pPr indent="0" marL="0">
+              <a:buNone/>
+            </a:pPr>
+            <a:r>
+              <a:rPr lang="en-US" sz="3000" b="1" dirty="0">
+                <a:solidFill>
+                  <a:srgbClr val="1E2761"/>
+                </a:solidFill>
+                <a:latin typeface="Calibri" pitchFamily="34" charset="0"/>
+                <a:ea typeface="Calibri" pitchFamily="34" charset="-122"/>
+                <a:cs typeface="Calibri" pitchFamily="34" charset="-120"/>
+              </a:rPr>
+              <a:t>Что улучшать дальше</a:t>
+            </a:r>
+            <a:endParaRPr lang="en-US" sz="3000" dirty="0"/>
+          </a:p>
+        </p:txBody>
+      </p:sp>
+      <p:sp>
+        <p:nvSpPr>
+          <p:cNvPr id="4" name="Text 2"/>
+          <p:cNvSpPr/>
+          <p:nvPr/>
+        </p:nvSpPr>
+        <p:spPr>
+          <a:xfrm>
+            <a:off x="457200" y="777240"/>
+            <a:ext cx="8321040" cy="320040"/>
+          </a:xfrm>
+          <a:prstGeom prst="rect">
+            <a:avLst/>
+          </a:prstGeom>
+          <a:noFill/>
+          <a:ln/>
+        </p:spPr>
+        <p:txBody>
+          <a:bodyPr wrap="square" lIns="0" tIns="0" rIns="0" bIns="0" rtlCol="0" anchor="ctr"/>
+          <a:lstStyle/>
+          <a:p>
+            <a:pPr indent="0" marL="0">
+              <a:buNone/>
+            </a:pPr>
+            <a:r>
+              <a:rPr lang="en-US" sz="1400" i="1" dirty="0">
+                <a:solidFill>
+                  <a:srgbClr val="5A6378"/>
+                </a:solidFill>
+                <a:latin typeface="Calibri" pitchFamily="34" charset="0"/>
+                <a:ea typeface="Calibri" pitchFamily="34" charset="-122"/>
+                <a:cs typeface="Calibri" pitchFamily="34" charset="-120"/>
+              </a:rPr>
+              <a:t>Roadmap на 6-12 месяцев</a:t>
+            </a:r>
+            <a:endParaRPr lang="en-US" sz="1400" dirty="0"/>
+          </a:p>
+        </p:txBody>
+      </p:sp>
+      <p:sp>
+        <p:nvSpPr>
+          <p:cNvPr id="5" name="Shape 3"/>
+          <p:cNvSpPr/>
+          <p:nvPr/>
+        </p:nvSpPr>
+        <p:spPr>
+          <a:xfrm>
+            <a:off x="365760" y="1280160"/>
+            <a:ext cx="2743200" cy="3291840"/>
+          </a:xfrm>
+          <a:prstGeom prst="rect">
+            <a:avLst/>
+          </a:prstGeom>
+          <a:solidFill>
+            <a:srgbClr val="F7F8FB"/>
+          </a:solidFill>
+          <a:ln w="12700">
+            <a:solidFill>
+              <a:srgbClr val="CADCFC"/>
+            </a:solidFill>
+            <a:prstDash val="solid"/>
+          </a:ln>
+        </p:spPr>
+      </p:sp>
+      <p:sp>
+        <p:nvSpPr>
+          <p:cNvPr id="6" name="Shape 4"/>
+          <p:cNvSpPr/>
+          <p:nvPr/>
+        </p:nvSpPr>
+        <p:spPr>
+          <a:xfrm>
+            <a:off x="365760" y="1280160"/>
+            <a:ext cx="2743200" cy="457200"/>
+          </a:xfrm>
+          <a:prstGeom prst="rect">
+            <a:avLst/>
+          </a:prstGeom>
+          <a:solidFill>
+            <a:srgbClr val="0F9D58"/>
+          </a:solidFill>
+          <a:ln w="12700">
+            <a:solidFill>
+              <a:srgbClr val="0F9D58"/>
+            </a:solidFill>
+            <a:prstDash val="solid"/>
+          </a:ln>
+        </p:spPr>
+      </p:sp>
+      <p:sp>
+        <p:nvSpPr>
+          <p:cNvPr id="7" name="Text 5"/>
+          <p:cNvSpPr/>
+          <p:nvPr/>
+        </p:nvSpPr>
+        <p:spPr>
+          <a:xfrm>
+            <a:off x="365760" y="1280160"/>
+            <a:ext cx="2743200" cy="457200"/>
+          </a:xfrm>
+          <a:prstGeom prst="rect">
+            <a:avLst/>
+          </a:prstGeom>
+          <a:noFill/>
+          <a:ln/>
+        </p:spPr>
+        <p:txBody>
+          <a:bodyPr wrap="square" lIns="0" tIns="0" rIns="0" bIns="0" rtlCol="0" anchor="ctr"/>
+          <a:lstStyle/>
+          <a:p>
+            <a:pPr algn="ctr" indent="0" marL="0">
+              <a:buNone/>
+            </a:pPr>
+            <a:r>
+              <a:rPr lang="en-US" sz="1400" b="1" dirty="0">
+                <a:solidFill>
+                  <a:srgbClr val="FFFFFF"/>
+                </a:solidFill>
+                <a:latin typeface="Calibri" pitchFamily="34" charset="0"/>
+                <a:ea typeface="Calibri" pitchFamily="34" charset="-122"/>
+                <a:cs typeface="Calibri" pitchFamily="34" charset="-120"/>
+              </a:rPr>
+              <a:t>✅ СДЕЛАНО в v2</a:t>
+            </a:r>
+            <a:endParaRPr lang="en-US" sz="1400" dirty="0"/>
+          </a:p>
+        </p:txBody>
+      </p:sp>
+      <p:sp>
+        <p:nvSpPr>
+          <p:cNvPr id="8" name="Text 6"/>
+          <p:cNvSpPr/>
+          <p:nvPr/>
+        </p:nvSpPr>
+        <p:spPr>
+          <a:xfrm>
+            <a:off x="548640" y="1874520"/>
+            <a:ext cx="2377440" cy="2606040"/>
+          </a:xfrm>
+          <a:prstGeom prst="rect">
+            <a:avLst/>
+          </a:prstGeom>
+          <a:noFill/>
+          <a:ln/>
+        </p:spPr>
+        <p:txBody>
+          <a:bodyPr wrap="square" lIns="0" tIns="0" rIns="0" bIns="0" rtlCol="0" anchor="t"/>
+          <a:lstStyle/>
+          <a:p>
+            <a:pPr marL="342900" indent="-342900">
+              <a:spcAft>
+                <a:spcPts val="600"/>
+              </a:spcAft>
+              <a:buSzPct val="100000"/>
+              <a:buChar char="■"/>
+            </a:pPr>
+            <a:r>
+              <a:rPr lang="en-US" sz="1050" dirty="0">
+                <a:solidFill>
+                  <a:srgbClr val="242938"/>
+                </a:solidFill>
+                <a:latin typeface="Calibri" pitchFamily="34" charset="0"/>
+                <a:ea typeface="Calibri" pitchFamily="34" charset="-122"/>
+                <a:cs typeface="Calibri" pitchFamily="34" charset="-120"/>
+              </a:rPr>
+              <a:t>Адаптивные веса по режиму Markov</a:t>
+            </a:r>
+            <a:endParaRPr lang="en-US" sz="1050" dirty="0"/>
+          </a:p>
+          <a:p>
+            <a:pPr marL="342900" indent="-342900">
+              <a:spcAft>
+                <a:spcPts val="600"/>
+              </a:spcAft>
+              <a:buSzPct val="100000"/>
+              <a:buChar char="■"/>
+            </a:pPr>
+            <a:r>
+              <a:rPr lang="en-US" sz="1050" dirty="0">
+                <a:solidFill>
+                  <a:srgbClr val="242938"/>
+                </a:solidFill>
+                <a:latin typeface="Calibri" pitchFamily="34" charset="0"/>
+                <a:ea typeface="Calibri" pitchFamily="34" charset="-122"/>
+                <a:cs typeface="Calibri" pitchFamily="34" charset="-120"/>
+              </a:rPr>
+              <a:t>SHAP-объяснение каждого прогноза</a:t>
+            </a:r>
+            <a:endParaRPr lang="en-US" sz="1050" dirty="0"/>
+          </a:p>
+          <a:p>
+            <a:pPr marL="342900" indent="-342900">
+              <a:spcAft>
+                <a:spcPts val="600"/>
+              </a:spcAft>
+              <a:buSzPct val="100000"/>
+              <a:buChar char="■"/>
+            </a:pPr>
+            <a:r>
+              <a:rPr lang="en-US" sz="1050" dirty="0">
+                <a:solidFill>
+                  <a:srgbClr val="242938"/>
+                </a:solidFill>
+                <a:latin typeface="Calibri" pitchFamily="34" charset="0"/>
+                <a:ea typeface="Calibri" pitchFamily="34" charset="-122"/>
+                <a:cs typeface="Calibri" pitchFamily="34" charset="-120"/>
+              </a:rPr>
+              <a:t>Гибрид LME 3M + COMEX, премия как фича</a:t>
+            </a:r>
+            <a:endParaRPr lang="en-US" sz="1050" dirty="0"/>
+          </a:p>
+          <a:p>
+            <a:pPr marL="342900" indent="-342900">
+              <a:spcAft>
+                <a:spcPts val="600"/>
+              </a:spcAft>
+              <a:buSzPct val="100000"/>
+              <a:buChar char="■"/>
+            </a:pPr>
+            <a:r>
+              <a:rPr lang="en-US" sz="1050" dirty="0">
+                <a:solidFill>
+                  <a:srgbClr val="242938"/>
+                </a:solidFill>
+                <a:latin typeface="Calibri" pitchFamily="34" charset="0"/>
+                <a:ea typeface="Calibri" pitchFamily="34" charset="-122"/>
+                <a:cs typeface="Calibri" pitchFamily="34" charset="-120"/>
+              </a:rPr>
+              <a:t>Календарь событий с прогнозами аналитиков</a:t>
+            </a:r>
+            <a:endParaRPr lang="en-US" sz="1050" dirty="0"/>
+          </a:p>
+          <a:p>
+            <a:pPr marL="342900" indent="-342900">
+              <a:spcAft>
+                <a:spcPts val="600"/>
+              </a:spcAft>
+              <a:buSzPct val="100000"/>
+              <a:buChar char="■"/>
+            </a:pPr>
+            <a:r>
+              <a:rPr lang="en-US" sz="1050" dirty="0">
+                <a:solidFill>
+                  <a:srgbClr val="242938"/>
+                </a:solidFill>
+                <a:latin typeface="Calibri" pitchFamily="34" charset="0"/>
+                <a:ea typeface="Calibri" pitchFamily="34" charset="-122"/>
+                <a:cs typeface="Calibri" pitchFamily="34" charset="-120"/>
+              </a:rPr>
+              <a:t>What-if + стресс-тесты + PDF-отчёт</a:t>
+            </a:r>
+            <a:endParaRPr lang="en-US" sz="1050" dirty="0"/>
+          </a:p>
+          <a:p>
+            <a:pPr marL="342900" indent="-342900">
+              <a:spcAft>
+                <a:spcPts val="600"/>
+              </a:spcAft>
+              <a:buSzPct val="100000"/>
+              <a:buChar char="■"/>
+            </a:pPr>
+            <a:r>
+              <a:rPr lang="en-US" sz="1050" dirty="0">
+                <a:solidFill>
+                  <a:srgbClr val="242938"/>
+                </a:solidFill>
+                <a:latin typeface="Calibri" pitchFamily="34" charset="0"/>
+                <a:ea typeface="Calibri" pitchFamily="34" charset="-122"/>
+                <a:cs typeface="Calibri" pitchFamily="34" charset="-120"/>
+              </a:rPr>
+              <a:t>+8 источников: AUD/CLP/CNY, Mining ETFs, VIX</a:t>
+            </a:r>
+            <a:endParaRPr lang="en-US" sz="1050" dirty="0"/>
+          </a:p>
+        </p:txBody>
+      </p:sp>
+      <p:sp>
+        <p:nvSpPr>
+          <p:cNvPr id="9" name="Shape 7"/>
+          <p:cNvSpPr/>
+          <p:nvPr/>
+        </p:nvSpPr>
+        <p:spPr>
+          <a:xfrm>
+            <a:off x="3291840" y="1280160"/>
+            <a:ext cx="2743200" cy="3291840"/>
+          </a:xfrm>
+          <a:prstGeom prst="rect">
+            <a:avLst/>
+          </a:prstGeom>
+          <a:solidFill>
+            <a:srgbClr val="F7F8FB"/>
+          </a:solidFill>
+          <a:ln w="12700">
+            <a:solidFill>
+              <a:srgbClr val="CADCFC"/>
+            </a:solidFill>
+            <a:prstDash val="solid"/>
+          </a:ln>
+        </p:spPr>
+      </p:sp>
+      <p:sp>
+        <p:nvSpPr>
+          <p:cNvPr id="10" name="Shape 8"/>
+          <p:cNvSpPr/>
+          <p:nvPr/>
+        </p:nvSpPr>
+        <p:spPr>
+          <a:xfrm>
+            <a:off x="3291840" y="1280160"/>
+            <a:ext cx="2743200" cy="457200"/>
+          </a:xfrm>
+          <a:prstGeom prst="rect">
+            <a:avLst/>
+          </a:prstGeom>
+          <a:solidFill>
+            <a:srgbClr val="B87333"/>
+          </a:solidFill>
+          <a:ln w="12700">
+            <a:solidFill>
+              <a:srgbClr val="B87333"/>
+            </a:solidFill>
+            <a:prstDash val="solid"/>
+          </a:ln>
+        </p:spPr>
+      </p:sp>
+      <p:sp>
+        <p:nvSpPr>
+          <p:cNvPr id="11" name="Text 9"/>
+          <p:cNvSpPr/>
+          <p:nvPr/>
+        </p:nvSpPr>
+        <p:spPr>
+          <a:xfrm>
+            <a:off x="3291840" y="1280160"/>
+            <a:ext cx="2743200" cy="457200"/>
+          </a:xfrm>
+          <a:prstGeom prst="rect">
+            <a:avLst/>
+          </a:prstGeom>
+          <a:noFill/>
+          <a:ln/>
+        </p:spPr>
+        <p:txBody>
+          <a:bodyPr wrap="square" lIns="0" tIns="0" rIns="0" bIns="0" rtlCol="0" anchor="ctr"/>
+          <a:lstStyle/>
+          <a:p>
+            <a:pPr algn="ctr" indent="0" marL="0">
+              <a:buNone/>
+            </a:pPr>
+            <a:r>
+              <a:rPr lang="en-US" sz="1400" b="1" dirty="0">
+                <a:solidFill>
+                  <a:srgbClr val="FFFFFF"/>
+                </a:solidFill>
+                <a:latin typeface="Calibri" pitchFamily="34" charset="0"/>
+                <a:ea typeface="Calibri" pitchFamily="34" charset="-122"/>
+                <a:cs typeface="Calibri" pitchFamily="34" charset="-120"/>
+              </a:rPr>
+              <a:t>БЛИЖАЙШИЕ 3-6 мес</a:t>
+            </a:r>
+            <a:endParaRPr lang="en-US" sz="1400" dirty="0"/>
+          </a:p>
+        </p:txBody>
+      </p:sp>
+      <p:sp>
+        <p:nvSpPr>
+          <p:cNvPr id="12" name="Text 10"/>
+          <p:cNvSpPr/>
+          <p:nvPr/>
+        </p:nvSpPr>
+        <p:spPr>
+          <a:xfrm>
+            <a:off x="3474720" y="1874520"/>
+            <a:ext cx="2377440" cy="2606040"/>
+          </a:xfrm>
+          <a:prstGeom prst="rect">
+            <a:avLst/>
+          </a:prstGeom>
+          <a:noFill/>
+          <a:ln/>
+        </p:spPr>
+        <p:txBody>
+          <a:bodyPr wrap="square" lIns="0" tIns="0" rIns="0" bIns="0" rtlCol="0" anchor="t"/>
+          <a:lstStyle/>
+          <a:p>
+            <a:pPr marL="342900" indent="-342900">
+              <a:spcAft>
+                <a:spcPts val="600"/>
+              </a:spcAft>
+              <a:buSzPct val="100000"/>
+              <a:buChar char="■"/>
+            </a:pPr>
+            <a:r>
+              <a:rPr lang="en-US" sz="1050" dirty="0">
+                <a:solidFill>
+                  <a:srgbClr val="242938"/>
+                </a:solidFill>
+                <a:latin typeface="Calibri" pitchFamily="34" charset="0"/>
+                <a:ea typeface="Calibri" pitchFamily="34" charset="-122"/>
+                <a:cs typeface="Calibri" pitchFamily="34" charset="-120"/>
+              </a:rPr>
+              <a:t>Накопить историю LME 3M (3-6 мес ежедневных запусков)</a:t>
+            </a:r>
+            <a:endParaRPr lang="en-US" sz="1050" dirty="0"/>
+          </a:p>
+          <a:p>
+            <a:pPr marL="342900" indent="-342900">
+              <a:spcAft>
+                <a:spcPts val="600"/>
+              </a:spcAft>
+              <a:buSzPct val="100000"/>
+              <a:buChar char="■"/>
+            </a:pPr>
+            <a:r>
+              <a:rPr lang="en-US" sz="1050" dirty="0">
+                <a:solidFill>
+                  <a:srgbClr val="242938"/>
+                </a:solidFill>
+                <a:latin typeface="Calibri" pitchFamily="34" charset="0"/>
+                <a:ea typeface="Calibri" pitchFamily="34" charset="-122"/>
+                <a:cs typeface="Calibri" pitchFamily="34" charset="-120"/>
+              </a:rPr>
+              <a:t>FRED API: добавить Caixin PMI, IPI, ставки</a:t>
+            </a:r>
+            <a:endParaRPr lang="en-US" sz="1050" dirty="0"/>
+          </a:p>
+          <a:p>
+            <a:pPr marL="342900" indent="-342900">
+              <a:spcAft>
+                <a:spcPts val="600"/>
+              </a:spcAft>
+              <a:buSzPct val="100000"/>
+              <a:buChar char="■"/>
+            </a:pPr>
+            <a:r>
+              <a:rPr lang="en-US" sz="1050" dirty="0">
+                <a:solidFill>
+                  <a:srgbClr val="242938"/>
+                </a:solidFill>
+                <a:latin typeface="Calibri" pitchFamily="34" charset="0"/>
+                <a:ea typeface="Calibri" pitchFamily="34" charset="-122"/>
+                <a:cs typeface="Calibri" pitchFamily="34" charset="-120"/>
+              </a:rPr>
+              <a:t>ERP-интеграция: привязка прогноза к плану закупок</a:t>
+            </a:r>
+            <a:endParaRPr lang="en-US" sz="1050" dirty="0"/>
+          </a:p>
+          <a:p>
+            <a:pPr marL="342900" indent="-342900">
+              <a:spcAft>
+                <a:spcPts val="600"/>
+              </a:spcAft>
+              <a:buSzPct val="100000"/>
+              <a:buChar char="■"/>
+            </a:pPr>
+            <a:r>
+              <a:rPr lang="en-US" sz="1050" dirty="0">
+                <a:solidFill>
+                  <a:srgbClr val="242938"/>
+                </a:solidFill>
+                <a:latin typeface="Calibri" pitchFamily="34" charset="0"/>
+                <a:ea typeface="Calibri" pitchFamily="34" charset="-122"/>
+                <a:cs typeface="Calibri" pitchFamily="34" charset="-120"/>
+              </a:rPr>
+              <a:t>Прогноз цены в рублях (курс ЦБ + хедж)</a:t>
+            </a:r>
+            <a:endParaRPr lang="en-US" sz="1050" dirty="0"/>
+          </a:p>
+          <a:p>
+            <a:pPr marL="342900" indent="-342900">
+              <a:spcAft>
+                <a:spcPts val="600"/>
+              </a:spcAft>
+              <a:buSzPct val="100000"/>
+              <a:buChar char="■"/>
+            </a:pPr>
+            <a:r>
+              <a:rPr lang="en-US" sz="1050" dirty="0">
+                <a:solidFill>
+                  <a:srgbClr val="242938"/>
+                </a:solidFill>
+                <a:latin typeface="Calibri" pitchFamily="34" charset="0"/>
+                <a:ea typeface="Calibri" pitchFamily="34" charset="-122"/>
+                <a:cs typeface="Calibri" pitchFamily="34" charset="-120"/>
+              </a:rPr>
+              <a:t>Telegram-алерты на смену режима и critical-новости</a:t>
+            </a:r>
+            <a:endParaRPr lang="en-US" sz="1050" dirty="0"/>
+          </a:p>
+        </p:txBody>
+      </p:sp>
+      <p:sp>
+        <p:nvSpPr>
+          <p:cNvPr id="13" name="Shape 11"/>
+          <p:cNvSpPr/>
+          <p:nvPr/>
+        </p:nvSpPr>
+        <p:spPr>
+          <a:xfrm>
+            <a:off x="6217920" y="1280160"/>
+            <a:ext cx="2743200" cy="3291840"/>
+          </a:xfrm>
+          <a:prstGeom prst="rect">
+            <a:avLst/>
+          </a:prstGeom>
+          <a:solidFill>
+            <a:srgbClr val="F7F8FB"/>
+          </a:solidFill>
+          <a:ln w="12700">
+            <a:solidFill>
+              <a:srgbClr val="CADCFC"/>
+            </a:solidFill>
+            <a:prstDash val="solid"/>
+          </a:ln>
+        </p:spPr>
+      </p:sp>
+      <p:sp>
+        <p:nvSpPr>
+          <p:cNvPr id="14" name="Shape 12"/>
+          <p:cNvSpPr/>
+          <p:nvPr/>
+        </p:nvSpPr>
+        <p:spPr>
+          <a:xfrm>
+            <a:off x="6217920" y="1280160"/>
+            <a:ext cx="2743200" cy="457200"/>
+          </a:xfrm>
+          <a:prstGeom prst="rect">
+            <a:avLst/>
+          </a:prstGeom>
+          <a:solidFill>
+            <a:srgbClr val="1E2761"/>
+          </a:solidFill>
+          <a:ln w="12700">
+            <a:solidFill>
+              <a:srgbClr val="1E2761"/>
+            </a:solidFill>
+            <a:prstDash val="solid"/>
+          </a:ln>
+        </p:spPr>
+      </p:sp>
+      <p:sp>
+        <p:nvSpPr>
+          <p:cNvPr id="15" name="Text 13"/>
+          <p:cNvSpPr/>
+          <p:nvPr/>
+        </p:nvSpPr>
+        <p:spPr>
+          <a:xfrm>
+            <a:off x="6217920" y="1280160"/>
+            <a:ext cx="2743200" cy="457200"/>
+          </a:xfrm>
+          <a:prstGeom prst="rect">
+            <a:avLst/>
+          </a:prstGeom>
+          <a:noFill/>
+          <a:ln/>
+        </p:spPr>
+        <p:txBody>
+          <a:bodyPr wrap="square" lIns="0" tIns="0" rIns="0" bIns="0" rtlCol="0" anchor="ctr"/>
+          <a:lstStyle/>
+          <a:p>
+            <a:pPr algn="ctr" indent="0" marL="0">
+              <a:buNone/>
+            </a:pPr>
+            <a:r>
+              <a:rPr lang="en-US" sz="1400" b="1" dirty="0">
+                <a:solidFill>
+                  <a:srgbClr val="FFFFFF"/>
+                </a:solidFill>
+                <a:latin typeface="Calibri" pitchFamily="34" charset="0"/>
+                <a:ea typeface="Calibri" pitchFamily="34" charset="-122"/>
+                <a:cs typeface="Calibri" pitchFamily="34" charset="-120"/>
+              </a:rPr>
+              <a:t>6 → 12 мес</a:t>
+            </a:r>
+            <a:endParaRPr lang="en-US" sz="1400" dirty="0"/>
+          </a:p>
+        </p:txBody>
+      </p:sp>
+      <p:sp>
+        <p:nvSpPr>
+          <p:cNvPr id="16" name="Text 14"/>
+          <p:cNvSpPr/>
+          <p:nvPr/>
+        </p:nvSpPr>
+        <p:spPr>
+          <a:xfrm>
+            <a:off x="6400800" y="1874520"/>
+            <a:ext cx="2377440" cy="2606040"/>
+          </a:xfrm>
+          <a:prstGeom prst="rect">
+            <a:avLst/>
+          </a:prstGeom>
+          <a:noFill/>
+          <a:ln/>
+        </p:spPr>
+        <p:txBody>
+          <a:bodyPr wrap="square" lIns="0" tIns="0" rIns="0" bIns="0" rtlCol="0" anchor="t"/>
+          <a:lstStyle/>
+          <a:p>
+            <a:pPr marL="342900" indent="-342900">
+              <a:spcAft>
+                <a:spcPts val="600"/>
+              </a:spcAft>
+              <a:buSzPct val="100000"/>
+              <a:buChar char="■"/>
+            </a:pPr>
+            <a:r>
+              <a:rPr lang="en-US" sz="1050" dirty="0">
+                <a:solidFill>
+                  <a:srgbClr val="242938"/>
+                </a:solidFill>
+                <a:latin typeface="Calibri" pitchFamily="34" charset="0"/>
+                <a:ea typeface="Calibri" pitchFamily="34" charset="-122"/>
+                <a:cs typeface="Calibri" pitchFamily="34" charset="-120"/>
+              </a:rPr>
+              <a:t>Платные источники: ICSG Bulletin, LMEsource, SMM</a:t>
+            </a:r>
+            <a:endParaRPr lang="en-US" sz="1050" dirty="0"/>
+          </a:p>
+          <a:p>
+            <a:pPr marL="342900" indent="-342900">
+              <a:spcAft>
+                <a:spcPts val="600"/>
+              </a:spcAft>
+              <a:buSzPct val="100000"/>
+              <a:buChar char="■"/>
+            </a:pPr>
+            <a:r>
+              <a:rPr lang="en-US" sz="1050" dirty="0">
+                <a:solidFill>
+                  <a:srgbClr val="242938"/>
+                </a:solidFill>
+                <a:latin typeface="Calibri" pitchFamily="34" charset="0"/>
+                <a:ea typeface="Calibri" pitchFamily="34" charset="-122"/>
+                <a:cs typeface="Calibri" pitchFamily="34" charset="-120"/>
+              </a:rPr>
+              <a:t>Deep models: LSTM, Temporal Fusion Transformer</a:t>
+            </a:r>
+            <a:endParaRPr lang="en-US" sz="1050" dirty="0"/>
+          </a:p>
+          <a:p>
+            <a:pPr marL="342900" indent="-342900">
+              <a:spcAft>
+                <a:spcPts val="600"/>
+              </a:spcAft>
+              <a:buSzPct val="100000"/>
+              <a:buChar char="■"/>
+            </a:pPr>
+            <a:r>
+              <a:rPr lang="en-US" sz="1050" dirty="0">
+                <a:solidFill>
+                  <a:srgbClr val="242938"/>
+                </a:solidFill>
+                <a:latin typeface="Calibri" pitchFamily="34" charset="0"/>
+                <a:ea typeface="Calibri" pitchFamily="34" charset="-122"/>
+                <a:cs typeface="Calibri" pitchFamily="34" charset="-120"/>
+              </a:rPr>
+              <a:t>Event study: автопривязка новостей к движениям</a:t>
+            </a:r>
+            <a:endParaRPr lang="en-US" sz="1050" dirty="0"/>
+          </a:p>
+          <a:p>
+            <a:pPr marL="342900" indent="-342900">
+              <a:spcAft>
+                <a:spcPts val="600"/>
+              </a:spcAft>
+              <a:buSzPct val="100000"/>
+              <a:buChar char="■"/>
+            </a:pPr>
+            <a:r>
+              <a:rPr lang="en-US" sz="1050" dirty="0">
+                <a:solidFill>
+                  <a:srgbClr val="242938"/>
+                </a:solidFill>
+                <a:latin typeface="Calibri" pitchFamily="34" charset="0"/>
+                <a:ea typeface="Calibri" pitchFamily="34" charset="-122"/>
+                <a:cs typeface="Calibri" pitchFamily="34" charset="-120"/>
+              </a:rPr>
+              <a:t>FinBERT для NLP-сентимента (точнее VADER)</a:t>
+            </a:r>
+            <a:endParaRPr lang="en-US" sz="1050" dirty="0"/>
+          </a:p>
+          <a:p>
+            <a:pPr marL="342900" indent="-342900">
+              <a:spcAft>
+                <a:spcPts val="600"/>
+              </a:spcAft>
+              <a:buSzPct val="100000"/>
+              <a:buChar char="■"/>
+            </a:pPr>
+            <a:r>
+              <a:rPr lang="en-US" sz="1050" dirty="0">
+                <a:solidFill>
+                  <a:srgbClr val="242938"/>
+                </a:solidFill>
+                <a:latin typeface="Calibri" pitchFamily="34" charset="0"/>
+                <a:ea typeface="Calibri" pitchFamily="34" charset="-122"/>
+                <a:cs typeface="Calibri" pitchFamily="34" charset="-120"/>
+              </a:rPr>
+              <a:t>Оптимизация портфеля: хедж + спот + контракты</a:t>
+            </a:r>
+            <a:endParaRPr lang="en-US" sz="1050" dirty="0"/>
+          </a:p>
+        </p:txBody>
+      </p:sp>
+      <p:sp>
+        <p:nvSpPr>
+          <p:cNvPr id="17" name="Text 15"/>
+          <p:cNvSpPr/>
+          <p:nvPr/>
+        </p:nvSpPr>
+        <p:spPr>
+          <a:xfrm>
+            <a:off x="457200" y="4617720"/>
+            <a:ext cx="8229600" cy="365760"/>
+          </a:xfrm>
+          <a:prstGeom prst="rect">
+            <a:avLst/>
+          </a:prstGeom>
+          <a:noFill/>
+          <a:ln/>
+        </p:spPr>
+        <p:txBody>
+          <a:bodyPr wrap="square" lIns="0" tIns="0" rIns="0" bIns="0" rtlCol="0" anchor="ctr"/>
+          <a:lstStyle/>
+          <a:p>
+            <a:pPr indent="0" marL="0">
+              <a:buNone/>
+            </a:pPr>
+            <a:r>
+              <a:rPr lang="en-US" sz="1100" i="1" dirty="0">
+                <a:solidFill>
+                  <a:srgbClr val="5A6378"/>
+                </a:solidFill>
+                <a:latin typeface="Calibri" pitchFamily="34" charset="0"/>
+                <a:ea typeface="Calibri" pitchFamily="34" charset="-122"/>
+                <a:cs typeface="Calibri" pitchFamily="34" charset="-120"/>
+              </a:rPr>
+              <a:t>Бюджет: первая фаза — без затрат (опираемся на бесплатные данные). Платные источники — со второй половины года.</a:t>
+            </a:r>
+            <a:endParaRPr lang="en-US" sz="1100" dirty="0"/>
+          </a:p>
+        </p:txBody>
+      </p:sp>
+      <p:sp>
+        <p:nvSpPr>
+          <p:cNvPr id="18" name="Text 16"/>
+          <p:cNvSpPr/>
+          <p:nvPr/>
+        </p:nvSpPr>
+        <p:spPr>
+          <a:xfrm>
+            <a:off x="457200" y="4892040"/>
+            <a:ext cx="4572000" cy="228600"/>
+          </a:xfrm>
+          <a:prstGeom prst="rect">
+            <a:avLst/>
+          </a:prstGeom>
+          <a:noFill/>
+          <a:ln/>
+        </p:spPr>
+        <p:txBody>
+          <a:bodyPr wrap="square" lIns="0" tIns="0" rIns="0" bIns="0" rtlCol="0" anchor="ctr"/>
+          <a:lstStyle/>
+          <a:p>
+            <a:pPr indent="0" marL="0">
+              <a:buNone/>
+            </a:pPr>
+            <a:r>
+              <a:rPr lang="en-US" sz="900" dirty="0">
+                <a:solidFill>
+                  <a:srgbClr val="5A6378"/>
+                </a:solidFill>
+                <a:latin typeface="Calibri" pitchFamily="34" charset="0"/>
+                <a:ea typeface="Calibri" pitchFamily="34" charset="-122"/>
+                <a:cs typeface="Calibri" pitchFamily="34" charset="-120"/>
+              </a:rPr>
+              <a:t>Прогноз цены меди · для руководства</a:t>
+            </a:r>
+            <a:endParaRPr lang="en-US" sz="900" dirty="0"/>
+          </a:p>
+        </p:txBody>
+      </p:sp>
+      <p:sp>
+        <p:nvSpPr>
+          <p:cNvPr id="19" name="Text 17"/>
+          <p:cNvSpPr/>
+          <p:nvPr/>
+        </p:nvSpPr>
+        <p:spPr>
+          <a:xfrm>
+            <a:off x="8229600" y="4892040"/>
+            <a:ext cx="640080" cy="228600"/>
+          </a:xfrm>
+          <a:prstGeom prst="rect">
+            <a:avLst/>
+          </a:prstGeom>
+          <a:noFill/>
+          <a:ln/>
+        </p:spPr>
+        <p:txBody>
+          <a:bodyPr wrap="square" lIns="0" tIns="0" rIns="0" bIns="0" rtlCol="0" anchor="ctr"/>
+          <a:lstStyle/>
+          <a:p>
+            <a:pPr algn="r" indent="0" marL="0">
+              <a:buNone/>
+            </a:pPr>
+            <a:r>
+              <a:rPr lang="en-US" sz="900" dirty="0">
+                <a:solidFill>
+                  <a:srgbClr val="5A6378"/>
+                </a:solidFill>
+                <a:latin typeface="Calibri" pitchFamily="34" charset="0"/>
+                <a:ea typeface="Calibri" pitchFamily="34" charset="-122"/>
+                <a:cs typeface="Calibri" pitchFamily="34" charset="-120"/>
+              </a:rPr>
+              <a:t>16 / 17</a:t>
+            </a:r>
+            <a:endParaRPr lang="en-US" sz="900" dirty="0"/>
+          </a:p>
+        </p:txBody>
+      </p:sp>
+    </p:spTree>
+  </p:cSld>
+  <p:clrMapOvr>
+    <a:masterClrMapping/>
+  </p:clrMapOvr>
+</p:sld>
+</file>
+
+<file path=ppt/slides/slide17.xml><?xml version="1.0" encoding="utf-8"?>
+<p:sld xmlns:a="http://schemas.openxmlformats.org/drawingml/2006/main" xmlns:r="http://schemas.openxmlformats.org/officeDocument/2006/relationships" xmlns:p="http://schemas.openxmlformats.org/presentationml/2006/main">
+  <p:cSld name="Slide 17">
     <p:bg>
       <p:bgPr>
         <a:solidFill>
@@ -8062,7 +9157,7 @@
               <a:buNone/>
             </a:pPr>
             <a:r>
-              <a:rPr lang="en-US" sz="1100" dirty="0">
+              <a:rPr lang="en-US" sz="1000" dirty="0">
                 <a:solidFill>
                   <a:srgbClr val="242938"/>
                 </a:solidFill>
@@ -8070,16 +9165,16 @@
                 <a:ea typeface="Calibri" pitchFamily="34" charset="-122"/>
                 <a:cs typeface="Calibri" pitchFamily="34" charset="-120"/>
               </a:rPr>
-              <a:t>Прогноз на 5 горизонтов + коридоры</a:t>
-            </a:r>
-            <a:endParaRPr lang="en-US" sz="1100" dirty="0"/>
-          </a:p>
-          <a:p>
-            <a:pPr indent="0" marL="0">
-              <a:buNone/>
-            </a:pPr>
-            <a:r>
-              <a:rPr lang="en-US" sz="1100" dirty="0">
+              <a:t>Прогноз на 5 горизонтов + COMEX/LME</a:t>
+            </a:r>
+            <a:endParaRPr lang="en-US" sz="1000" dirty="0"/>
+          </a:p>
+          <a:p>
+            <a:pPr indent="0" marL="0">
+              <a:buNone/>
+            </a:pPr>
+            <a:r>
+              <a:rPr lang="en-US" sz="1000" dirty="0">
                 <a:solidFill>
                   <a:srgbClr val="242938"/>
                 </a:solidFill>
@@ -8087,16 +9182,16 @@
                 <a:ea typeface="Calibri" pitchFamily="34" charset="-122"/>
                 <a:cs typeface="Calibri" pitchFamily="34" charset="-120"/>
               </a:rPr>
-              <a:t>7 групп показателей · 4 модели</a:t>
-            </a:r>
-            <a:endParaRPr lang="en-US" sz="1100" dirty="0"/>
-          </a:p>
-          <a:p>
-            <a:pPr indent="0" marL="0">
-              <a:buNone/>
-            </a:pPr>
-            <a:r>
-              <a:rPr lang="en-US" sz="1100" dirty="0">
+              <a:t>8 групп показателей · 4 модели + адаптивные веса</a:t>
+            </a:r>
+            <a:endParaRPr lang="en-US" sz="1000" dirty="0"/>
+          </a:p>
+          <a:p>
+            <a:pPr indent="0" marL="0">
+              <a:buNone/>
+            </a:pPr>
+            <a:r>
+              <a:rPr lang="en-US" sz="1000" dirty="0">
                 <a:solidFill>
                   <a:srgbClr val="242938"/>
                 </a:solidFill>
@@ -8104,9 +9199,26 @@
                 <a:ea typeface="Calibri" pitchFamily="34" charset="-122"/>
                 <a:cs typeface="Calibri" pitchFamily="34" charset="-120"/>
               </a:rPr>
-              <a:t>Время-слайдер истории · новости · события</a:t>
-            </a:r>
-            <a:endParaRPr lang="en-US" sz="1100" dirty="0"/>
+              <a:t>SHAP-объяснение · What-if · стресс-тесты · PDF</a:t>
+            </a:r>
+            <a:endParaRPr lang="en-US" sz="1000" dirty="0"/>
+          </a:p>
+          <a:p>
+            <a:pPr indent="0" marL="0">
+              <a:buNone/>
+            </a:pPr>
+            <a:r>
+              <a:rPr lang="en-US" sz="1000" dirty="0">
+                <a:solidFill>
+                  <a:srgbClr val="242938"/>
+                </a:solidFill>
+                <a:latin typeface="Calibri" pitchFamily="34" charset="0"/>
+                <a:ea typeface="Calibri" pitchFamily="34" charset="-122"/>
+                <a:cs typeface="Calibri" pitchFamily="34" charset="-120"/>
+              </a:rPr>
+              <a:t>Календарь событий с консенсусом аналитиков</a:t>
+            </a:r>
+            <a:endParaRPr lang="en-US" sz="1000" dirty="0"/>
           </a:p>
         </p:txBody>
       </p:sp>
@@ -8710,7 +9822,7 @@
                 <a:ea typeface="Calibri" pitchFamily="34" charset="-122"/>
                 <a:cs typeface="Calibri" pitchFamily="34" charset="-120"/>
               </a:rPr>
-              <a:t>Какие показатели используем</a:t>
+              <a:t>8 групп показателей</a:t>
             </a:r>
             <a:endParaRPr lang="en-US" sz="1500" dirty="0"/>
           </a:p>
@@ -8749,7 +9861,7 @@
                 <a:ea typeface="Calibri" pitchFamily="34" charset="-122"/>
                 <a:cs typeface="Calibri" pitchFamily="34" charset="-120"/>
               </a:rPr>
-              <a:t>7 групп факторов, веса каждого, почему именно они</a:t>
+              <a:t>Цена, валюты, COT, LME, Mining ETFs, новости, события</a:t>
             </a:r>
             <a:endParaRPr lang="en-US" sz="1100" dirty="0"/>
           </a:p>
@@ -8877,7 +9989,7 @@
                 <a:ea typeface="Calibri" pitchFamily="34" charset="-122"/>
                 <a:cs typeface="Calibri" pitchFamily="34" charset="-120"/>
               </a:rPr>
-              <a:t>Как считается прогноз</a:t>
+              <a:t>4 модели + адаптивные веса</a:t>
             </a:r>
             <a:endParaRPr lang="en-US" sz="1500" dirty="0"/>
           </a:p>
@@ -8916,7 +10028,7 @@
                 <a:ea typeface="Calibri" pitchFamily="34" charset="-122"/>
                 <a:cs typeface="Calibri" pitchFamily="34" charset="-120"/>
               </a:rPr>
-              <a:t>4 «головы» модели — каждая считает по-своему</a:t>
+              <a:t>Веса автоматически меняются в шоках</a:t>
             </a:r>
             <a:endParaRPr lang="en-US" sz="1100" dirty="0"/>
           </a:p>
@@ -9044,7 +10156,7 @@
                 <a:ea typeface="Calibri" pitchFamily="34" charset="-122"/>
                 <a:cs typeface="Calibri" pitchFamily="34" charset="-120"/>
               </a:rPr>
-              <a:t>Где модель сильная, где слабая</a:t>
+              <a:t>Инструменты эксперта (новое v2)</a:t>
             </a:r>
             <a:endParaRPr lang="en-US" sz="1500" dirty="0"/>
           </a:p>
@@ -9083,7 +10195,7 @@
                 <a:ea typeface="Calibri" pitchFamily="34" charset="-122"/>
                 <a:cs typeface="Calibri" pitchFamily="34" charset="-120"/>
               </a:rPr>
-              <a:t>Что система видит и чего точно не видит</a:t>
+              <a:t>SHAP, What-if, стресс-тесты, PDF-отчёт</a:t>
             </a:r>
             <a:endParaRPr lang="en-US" sz="1100" dirty="0"/>
           </a:p>
@@ -9378,7 +10490,7 @@
                 <a:ea typeface="Calibri" pitchFamily="34" charset="-122"/>
                 <a:cs typeface="Calibri" pitchFamily="34" charset="-120"/>
               </a:rPr>
-              <a:t>Что улучшать дальше</a:t>
+              <a:t>Что сделано и что улучшать</a:t>
             </a:r>
             <a:endParaRPr lang="en-US" sz="1500" dirty="0"/>
           </a:p>
@@ -9417,7 +10529,7 @@
                 <a:ea typeface="Calibri" pitchFamily="34" charset="-122"/>
                 <a:cs typeface="Calibri" pitchFamily="34" charset="-120"/>
               </a:rPr>
-              <a:t>План развития на 6-12 месяцев</a:t>
+              <a:t>Roadmap: v2 готов, дальше — ERP, рубли, alerts</a:t>
             </a:r>
             <a:endParaRPr lang="en-US" sz="1100" dirty="0"/>
           </a:p>
@@ -9495,7 +10607,7 @@
                 <a:ea typeface="Calibri" pitchFamily="34" charset="-122"/>
                 <a:cs typeface="Calibri" pitchFamily="34" charset="-120"/>
               </a:rPr>
-              <a:t>2 / 16</a:t>
+              <a:t>2 / 17</a:t>
             </a:r>
             <a:endParaRPr lang="en-US" sz="900" dirty="0"/>
           </a:p>
@@ -10435,7 +11547,7 @@
                 <a:ea typeface="Calibri" pitchFamily="34" charset="-122"/>
                 <a:cs typeface="Calibri" pitchFamily="34" charset="-120"/>
               </a:rPr>
-              <a:t>3 / 16</a:t>
+              <a:t>3 / 17</a:t>
             </a:r>
             <a:endParaRPr lang="en-US" sz="900" dirty="0"/>
           </a:p>
@@ -10570,7 +11682,7 @@
                 <a:ea typeface="Calibri" pitchFamily="34" charset="-122"/>
                 <a:cs typeface="Calibri" pitchFamily="34" charset="-120"/>
               </a:rPr>
-              <a:t>7 групп. Каждая отвечает за свой класс сигналов</a:t>
+              <a:t>8 групп. Каждая отвечает за свой класс сигналов</a:t>
             </a:r>
             <a:endParaRPr lang="en-US" sz="1400" dirty="0"/>
           </a:p>
@@ -10698,7 +11810,7 @@
                 <a:ea typeface="Calibri" pitchFamily="34" charset="-122"/>
                 <a:cs typeface="Calibri" pitchFamily="34" charset="-120"/>
               </a:rPr>
-              <a:t>40 %</a:t>
+              <a:t>35 %</a:t>
             </a:r>
             <a:endParaRPr lang="en-US" sz="1600" dirty="0"/>
           </a:p>
@@ -10943,7 +12055,7 @@
                 <a:ea typeface="Calibri" pitchFamily="34" charset="-122"/>
                 <a:cs typeface="Calibri" pitchFamily="34" charset="-120"/>
               </a:rPr>
-              <a:t>Доллар (DXY)</a:t>
+              <a:t>Доллар + валюты</a:t>
             </a:r>
             <a:endParaRPr lang="en-US" sz="1300" dirty="0"/>
           </a:p>
@@ -10982,7 +12094,7 @@
                 <a:ea typeface="Calibri" pitchFamily="34" charset="-122"/>
                 <a:cs typeface="Calibri" pitchFamily="34" charset="-120"/>
               </a:rPr>
-              <a:t>Обратная связь с медью</a:t>
+              <a:t>DXY, AUD, CLP, CNY</a:t>
             </a:r>
             <a:endParaRPr lang="en-US" sz="1000" dirty="0"/>
           </a:p>
@@ -11028,11 +12140,11 @@
             <a:avLst/>
           </a:prstGeom>
           <a:solidFill>
-            <a:srgbClr val="1E2761"/>
+            <a:srgbClr val="B87333"/>
           </a:solidFill>
           <a:ln w="12700">
             <a:solidFill>
-              <a:srgbClr val="1E2761"/>
+              <a:srgbClr val="B87333"/>
             </a:solidFill>
             <a:prstDash val="solid"/>
           </a:ln>
@@ -11065,7 +12177,7 @@
             <a:r>
               <a:rPr lang="en-US" sz="2400" b="1" dirty="0">
                 <a:solidFill>
-                  <a:srgbClr val="1E2761"/>
+                  <a:srgbClr val="B87333"/>
                 </a:solidFill>
                 <a:latin typeface="Calibri" pitchFamily="34" charset="0"/>
                 <a:ea typeface="Calibri" pitchFamily="34" charset="-122"/>
@@ -11104,7 +12216,7 @@
             <a:r>
               <a:rPr lang="en-US" sz="1600" b="1" dirty="0">
                 <a:solidFill>
-                  <a:srgbClr val="1E2761"/>
+                  <a:srgbClr val="B87333"/>
                 </a:solidFill>
                 <a:latin typeface="Calibri" pitchFamily="34" charset="0"/>
                 <a:ea typeface="Calibri" pitchFamily="34" charset="-122"/>
@@ -11149,7 +12261,7 @@
                 <a:ea typeface="Calibri" pitchFamily="34" charset="-122"/>
                 <a:cs typeface="Calibri" pitchFamily="34" charset="-120"/>
               </a:rPr>
-              <a:t>Связанные товары</a:t>
+              <a:t>Mining ETFs + риск</a:t>
             </a:r>
             <a:endParaRPr lang="en-US" sz="1300" dirty="0"/>
           </a:p>
@@ -11188,7 +12300,7 @@
                 <a:ea typeface="Calibri" pitchFamily="34" charset="-122"/>
                 <a:cs typeface="Calibri" pitchFamily="34" charset="-120"/>
               </a:rPr>
-              <a:t>Нефть, золото, серебро</a:t>
+              <a:t>COPX, PICK, VIX</a:t>
             </a:r>
             <a:endParaRPr lang="en-US" sz="1000" dirty="0"/>
           </a:p>
@@ -11316,7 +12428,7 @@
                 <a:ea typeface="Calibri" pitchFamily="34" charset="-122"/>
                 <a:cs typeface="Calibri" pitchFamily="34" charset="-120"/>
               </a:rPr>
-              <a:t>15 %</a:t>
+              <a:t>13 %</a:t>
             </a:r>
             <a:endParaRPr lang="en-US" sz="1600" dirty="0"/>
           </a:p>
@@ -11408,7 +12520,7 @@
         </p:nvSpPr>
         <p:spPr>
           <a:xfrm>
-            <a:off x="365760" y="2743200"/>
+            <a:off x="365760" y="2697480"/>
             <a:ext cx="2057400" cy="1280160"/>
           </a:xfrm>
           <a:prstGeom prst="rect">
@@ -11433,7 +12545,7 @@
         </p:nvSpPr>
         <p:spPr>
           <a:xfrm>
-            <a:off x="365760" y="2743200"/>
+            <a:off x="365760" y="2697480"/>
             <a:ext cx="64008" cy="1280160"/>
           </a:xfrm>
           <a:prstGeom prst="rect">
@@ -11458,7 +12570,7 @@
         </p:nvSpPr>
         <p:spPr>
           <a:xfrm>
-            <a:off x="502920" y="2834640"/>
+            <a:off x="502920" y="2788920"/>
             <a:ext cx="457200" cy="365760"/>
           </a:xfrm>
           <a:prstGeom prst="rect">
@@ -11497,7 +12609,7 @@
         </p:nvSpPr>
         <p:spPr>
           <a:xfrm>
-            <a:off x="1463040" y="2834640"/>
+            <a:off x="1463040" y="2788920"/>
             <a:ext cx="868680" cy="365760"/>
           </a:xfrm>
           <a:prstGeom prst="rect">
@@ -11522,7 +12634,7 @@
                 <a:ea typeface="Calibri" pitchFamily="34" charset="-122"/>
                 <a:cs typeface="Calibri" pitchFamily="34" charset="-120"/>
               </a:rPr>
-              <a:t>8 %</a:t>
+              <a:t>10 %</a:t>
             </a:r>
             <a:endParaRPr lang="en-US" sz="1600" dirty="0"/>
           </a:p>
@@ -11536,7 +12648,7 @@
         </p:nvSpPr>
         <p:spPr>
           <a:xfrm>
-            <a:off x="502920" y="3246120"/>
+            <a:off x="502920" y="3200400"/>
             <a:ext cx="1828800" cy="411480"/>
           </a:xfrm>
           <a:prstGeom prst="rect">
@@ -11561,7 +12673,7 @@
                 <a:ea typeface="Calibri" pitchFamily="34" charset="-122"/>
                 <a:cs typeface="Calibri" pitchFamily="34" charset="-120"/>
               </a:rPr>
-              <a:t>Запасы LME</a:t>
+              <a:t>LME 3M + запасы</a:t>
             </a:r>
             <a:endParaRPr lang="en-US" sz="1300" dirty="0"/>
           </a:p>
@@ -11575,7 +12687,7 @@
         </p:nvSpPr>
         <p:spPr>
           <a:xfrm>
-            <a:off x="502920" y="3657600"/>
+            <a:off x="502920" y="3611880"/>
             <a:ext cx="1828800" cy="320040"/>
           </a:xfrm>
           <a:prstGeom prst="rect">
@@ -11600,7 +12712,7 @@
                 <a:ea typeface="Calibri" pitchFamily="34" charset="-122"/>
                 <a:cs typeface="Calibri" pitchFamily="34" charset="-120"/>
               </a:rPr>
-              <a:t>Физический баланс</a:t>
+              <a:t>Глобальный baseline</a:t>
             </a:r>
             <a:endParaRPr lang="en-US" sz="1000" dirty="0"/>
           </a:p>
@@ -11614,7 +12726,7 @@
         </p:nvSpPr>
         <p:spPr>
           <a:xfrm>
-            <a:off x="2560320" y="2743200"/>
+            <a:off x="2560320" y="2697480"/>
             <a:ext cx="2057400" cy="1280160"/>
           </a:xfrm>
           <a:prstGeom prst="rect">
@@ -11639,7 +12751,213 @@
         </p:nvSpPr>
         <p:spPr>
           <a:xfrm>
-            <a:off x="2560320" y="2743200"/>
+            <a:off x="2560320" y="2697480"/>
+            <a:ext cx="64008" cy="1280160"/>
+          </a:xfrm>
+          <a:prstGeom prst="rect">
+            <a:avLst/>
+          </a:prstGeom>
+          <a:solidFill>
+            <a:srgbClr val="1E2761"/>
+          </a:solidFill>
+          <a:ln w="12700">
+            <a:solidFill>
+              <a:srgbClr val="1E2761"/>
+            </a:solidFill>
+            <a:prstDash val="solid"/>
+          </a:ln>
+        </p:spPr>
+      </p:sp>
+      <p:sp>
+        <p:nvSpPr>
+          <p:cNvPr id="37" name="Text 35"/>
+          <p:cNvSpPr/>
+          <p:nvPr/>
+        </p:nvSpPr>
+        <p:spPr>
+          <a:xfrm>
+            <a:off x="2697480" y="2788920"/>
+            <a:ext cx="457200" cy="365760"/>
+          </a:xfrm>
+          <a:prstGeom prst="rect">
+            <a:avLst/>
+          </a:prstGeom>
+          <a:noFill/>
+          <a:ln/>
+        </p:spPr>
+        <p:txBody>
+          <a:bodyPr wrap="square" lIns="0" tIns="0" rIns="0" bIns="0" rtlCol="0" anchor="ctr"/>
+          <a:lstStyle/>
+          <a:p>
+            <a:pPr indent="0" marL="0">
+              <a:buNone/>
+            </a:pPr>
+            <a:r>
+              <a:rPr lang="en-US" sz="2400" b="1" dirty="0">
+                <a:solidFill>
+                  <a:srgbClr val="1E2761"/>
+                </a:solidFill>
+                <a:latin typeface="Calibri" pitchFamily="34" charset="0"/>
+                <a:ea typeface="Calibri" pitchFamily="34" charset="-122"/>
+                <a:cs typeface="Calibri" pitchFamily="34" charset="-120"/>
+              </a:rPr>
+              <a:t>⑥</a:t>
+            </a:r>
+            <a:endParaRPr lang="en-US" sz="2400" dirty="0"/>
+          </a:p>
+        </p:txBody>
+      </p:sp>
+      <p:sp>
+        <p:nvSpPr>
+          <p:cNvPr id="38" name="Text 36"/>
+          <p:cNvSpPr/>
+          <p:nvPr/>
+        </p:nvSpPr>
+        <p:spPr>
+          <a:xfrm>
+            <a:off x="3657600" y="2788920"/>
+            <a:ext cx="868680" cy="365760"/>
+          </a:xfrm>
+          <a:prstGeom prst="rect">
+            <a:avLst/>
+          </a:prstGeom>
+          <a:noFill/>
+          <a:ln/>
+        </p:spPr>
+        <p:txBody>
+          <a:bodyPr wrap="square" lIns="0" tIns="0" rIns="0" bIns="0" rtlCol="0" anchor="ctr"/>
+          <a:lstStyle/>
+          <a:p>
+            <a:pPr algn="r" indent="0" marL="0">
+              <a:buNone/>
+            </a:pPr>
+            <a:r>
+              <a:rPr lang="en-US" sz="1600" b="1" dirty="0">
+                <a:solidFill>
+                  <a:srgbClr val="1E2761"/>
+                </a:solidFill>
+                <a:latin typeface="Calibri" pitchFamily="34" charset="0"/>
+                <a:ea typeface="Calibri" pitchFamily="34" charset="-122"/>
+                <a:cs typeface="Calibri" pitchFamily="34" charset="-120"/>
+              </a:rPr>
+              <a:t>8 %</a:t>
+            </a:r>
+            <a:endParaRPr lang="en-US" sz="1600" dirty="0"/>
+          </a:p>
+        </p:txBody>
+      </p:sp>
+      <p:sp>
+        <p:nvSpPr>
+          <p:cNvPr id="39" name="Text 37"/>
+          <p:cNvSpPr/>
+          <p:nvPr/>
+        </p:nvSpPr>
+        <p:spPr>
+          <a:xfrm>
+            <a:off x="2697480" y="3200400"/>
+            <a:ext cx="1828800" cy="411480"/>
+          </a:xfrm>
+          <a:prstGeom prst="rect">
+            <a:avLst/>
+          </a:prstGeom>
+          <a:noFill/>
+          <a:ln/>
+        </p:spPr>
+        <p:txBody>
+          <a:bodyPr wrap="square" lIns="0" tIns="0" rIns="0" bIns="0" rtlCol="0" anchor="ctr"/>
+          <a:lstStyle/>
+          <a:p>
+            <a:pPr indent="0" marL="0">
+              <a:buNone/>
+            </a:pPr>
+            <a:r>
+              <a:rPr lang="en-US" sz="1300" b="1" dirty="0">
+                <a:solidFill>
+                  <a:srgbClr val="1E2761"/>
+                </a:solidFill>
+                <a:latin typeface="Calibri" pitchFamily="34" charset="0"/>
+                <a:ea typeface="Calibri" pitchFamily="34" charset="-122"/>
+                <a:cs typeface="Calibri" pitchFamily="34" charset="-120"/>
+              </a:rPr>
+              <a:t>Связанные товары</a:t>
+            </a:r>
+            <a:endParaRPr lang="en-US" sz="1300" dirty="0"/>
+          </a:p>
+        </p:txBody>
+      </p:sp>
+      <p:sp>
+        <p:nvSpPr>
+          <p:cNvPr id="40" name="Text 38"/>
+          <p:cNvSpPr/>
+          <p:nvPr/>
+        </p:nvSpPr>
+        <p:spPr>
+          <a:xfrm>
+            <a:off x="2697480" y="3611880"/>
+            <a:ext cx="1828800" cy="320040"/>
+          </a:xfrm>
+          <a:prstGeom prst="rect">
+            <a:avLst/>
+          </a:prstGeom>
+          <a:noFill/>
+          <a:ln/>
+        </p:spPr>
+        <p:txBody>
+          <a:bodyPr wrap="square" lIns="0" tIns="0" rIns="0" bIns="0" rtlCol="0" anchor="ctr"/>
+          <a:lstStyle/>
+          <a:p>
+            <a:pPr indent="0" marL="0">
+              <a:buNone/>
+            </a:pPr>
+            <a:r>
+              <a:rPr lang="en-US" sz="1000" i="1" dirty="0">
+                <a:solidFill>
+                  <a:srgbClr val="5A6378"/>
+                </a:solidFill>
+                <a:latin typeface="Calibri" pitchFamily="34" charset="0"/>
+                <a:ea typeface="Calibri" pitchFamily="34" charset="-122"/>
+                <a:cs typeface="Calibri" pitchFamily="34" charset="-120"/>
+              </a:rPr>
+              <a:t>Нефть, золото, серебро</a:t>
+            </a:r>
+            <a:endParaRPr lang="en-US" sz="1000" dirty="0"/>
+          </a:p>
+        </p:txBody>
+      </p:sp>
+      <p:sp>
+        <p:nvSpPr>
+          <p:cNvPr id="41" name="Shape 39"/>
+          <p:cNvSpPr/>
+          <p:nvPr/>
+        </p:nvSpPr>
+        <p:spPr>
+          <a:xfrm>
+            <a:off x="4754880" y="2697480"/>
+            <a:ext cx="2057400" cy="1280160"/>
+          </a:xfrm>
+          <a:prstGeom prst="rect">
+            <a:avLst/>
+          </a:prstGeom>
+          <a:solidFill>
+            <a:srgbClr val="F7F8FB"/>
+          </a:solidFill>
+          <a:ln w="12700">
+            <a:solidFill>
+              <a:srgbClr val="CADCFC"/>
+            </a:solidFill>
+            <a:prstDash val="solid"/>
+          </a:ln>
+        </p:spPr>
+      </p:sp>
+      <p:sp>
+        <p:nvSpPr>
+          <p:cNvPr id="42" name="Shape 40"/>
+          <p:cNvSpPr/>
+          <p:nvPr/>
+        </p:nvSpPr>
+        <p:spPr>
+          <a:xfrm>
+            <a:off x="4754880" y="2697480"/>
             <a:ext cx="64008" cy="1280160"/>
           </a:xfrm>
           <a:prstGeom prst="rect">
@@ -11658,13 +12976,13 @@
       </p:sp>
       <p:sp>
         <p:nvSpPr>
-          <p:cNvPr id="37" name="Text 35"/>
-          <p:cNvSpPr/>
-          <p:nvPr/>
-        </p:nvSpPr>
-        <p:spPr>
-          <a:xfrm>
-            <a:off x="2697480" y="2834640"/>
+          <p:cNvPr id="43" name="Text 41"/>
+          <p:cNvSpPr/>
+          <p:nvPr/>
+        </p:nvSpPr>
+        <p:spPr>
+          <a:xfrm>
+            <a:off x="4892040" y="2788920"/>
             <a:ext cx="457200" cy="365760"/>
           </a:xfrm>
           <a:prstGeom prst="rect">
@@ -11689,7 +13007,7 @@
                 <a:ea typeface="Calibri" pitchFamily="34" charset="-122"/>
                 <a:cs typeface="Calibri" pitchFamily="34" charset="-120"/>
               </a:rPr>
-              <a:t>⑥</a:t>
+              <a:t>⑦</a:t>
             </a:r>
             <a:endParaRPr lang="en-US" sz="2400" dirty="0"/>
           </a:p>
@@ -11697,13 +13015,13 @@
       </p:sp>
       <p:sp>
         <p:nvSpPr>
-          <p:cNvPr id="38" name="Text 36"/>
-          <p:cNvSpPr/>
-          <p:nvPr/>
-        </p:nvSpPr>
-        <p:spPr>
-          <a:xfrm>
-            <a:off x="3657600" y="2834640"/>
+          <p:cNvPr id="44" name="Text 42"/>
+          <p:cNvSpPr/>
+          <p:nvPr/>
+        </p:nvSpPr>
+        <p:spPr>
+          <a:xfrm>
+            <a:off x="5852160" y="2788920"/>
             <a:ext cx="868680" cy="365760"/>
           </a:xfrm>
           <a:prstGeom prst="rect">
@@ -11728,7 +13046,7 @@
                 <a:ea typeface="Calibri" pitchFamily="34" charset="-122"/>
                 <a:cs typeface="Calibri" pitchFamily="34" charset="-120"/>
               </a:rPr>
-              <a:t>10 %</a:t>
+              <a:t>7 %</a:t>
             </a:r>
             <a:endParaRPr lang="en-US" sz="1600" dirty="0"/>
           </a:p>
@@ -11736,13 +13054,13 @@
       </p:sp>
       <p:sp>
         <p:nvSpPr>
-          <p:cNvPr id="39" name="Text 37"/>
-          <p:cNvSpPr/>
-          <p:nvPr/>
-        </p:nvSpPr>
-        <p:spPr>
-          <a:xfrm>
-            <a:off x="2697480" y="3246120"/>
+          <p:cNvPr id="45" name="Text 43"/>
+          <p:cNvSpPr/>
+          <p:nvPr/>
+        </p:nvSpPr>
+        <p:spPr>
+          <a:xfrm>
+            <a:off x="4892040" y="3200400"/>
             <a:ext cx="1828800" cy="411480"/>
           </a:xfrm>
           <a:prstGeom prst="rect">
@@ -11775,13 +13093,13 @@
       </p:sp>
       <p:sp>
         <p:nvSpPr>
-          <p:cNvPr id="40" name="Text 38"/>
-          <p:cNvSpPr/>
-          <p:nvPr/>
-        </p:nvSpPr>
-        <p:spPr>
-          <a:xfrm>
-            <a:off x="2697480" y="3657600"/>
+          <p:cNvPr id="46" name="Text 44"/>
+          <p:cNvSpPr/>
+          <p:nvPr/>
+        </p:nvSpPr>
+        <p:spPr>
+          <a:xfrm>
+            <a:off x="4892040" y="3611880"/>
             <a:ext cx="1828800" cy="320040"/>
           </a:xfrm>
           <a:prstGeom prst="rect">
@@ -11806,7 +13124,7 @@
                 <a:ea typeface="Calibri" pitchFamily="34" charset="-122"/>
                 <a:cs typeface="Calibri" pitchFamily="34" charset="-120"/>
               </a:rPr>
-              <a:t>Состояние тренда</a:t>
+              <a:t>RSI/MACD/ATR</a:t>
             </a:r>
             <a:endParaRPr lang="en-US" sz="1000" dirty="0"/>
           </a:p>
@@ -11814,13 +13132,13 @@
       </p:sp>
       <p:sp>
         <p:nvSpPr>
-          <p:cNvPr id="41" name="Shape 39"/>
-          <p:cNvSpPr/>
-          <p:nvPr/>
-        </p:nvSpPr>
-        <p:spPr>
-          <a:xfrm>
-            <a:off x="4754880" y="2743200"/>
+          <p:cNvPr id="47" name="Shape 45"/>
+          <p:cNvSpPr/>
+          <p:nvPr/>
+        </p:nvSpPr>
+        <p:spPr>
+          <a:xfrm>
+            <a:off x="6949440" y="2697480"/>
             <a:ext cx="2057400" cy="1280160"/>
           </a:xfrm>
           <a:prstGeom prst="rect">
@@ -11839,13 +13157,13 @@
       </p:sp>
       <p:sp>
         <p:nvSpPr>
-          <p:cNvPr id="42" name="Shape 40"/>
-          <p:cNvSpPr/>
-          <p:nvPr/>
-        </p:nvSpPr>
-        <p:spPr>
-          <a:xfrm>
-            <a:off x="4754880" y="2743200"/>
+          <p:cNvPr id="48" name="Shape 46"/>
+          <p:cNvSpPr/>
+          <p:nvPr/>
+        </p:nvSpPr>
+        <p:spPr>
+          <a:xfrm>
+            <a:off x="6949440" y="2697480"/>
             <a:ext cx="64008" cy="1280160"/>
           </a:xfrm>
           <a:prstGeom prst="rect">
@@ -11864,13 +13182,13 @@
       </p:sp>
       <p:sp>
         <p:nvSpPr>
-          <p:cNvPr id="43" name="Text 41"/>
-          <p:cNvSpPr/>
-          <p:nvPr/>
-        </p:nvSpPr>
-        <p:spPr>
-          <a:xfrm>
-            <a:off x="4892040" y="2834640"/>
+          <p:cNvPr id="49" name="Text 47"/>
+          <p:cNvSpPr/>
+          <p:nvPr/>
+        </p:nvSpPr>
+        <p:spPr>
+          <a:xfrm>
+            <a:off x="7086600" y="2788920"/>
             <a:ext cx="457200" cy="365760"/>
           </a:xfrm>
           <a:prstGeom prst="rect">
@@ -11895,7 +13213,7 @@
                 <a:ea typeface="Calibri" pitchFamily="34" charset="-122"/>
                 <a:cs typeface="Calibri" pitchFamily="34" charset="-120"/>
               </a:rPr>
-              <a:t>⑦</a:t>
+              <a:t>⑧</a:t>
             </a:r>
             <a:endParaRPr lang="en-US" sz="2400" dirty="0"/>
           </a:p>
@@ -11903,13 +13221,13 @@
       </p:sp>
       <p:sp>
         <p:nvSpPr>
-          <p:cNvPr id="44" name="Text 42"/>
-          <p:cNvSpPr/>
-          <p:nvPr/>
-        </p:nvSpPr>
-        <p:spPr>
-          <a:xfrm>
-            <a:off x="5852160" y="2834640"/>
+          <p:cNvPr id="50" name="Text 48"/>
+          <p:cNvSpPr/>
+          <p:nvPr/>
+        </p:nvSpPr>
+        <p:spPr>
+          <a:xfrm>
+            <a:off x="8046720" y="2788920"/>
             <a:ext cx="868680" cy="365760"/>
           </a:xfrm>
           <a:prstGeom prst="rect">
@@ -11942,13 +13260,13 @@
       </p:sp>
       <p:sp>
         <p:nvSpPr>
-          <p:cNvPr id="45" name="Text 43"/>
-          <p:cNvSpPr/>
-          <p:nvPr/>
-        </p:nvSpPr>
-        <p:spPr>
-          <a:xfrm>
-            <a:off x="4892040" y="3246120"/>
+          <p:cNvPr id="51" name="Text 49"/>
+          <p:cNvSpPr/>
+          <p:nvPr/>
+        </p:nvSpPr>
+        <p:spPr>
+          <a:xfrm>
+            <a:off x="7086600" y="3200400"/>
             <a:ext cx="1828800" cy="411480"/>
           </a:xfrm>
           <a:prstGeom prst="rect">
@@ -11973,7 +13291,7 @@
                 <a:ea typeface="Calibri" pitchFamily="34" charset="-122"/>
                 <a:cs typeface="Calibri" pitchFamily="34" charset="-120"/>
               </a:rPr>
-              <a:t>Календарь и режим рынка</a:t>
+              <a:t>Новости + сентимент</a:t>
             </a:r>
             <a:endParaRPr lang="en-US" sz="1300" dirty="0"/>
           </a:p>
@@ -11981,13 +13299,13 @@
       </p:sp>
       <p:sp>
         <p:nvSpPr>
-          <p:cNvPr id="46" name="Text 44"/>
-          <p:cNvSpPr/>
-          <p:nvPr/>
-        </p:nvSpPr>
-        <p:spPr>
-          <a:xfrm>
-            <a:off x="4892040" y="3657600"/>
+          <p:cNvPr id="52" name="Text 50"/>
+          <p:cNvSpPr/>
+          <p:nvPr/>
+        </p:nvSpPr>
+        <p:spPr>
+          <a:xfrm>
+            <a:off x="7086600" y="3611880"/>
             <a:ext cx="1828800" cy="320040"/>
           </a:xfrm>
           <a:prstGeom prst="rect">
@@ -12012,7 +13330,7 @@
                 <a:ea typeface="Calibri" pitchFamily="34" charset="-122"/>
                 <a:cs typeface="Calibri" pitchFamily="34" charset="-120"/>
               </a:rPr>
-              <a:t>Контекст времени</a:t>
+              <a:t>VADER + правила</a:t>
             </a:r>
             <a:endParaRPr lang="en-US" sz="1000" dirty="0"/>
           </a:p>
@@ -12020,7 +13338,7 @@
       </p:sp>
       <p:sp>
         <p:nvSpPr>
-          <p:cNvPr id="47" name="Text 45"/>
+          <p:cNvPr id="53" name="Text 51"/>
           <p:cNvSpPr/>
           <p:nvPr/>
         </p:nvSpPr>
@@ -12059,7 +13377,7 @@
       </p:sp>
       <p:sp>
         <p:nvSpPr>
-          <p:cNvPr id="48" name="Text 46"/>
+          <p:cNvPr id="54" name="Text 52"/>
           <p:cNvSpPr/>
           <p:nvPr/>
         </p:nvSpPr>
@@ -12098,7 +13416,7 @@
       </p:sp>
       <p:sp>
         <p:nvSpPr>
-          <p:cNvPr id="49" name="Text 47"/>
+          <p:cNvPr id="55" name="Text 53"/>
           <p:cNvSpPr/>
           <p:nvPr/>
         </p:nvSpPr>
@@ -12129,7 +13447,7 @@
                 <a:ea typeface="Calibri" pitchFamily="34" charset="-122"/>
                 <a:cs typeface="Calibri" pitchFamily="34" charset="-120"/>
               </a:rPr>
-              <a:t>4 / 16</a:t>
+              <a:t>4 / 17</a:t>
             </a:r>
             <a:endParaRPr lang="en-US" sz="900" dirty="0"/>
           </a:p>
@@ -12728,7 +14046,7 @@
                 <a:ea typeface="Calibri" pitchFamily="34" charset="-122"/>
                 <a:cs typeface="Calibri" pitchFamily="34" charset="-120"/>
               </a:rPr>
-              <a:t>5 / 16</a:t>
+              <a:t>5 / 17</a:t>
             </a:r>
             <a:endParaRPr lang="en-US" sz="900" dirty="0"/>
           </a:p>
@@ -13342,7 +14660,7 @@
                 <a:ea typeface="Calibri" pitchFamily="34" charset="-122"/>
                 <a:cs typeface="Calibri" pitchFamily="34" charset="-120"/>
               </a:rPr>
-              <a:t>6 / 16</a:t>
+              <a:t>6 / 17</a:t>
             </a:r>
             <a:endParaRPr lang="en-US" sz="900" dirty="0"/>
           </a:p>
@@ -14429,7 +15747,7 @@
                 <a:ea typeface="Calibri" pitchFamily="34" charset="-122"/>
                 <a:cs typeface="Calibri" pitchFamily="34" charset="-120"/>
               </a:rPr>
-              <a:t>7 / 16</a:t>
+              <a:t>7 / 17</a:t>
             </a:r>
             <a:endParaRPr lang="en-US" sz="900" dirty="0"/>
           </a:p>
@@ -15124,7 +16442,7 @@
                 <a:ea typeface="Calibri" pitchFamily="34" charset="-122"/>
                 <a:cs typeface="Calibri" pitchFamily="34" charset="-120"/>
               </a:rPr>
-              <a:t>8 / 16</a:t>
+              <a:t>8 / 17</a:t>
             </a:r>
             <a:endParaRPr lang="en-US" sz="900" dirty="0"/>
           </a:p>
@@ -15823,7 +17141,7 @@
                 <a:ea typeface="Calibri" pitchFamily="34" charset="-122"/>
                 <a:cs typeface="Calibri" pitchFamily="34" charset="-120"/>
               </a:rPr>
-              <a:t>9 / 16</a:t>
+              <a:t>9 / 17</a:t>
             </a:r>
             <a:endParaRPr lang="en-US" sz="900" dirty="0"/>
           </a:p>

--- a/presentation/Copper_Forecast_For_Director.pptx
+++ b/presentation/Copper_Forecast_For_Director.pptx
@@ -165,7 +165,7 @@
             <c:bubble3D val="0"/>
             <c:spPr>
               <a:solidFill>
-                <a:srgbClr val="B87333"/>
+                <a:srgbClr val="C8102E"/>
               </a:solidFill>
               <a:effectLst/>
             </c:spPr>
@@ -175,7 +175,7 @@
             <c:bubble3D val="0"/>
             <c:spPr>
               <a:solidFill>
-                <a:srgbClr val="1E2761"/>
+                <a:srgbClr val="1A1A1A"/>
               </a:solidFill>
               <a:effectLst/>
             </c:spPr>
@@ -185,7 +185,7 @@
             <c:bubble3D val="0"/>
             <c:spPr>
               <a:solidFill>
-                <a:srgbClr val="E8A87C"/>
+                <a:srgbClr val="F08080"/>
               </a:solidFill>
               <a:effectLst/>
             </c:spPr>
@@ -195,7 +195,7 @@
             <c:bubble3D val="0"/>
             <c:spPr>
               <a:solidFill>
-                <a:srgbClr val="CADCFC"/>
+                <a:srgbClr val="E0E0E0"/>
               </a:solidFill>
               <a:effectLst/>
             </c:spPr>
@@ -205,7 +205,7 @@
             <c:bubble3D val="0"/>
             <c:spPr>
               <a:solidFill>
-                <a:srgbClr val="8B5A2B"/>
+                <a:srgbClr val="8B0E20"/>
               </a:solidFill>
               <a:effectLst/>
             </c:spPr>
@@ -215,7 +215,7 @@
             <c:bubble3D val="0"/>
             <c:spPr>
               <a:solidFill>
-                <a:srgbClr val="5A6378"/>
+                <a:srgbClr val="5C5C5C"/>
               </a:solidFill>
               <a:effectLst/>
             </c:spPr>
@@ -2720,7 +2720,7 @@
     <p:bg>
       <p:bgPr>
         <a:solidFill>
-          <a:srgbClr val="1E2761"/>
+          <a:srgbClr val="1A1A1A"/>
         </a:solidFill>
       </p:bgPr>
     </p:bg>
@@ -2753,11 +2753,11 @@
             <a:avLst/>
           </a:prstGeom>
           <a:solidFill>
-            <a:srgbClr val="B87333"/>
+            <a:srgbClr val="C8102E"/>
           </a:solidFill>
           <a:ln w="12700">
             <a:solidFill>
-              <a:srgbClr val="B87333"/>
+              <a:srgbClr val="C8102E"/>
             </a:solidFill>
             <a:prstDash val="solid"/>
           </a:ln>
@@ -2765,32 +2765,96 @@
       </p:sp>
       <p:sp>
         <p:nvSpPr>
-          <p:cNvPr id="3" name="Text 1"/>
+          <p:cNvPr id="3" name="Shape 1"/>
           <p:cNvSpPr/>
           <p:nvPr/>
         </p:nvSpPr>
         <p:spPr>
           <a:xfrm>
             <a:off x="548640" y="457200"/>
-            <a:ext cx="1371600" cy="914400"/>
-          </a:xfrm>
-          <a:prstGeom prst="rect">
-            <a:avLst/>
-          </a:prstGeom>
-          <a:noFill/>
-          <a:ln/>
-        </p:spPr>
-        <p:txBody>
-          <a:bodyPr wrap="square" lIns="0" tIns="0" rIns="0" bIns="0" rtlCol="0" anchor="ctr"/>
-          <a:lstStyle/>
-          <a:p>
-            <a:pPr indent="0" marL="0">
-              <a:buNone/>
-            </a:pPr>
-            <a:r>
-              <a:rPr lang="en-US" sz="7800" b="1" dirty="0">
-                <a:solidFill>
-                  <a:srgbClr val="B87333"/>
+            <a:ext cx="2377440" cy="640080"/>
+          </a:xfrm>
+          <a:prstGeom prst="rect">
+            <a:avLst/>
+          </a:prstGeom>
+          <a:solidFill>
+            <a:srgbClr val="C8102E"/>
+          </a:solidFill>
+          <a:ln w="12700">
+            <a:solidFill>
+              <a:srgbClr val="C8102E"/>
+            </a:solidFill>
+            <a:prstDash val="solid"/>
+          </a:ln>
+        </p:spPr>
+      </p:sp>
+      <p:sp>
+        <p:nvSpPr>
+          <p:cNvPr id="4" name="Text 2"/>
+          <p:cNvSpPr/>
+          <p:nvPr/>
+        </p:nvSpPr>
+        <p:spPr>
+          <a:xfrm>
+            <a:off x="548640" y="457200"/>
+            <a:ext cx="2377440" cy="640080"/>
+          </a:xfrm>
+          <a:prstGeom prst="rect">
+            <a:avLst/>
+          </a:prstGeom>
+          <a:noFill/>
+          <a:ln/>
+        </p:spPr>
+        <p:txBody>
+          <a:bodyPr wrap="square" lIns="0" tIns="0" rIns="0" bIns="0" rtlCol="0" anchor="ctr"/>
+          <a:lstStyle/>
+          <a:p>
+            <a:pPr algn="ctr" indent="0" marL="0">
+              <a:buNone/>
+            </a:pPr>
+            <a:r>
+              <a:rPr lang="en-US" sz="1800" b="1" dirty="0">
+                <a:solidFill>
+                  <a:srgbClr val="FFFFFF"/>
+                </a:solidFill>
+                <a:latin typeface="Calibri" pitchFamily="34" charset="0"/>
+                <a:ea typeface="Calibri" pitchFamily="34" charset="-122"/>
+                <a:cs typeface="Calibri" pitchFamily="34" charset="-120"/>
+              </a:rPr>
+              <a:t>АКРОН ХОЛДИНГ</a:t>
+            </a:r>
+            <a:endParaRPr lang="en-US" sz="1800" dirty="0"/>
+          </a:p>
+        </p:txBody>
+      </p:sp>
+      <p:sp>
+        <p:nvSpPr>
+          <p:cNvPr id="5" name="Text 3"/>
+          <p:cNvSpPr/>
+          <p:nvPr/>
+        </p:nvSpPr>
+        <p:spPr>
+          <a:xfrm>
+            <a:off x="548640" y="1280160"/>
+            <a:ext cx="1371600" cy="822960"/>
+          </a:xfrm>
+          <a:prstGeom prst="rect">
+            <a:avLst/>
+          </a:prstGeom>
+          <a:noFill/>
+          <a:ln/>
+        </p:spPr>
+        <p:txBody>
+          <a:bodyPr wrap="square" lIns="0" tIns="0" rIns="0" bIns="0" rtlCol="0" anchor="ctr"/>
+          <a:lstStyle/>
+          <a:p>
+            <a:pPr indent="0" marL="0">
+              <a:buNone/>
+            </a:pPr>
+            <a:r>
+              <a:rPr lang="en-US" sz="6400" b="1" dirty="0">
+                <a:solidFill>
+                  <a:srgbClr val="C8102E"/>
                 </a:solidFill>
                 <a:latin typeface="Georgia" pitchFamily="34" charset="0"/>
                 <a:ea typeface="Georgia" pitchFamily="34" charset="-122"/>
@@ -2798,19 +2862,19 @@
               </a:rPr>
               <a:t>Cu</a:t>
             </a:r>
-            <a:endParaRPr lang="en-US" sz="7800" dirty="0"/>
-          </a:p>
-        </p:txBody>
-      </p:sp>
-      <p:sp>
-        <p:nvSpPr>
-          <p:cNvPr id="4" name="Text 2"/>
-          <p:cNvSpPr/>
-          <p:nvPr/>
-        </p:nvSpPr>
-        <p:spPr>
-          <a:xfrm>
-            <a:off x="548640" y="1417320"/>
+            <a:endParaRPr lang="en-US" sz="6400" dirty="0"/>
+          </a:p>
+        </p:txBody>
+      </p:sp>
+      <p:sp>
+        <p:nvSpPr>
+          <p:cNvPr id="6" name="Text 4"/>
+          <p:cNvSpPr/>
+          <p:nvPr/>
+        </p:nvSpPr>
+        <p:spPr>
+          <a:xfrm>
+            <a:off x="548640" y="2057400"/>
             <a:ext cx="3657600" cy="274320"/>
           </a:xfrm>
           <a:prstGeom prst="rect">
@@ -2829,7 +2893,7 @@
             <a:r>
               <a:rPr lang="en-US" sz="1200" i="1" dirty="0">
                 <a:solidFill>
-                  <a:srgbClr val="CADCFC"/>
+                  <a:srgbClr val="E0E0E0"/>
                 </a:solidFill>
                 <a:latin typeface="Calibri" pitchFamily="34" charset="0"/>
                 <a:ea typeface="Calibri" pitchFamily="34" charset="-122"/>
@@ -2843,13 +2907,13 @@
       </p:sp>
       <p:sp>
         <p:nvSpPr>
-          <p:cNvPr id="5" name="Text 3"/>
-          <p:cNvSpPr/>
-          <p:nvPr/>
-        </p:nvSpPr>
-        <p:spPr>
-          <a:xfrm>
-            <a:off x="548640" y="2194560"/>
+          <p:cNvPr id="7" name="Text 5"/>
+          <p:cNvSpPr/>
+          <p:nvPr/>
+        </p:nvSpPr>
+        <p:spPr>
+          <a:xfrm>
+            <a:off x="548640" y="2560320"/>
             <a:ext cx="8229600" cy="640080"/>
           </a:xfrm>
           <a:prstGeom prst="rect">
@@ -2882,13 +2946,13 @@
       </p:sp>
       <p:sp>
         <p:nvSpPr>
-          <p:cNvPr id="6" name="Text 4"/>
-          <p:cNvSpPr/>
-          <p:nvPr/>
-        </p:nvSpPr>
-        <p:spPr>
-          <a:xfrm>
-            <a:off x="548640" y="2880360"/>
+          <p:cNvPr id="8" name="Text 6"/>
+          <p:cNvSpPr/>
+          <p:nvPr/>
+        </p:nvSpPr>
+        <p:spPr>
+          <a:xfrm>
+            <a:off x="548640" y="3246120"/>
             <a:ext cx="8229600" cy="411480"/>
           </a:xfrm>
           <a:prstGeom prst="rect">
@@ -2907,7 +2971,7 @@
             <a:r>
               <a:rPr lang="en-US" sz="2000" i="1" dirty="0">
                 <a:solidFill>
-                  <a:srgbClr val="E8A87C"/>
+                  <a:srgbClr val="F08080"/>
                 </a:solidFill>
                 <a:latin typeface="Calibri" pitchFamily="34" charset="0"/>
                 <a:ea typeface="Calibri" pitchFamily="34" charset="-122"/>
@@ -2921,7 +2985,7 @@
       </p:sp>
       <p:sp>
         <p:nvSpPr>
-          <p:cNvPr id="7" name="Shape 5"/>
+          <p:cNvPr id="9" name="Shape 7"/>
           <p:cNvSpPr/>
           <p:nvPr/>
         </p:nvSpPr>
@@ -2934,11 +2998,11 @@
             <a:avLst/>
           </a:prstGeom>
           <a:solidFill>
-            <a:srgbClr val="B87333"/>
+            <a:srgbClr val="C8102E"/>
           </a:solidFill>
           <a:ln w="12700">
             <a:solidFill>
-              <a:srgbClr val="B87333"/>
+              <a:srgbClr val="C8102E"/>
             </a:solidFill>
             <a:prstDash val="solid"/>
           </a:ln>
@@ -2946,7 +3010,7 @@
       </p:sp>
       <p:sp>
         <p:nvSpPr>
-          <p:cNvPr id="8" name="Text 6"/>
+          <p:cNvPr id="10" name="Text 8"/>
           <p:cNvSpPr/>
           <p:nvPr/>
         </p:nvSpPr>
@@ -2971,7 +3035,7 @@
             <a:r>
               <a:rPr lang="en-US" sz="1300" dirty="0">
                 <a:solidFill>
-                  <a:srgbClr val="CADCFC"/>
+                  <a:srgbClr val="E0E0E0"/>
                 </a:solidFill>
                 <a:latin typeface="Calibri" pitchFamily="34" charset="0"/>
                 <a:ea typeface="Calibri" pitchFamily="34" charset="-122"/>
@@ -3030,11 +3094,11 @@
             <a:avLst/>
           </a:prstGeom>
           <a:solidFill>
-            <a:srgbClr val="B87333"/>
+            <a:srgbClr val="C8102E"/>
           </a:solidFill>
           <a:ln w="12700">
             <a:solidFill>
-              <a:srgbClr val="B87333"/>
+              <a:srgbClr val="C8102E"/>
             </a:solidFill>
             <a:prstDash val="solid"/>
           </a:ln>
@@ -3067,7 +3131,7 @@
             <a:r>
               <a:rPr lang="en-US" sz="3000" b="1" dirty="0">
                 <a:solidFill>
-                  <a:srgbClr val="1E2761"/>
+                  <a:srgbClr val="1A1A1A"/>
                 </a:solidFill>
                 <a:latin typeface="Calibri" pitchFamily="34" charset="0"/>
                 <a:ea typeface="Calibri" pitchFamily="34" charset="-122"/>
@@ -3106,7 +3170,7 @@
             <a:r>
               <a:rPr lang="en-US" sz="1400" i="1" dirty="0">
                 <a:solidFill>
-                  <a:srgbClr val="5A6378"/>
+                  <a:srgbClr val="5C5C5C"/>
                 </a:solidFill>
                 <a:latin typeface="Calibri" pitchFamily="34" charset="0"/>
                 <a:ea typeface="Calibri" pitchFamily="34" charset="-122"/>
@@ -3133,11 +3197,11 @@
             <a:avLst/>
           </a:prstGeom>
           <a:solidFill>
-            <a:srgbClr val="F7F8FB"/>
+            <a:srgbClr val="F5F5F5"/>
           </a:solidFill>
           <a:ln w="12700">
             <a:solidFill>
-              <a:srgbClr val="CADCFC"/>
+              <a:srgbClr val="E0E0E0"/>
             </a:solidFill>
             <a:prstDash val="solid"/>
           </a:ln>
@@ -3158,11 +3222,11 @@
             <a:avLst/>
           </a:prstGeom>
           <a:solidFill>
-            <a:srgbClr val="B87333"/>
+            <a:srgbClr val="C8102E"/>
           </a:solidFill>
           <a:ln w="12700">
             <a:solidFill>
-              <a:srgbClr val="B87333"/>
+              <a:srgbClr val="C8102E"/>
             </a:solidFill>
             <a:prstDash val="solid"/>
           </a:ln>
@@ -3195,7 +3259,7 @@
             <a:r>
               <a:rPr lang="en-US" sz="1500" b="1" dirty="0">
                 <a:solidFill>
-                  <a:srgbClr val="1E2761"/>
+                  <a:srgbClr val="1A1A1A"/>
                 </a:solidFill>
                 <a:latin typeface="Calibri" pitchFamily="34" charset="0"/>
                 <a:ea typeface="Calibri" pitchFamily="34" charset="-122"/>
@@ -3234,7 +3298,7 @@
             <a:r>
               <a:rPr lang="en-US" sz="1100" dirty="0">
                 <a:solidFill>
-                  <a:srgbClr val="242938"/>
+                  <a:srgbClr val="1A1A1A"/>
                 </a:solidFill>
                 <a:latin typeface="Calibri" pitchFamily="34" charset="0"/>
                 <a:ea typeface="Calibri" pitchFamily="34" charset="-122"/>
@@ -3261,11 +3325,11 @@
             <a:avLst/>
           </a:prstGeom>
           <a:solidFill>
-            <a:srgbClr val="F7F8FB"/>
+            <a:srgbClr val="F5F5F5"/>
           </a:solidFill>
           <a:ln w="12700">
             <a:solidFill>
-              <a:srgbClr val="CADCFC"/>
+              <a:srgbClr val="E0E0E0"/>
             </a:solidFill>
             <a:prstDash val="solid"/>
           </a:ln>
@@ -3286,11 +3350,11 @@
             <a:avLst/>
           </a:prstGeom>
           <a:solidFill>
-            <a:srgbClr val="B87333"/>
+            <a:srgbClr val="C8102E"/>
           </a:solidFill>
           <a:ln w="12700">
             <a:solidFill>
-              <a:srgbClr val="B87333"/>
+              <a:srgbClr val="C8102E"/>
             </a:solidFill>
             <a:prstDash val="solid"/>
           </a:ln>
@@ -3323,7 +3387,7 @@
             <a:r>
               <a:rPr lang="en-US" sz="1500" b="1" dirty="0">
                 <a:solidFill>
-                  <a:srgbClr val="1E2761"/>
+                  <a:srgbClr val="1A1A1A"/>
                 </a:solidFill>
                 <a:latin typeface="Calibri" pitchFamily="34" charset="0"/>
                 <a:ea typeface="Calibri" pitchFamily="34" charset="-122"/>
@@ -3362,7 +3426,7 @@
             <a:r>
               <a:rPr lang="en-US" sz="1100" dirty="0">
                 <a:solidFill>
-                  <a:srgbClr val="242938"/>
+                  <a:srgbClr val="1A1A1A"/>
                 </a:solidFill>
                 <a:latin typeface="Calibri" pitchFamily="34" charset="0"/>
                 <a:ea typeface="Calibri" pitchFamily="34" charset="-122"/>
@@ -3389,11 +3453,11 @@
             <a:avLst/>
           </a:prstGeom>
           <a:solidFill>
-            <a:srgbClr val="F7F8FB"/>
+            <a:srgbClr val="F5F5F5"/>
           </a:solidFill>
           <a:ln w="12700">
             <a:solidFill>
-              <a:srgbClr val="CADCFC"/>
+              <a:srgbClr val="E0E0E0"/>
             </a:solidFill>
             <a:prstDash val="solid"/>
           </a:ln>
@@ -3414,11 +3478,11 @@
             <a:avLst/>
           </a:prstGeom>
           <a:solidFill>
-            <a:srgbClr val="B87333"/>
+            <a:srgbClr val="C8102E"/>
           </a:solidFill>
           <a:ln w="12700">
             <a:solidFill>
-              <a:srgbClr val="B87333"/>
+              <a:srgbClr val="C8102E"/>
             </a:solidFill>
             <a:prstDash val="solid"/>
           </a:ln>
@@ -3451,7 +3515,7 @@
             <a:r>
               <a:rPr lang="en-US" sz="1500" b="1" dirty="0">
                 <a:solidFill>
-                  <a:srgbClr val="1E2761"/>
+                  <a:srgbClr val="1A1A1A"/>
                 </a:solidFill>
                 <a:latin typeface="Calibri" pitchFamily="34" charset="0"/>
                 <a:ea typeface="Calibri" pitchFamily="34" charset="-122"/>
@@ -3490,7 +3554,7 @@
             <a:r>
               <a:rPr lang="en-US" sz="1100" dirty="0">
                 <a:solidFill>
-                  <a:srgbClr val="242938"/>
+                  <a:srgbClr val="1A1A1A"/>
                 </a:solidFill>
                 <a:latin typeface="Calibri" pitchFamily="34" charset="0"/>
                 <a:ea typeface="Calibri" pitchFamily="34" charset="-122"/>
@@ -3517,11 +3581,11 @@
             <a:avLst/>
           </a:prstGeom>
           <a:solidFill>
-            <a:srgbClr val="F7F8FB"/>
+            <a:srgbClr val="F5F5F5"/>
           </a:solidFill>
           <a:ln w="12700">
             <a:solidFill>
-              <a:srgbClr val="CADCFC"/>
+              <a:srgbClr val="E0E0E0"/>
             </a:solidFill>
             <a:prstDash val="solid"/>
           </a:ln>
@@ -3542,11 +3606,11 @@
             <a:avLst/>
           </a:prstGeom>
           <a:solidFill>
-            <a:srgbClr val="B87333"/>
+            <a:srgbClr val="C8102E"/>
           </a:solidFill>
           <a:ln w="12700">
             <a:solidFill>
-              <a:srgbClr val="B87333"/>
+              <a:srgbClr val="C8102E"/>
             </a:solidFill>
             <a:prstDash val="solid"/>
           </a:ln>
@@ -3579,7 +3643,7 @@
             <a:r>
               <a:rPr lang="en-US" sz="1500" b="1" dirty="0">
                 <a:solidFill>
-                  <a:srgbClr val="1E2761"/>
+                  <a:srgbClr val="1A1A1A"/>
                 </a:solidFill>
                 <a:latin typeface="Calibri" pitchFamily="34" charset="0"/>
                 <a:ea typeface="Calibri" pitchFamily="34" charset="-122"/>
@@ -3618,7 +3682,7 @@
             <a:r>
               <a:rPr lang="en-US" sz="1100" dirty="0">
                 <a:solidFill>
-                  <a:srgbClr val="242938"/>
+                  <a:srgbClr val="1A1A1A"/>
                 </a:solidFill>
                 <a:latin typeface="Calibri" pitchFamily="34" charset="0"/>
                 <a:ea typeface="Calibri" pitchFamily="34" charset="-122"/>
@@ -3645,11 +3709,11 @@
             <a:avLst/>
           </a:prstGeom>
           <a:solidFill>
-            <a:srgbClr val="1E2761"/>
+            <a:srgbClr val="1A1A1A"/>
           </a:solidFill>
           <a:ln w="12700">
             <a:solidFill>
-              <a:srgbClr val="1E2761"/>
+              <a:srgbClr val="1A1A1A"/>
             </a:solidFill>
             <a:prstDash val="solid"/>
           </a:ln>
@@ -3682,7 +3746,7 @@
             <a:r>
               <a:rPr lang="en-US" sz="1500" b="1" dirty="0">
                 <a:solidFill>
-                  <a:srgbClr val="E8A87C"/>
+                  <a:srgbClr val="F08080"/>
                 </a:solidFill>
                 <a:latin typeface="Calibri" pitchFamily="34" charset="0"/>
                 <a:ea typeface="Calibri" pitchFamily="34" charset="-122"/>
@@ -3785,7 +3849,7 @@
             <a:r>
               <a:rPr lang="en-US" sz="900" dirty="0">
                 <a:solidFill>
-                  <a:srgbClr val="5A6378"/>
+                  <a:srgbClr val="5C5C5C"/>
                 </a:solidFill>
                 <a:latin typeface="Calibri" pitchFamily="34" charset="0"/>
                 <a:ea typeface="Calibri" pitchFamily="34" charset="-122"/>
@@ -3824,7 +3888,7 @@
             <a:r>
               <a:rPr lang="en-US" sz="900" dirty="0">
                 <a:solidFill>
-                  <a:srgbClr val="5A6378"/>
+                  <a:srgbClr val="5C5C5C"/>
                 </a:solidFill>
                 <a:latin typeface="Calibri" pitchFamily="34" charset="0"/>
                 <a:ea typeface="Calibri" pitchFamily="34" charset="-122"/>
@@ -3883,11 +3947,11 @@
             <a:avLst/>
           </a:prstGeom>
           <a:solidFill>
-            <a:srgbClr val="B87333"/>
+            <a:srgbClr val="C8102E"/>
           </a:solidFill>
           <a:ln w="12700">
             <a:solidFill>
-              <a:srgbClr val="B87333"/>
+              <a:srgbClr val="C8102E"/>
             </a:solidFill>
             <a:prstDash val="solid"/>
           </a:ln>
@@ -3920,7 +3984,7 @@
             <a:r>
               <a:rPr lang="en-US" sz="3000" b="1" dirty="0">
                 <a:solidFill>
-                  <a:srgbClr val="1E2761"/>
+                  <a:srgbClr val="1A1A1A"/>
                 </a:solidFill>
                 <a:latin typeface="Calibri" pitchFamily="34" charset="0"/>
                 <a:ea typeface="Calibri" pitchFamily="34" charset="-122"/>
@@ -3959,7 +4023,7 @@
             <a:r>
               <a:rPr lang="en-US" sz="1400" i="1" dirty="0">
                 <a:solidFill>
-                  <a:srgbClr val="5A6378"/>
+                  <a:srgbClr val="5C5C5C"/>
                 </a:solidFill>
                 <a:latin typeface="Calibri" pitchFamily="34" charset="0"/>
                 <a:ea typeface="Calibri" pitchFamily="34" charset="-122"/>
@@ -4014,7 +4078,7 @@
             <a:r>
               <a:rPr lang="en-US" sz="1600" b="1" dirty="0">
                 <a:solidFill>
-                  <a:srgbClr val="1E2761"/>
+                  <a:srgbClr val="1A1A1A"/>
                 </a:solidFill>
                 <a:latin typeface="Calibri" pitchFamily="34" charset="0"/>
                 <a:ea typeface="Calibri" pitchFamily="34" charset="-122"/>
@@ -4057,7 +4121,7 @@
             <a:r>
               <a:rPr lang="en-US" sz="1200" dirty="0">
                 <a:solidFill>
-                  <a:srgbClr val="242938"/>
+                  <a:srgbClr val="1A1A1A"/>
                 </a:solidFill>
                 <a:latin typeface="Calibri" pitchFamily="34" charset="0"/>
                 <a:ea typeface="Calibri" pitchFamily="34" charset="-122"/>
@@ -4078,7 +4142,7 @@
             <a:r>
               <a:rPr lang="en-US" sz="1200" dirty="0">
                 <a:solidFill>
-                  <a:srgbClr val="242938"/>
+                  <a:srgbClr val="1A1A1A"/>
                 </a:solidFill>
                 <a:latin typeface="Calibri" pitchFamily="34" charset="0"/>
                 <a:ea typeface="Calibri" pitchFamily="34" charset="-122"/>
@@ -4099,7 +4163,7 @@
             <a:r>
               <a:rPr lang="en-US" sz="1200" dirty="0">
                 <a:solidFill>
-                  <a:srgbClr val="242938"/>
+                  <a:srgbClr val="1A1A1A"/>
                 </a:solidFill>
                 <a:latin typeface="Calibri" pitchFamily="34" charset="0"/>
                 <a:ea typeface="Calibri" pitchFamily="34" charset="-122"/>
@@ -4120,7 +4184,7 @@
             <a:r>
               <a:rPr lang="en-US" sz="1200" dirty="0">
                 <a:solidFill>
-                  <a:srgbClr val="242938"/>
+                  <a:srgbClr val="1A1A1A"/>
                 </a:solidFill>
                 <a:latin typeface="Calibri" pitchFamily="34" charset="0"/>
                 <a:ea typeface="Calibri" pitchFamily="34" charset="-122"/>
@@ -4159,7 +4223,7 @@
             <a:r>
               <a:rPr lang="en-US" sz="1100" i="1" dirty="0">
                 <a:solidFill>
-                  <a:srgbClr val="5A6378"/>
+                  <a:srgbClr val="5C5C5C"/>
                 </a:solidFill>
                 <a:latin typeface="Calibri" pitchFamily="34" charset="0"/>
                 <a:ea typeface="Calibri" pitchFamily="34" charset="-122"/>
@@ -4198,7 +4262,7 @@
             <a:r>
               <a:rPr lang="en-US" sz="900" dirty="0">
                 <a:solidFill>
-                  <a:srgbClr val="5A6378"/>
+                  <a:srgbClr val="5C5C5C"/>
                 </a:solidFill>
                 <a:latin typeface="Calibri" pitchFamily="34" charset="0"/>
                 <a:ea typeface="Calibri" pitchFamily="34" charset="-122"/>
@@ -4237,7 +4301,7 @@
             <a:r>
               <a:rPr lang="en-US" sz="900" dirty="0">
                 <a:solidFill>
-                  <a:srgbClr val="5A6378"/>
+                  <a:srgbClr val="5C5C5C"/>
                 </a:solidFill>
                 <a:latin typeface="Calibri" pitchFamily="34" charset="0"/>
                 <a:ea typeface="Calibri" pitchFamily="34" charset="-122"/>
@@ -4296,11 +4360,11 @@
             <a:avLst/>
           </a:prstGeom>
           <a:solidFill>
-            <a:srgbClr val="B87333"/>
+            <a:srgbClr val="C8102E"/>
           </a:solidFill>
           <a:ln w="12700">
             <a:solidFill>
-              <a:srgbClr val="B87333"/>
+              <a:srgbClr val="C8102E"/>
             </a:solidFill>
             <a:prstDash val="solid"/>
           </a:ln>
@@ -4333,7 +4397,7 @@
             <a:r>
               <a:rPr lang="en-US" sz="3000" b="1" dirty="0">
                 <a:solidFill>
-                  <a:srgbClr val="1E2761"/>
+                  <a:srgbClr val="1A1A1A"/>
                 </a:solidFill>
                 <a:latin typeface="Calibri" pitchFamily="34" charset="0"/>
                 <a:ea typeface="Calibri" pitchFamily="34" charset="-122"/>
@@ -4372,7 +4436,7 @@
             <a:r>
               <a:rPr lang="en-US" sz="1400" i="1" dirty="0">
                 <a:solidFill>
-                  <a:srgbClr val="5A6378"/>
+                  <a:srgbClr val="5C5C5C"/>
                 </a:solidFill>
                 <a:latin typeface="Calibri" pitchFamily="34" charset="0"/>
                 <a:ea typeface="Calibri" pitchFamily="34" charset="-122"/>
@@ -4399,11 +4463,11 @@
             <a:avLst/>
           </a:prstGeom>
           <a:solidFill>
-            <a:srgbClr val="F7F8FB"/>
+            <a:srgbClr val="F5F5F5"/>
           </a:solidFill>
           <a:ln w="12700">
             <a:solidFill>
-              <a:srgbClr val="CADCFC"/>
+              <a:srgbClr val="E0E0E0"/>
             </a:solidFill>
             <a:prstDash val="solid"/>
           </a:ln>
@@ -4424,11 +4488,11 @@
             <a:avLst/>
           </a:prstGeom>
           <a:solidFill>
-            <a:srgbClr val="5A6378"/>
+            <a:srgbClr val="5C5C5C"/>
           </a:solidFill>
           <a:ln w="12700">
             <a:solidFill>
-              <a:srgbClr val="5A6378"/>
+              <a:srgbClr val="5C5C5C"/>
             </a:solidFill>
             <a:prstDash val="solid"/>
           </a:ln>
@@ -4461,7 +4525,7 @@
             <a:r>
               <a:rPr lang="en-US" sz="1300" b="1" dirty="0">
                 <a:solidFill>
-                  <a:srgbClr val="1E2761"/>
+                  <a:srgbClr val="1A1A1A"/>
                 </a:solidFill>
                 <a:latin typeface="Calibri" pitchFamily="34" charset="0"/>
                 <a:ea typeface="Calibri" pitchFamily="34" charset="-122"/>
@@ -4500,7 +4564,7 @@
             <a:r>
               <a:rPr lang="en-US" sz="1700" b="1" dirty="0">
                 <a:solidFill>
-                  <a:srgbClr val="5A6378"/>
+                  <a:srgbClr val="5C5C5C"/>
                 </a:solidFill>
                 <a:latin typeface="Calibri" pitchFamily="34" charset="0"/>
                 <a:ea typeface="Calibri" pitchFamily="34" charset="-122"/>
@@ -4539,7 +4603,7 @@
             <a:r>
               <a:rPr lang="en-US" sz="1050" i="1" dirty="0">
                 <a:solidFill>
-                  <a:srgbClr val="242938"/>
+                  <a:srgbClr val="1A1A1A"/>
                 </a:solidFill>
                 <a:latin typeface="Calibri" pitchFamily="34" charset="0"/>
                 <a:ea typeface="Calibri" pitchFamily="34" charset="-122"/>
@@ -4566,11 +4630,11 @@
             <a:avLst/>
           </a:prstGeom>
           <a:solidFill>
-            <a:srgbClr val="F7F8FB"/>
+            <a:srgbClr val="F5F5F5"/>
           </a:solidFill>
           <a:ln w="12700">
             <a:solidFill>
-              <a:srgbClr val="CADCFC"/>
+              <a:srgbClr val="E0E0E0"/>
             </a:solidFill>
             <a:prstDash val="solid"/>
           </a:ln>
@@ -4591,11 +4655,11 @@
             <a:avLst/>
           </a:prstGeom>
           <a:solidFill>
-            <a:srgbClr val="1E2761"/>
+            <a:srgbClr val="1A1A1A"/>
           </a:solidFill>
           <a:ln w="12700">
             <a:solidFill>
-              <a:srgbClr val="1E2761"/>
+              <a:srgbClr val="1A1A1A"/>
             </a:solidFill>
             <a:prstDash val="solid"/>
           </a:ln>
@@ -4628,7 +4692,7 @@
             <a:r>
               <a:rPr lang="en-US" sz="1300" b="1" dirty="0">
                 <a:solidFill>
-                  <a:srgbClr val="1E2761"/>
+                  <a:srgbClr val="1A1A1A"/>
                 </a:solidFill>
                 <a:latin typeface="Calibri" pitchFamily="34" charset="0"/>
                 <a:ea typeface="Calibri" pitchFamily="34" charset="-122"/>
@@ -4667,7 +4731,7 @@
             <a:r>
               <a:rPr lang="en-US" sz="1700" b="1" dirty="0">
                 <a:solidFill>
-                  <a:srgbClr val="1E2761"/>
+                  <a:srgbClr val="1A1A1A"/>
                 </a:solidFill>
                 <a:latin typeface="Calibri" pitchFamily="34" charset="0"/>
                 <a:ea typeface="Calibri" pitchFamily="34" charset="-122"/>
@@ -4706,7 +4770,7 @@
             <a:r>
               <a:rPr lang="en-US" sz="1050" i="1" dirty="0">
                 <a:solidFill>
-                  <a:srgbClr val="242938"/>
+                  <a:srgbClr val="1A1A1A"/>
                 </a:solidFill>
                 <a:latin typeface="Calibri" pitchFamily="34" charset="0"/>
                 <a:ea typeface="Calibri" pitchFamily="34" charset="-122"/>
@@ -4733,11 +4797,11 @@
             <a:avLst/>
           </a:prstGeom>
           <a:solidFill>
-            <a:srgbClr val="F7F8FB"/>
+            <a:srgbClr val="F5F5F5"/>
           </a:solidFill>
           <a:ln w="12700">
             <a:solidFill>
-              <a:srgbClr val="CADCFC"/>
+              <a:srgbClr val="E0E0E0"/>
             </a:solidFill>
             <a:prstDash val="solid"/>
           </a:ln>
@@ -4758,11 +4822,11 @@
             <a:avLst/>
           </a:prstGeom>
           <a:solidFill>
-            <a:srgbClr val="B87333"/>
+            <a:srgbClr val="C8102E"/>
           </a:solidFill>
           <a:ln w="12700">
             <a:solidFill>
-              <a:srgbClr val="B87333"/>
+              <a:srgbClr val="C8102E"/>
             </a:solidFill>
             <a:prstDash val="solid"/>
           </a:ln>
@@ -4795,7 +4859,7 @@
             <a:r>
               <a:rPr lang="en-US" sz="1300" b="1" dirty="0">
                 <a:solidFill>
-                  <a:srgbClr val="1E2761"/>
+                  <a:srgbClr val="1A1A1A"/>
                 </a:solidFill>
                 <a:latin typeface="Calibri" pitchFamily="34" charset="0"/>
                 <a:ea typeface="Calibri" pitchFamily="34" charset="-122"/>
@@ -4834,7 +4898,7 @@
             <a:r>
               <a:rPr lang="en-US" sz="1700" b="1" dirty="0">
                 <a:solidFill>
-                  <a:srgbClr val="B87333"/>
+                  <a:srgbClr val="C8102E"/>
                 </a:solidFill>
                 <a:latin typeface="Calibri" pitchFamily="34" charset="0"/>
                 <a:ea typeface="Calibri" pitchFamily="34" charset="-122"/>
@@ -4873,7 +4937,7 @@
             <a:r>
               <a:rPr lang="en-US" sz="1050" i="1" dirty="0">
                 <a:solidFill>
-                  <a:srgbClr val="242938"/>
+                  <a:srgbClr val="1A1A1A"/>
                 </a:solidFill>
                 <a:latin typeface="Calibri" pitchFamily="34" charset="0"/>
                 <a:ea typeface="Calibri" pitchFamily="34" charset="-122"/>
@@ -4900,11 +4964,11 @@
             <a:avLst/>
           </a:prstGeom>
           <a:solidFill>
-            <a:srgbClr val="F7F8FB"/>
+            <a:srgbClr val="F5F5F5"/>
           </a:solidFill>
           <a:ln w="12700">
             <a:solidFill>
-              <a:srgbClr val="CADCFC"/>
+              <a:srgbClr val="E0E0E0"/>
             </a:solidFill>
             <a:prstDash val="solid"/>
           </a:ln>
@@ -4925,11 +4989,11 @@
             <a:avLst/>
           </a:prstGeom>
           <a:solidFill>
-            <a:srgbClr val="E8A87C"/>
+            <a:srgbClr val="F08080"/>
           </a:solidFill>
           <a:ln w="12700">
             <a:solidFill>
-              <a:srgbClr val="E8A87C"/>
+              <a:srgbClr val="F08080"/>
             </a:solidFill>
             <a:prstDash val="solid"/>
           </a:ln>
@@ -4962,7 +5026,7 @@
             <a:r>
               <a:rPr lang="en-US" sz="1300" b="1" dirty="0">
                 <a:solidFill>
-                  <a:srgbClr val="1E2761"/>
+                  <a:srgbClr val="1A1A1A"/>
                 </a:solidFill>
                 <a:latin typeface="Calibri" pitchFamily="34" charset="0"/>
                 <a:ea typeface="Calibri" pitchFamily="34" charset="-122"/>
@@ -5001,7 +5065,7 @@
             <a:r>
               <a:rPr lang="en-US" sz="1700" b="1" dirty="0">
                 <a:solidFill>
-                  <a:srgbClr val="E8A87C"/>
+                  <a:srgbClr val="F08080"/>
                 </a:solidFill>
                 <a:latin typeface="Calibri" pitchFamily="34" charset="0"/>
                 <a:ea typeface="Calibri" pitchFamily="34" charset="-122"/>
@@ -5040,7 +5104,7 @@
             <a:r>
               <a:rPr lang="en-US" sz="1050" i="1" dirty="0">
                 <a:solidFill>
-                  <a:srgbClr val="242938"/>
+                  <a:srgbClr val="1A1A1A"/>
                 </a:solidFill>
                 <a:latin typeface="Calibri" pitchFamily="34" charset="0"/>
                 <a:ea typeface="Calibri" pitchFamily="34" charset="-122"/>
@@ -5079,7 +5143,7 @@
             <a:r>
               <a:rPr lang="en-US" sz="1100" i="1" dirty="0">
                 <a:solidFill>
-                  <a:srgbClr val="5A6378"/>
+                  <a:srgbClr val="5C5C5C"/>
                 </a:solidFill>
                 <a:latin typeface="Calibri" pitchFamily="34" charset="0"/>
                 <a:ea typeface="Calibri" pitchFamily="34" charset="-122"/>
@@ -5118,7 +5182,7 @@
             <a:r>
               <a:rPr lang="en-US" sz="900" dirty="0">
                 <a:solidFill>
-                  <a:srgbClr val="5A6378"/>
+                  <a:srgbClr val="5C5C5C"/>
                 </a:solidFill>
                 <a:latin typeface="Calibri" pitchFamily="34" charset="0"/>
                 <a:ea typeface="Calibri" pitchFamily="34" charset="-122"/>
@@ -5157,7 +5221,7 @@
             <a:r>
               <a:rPr lang="en-US" sz="900" dirty="0">
                 <a:solidFill>
-                  <a:srgbClr val="5A6378"/>
+                  <a:srgbClr val="5C5C5C"/>
                 </a:solidFill>
                 <a:latin typeface="Calibri" pitchFamily="34" charset="0"/>
                 <a:ea typeface="Calibri" pitchFamily="34" charset="-122"/>
@@ -5216,11 +5280,11 @@
             <a:avLst/>
           </a:prstGeom>
           <a:solidFill>
-            <a:srgbClr val="B87333"/>
+            <a:srgbClr val="C8102E"/>
           </a:solidFill>
           <a:ln w="12700">
             <a:solidFill>
-              <a:srgbClr val="B87333"/>
+              <a:srgbClr val="C8102E"/>
             </a:solidFill>
             <a:prstDash val="solid"/>
           </a:ln>
@@ -5253,7 +5317,7 @@
             <a:r>
               <a:rPr lang="en-US" sz="3000" b="1" dirty="0">
                 <a:solidFill>
-                  <a:srgbClr val="1E2761"/>
+                  <a:srgbClr val="1A1A1A"/>
                 </a:solidFill>
                 <a:latin typeface="Calibri" pitchFamily="34" charset="0"/>
                 <a:ea typeface="Calibri" pitchFamily="34" charset="-122"/>
@@ -5292,7 +5356,7 @@
             <a:r>
               <a:rPr lang="en-US" sz="1400" i="1" dirty="0">
                 <a:solidFill>
-                  <a:srgbClr val="5A6378"/>
+                  <a:srgbClr val="5C5C5C"/>
                 </a:solidFill>
                 <a:latin typeface="Calibri" pitchFamily="34" charset="0"/>
                 <a:ea typeface="Calibri" pitchFamily="34" charset="-122"/>
@@ -5319,11 +5383,11 @@
             <a:avLst/>
           </a:prstGeom>
           <a:solidFill>
-            <a:srgbClr val="F7F8FB"/>
+            <a:srgbClr val="F5F5F5"/>
           </a:solidFill>
           <a:ln w="12700">
             <a:solidFill>
-              <a:srgbClr val="CADCFC"/>
+              <a:srgbClr val="E0E0E0"/>
             </a:solidFill>
             <a:prstDash val="solid"/>
           </a:ln>
@@ -5344,11 +5408,11 @@
             <a:avLst/>
           </a:prstGeom>
           <a:solidFill>
-            <a:srgbClr val="B87333"/>
+            <a:srgbClr val="C8102E"/>
           </a:solidFill>
           <a:ln w="12700">
             <a:solidFill>
-              <a:srgbClr val="B87333"/>
+              <a:srgbClr val="C8102E"/>
             </a:solidFill>
             <a:prstDash val="solid"/>
           </a:ln>
@@ -5381,7 +5445,7 @@
             <a:r>
               <a:rPr lang="en-US" sz="1400" b="1" dirty="0">
                 <a:solidFill>
-                  <a:srgbClr val="1E2761"/>
+                  <a:srgbClr val="1A1A1A"/>
                 </a:solidFill>
                 <a:latin typeface="Calibri" pitchFamily="34" charset="0"/>
                 <a:ea typeface="Calibri" pitchFamily="34" charset="-122"/>
@@ -5420,7 +5484,7 @@
             <a:r>
               <a:rPr lang="en-US" sz="1000" dirty="0">
                 <a:solidFill>
-                  <a:srgbClr val="242938"/>
+                  <a:srgbClr val="1A1A1A"/>
                 </a:solidFill>
                 <a:latin typeface="Calibri" pitchFamily="34" charset="0"/>
                 <a:ea typeface="Calibri" pitchFamily="34" charset="-122"/>
@@ -5459,7 +5523,7 @@
             <a:r>
               <a:rPr lang="en-US" sz="950" i="1" dirty="0">
                 <a:solidFill>
-                  <a:srgbClr val="B87333"/>
+                  <a:srgbClr val="C8102E"/>
                 </a:solidFill>
                 <a:latin typeface="Calibri" pitchFamily="34" charset="0"/>
                 <a:ea typeface="Calibri" pitchFamily="34" charset="-122"/>
@@ -5486,11 +5550,11 @@
             <a:avLst/>
           </a:prstGeom>
           <a:solidFill>
-            <a:srgbClr val="F7F8FB"/>
+            <a:srgbClr val="F5F5F5"/>
           </a:solidFill>
           <a:ln w="12700">
             <a:solidFill>
-              <a:srgbClr val="CADCFC"/>
+              <a:srgbClr val="E0E0E0"/>
             </a:solidFill>
             <a:prstDash val="solid"/>
           </a:ln>
@@ -5511,11 +5575,11 @@
             <a:avLst/>
           </a:prstGeom>
           <a:solidFill>
-            <a:srgbClr val="B87333"/>
+            <a:srgbClr val="C8102E"/>
           </a:solidFill>
           <a:ln w="12700">
             <a:solidFill>
-              <a:srgbClr val="B87333"/>
+              <a:srgbClr val="C8102E"/>
             </a:solidFill>
             <a:prstDash val="solid"/>
           </a:ln>
@@ -5548,7 +5612,7 @@
             <a:r>
               <a:rPr lang="en-US" sz="1400" b="1" dirty="0">
                 <a:solidFill>
-                  <a:srgbClr val="1E2761"/>
+                  <a:srgbClr val="1A1A1A"/>
                 </a:solidFill>
                 <a:latin typeface="Calibri" pitchFamily="34" charset="0"/>
                 <a:ea typeface="Calibri" pitchFamily="34" charset="-122"/>
@@ -5587,7 +5651,7 @@
             <a:r>
               <a:rPr lang="en-US" sz="1000" dirty="0">
                 <a:solidFill>
-                  <a:srgbClr val="242938"/>
+                  <a:srgbClr val="1A1A1A"/>
                 </a:solidFill>
                 <a:latin typeface="Calibri" pitchFamily="34" charset="0"/>
                 <a:ea typeface="Calibri" pitchFamily="34" charset="-122"/>
@@ -5626,7 +5690,7 @@
             <a:r>
               <a:rPr lang="en-US" sz="950" i="1" dirty="0">
                 <a:solidFill>
-                  <a:srgbClr val="B87333"/>
+                  <a:srgbClr val="C8102E"/>
                 </a:solidFill>
                 <a:latin typeface="Calibri" pitchFamily="34" charset="0"/>
                 <a:ea typeface="Calibri" pitchFamily="34" charset="-122"/>
@@ -5653,11 +5717,11 @@
             <a:avLst/>
           </a:prstGeom>
           <a:solidFill>
-            <a:srgbClr val="F7F8FB"/>
+            <a:srgbClr val="F5F5F5"/>
           </a:solidFill>
           <a:ln w="12700">
             <a:solidFill>
-              <a:srgbClr val="CADCFC"/>
+              <a:srgbClr val="E0E0E0"/>
             </a:solidFill>
             <a:prstDash val="solid"/>
           </a:ln>
@@ -5678,11 +5742,11 @@
             <a:avLst/>
           </a:prstGeom>
           <a:solidFill>
-            <a:srgbClr val="B87333"/>
+            <a:srgbClr val="C8102E"/>
           </a:solidFill>
           <a:ln w="12700">
             <a:solidFill>
-              <a:srgbClr val="B87333"/>
+              <a:srgbClr val="C8102E"/>
             </a:solidFill>
             <a:prstDash val="solid"/>
           </a:ln>
@@ -5715,7 +5779,7 @@
             <a:r>
               <a:rPr lang="en-US" sz="1400" b="1" dirty="0">
                 <a:solidFill>
-                  <a:srgbClr val="1E2761"/>
+                  <a:srgbClr val="1A1A1A"/>
                 </a:solidFill>
                 <a:latin typeface="Calibri" pitchFamily="34" charset="0"/>
                 <a:ea typeface="Calibri" pitchFamily="34" charset="-122"/>
@@ -5754,7 +5818,7 @@
             <a:r>
               <a:rPr lang="en-US" sz="1000" dirty="0">
                 <a:solidFill>
-                  <a:srgbClr val="242938"/>
+                  <a:srgbClr val="1A1A1A"/>
                 </a:solidFill>
                 <a:latin typeface="Calibri" pitchFamily="34" charset="0"/>
                 <a:ea typeface="Calibri" pitchFamily="34" charset="-122"/>
@@ -5793,7 +5857,7 @@
             <a:r>
               <a:rPr lang="en-US" sz="950" i="1" dirty="0">
                 <a:solidFill>
-                  <a:srgbClr val="B87333"/>
+                  <a:srgbClr val="C8102E"/>
                 </a:solidFill>
                 <a:latin typeface="Calibri" pitchFamily="34" charset="0"/>
                 <a:ea typeface="Calibri" pitchFamily="34" charset="-122"/>
@@ -5820,11 +5884,11 @@
             <a:avLst/>
           </a:prstGeom>
           <a:solidFill>
-            <a:srgbClr val="F7F8FB"/>
+            <a:srgbClr val="F5F5F5"/>
           </a:solidFill>
           <a:ln w="12700">
             <a:solidFill>
-              <a:srgbClr val="CADCFC"/>
+              <a:srgbClr val="E0E0E0"/>
             </a:solidFill>
             <a:prstDash val="solid"/>
           </a:ln>
@@ -5845,11 +5909,11 @@
             <a:avLst/>
           </a:prstGeom>
           <a:solidFill>
-            <a:srgbClr val="B87333"/>
+            <a:srgbClr val="C8102E"/>
           </a:solidFill>
           <a:ln w="12700">
             <a:solidFill>
-              <a:srgbClr val="B87333"/>
+              <a:srgbClr val="C8102E"/>
             </a:solidFill>
             <a:prstDash val="solid"/>
           </a:ln>
@@ -5882,7 +5946,7 @@
             <a:r>
               <a:rPr lang="en-US" sz="1400" b="1" dirty="0">
                 <a:solidFill>
-                  <a:srgbClr val="1E2761"/>
+                  <a:srgbClr val="1A1A1A"/>
                 </a:solidFill>
                 <a:latin typeface="Calibri" pitchFamily="34" charset="0"/>
                 <a:ea typeface="Calibri" pitchFamily="34" charset="-122"/>
@@ -5921,7 +5985,7 @@
             <a:r>
               <a:rPr lang="en-US" sz="1000" dirty="0">
                 <a:solidFill>
-                  <a:srgbClr val="242938"/>
+                  <a:srgbClr val="1A1A1A"/>
                 </a:solidFill>
                 <a:latin typeface="Calibri" pitchFamily="34" charset="0"/>
                 <a:ea typeface="Calibri" pitchFamily="34" charset="-122"/>
@@ -5960,7 +6024,7 @@
             <a:r>
               <a:rPr lang="en-US" sz="950" i="1" dirty="0">
                 <a:solidFill>
-                  <a:srgbClr val="B87333"/>
+                  <a:srgbClr val="C8102E"/>
                 </a:solidFill>
                 <a:latin typeface="Calibri" pitchFamily="34" charset="0"/>
                 <a:ea typeface="Calibri" pitchFamily="34" charset="-122"/>
@@ -5999,7 +6063,7 @@
             <a:r>
               <a:rPr lang="en-US" sz="900" dirty="0">
                 <a:solidFill>
-                  <a:srgbClr val="5A6378"/>
+                  <a:srgbClr val="5C5C5C"/>
                 </a:solidFill>
                 <a:latin typeface="Calibri" pitchFamily="34" charset="0"/>
                 <a:ea typeface="Calibri" pitchFamily="34" charset="-122"/>
@@ -6038,7 +6102,7 @@
             <a:r>
               <a:rPr lang="en-US" sz="900" dirty="0">
                 <a:solidFill>
-                  <a:srgbClr val="5A6378"/>
+                  <a:srgbClr val="5C5C5C"/>
                 </a:solidFill>
                 <a:latin typeface="Calibri" pitchFamily="34" charset="0"/>
                 <a:ea typeface="Calibri" pitchFamily="34" charset="-122"/>
@@ -6097,11 +6161,11 @@
             <a:avLst/>
           </a:prstGeom>
           <a:solidFill>
-            <a:srgbClr val="B87333"/>
+            <a:srgbClr val="C8102E"/>
           </a:solidFill>
           <a:ln w="12700">
             <a:solidFill>
-              <a:srgbClr val="B87333"/>
+              <a:srgbClr val="C8102E"/>
             </a:solidFill>
             <a:prstDash val="solid"/>
           </a:ln>
@@ -6134,7 +6198,7 @@
             <a:r>
               <a:rPr lang="en-US" sz="3000" b="1" dirty="0">
                 <a:solidFill>
-                  <a:srgbClr val="1E2761"/>
+                  <a:srgbClr val="1A1A1A"/>
                 </a:solidFill>
                 <a:latin typeface="Calibri" pitchFamily="34" charset="0"/>
                 <a:ea typeface="Calibri" pitchFamily="34" charset="-122"/>
@@ -6173,7 +6237,7 @@
             <a:r>
               <a:rPr lang="en-US" sz="1400" i="1" dirty="0">
                 <a:solidFill>
-                  <a:srgbClr val="5A6378"/>
+                  <a:srgbClr val="5C5C5C"/>
                 </a:solidFill>
                 <a:latin typeface="Calibri" pitchFamily="34" charset="0"/>
                 <a:ea typeface="Calibri" pitchFamily="34" charset="-122"/>
@@ -6200,11 +6264,11 @@
             <a:avLst/>
           </a:prstGeom>
           <a:solidFill>
-            <a:srgbClr val="F7F8FB"/>
+            <a:srgbClr val="F5F5F5"/>
           </a:solidFill>
           <a:ln w="25400">
             <a:solidFill>
-              <a:srgbClr val="0F9D58"/>
+              <a:srgbClr val="2E7D32"/>
             </a:solidFill>
             <a:prstDash val="solid"/>
           </a:ln>
@@ -6237,7 +6301,7 @@
             <a:r>
               <a:rPr lang="en-US" sz="1500" b="1" dirty="0">
                 <a:solidFill>
-                  <a:srgbClr val="0F9D58"/>
+                  <a:srgbClr val="2E7D32"/>
                 </a:solidFill>
                 <a:latin typeface="Calibri" pitchFamily="34" charset="0"/>
                 <a:ea typeface="Calibri" pitchFamily="34" charset="-122"/>
@@ -6280,7 +6344,7 @@
             <a:r>
               <a:rPr lang="en-US" sz="1100" dirty="0">
                 <a:solidFill>
-                  <a:srgbClr val="242938"/>
+                  <a:srgbClr val="1A1A1A"/>
                 </a:solidFill>
                 <a:latin typeface="Calibri" pitchFamily="34" charset="0"/>
                 <a:ea typeface="Calibri" pitchFamily="34" charset="-122"/>
@@ -6301,7 +6365,7 @@
             <a:r>
               <a:rPr lang="en-US" sz="1100" dirty="0">
                 <a:solidFill>
-                  <a:srgbClr val="242938"/>
+                  <a:srgbClr val="1A1A1A"/>
                 </a:solidFill>
                 <a:latin typeface="Calibri" pitchFamily="34" charset="0"/>
                 <a:ea typeface="Calibri" pitchFamily="34" charset="-122"/>
@@ -6322,7 +6386,7 @@
             <a:r>
               <a:rPr lang="en-US" sz="1100" dirty="0">
                 <a:solidFill>
-                  <a:srgbClr val="242938"/>
+                  <a:srgbClr val="1A1A1A"/>
                 </a:solidFill>
                 <a:latin typeface="Calibri" pitchFamily="34" charset="0"/>
                 <a:ea typeface="Calibri" pitchFamily="34" charset="-122"/>
@@ -6343,7 +6407,7 @@
             <a:r>
               <a:rPr lang="en-US" sz="1100" dirty="0">
                 <a:solidFill>
-                  <a:srgbClr val="242938"/>
+                  <a:srgbClr val="1A1A1A"/>
                 </a:solidFill>
                 <a:latin typeface="Calibri" pitchFamily="34" charset="0"/>
                 <a:ea typeface="Calibri" pitchFamily="34" charset="-122"/>
@@ -6364,7 +6428,7 @@
             <a:r>
               <a:rPr lang="en-US" sz="1100" dirty="0">
                 <a:solidFill>
-                  <a:srgbClr val="242938"/>
+                  <a:srgbClr val="1A1A1A"/>
                 </a:solidFill>
                 <a:latin typeface="Calibri" pitchFamily="34" charset="0"/>
                 <a:ea typeface="Calibri" pitchFamily="34" charset="-122"/>
@@ -6385,7 +6449,7 @@
             <a:r>
               <a:rPr lang="en-US" sz="1100" dirty="0">
                 <a:solidFill>
-                  <a:srgbClr val="242938"/>
+                  <a:srgbClr val="1A1A1A"/>
                 </a:solidFill>
                 <a:latin typeface="Calibri" pitchFamily="34" charset="0"/>
                 <a:ea typeface="Calibri" pitchFamily="34" charset="-122"/>
@@ -6412,11 +6476,11 @@
             <a:avLst/>
           </a:prstGeom>
           <a:solidFill>
-            <a:srgbClr val="F7F8FB"/>
+            <a:srgbClr val="F5F5F5"/>
           </a:solidFill>
           <a:ln w="25400">
             <a:solidFill>
-              <a:srgbClr val="D93025"/>
+              <a:srgbClr val="C8102E"/>
             </a:solidFill>
             <a:prstDash val="solid"/>
           </a:ln>
@@ -6449,7 +6513,7 @@
             <a:r>
               <a:rPr lang="en-US" sz="1500" b="1" dirty="0">
                 <a:solidFill>
-                  <a:srgbClr val="D93025"/>
+                  <a:srgbClr val="C8102E"/>
                 </a:solidFill>
                 <a:latin typeface="Calibri" pitchFamily="34" charset="0"/>
                 <a:ea typeface="Calibri" pitchFamily="34" charset="-122"/>
@@ -6492,7 +6556,7 @@
             <a:r>
               <a:rPr lang="en-US" sz="1100" dirty="0">
                 <a:solidFill>
-                  <a:srgbClr val="242938"/>
+                  <a:srgbClr val="1A1A1A"/>
                 </a:solidFill>
                 <a:latin typeface="Calibri" pitchFamily="34" charset="0"/>
                 <a:ea typeface="Calibri" pitchFamily="34" charset="-122"/>
@@ -6513,7 +6577,7 @@
             <a:r>
               <a:rPr lang="en-US" sz="1100" dirty="0">
                 <a:solidFill>
-                  <a:srgbClr val="242938"/>
+                  <a:srgbClr val="1A1A1A"/>
                 </a:solidFill>
                 <a:latin typeface="Calibri" pitchFamily="34" charset="0"/>
                 <a:ea typeface="Calibri" pitchFamily="34" charset="-122"/>
@@ -6534,7 +6598,7 @@
             <a:r>
               <a:rPr lang="en-US" sz="1100" dirty="0">
                 <a:solidFill>
-                  <a:srgbClr val="242938"/>
+                  <a:srgbClr val="1A1A1A"/>
                 </a:solidFill>
                 <a:latin typeface="Calibri" pitchFamily="34" charset="0"/>
                 <a:ea typeface="Calibri" pitchFamily="34" charset="-122"/>
@@ -6555,7 +6619,7 @@
             <a:r>
               <a:rPr lang="en-US" sz="1100" dirty="0">
                 <a:solidFill>
-                  <a:srgbClr val="242938"/>
+                  <a:srgbClr val="1A1A1A"/>
                 </a:solidFill>
                 <a:latin typeface="Calibri" pitchFamily="34" charset="0"/>
                 <a:ea typeface="Calibri" pitchFamily="34" charset="-122"/>
@@ -6576,7 +6640,7 @@
             <a:r>
               <a:rPr lang="en-US" sz="1100" dirty="0">
                 <a:solidFill>
-                  <a:srgbClr val="242938"/>
+                  <a:srgbClr val="1A1A1A"/>
                 </a:solidFill>
                 <a:latin typeface="Calibri" pitchFamily="34" charset="0"/>
                 <a:ea typeface="Calibri" pitchFamily="34" charset="-122"/>
@@ -6597,7 +6661,7 @@
             <a:r>
               <a:rPr lang="en-US" sz="1100" dirty="0">
                 <a:solidFill>
-                  <a:srgbClr val="242938"/>
+                  <a:srgbClr val="1A1A1A"/>
                 </a:solidFill>
                 <a:latin typeface="Calibri" pitchFamily="34" charset="0"/>
                 <a:ea typeface="Calibri" pitchFamily="34" charset="-122"/>
@@ -6618,7 +6682,7 @@
             <a:r>
               <a:rPr lang="en-US" sz="1100" dirty="0">
                 <a:solidFill>
-                  <a:srgbClr val="242938"/>
+                  <a:srgbClr val="1A1A1A"/>
                 </a:solidFill>
                 <a:latin typeface="Calibri" pitchFamily="34" charset="0"/>
                 <a:ea typeface="Calibri" pitchFamily="34" charset="-122"/>
@@ -6657,7 +6721,7 @@
             <a:r>
               <a:rPr lang="en-US" sz="900" dirty="0">
                 <a:solidFill>
-                  <a:srgbClr val="5A6378"/>
+                  <a:srgbClr val="5C5C5C"/>
                 </a:solidFill>
                 <a:latin typeface="Calibri" pitchFamily="34" charset="0"/>
                 <a:ea typeface="Calibri" pitchFamily="34" charset="-122"/>
@@ -6696,7 +6760,7 @@
             <a:r>
               <a:rPr lang="en-US" sz="900" dirty="0">
                 <a:solidFill>
-                  <a:srgbClr val="5A6378"/>
+                  <a:srgbClr val="5C5C5C"/>
                 </a:solidFill>
                 <a:latin typeface="Calibri" pitchFamily="34" charset="0"/>
                 <a:ea typeface="Calibri" pitchFamily="34" charset="-122"/>
@@ -6755,11 +6819,11 @@
             <a:avLst/>
           </a:prstGeom>
           <a:solidFill>
-            <a:srgbClr val="B87333"/>
+            <a:srgbClr val="C8102E"/>
           </a:solidFill>
           <a:ln w="12700">
             <a:solidFill>
-              <a:srgbClr val="B87333"/>
+              <a:srgbClr val="C8102E"/>
             </a:solidFill>
             <a:prstDash val="solid"/>
           </a:ln>
@@ -6792,7 +6856,7 @@
             <a:r>
               <a:rPr lang="en-US" sz="3000" b="1" dirty="0">
                 <a:solidFill>
-                  <a:srgbClr val="1E2761"/>
+                  <a:srgbClr val="1A1A1A"/>
                 </a:solidFill>
                 <a:latin typeface="Calibri" pitchFamily="34" charset="0"/>
                 <a:ea typeface="Calibri" pitchFamily="34" charset="-122"/>
@@ -6831,7 +6895,7 @@
             <a:r>
               <a:rPr lang="en-US" sz="1400" i="1" dirty="0">
                 <a:solidFill>
-                  <a:srgbClr val="5A6378"/>
+                  <a:srgbClr val="5C5C5C"/>
                 </a:solidFill>
                 <a:latin typeface="Calibri" pitchFamily="34" charset="0"/>
                 <a:ea typeface="Calibri" pitchFamily="34" charset="-122"/>
@@ -6858,11 +6922,11 @@
             <a:avLst/>
           </a:prstGeom>
           <a:solidFill>
-            <a:srgbClr val="F7F8FB"/>
+            <a:srgbClr val="F5F5F5"/>
           </a:solidFill>
           <a:ln w="12700">
             <a:solidFill>
-              <a:srgbClr val="CADCFC"/>
+              <a:srgbClr val="E0E0E0"/>
             </a:solidFill>
             <a:prstDash val="solid"/>
           </a:ln>
@@ -6883,11 +6947,11 @@
             <a:avLst/>
           </a:prstGeom>
           <a:solidFill>
-            <a:srgbClr val="B87333"/>
+            <a:srgbClr val="C8102E"/>
           </a:solidFill>
           <a:ln w="12700">
             <a:solidFill>
-              <a:srgbClr val="B87333"/>
+              <a:srgbClr val="C8102E"/>
             </a:solidFill>
             <a:prstDash val="solid"/>
           </a:ln>
@@ -6959,7 +7023,7 @@
             <a:r>
               <a:rPr lang="en-US" sz="1200" b="1" dirty="0">
                 <a:solidFill>
-                  <a:srgbClr val="1E2761"/>
+                  <a:srgbClr val="1A1A1A"/>
                 </a:solidFill>
                 <a:latin typeface="Calibri" pitchFamily="34" charset="0"/>
                 <a:ea typeface="Calibri" pitchFamily="34" charset="-122"/>
@@ -6998,7 +7062,7 @@
             <a:r>
               <a:rPr lang="en-US" sz="950" dirty="0">
                 <a:solidFill>
-                  <a:srgbClr val="242938"/>
+                  <a:srgbClr val="1A1A1A"/>
                 </a:solidFill>
                 <a:latin typeface="Calibri" pitchFamily="34" charset="0"/>
                 <a:ea typeface="Calibri" pitchFamily="34" charset="-122"/>
@@ -7025,11 +7089,11 @@
             <a:avLst/>
           </a:prstGeom>
           <a:solidFill>
-            <a:srgbClr val="F7F8FB"/>
+            <a:srgbClr val="F5F5F5"/>
           </a:solidFill>
           <a:ln w="12700">
             <a:solidFill>
-              <a:srgbClr val="CADCFC"/>
+              <a:srgbClr val="E0E0E0"/>
             </a:solidFill>
             <a:prstDash val="solid"/>
           </a:ln>
@@ -7050,11 +7114,11 @@
             <a:avLst/>
           </a:prstGeom>
           <a:solidFill>
-            <a:srgbClr val="B87333"/>
+            <a:srgbClr val="C8102E"/>
           </a:solidFill>
           <a:ln w="12700">
             <a:solidFill>
-              <a:srgbClr val="B87333"/>
+              <a:srgbClr val="C8102E"/>
             </a:solidFill>
             <a:prstDash val="solid"/>
           </a:ln>
@@ -7126,7 +7190,7 @@
             <a:r>
               <a:rPr lang="en-US" sz="1200" b="1" dirty="0">
                 <a:solidFill>
-                  <a:srgbClr val="1E2761"/>
+                  <a:srgbClr val="1A1A1A"/>
                 </a:solidFill>
                 <a:latin typeface="Calibri" pitchFamily="34" charset="0"/>
                 <a:ea typeface="Calibri" pitchFamily="34" charset="-122"/>
@@ -7165,7 +7229,7 @@
             <a:r>
               <a:rPr lang="en-US" sz="950" dirty="0">
                 <a:solidFill>
-                  <a:srgbClr val="242938"/>
+                  <a:srgbClr val="1A1A1A"/>
                 </a:solidFill>
                 <a:latin typeface="Calibri" pitchFamily="34" charset="0"/>
                 <a:ea typeface="Calibri" pitchFamily="34" charset="-122"/>
@@ -7192,11 +7256,11 @@
             <a:avLst/>
           </a:prstGeom>
           <a:solidFill>
-            <a:srgbClr val="F7F8FB"/>
+            <a:srgbClr val="F5F5F5"/>
           </a:solidFill>
           <a:ln w="12700">
             <a:solidFill>
-              <a:srgbClr val="CADCFC"/>
+              <a:srgbClr val="E0E0E0"/>
             </a:solidFill>
             <a:prstDash val="solid"/>
           </a:ln>
@@ -7217,11 +7281,11 @@
             <a:avLst/>
           </a:prstGeom>
           <a:solidFill>
-            <a:srgbClr val="B87333"/>
+            <a:srgbClr val="C8102E"/>
           </a:solidFill>
           <a:ln w="12700">
             <a:solidFill>
-              <a:srgbClr val="B87333"/>
+              <a:srgbClr val="C8102E"/>
             </a:solidFill>
             <a:prstDash val="solid"/>
           </a:ln>
@@ -7293,7 +7357,7 @@
             <a:r>
               <a:rPr lang="en-US" sz="1200" b="1" dirty="0">
                 <a:solidFill>
-                  <a:srgbClr val="1E2761"/>
+                  <a:srgbClr val="1A1A1A"/>
                 </a:solidFill>
                 <a:latin typeface="Calibri" pitchFamily="34" charset="0"/>
                 <a:ea typeface="Calibri" pitchFamily="34" charset="-122"/>
@@ -7332,7 +7396,7 @@
             <a:r>
               <a:rPr lang="en-US" sz="950" dirty="0">
                 <a:solidFill>
-                  <a:srgbClr val="242938"/>
+                  <a:srgbClr val="1A1A1A"/>
                 </a:solidFill>
                 <a:latin typeface="Calibri" pitchFamily="34" charset="0"/>
                 <a:ea typeface="Calibri" pitchFamily="34" charset="-122"/>
@@ -7359,11 +7423,11 @@
             <a:avLst/>
           </a:prstGeom>
           <a:solidFill>
-            <a:srgbClr val="F7F8FB"/>
+            <a:srgbClr val="F5F5F5"/>
           </a:solidFill>
           <a:ln w="12700">
             <a:solidFill>
-              <a:srgbClr val="CADCFC"/>
+              <a:srgbClr val="E0E0E0"/>
             </a:solidFill>
             <a:prstDash val="solid"/>
           </a:ln>
@@ -7384,11 +7448,11 @@
             <a:avLst/>
           </a:prstGeom>
           <a:solidFill>
-            <a:srgbClr val="B87333"/>
+            <a:srgbClr val="C8102E"/>
           </a:solidFill>
           <a:ln w="12700">
             <a:solidFill>
-              <a:srgbClr val="B87333"/>
+              <a:srgbClr val="C8102E"/>
             </a:solidFill>
             <a:prstDash val="solid"/>
           </a:ln>
@@ -7460,7 +7524,7 @@
             <a:r>
               <a:rPr lang="en-US" sz="1200" b="1" dirty="0">
                 <a:solidFill>
-                  <a:srgbClr val="1E2761"/>
+                  <a:srgbClr val="1A1A1A"/>
                 </a:solidFill>
                 <a:latin typeface="Calibri" pitchFamily="34" charset="0"/>
                 <a:ea typeface="Calibri" pitchFamily="34" charset="-122"/>
@@ -7499,7 +7563,7 @@
             <a:r>
               <a:rPr lang="en-US" sz="950" dirty="0">
                 <a:solidFill>
-                  <a:srgbClr val="242938"/>
+                  <a:srgbClr val="1A1A1A"/>
                 </a:solidFill>
                 <a:latin typeface="Calibri" pitchFamily="34" charset="0"/>
                 <a:ea typeface="Calibri" pitchFamily="34" charset="-122"/>
@@ -7526,11 +7590,11 @@
             <a:avLst/>
           </a:prstGeom>
           <a:solidFill>
-            <a:srgbClr val="F7F8FB"/>
+            <a:srgbClr val="F5F5F5"/>
           </a:solidFill>
           <a:ln w="12700">
             <a:solidFill>
-              <a:srgbClr val="CADCFC"/>
+              <a:srgbClr val="E0E0E0"/>
             </a:solidFill>
             <a:prstDash val="solid"/>
           </a:ln>
@@ -7551,11 +7615,11 @@
             <a:avLst/>
           </a:prstGeom>
           <a:solidFill>
-            <a:srgbClr val="B87333"/>
+            <a:srgbClr val="C8102E"/>
           </a:solidFill>
           <a:ln w="12700">
             <a:solidFill>
-              <a:srgbClr val="B87333"/>
+              <a:srgbClr val="C8102E"/>
             </a:solidFill>
             <a:prstDash val="solid"/>
           </a:ln>
@@ -7627,7 +7691,7 @@
             <a:r>
               <a:rPr lang="en-US" sz="1200" b="1" dirty="0">
                 <a:solidFill>
-                  <a:srgbClr val="1E2761"/>
+                  <a:srgbClr val="1A1A1A"/>
                 </a:solidFill>
                 <a:latin typeface="Calibri" pitchFamily="34" charset="0"/>
                 <a:ea typeface="Calibri" pitchFamily="34" charset="-122"/>
@@ -7666,7 +7730,7 @@
             <a:r>
               <a:rPr lang="en-US" sz="950" dirty="0">
                 <a:solidFill>
-                  <a:srgbClr val="242938"/>
+                  <a:srgbClr val="1A1A1A"/>
                 </a:solidFill>
                 <a:latin typeface="Calibri" pitchFamily="34" charset="0"/>
                 <a:ea typeface="Calibri" pitchFamily="34" charset="-122"/>
@@ -7693,11 +7757,11 @@
             <a:avLst/>
           </a:prstGeom>
           <a:solidFill>
-            <a:srgbClr val="F7F8FB"/>
+            <a:srgbClr val="F5F5F5"/>
           </a:solidFill>
           <a:ln w="12700">
             <a:solidFill>
-              <a:srgbClr val="CADCFC"/>
+              <a:srgbClr val="E0E0E0"/>
             </a:solidFill>
             <a:prstDash val="solid"/>
           </a:ln>
@@ -7718,11 +7782,11 @@
             <a:avLst/>
           </a:prstGeom>
           <a:solidFill>
-            <a:srgbClr val="B87333"/>
+            <a:srgbClr val="C8102E"/>
           </a:solidFill>
           <a:ln w="12700">
             <a:solidFill>
-              <a:srgbClr val="B87333"/>
+              <a:srgbClr val="C8102E"/>
             </a:solidFill>
             <a:prstDash val="solid"/>
           </a:ln>
@@ -7794,7 +7858,7 @@
             <a:r>
               <a:rPr lang="en-US" sz="1200" b="1" dirty="0">
                 <a:solidFill>
-                  <a:srgbClr val="1E2761"/>
+                  <a:srgbClr val="1A1A1A"/>
                 </a:solidFill>
                 <a:latin typeface="Calibri" pitchFamily="34" charset="0"/>
                 <a:ea typeface="Calibri" pitchFamily="34" charset="-122"/>
@@ -7833,7 +7897,7 @@
             <a:r>
               <a:rPr lang="en-US" sz="950" dirty="0">
                 <a:solidFill>
-                  <a:srgbClr val="242938"/>
+                  <a:srgbClr val="1A1A1A"/>
                 </a:solidFill>
                 <a:latin typeface="Calibri" pitchFamily="34" charset="0"/>
                 <a:ea typeface="Calibri" pitchFamily="34" charset="-122"/>
@@ -7872,7 +7936,7 @@
             <a:r>
               <a:rPr lang="en-US" sz="900" dirty="0">
                 <a:solidFill>
-                  <a:srgbClr val="5A6378"/>
+                  <a:srgbClr val="5C5C5C"/>
                 </a:solidFill>
                 <a:latin typeface="Calibri" pitchFamily="34" charset="0"/>
                 <a:ea typeface="Calibri" pitchFamily="34" charset="-122"/>
@@ -7911,7 +7975,7 @@
             <a:r>
               <a:rPr lang="en-US" sz="900" dirty="0">
                 <a:solidFill>
-                  <a:srgbClr val="5A6378"/>
+                  <a:srgbClr val="5C5C5C"/>
                 </a:solidFill>
                 <a:latin typeface="Calibri" pitchFamily="34" charset="0"/>
                 <a:ea typeface="Calibri" pitchFamily="34" charset="-122"/>
@@ -7970,11 +8034,11 @@
             <a:avLst/>
           </a:prstGeom>
           <a:solidFill>
-            <a:srgbClr val="B87333"/>
+            <a:srgbClr val="C8102E"/>
           </a:solidFill>
           <a:ln w="12700">
             <a:solidFill>
-              <a:srgbClr val="B87333"/>
+              <a:srgbClr val="C8102E"/>
             </a:solidFill>
             <a:prstDash val="solid"/>
           </a:ln>
@@ -8007,7 +8071,7 @@
             <a:r>
               <a:rPr lang="en-US" sz="3000" b="1" dirty="0">
                 <a:solidFill>
-                  <a:srgbClr val="1E2761"/>
+                  <a:srgbClr val="1A1A1A"/>
                 </a:solidFill>
                 <a:latin typeface="Calibri" pitchFamily="34" charset="0"/>
                 <a:ea typeface="Calibri" pitchFamily="34" charset="-122"/>
@@ -8046,7 +8110,7 @@
             <a:r>
               <a:rPr lang="en-US" sz="1400" i="1" dirty="0">
                 <a:solidFill>
-                  <a:srgbClr val="5A6378"/>
+                  <a:srgbClr val="5C5C5C"/>
                 </a:solidFill>
                 <a:latin typeface="Calibri" pitchFamily="34" charset="0"/>
                 <a:ea typeface="Calibri" pitchFamily="34" charset="-122"/>
@@ -8073,11 +8137,11 @@
             <a:avLst/>
           </a:prstGeom>
           <a:solidFill>
-            <a:srgbClr val="F7F8FB"/>
+            <a:srgbClr val="F5F5F5"/>
           </a:solidFill>
           <a:ln w="12700">
             <a:solidFill>
-              <a:srgbClr val="CADCFC"/>
+              <a:srgbClr val="E0E0E0"/>
             </a:solidFill>
             <a:prstDash val="solid"/>
           </a:ln>
@@ -8098,11 +8162,11 @@
             <a:avLst/>
           </a:prstGeom>
           <a:solidFill>
-            <a:srgbClr val="0F9D58"/>
+            <a:srgbClr val="2E7D32"/>
           </a:solidFill>
           <a:ln w="12700">
             <a:solidFill>
-              <a:srgbClr val="0F9D58"/>
+              <a:srgbClr val="2E7D32"/>
             </a:solidFill>
             <a:prstDash val="solid"/>
           </a:ln>
@@ -8178,7 +8242,7 @@
             <a:r>
               <a:rPr lang="en-US" sz="1050" dirty="0">
                 <a:solidFill>
-                  <a:srgbClr val="242938"/>
+                  <a:srgbClr val="1A1A1A"/>
                 </a:solidFill>
                 <a:latin typeface="Calibri" pitchFamily="34" charset="0"/>
                 <a:ea typeface="Calibri" pitchFamily="34" charset="-122"/>
@@ -8199,7 +8263,7 @@
             <a:r>
               <a:rPr lang="en-US" sz="1050" dirty="0">
                 <a:solidFill>
-                  <a:srgbClr val="242938"/>
+                  <a:srgbClr val="1A1A1A"/>
                 </a:solidFill>
                 <a:latin typeface="Calibri" pitchFamily="34" charset="0"/>
                 <a:ea typeface="Calibri" pitchFamily="34" charset="-122"/>
@@ -8220,7 +8284,7 @@
             <a:r>
               <a:rPr lang="en-US" sz="1050" dirty="0">
                 <a:solidFill>
-                  <a:srgbClr val="242938"/>
+                  <a:srgbClr val="1A1A1A"/>
                 </a:solidFill>
                 <a:latin typeface="Calibri" pitchFamily="34" charset="0"/>
                 <a:ea typeface="Calibri" pitchFamily="34" charset="-122"/>
@@ -8241,7 +8305,7 @@
             <a:r>
               <a:rPr lang="en-US" sz="1050" dirty="0">
                 <a:solidFill>
-                  <a:srgbClr val="242938"/>
+                  <a:srgbClr val="1A1A1A"/>
                 </a:solidFill>
                 <a:latin typeface="Calibri" pitchFamily="34" charset="0"/>
                 <a:ea typeface="Calibri" pitchFamily="34" charset="-122"/>
@@ -8262,7 +8326,7 @@
             <a:r>
               <a:rPr lang="en-US" sz="1050" dirty="0">
                 <a:solidFill>
-                  <a:srgbClr val="242938"/>
+                  <a:srgbClr val="1A1A1A"/>
                 </a:solidFill>
                 <a:latin typeface="Calibri" pitchFamily="34" charset="0"/>
                 <a:ea typeface="Calibri" pitchFamily="34" charset="-122"/>
@@ -8283,7 +8347,7 @@
             <a:r>
               <a:rPr lang="en-US" sz="1050" dirty="0">
                 <a:solidFill>
-                  <a:srgbClr val="242938"/>
+                  <a:srgbClr val="1A1A1A"/>
                 </a:solidFill>
                 <a:latin typeface="Calibri" pitchFamily="34" charset="0"/>
                 <a:ea typeface="Calibri" pitchFamily="34" charset="-122"/>
@@ -8310,11 +8374,11 @@
             <a:avLst/>
           </a:prstGeom>
           <a:solidFill>
-            <a:srgbClr val="F7F8FB"/>
+            <a:srgbClr val="F5F5F5"/>
           </a:solidFill>
           <a:ln w="12700">
             <a:solidFill>
-              <a:srgbClr val="CADCFC"/>
+              <a:srgbClr val="E0E0E0"/>
             </a:solidFill>
             <a:prstDash val="solid"/>
           </a:ln>
@@ -8335,11 +8399,11 @@
             <a:avLst/>
           </a:prstGeom>
           <a:solidFill>
-            <a:srgbClr val="B87333"/>
+            <a:srgbClr val="C8102E"/>
           </a:solidFill>
           <a:ln w="12700">
             <a:solidFill>
-              <a:srgbClr val="B87333"/>
+              <a:srgbClr val="C8102E"/>
             </a:solidFill>
             <a:prstDash val="solid"/>
           </a:ln>
@@ -8415,7 +8479,7 @@
             <a:r>
               <a:rPr lang="en-US" sz="1050" dirty="0">
                 <a:solidFill>
-                  <a:srgbClr val="242938"/>
+                  <a:srgbClr val="1A1A1A"/>
                 </a:solidFill>
                 <a:latin typeface="Calibri" pitchFamily="34" charset="0"/>
                 <a:ea typeface="Calibri" pitchFamily="34" charset="-122"/>
@@ -8436,7 +8500,7 @@
             <a:r>
               <a:rPr lang="en-US" sz="1050" dirty="0">
                 <a:solidFill>
-                  <a:srgbClr val="242938"/>
+                  <a:srgbClr val="1A1A1A"/>
                 </a:solidFill>
                 <a:latin typeface="Calibri" pitchFamily="34" charset="0"/>
                 <a:ea typeface="Calibri" pitchFamily="34" charset="-122"/>
@@ -8457,7 +8521,7 @@
             <a:r>
               <a:rPr lang="en-US" sz="1050" dirty="0">
                 <a:solidFill>
-                  <a:srgbClr val="242938"/>
+                  <a:srgbClr val="1A1A1A"/>
                 </a:solidFill>
                 <a:latin typeface="Calibri" pitchFamily="34" charset="0"/>
                 <a:ea typeface="Calibri" pitchFamily="34" charset="-122"/>
@@ -8478,7 +8542,7 @@
             <a:r>
               <a:rPr lang="en-US" sz="1050" dirty="0">
                 <a:solidFill>
-                  <a:srgbClr val="242938"/>
+                  <a:srgbClr val="1A1A1A"/>
                 </a:solidFill>
                 <a:latin typeface="Calibri" pitchFamily="34" charset="0"/>
                 <a:ea typeface="Calibri" pitchFamily="34" charset="-122"/>
@@ -8499,7 +8563,7 @@
             <a:r>
               <a:rPr lang="en-US" sz="1050" dirty="0">
                 <a:solidFill>
-                  <a:srgbClr val="242938"/>
+                  <a:srgbClr val="1A1A1A"/>
                 </a:solidFill>
                 <a:latin typeface="Calibri" pitchFamily="34" charset="0"/>
                 <a:ea typeface="Calibri" pitchFamily="34" charset="-122"/>
@@ -8526,11 +8590,11 @@
             <a:avLst/>
           </a:prstGeom>
           <a:solidFill>
-            <a:srgbClr val="F7F8FB"/>
+            <a:srgbClr val="F5F5F5"/>
           </a:solidFill>
           <a:ln w="12700">
             <a:solidFill>
-              <a:srgbClr val="CADCFC"/>
+              <a:srgbClr val="E0E0E0"/>
             </a:solidFill>
             <a:prstDash val="solid"/>
           </a:ln>
@@ -8551,11 +8615,11 @@
             <a:avLst/>
           </a:prstGeom>
           <a:solidFill>
-            <a:srgbClr val="1E2761"/>
+            <a:srgbClr val="1A1A1A"/>
           </a:solidFill>
           <a:ln w="12700">
             <a:solidFill>
-              <a:srgbClr val="1E2761"/>
+              <a:srgbClr val="1A1A1A"/>
             </a:solidFill>
             <a:prstDash val="solid"/>
           </a:ln>
@@ -8631,7 +8695,7 @@
             <a:r>
               <a:rPr lang="en-US" sz="1050" dirty="0">
                 <a:solidFill>
-                  <a:srgbClr val="242938"/>
+                  <a:srgbClr val="1A1A1A"/>
                 </a:solidFill>
                 <a:latin typeface="Calibri" pitchFamily="34" charset="0"/>
                 <a:ea typeface="Calibri" pitchFamily="34" charset="-122"/>
@@ -8652,7 +8716,7 @@
             <a:r>
               <a:rPr lang="en-US" sz="1050" dirty="0">
                 <a:solidFill>
-                  <a:srgbClr val="242938"/>
+                  <a:srgbClr val="1A1A1A"/>
                 </a:solidFill>
                 <a:latin typeface="Calibri" pitchFamily="34" charset="0"/>
                 <a:ea typeface="Calibri" pitchFamily="34" charset="-122"/>
@@ -8673,7 +8737,7 @@
             <a:r>
               <a:rPr lang="en-US" sz="1050" dirty="0">
                 <a:solidFill>
-                  <a:srgbClr val="242938"/>
+                  <a:srgbClr val="1A1A1A"/>
                 </a:solidFill>
                 <a:latin typeface="Calibri" pitchFamily="34" charset="0"/>
                 <a:ea typeface="Calibri" pitchFamily="34" charset="-122"/>
@@ -8694,7 +8758,7 @@
             <a:r>
               <a:rPr lang="en-US" sz="1050" dirty="0">
                 <a:solidFill>
-                  <a:srgbClr val="242938"/>
+                  <a:srgbClr val="1A1A1A"/>
                 </a:solidFill>
                 <a:latin typeface="Calibri" pitchFamily="34" charset="0"/>
                 <a:ea typeface="Calibri" pitchFamily="34" charset="-122"/>
@@ -8715,7 +8779,7 @@
             <a:r>
               <a:rPr lang="en-US" sz="1050" dirty="0">
                 <a:solidFill>
-                  <a:srgbClr val="242938"/>
+                  <a:srgbClr val="1A1A1A"/>
                 </a:solidFill>
                 <a:latin typeface="Calibri" pitchFamily="34" charset="0"/>
                 <a:ea typeface="Calibri" pitchFamily="34" charset="-122"/>
@@ -8754,7 +8818,7 @@
             <a:r>
               <a:rPr lang="en-US" sz="1100" i="1" dirty="0">
                 <a:solidFill>
-                  <a:srgbClr val="5A6378"/>
+                  <a:srgbClr val="5C5C5C"/>
                 </a:solidFill>
                 <a:latin typeface="Calibri" pitchFamily="34" charset="0"/>
                 <a:ea typeface="Calibri" pitchFamily="34" charset="-122"/>
@@ -8793,7 +8857,7 @@
             <a:r>
               <a:rPr lang="en-US" sz="900" dirty="0">
                 <a:solidFill>
-                  <a:srgbClr val="5A6378"/>
+                  <a:srgbClr val="5C5C5C"/>
                 </a:solidFill>
                 <a:latin typeface="Calibri" pitchFamily="34" charset="0"/>
                 <a:ea typeface="Calibri" pitchFamily="34" charset="-122"/>
@@ -8832,7 +8896,7 @@
             <a:r>
               <a:rPr lang="en-US" sz="900" dirty="0">
                 <a:solidFill>
-                  <a:srgbClr val="5A6378"/>
+                  <a:srgbClr val="5C5C5C"/>
                 </a:solidFill>
                 <a:latin typeface="Calibri" pitchFamily="34" charset="0"/>
                 <a:ea typeface="Calibri" pitchFamily="34" charset="-122"/>
@@ -8858,7 +8922,7 @@
     <p:bg>
       <p:bgPr>
         <a:solidFill>
-          <a:srgbClr val="1E2761"/>
+          <a:srgbClr val="1A1A1A"/>
         </a:solidFill>
       </p:bgPr>
     </p:bg>
@@ -8891,11 +8955,11 @@
             <a:avLst/>
           </a:prstGeom>
           <a:solidFill>
-            <a:srgbClr val="B87333"/>
+            <a:srgbClr val="C8102E"/>
           </a:solidFill>
           <a:ln w="12700">
             <a:solidFill>
-              <a:srgbClr val="B87333"/>
+              <a:srgbClr val="C8102E"/>
             </a:solidFill>
             <a:prstDash val="solid"/>
           </a:ln>
@@ -8916,11 +8980,11 @@
             <a:avLst/>
           </a:prstGeom>
           <a:solidFill>
-            <a:srgbClr val="B87333"/>
+            <a:srgbClr val="C8102E"/>
           </a:solidFill>
           <a:ln w="12700">
             <a:solidFill>
-              <a:srgbClr val="B87333"/>
+              <a:srgbClr val="C8102E"/>
             </a:solidFill>
             <a:prstDash val="solid"/>
           </a:ln>
@@ -8984,7 +9048,7 @@
           </a:solidFill>
           <a:ln w="12700">
             <a:solidFill>
-              <a:srgbClr val="B87333"/>
+              <a:srgbClr val="C8102E"/>
             </a:solidFill>
             <a:prstDash val="solid"/>
           </a:ln>
@@ -9017,7 +9081,7 @@
             <a:r>
               <a:rPr lang="en-US" sz="2200" b="1" dirty="0">
                 <a:solidFill>
-                  <a:srgbClr val="1E2761"/>
+                  <a:srgbClr val="1A1A1A"/>
                 </a:solidFill>
                 <a:latin typeface="Calibri" pitchFamily="34" charset="0"/>
                 <a:ea typeface="Calibri" pitchFamily="34" charset="-122"/>
@@ -9056,7 +9120,7 @@
             <a:r>
               <a:rPr lang="en-US" sz="1400" dirty="0">
                 <a:solidFill>
-                  <a:srgbClr val="242938"/>
+                  <a:srgbClr val="1A1A1A"/>
                 </a:solidFill>
                 <a:latin typeface="Calibri" pitchFamily="34" charset="0"/>
                 <a:ea typeface="Calibri" pitchFamily="34" charset="-122"/>
@@ -9087,7 +9151,7 @@
           </a:solidFill>
           <a:ln w="19050">
             <a:solidFill>
-              <a:srgbClr val="0F9D58"/>
+              <a:srgbClr val="2E7D32"/>
             </a:solidFill>
             <a:prstDash val="solid"/>
           </a:ln>
@@ -9120,7 +9184,7 @@
             <a:r>
               <a:rPr lang="en-US" sz="1300" b="1" dirty="0">
                 <a:solidFill>
-                  <a:srgbClr val="0F9D58"/>
+                  <a:srgbClr val="2E7D32"/>
                 </a:solidFill>
                 <a:latin typeface="Calibri" pitchFamily="34" charset="0"/>
                 <a:ea typeface="Calibri" pitchFamily="34" charset="-122"/>
@@ -9159,7 +9223,7 @@
             <a:r>
               <a:rPr lang="en-US" sz="1000" dirty="0">
                 <a:solidFill>
-                  <a:srgbClr val="242938"/>
+                  <a:srgbClr val="1A1A1A"/>
                 </a:solidFill>
                 <a:latin typeface="Calibri" pitchFamily="34" charset="0"/>
                 <a:ea typeface="Calibri" pitchFamily="34" charset="-122"/>
@@ -9176,7 +9240,7 @@
             <a:r>
               <a:rPr lang="en-US" sz="1000" dirty="0">
                 <a:solidFill>
-                  <a:srgbClr val="242938"/>
+                  <a:srgbClr val="1A1A1A"/>
                 </a:solidFill>
                 <a:latin typeface="Calibri" pitchFamily="34" charset="0"/>
                 <a:ea typeface="Calibri" pitchFamily="34" charset="-122"/>
@@ -9193,7 +9257,7 @@
             <a:r>
               <a:rPr lang="en-US" sz="1000" dirty="0">
                 <a:solidFill>
-                  <a:srgbClr val="242938"/>
+                  <a:srgbClr val="1A1A1A"/>
                 </a:solidFill>
                 <a:latin typeface="Calibri" pitchFamily="34" charset="0"/>
                 <a:ea typeface="Calibri" pitchFamily="34" charset="-122"/>
@@ -9210,7 +9274,7 @@
             <a:r>
               <a:rPr lang="en-US" sz="1000" dirty="0">
                 <a:solidFill>
-                  <a:srgbClr val="242938"/>
+                  <a:srgbClr val="1A1A1A"/>
                 </a:solidFill>
                 <a:latin typeface="Calibri" pitchFamily="34" charset="0"/>
                 <a:ea typeface="Calibri" pitchFamily="34" charset="-122"/>
@@ -9241,7 +9305,7 @@
           </a:solidFill>
           <a:ln w="19050">
             <a:solidFill>
-              <a:srgbClr val="B87333"/>
+              <a:srgbClr val="C8102E"/>
             </a:solidFill>
             <a:prstDash val="solid"/>
           </a:ln>
@@ -9274,7 +9338,7 @@
             <a:r>
               <a:rPr lang="en-US" sz="1300" b="1" dirty="0">
                 <a:solidFill>
-                  <a:srgbClr val="B87333"/>
+                  <a:srgbClr val="C8102E"/>
                 </a:solidFill>
                 <a:latin typeface="Calibri" pitchFamily="34" charset="0"/>
                 <a:ea typeface="Calibri" pitchFamily="34" charset="-122"/>
@@ -9313,7 +9377,7 @@
             <a:r>
               <a:rPr lang="en-US" sz="1100" dirty="0">
                 <a:solidFill>
-                  <a:srgbClr val="242938"/>
+                  <a:srgbClr val="1A1A1A"/>
                 </a:solidFill>
                 <a:latin typeface="Calibri" pitchFamily="34" charset="0"/>
                 <a:ea typeface="Calibri" pitchFamily="34" charset="-122"/>
@@ -9330,7 +9394,7 @@
             <a:r>
               <a:rPr lang="en-US" sz="1100" dirty="0">
                 <a:solidFill>
-                  <a:srgbClr val="242938"/>
+                  <a:srgbClr val="1A1A1A"/>
                 </a:solidFill>
                 <a:latin typeface="Calibri" pitchFamily="34" charset="0"/>
                 <a:ea typeface="Calibri" pitchFamily="34" charset="-122"/>
@@ -9347,7 +9411,7 @@
             <a:r>
               <a:rPr lang="en-US" sz="1100" dirty="0">
                 <a:solidFill>
-                  <a:srgbClr val="242938"/>
+                  <a:srgbClr val="1A1A1A"/>
                 </a:solidFill>
                 <a:latin typeface="Calibri" pitchFamily="34" charset="0"/>
                 <a:ea typeface="Calibri" pitchFamily="34" charset="-122"/>
@@ -9386,7 +9450,7 @@
             <a:r>
               <a:rPr lang="en-US" sz="1200" i="1" dirty="0">
                 <a:solidFill>
-                  <a:srgbClr val="E8A87C"/>
+                  <a:srgbClr val="F08080"/>
                 </a:solidFill>
                 <a:latin typeface="Calibri" pitchFamily="34" charset="0"/>
                 <a:ea typeface="Calibri" pitchFamily="34" charset="-122"/>
@@ -9445,11 +9509,11 @@
             <a:avLst/>
           </a:prstGeom>
           <a:solidFill>
-            <a:srgbClr val="B87333"/>
+            <a:srgbClr val="C8102E"/>
           </a:solidFill>
           <a:ln w="12700">
             <a:solidFill>
-              <a:srgbClr val="B87333"/>
+              <a:srgbClr val="C8102E"/>
             </a:solidFill>
             <a:prstDash val="solid"/>
           </a:ln>
@@ -9482,7 +9546,7 @@
             <a:r>
               <a:rPr lang="en-US" sz="3000" b="1" dirty="0">
                 <a:solidFill>
-                  <a:srgbClr val="1E2761"/>
+                  <a:srgbClr val="1A1A1A"/>
                 </a:solidFill>
                 <a:latin typeface="Calibri" pitchFamily="34" charset="0"/>
                 <a:ea typeface="Calibri" pitchFamily="34" charset="-122"/>
@@ -9521,7 +9585,7 @@
             <a:r>
               <a:rPr lang="en-US" sz="1400" i="1" dirty="0">
                 <a:solidFill>
-                  <a:srgbClr val="5A6378"/>
+                  <a:srgbClr val="5C5C5C"/>
                 </a:solidFill>
                 <a:latin typeface="Calibri" pitchFamily="34" charset="0"/>
                 <a:ea typeface="Calibri" pitchFamily="34" charset="-122"/>
@@ -9548,11 +9612,11 @@
             <a:avLst/>
           </a:prstGeom>
           <a:solidFill>
-            <a:srgbClr val="F7F8FB"/>
+            <a:srgbClr val="F5F5F5"/>
           </a:solidFill>
           <a:ln w="12700">
             <a:solidFill>
-              <a:srgbClr val="CADCFC"/>
+              <a:srgbClr val="E0E0E0"/>
             </a:solidFill>
             <a:prstDash val="solid"/>
           </a:ln>
@@ -9573,11 +9637,11 @@
             <a:avLst/>
           </a:prstGeom>
           <a:solidFill>
-            <a:srgbClr val="B87333"/>
+            <a:srgbClr val="C8102E"/>
           </a:solidFill>
           <a:ln w="12700">
             <a:solidFill>
-              <a:srgbClr val="B87333"/>
+              <a:srgbClr val="C8102E"/>
             </a:solidFill>
             <a:prstDash val="solid"/>
           </a:ln>
@@ -9649,7 +9713,7 @@
             <a:r>
               <a:rPr lang="en-US" sz="1500" b="1" dirty="0">
                 <a:solidFill>
-                  <a:srgbClr val="1E2761"/>
+                  <a:srgbClr val="1A1A1A"/>
                 </a:solidFill>
                 <a:latin typeface="Calibri" pitchFamily="34" charset="0"/>
                 <a:ea typeface="Calibri" pitchFamily="34" charset="-122"/>
@@ -9688,7 +9752,7 @@
             <a:r>
               <a:rPr lang="en-US" sz="1100" dirty="0">
                 <a:solidFill>
-                  <a:srgbClr val="242938"/>
+                  <a:srgbClr val="1A1A1A"/>
                 </a:solidFill>
                 <a:latin typeface="Calibri" pitchFamily="34" charset="0"/>
                 <a:ea typeface="Calibri" pitchFamily="34" charset="-122"/>
@@ -9715,11 +9779,11 @@
             <a:avLst/>
           </a:prstGeom>
           <a:solidFill>
-            <a:srgbClr val="F7F8FB"/>
+            <a:srgbClr val="F5F5F5"/>
           </a:solidFill>
           <a:ln w="12700">
             <a:solidFill>
-              <a:srgbClr val="CADCFC"/>
+              <a:srgbClr val="E0E0E0"/>
             </a:solidFill>
             <a:prstDash val="solid"/>
           </a:ln>
@@ -9740,11 +9804,11 @@
             <a:avLst/>
           </a:prstGeom>
           <a:solidFill>
-            <a:srgbClr val="B87333"/>
+            <a:srgbClr val="C8102E"/>
           </a:solidFill>
           <a:ln w="12700">
             <a:solidFill>
-              <a:srgbClr val="B87333"/>
+              <a:srgbClr val="C8102E"/>
             </a:solidFill>
             <a:prstDash val="solid"/>
           </a:ln>
@@ -9816,7 +9880,7 @@
             <a:r>
               <a:rPr lang="en-US" sz="1500" b="1" dirty="0">
                 <a:solidFill>
-                  <a:srgbClr val="1E2761"/>
+                  <a:srgbClr val="1A1A1A"/>
                 </a:solidFill>
                 <a:latin typeface="Calibri" pitchFamily="34" charset="0"/>
                 <a:ea typeface="Calibri" pitchFamily="34" charset="-122"/>
@@ -9855,7 +9919,7 @@
             <a:r>
               <a:rPr lang="en-US" sz="1100" dirty="0">
                 <a:solidFill>
-                  <a:srgbClr val="242938"/>
+                  <a:srgbClr val="1A1A1A"/>
                 </a:solidFill>
                 <a:latin typeface="Calibri" pitchFamily="34" charset="0"/>
                 <a:ea typeface="Calibri" pitchFamily="34" charset="-122"/>
@@ -9882,11 +9946,11 @@
             <a:avLst/>
           </a:prstGeom>
           <a:solidFill>
-            <a:srgbClr val="F7F8FB"/>
+            <a:srgbClr val="F5F5F5"/>
           </a:solidFill>
           <a:ln w="12700">
             <a:solidFill>
-              <a:srgbClr val="CADCFC"/>
+              <a:srgbClr val="E0E0E0"/>
             </a:solidFill>
             <a:prstDash val="solid"/>
           </a:ln>
@@ -9907,11 +9971,11 @@
             <a:avLst/>
           </a:prstGeom>
           <a:solidFill>
-            <a:srgbClr val="B87333"/>
+            <a:srgbClr val="C8102E"/>
           </a:solidFill>
           <a:ln w="12700">
             <a:solidFill>
-              <a:srgbClr val="B87333"/>
+              <a:srgbClr val="C8102E"/>
             </a:solidFill>
             <a:prstDash val="solid"/>
           </a:ln>
@@ -9983,7 +10047,7 @@
             <a:r>
               <a:rPr lang="en-US" sz="1500" b="1" dirty="0">
                 <a:solidFill>
-                  <a:srgbClr val="1E2761"/>
+                  <a:srgbClr val="1A1A1A"/>
                 </a:solidFill>
                 <a:latin typeface="Calibri" pitchFamily="34" charset="0"/>
                 <a:ea typeface="Calibri" pitchFamily="34" charset="-122"/>
@@ -10022,7 +10086,7 @@
             <a:r>
               <a:rPr lang="en-US" sz="1100" dirty="0">
                 <a:solidFill>
-                  <a:srgbClr val="242938"/>
+                  <a:srgbClr val="1A1A1A"/>
                 </a:solidFill>
                 <a:latin typeface="Calibri" pitchFamily="34" charset="0"/>
                 <a:ea typeface="Calibri" pitchFamily="34" charset="-122"/>
@@ -10049,11 +10113,11 @@
             <a:avLst/>
           </a:prstGeom>
           <a:solidFill>
-            <a:srgbClr val="F7F8FB"/>
+            <a:srgbClr val="F5F5F5"/>
           </a:solidFill>
           <a:ln w="12700">
             <a:solidFill>
-              <a:srgbClr val="CADCFC"/>
+              <a:srgbClr val="E0E0E0"/>
             </a:solidFill>
             <a:prstDash val="solid"/>
           </a:ln>
@@ -10074,11 +10138,11 @@
             <a:avLst/>
           </a:prstGeom>
           <a:solidFill>
-            <a:srgbClr val="B87333"/>
+            <a:srgbClr val="C8102E"/>
           </a:solidFill>
           <a:ln w="12700">
             <a:solidFill>
-              <a:srgbClr val="B87333"/>
+              <a:srgbClr val="C8102E"/>
             </a:solidFill>
             <a:prstDash val="solid"/>
           </a:ln>
@@ -10150,7 +10214,7 @@
             <a:r>
               <a:rPr lang="en-US" sz="1500" b="1" dirty="0">
                 <a:solidFill>
-                  <a:srgbClr val="1E2761"/>
+                  <a:srgbClr val="1A1A1A"/>
                 </a:solidFill>
                 <a:latin typeface="Calibri" pitchFamily="34" charset="0"/>
                 <a:ea typeface="Calibri" pitchFamily="34" charset="-122"/>
@@ -10189,7 +10253,7 @@
             <a:r>
               <a:rPr lang="en-US" sz="1100" dirty="0">
                 <a:solidFill>
-                  <a:srgbClr val="242938"/>
+                  <a:srgbClr val="1A1A1A"/>
                 </a:solidFill>
                 <a:latin typeface="Calibri" pitchFamily="34" charset="0"/>
                 <a:ea typeface="Calibri" pitchFamily="34" charset="-122"/>
@@ -10216,11 +10280,11 @@
             <a:avLst/>
           </a:prstGeom>
           <a:solidFill>
-            <a:srgbClr val="F7F8FB"/>
+            <a:srgbClr val="F5F5F5"/>
           </a:solidFill>
           <a:ln w="12700">
             <a:solidFill>
-              <a:srgbClr val="CADCFC"/>
+              <a:srgbClr val="E0E0E0"/>
             </a:solidFill>
             <a:prstDash val="solid"/>
           </a:ln>
@@ -10241,11 +10305,11 @@
             <a:avLst/>
           </a:prstGeom>
           <a:solidFill>
-            <a:srgbClr val="B87333"/>
+            <a:srgbClr val="C8102E"/>
           </a:solidFill>
           <a:ln w="12700">
             <a:solidFill>
-              <a:srgbClr val="B87333"/>
+              <a:srgbClr val="C8102E"/>
             </a:solidFill>
             <a:prstDash val="solid"/>
           </a:ln>
@@ -10317,7 +10381,7 @@
             <a:r>
               <a:rPr lang="en-US" sz="1500" b="1" dirty="0">
                 <a:solidFill>
-                  <a:srgbClr val="1E2761"/>
+                  <a:srgbClr val="1A1A1A"/>
                 </a:solidFill>
                 <a:latin typeface="Calibri" pitchFamily="34" charset="0"/>
                 <a:ea typeface="Calibri" pitchFamily="34" charset="-122"/>
@@ -10356,7 +10420,7 @@
             <a:r>
               <a:rPr lang="en-US" sz="1100" dirty="0">
                 <a:solidFill>
-                  <a:srgbClr val="242938"/>
+                  <a:srgbClr val="1A1A1A"/>
                 </a:solidFill>
                 <a:latin typeface="Calibri" pitchFamily="34" charset="0"/>
                 <a:ea typeface="Calibri" pitchFamily="34" charset="-122"/>
@@ -10383,11 +10447,11 @@
             <a:avLst/>
           </a:prstGeom>
           <a:solidFill>
-            <a:srgbClr val="F7F8FB"/>
+            <a:srgbClr val="F5F5F5"/>
           </a:solidFill>
           <a:ln w="12700">
             <a:solidFill>
-              <a:srgbClr val="CADCFC"/>
+              <a:srgbClr val="E0E0E0"/>
             </a:solidFill>
             <a:prstDash val="solid"/>
           </a:ln>
@@ -10408,11 +10472,11 @@
             <a:avLst/>
           </a:prstGeom>
           <a:solidFill>
-            <a:srgbClr val="B87333"/>
+            <a:srgbClr val="C8102E"/>
           </a:solidFill>
           <a:ln w="12700">
             <a:solidFill>
-              <a:srgbClr val="B87333"/>
+              <a:srgbClr val="C8102E"/>
             </a:solidFill>
             <a:prstDash val="solid"/>
           </a:ln>
@@ -10484,7 +10548,7 @@
             <a:r>
               <a:rPr lang="en-US" sz="1500" b="1" dirty="0">
                 <a:solidFill>
-                  <a:srgbClr val="1E2761"/>
+                  <a:srgbClr val="1A1A1A"/>
                 </a:solidFill>
                 <a:latin typeface="Calibri" pitchFamily="34" charset="0"/>
                 <a:ea typeface="Calibri" pitchFamily="34" charset="-122"/>
@@ -10523,7 +10587,7 @@
             <a:r>
               <a:rPr lang="en-US" sz="1100" dirty="0">
                 <a:solidFill>
-                  <a:srgbClr val="242938"/>
+                  <a:srgbClr val="1A1A1A"/>
                 </a:solidFill>
                 <a:latin typeface="Calibri" pitchFamily="34" charset="0"/>
                 <a:ea typeface="Calibri" pitchFamily="34" charset="-122"/>
@@ -10562,7 +10626,7 @@
             <a:r>
               <a:rPr lang="en-US" sz="900" dirty="0">
                 <a:solidFill>
-                  <a:srgbClr val="5A6378"/>
+                  <a:srgbClr val="5C5C5C"/>
                 </a:solidFill>
                 <a:latin typeface="Calibri" pitchFamily="34" charset="0"/>
                 <a:ea typeface="Calibri" pitchFamily="34" charset="-122"/>
@@ -10601,7 +10665,7 @@
             <a:r>
               <a:rPr lang="en-US" sz="900" dirty="0">
                 <a:solidFill>
-                  <a:srgbClr val="5A6378"/>
+                  <a:srgbClr val="5C5C5C"/>
                 </a:solidFill>
                 <a:latin typeface="Calibri" pitchFamily="34" charset="0"/>
                 <a:ea typeface="Calibri" pitchFamily="34" charset="-122"/>
@@ -10660,11 +10724,11 @@
             <a:avLst/>
           </a:prstGeom>
           <a:solidFill>
-            <a:srgbClr val="B87333"/>
+            <a:srgbClr val="C8102E"/>
           </a:solidFill>
           <a:ln w="12700">
             <a:solidFill>
-              <a:srgbClr val="B87333"/>
+              <a:srgbClr val="C8102E"/>
             </a:solidFill>
             <a:prstDash val="solid"/>
           </a:ln>
@@ -10697,7 +10761,7 @@
             <a:r>
               <a:rPr lang="en-US" sz="3000" b="1" dirty="0">
                 <a:solidFill>
-                  <a:srgbClr val="1E2761"/>
+                  <a:srgbClr val="1A1A1A"/>
                 </a:solidFill>
                 <a:latin typeface="Calibri" pitchFamily="34" charset="0"/>
                 <a:ea typeface="Calibri" pitchFamily="34" charset="-122"/>
@@ -10736,7 +10800,7 @@
             <a:r>
               <a:rPr lang="en-US" sz="1400" i="1" dirty="0">
                 <a:solidFill>
-                  <a:srgbClr val="5A6378"/>
+                  <a:srgbClr val="5C5C5C"/>
                 </a:solidFill>
                 <a:latin typeface="Calibri" pitchFamily="34" charset="0"/>
                 <a:ea typeface="Calibri" pitchFamily="34" charset="-122"/>
@@ -10767,7 +10831,7 @@
           </a:solidFill>
           <a:ln w="12700">
             <a:solidFill>
-              <a:srgbClr val="B87333"/>
+              <a:srgbClr val="C8102E"/>
             </a:solidFill>
             <a:prstDash val="solid"/>
           </a:ln>
@@ -10800,7 +10864,7 @@
             <a:r>
               <a:rPr lang="en-US" sz="3600" b="1" dirty="0">
                 <a:solidFill>
-                  <a:srgbClr val="B87333"/>
+                  <a:srgbClr val="C8102E"/>
                 </a:solidFill>
                 <a:latin typeface="Calibri" pitchFamily="34" charset="0"/>
                 <a:ea typeface="Calibri" pitchFamily="34" charset="-122"/>
@@ -10839,7 +10903,7 @@
             <a:r>
               <a:rPr lang="en-US" sz="1300" b="1" dirty="0">
                 <a:solidFill>
-                  <a:srgbClr val="1E2761"/>
+                  <a:srgbClr val="1A1A1A"/>
                 </a:solidFill>
                 <a:latin typeface="Calibri" pitchFamily="34" charset="0"/>
                 <a:ea typeface="Calibri" pitchFamily="34" charset="-122"/>
@@ -10878,7 +10942,7 @@
             <a:r>
               <a:rPr lang="en-US" sz="1000" dirty="0">
                 <a:solidFill>
-                  <a:srgbClr val="242938"/>
+                  <a:srgbClr val="1A1A1A"/>
                 </a:solidFill>
                 <a:latin typeface="Calibri" pitchFamily="34" charset="0"/>
                 <a:ea typeface="Calibri" pitchFamily="34" charset="-122"/>
@@ -10909,7 +10973,7 @@
           </a:solidFill>
           <a:ln w="12700">
             <a:solidFill>
-              <a:srgbClr val="B87333"/>
+              <a:srgbClr val="C8102E"/>
             </a:solidFill>
             <a:prstDash val="solid"/>
           </a:ln>
@@ -10942,7 +11006,7 @@
             <a:r>
               <a:rPr lang="en-US" sz="3600" b="1" dirty="0">
                 <a:solidFill>
-                  <a:srgbClr val="B87333"/>
+                  <a:srgbClr val="C8102E"/>
                 </a:solidFill>
                 <a:latin typeface="Calibri" pitchFamily="34" charset="0"/>
                 <a:ea typeface="Calibri" pitchFamily="34" charset="-122"/>
@@ -10981,7 +11045,7 @@
             <a:r>
               <a:rPr lang="en-US" sz="1300" b="1" dirty="0">
                 <a:solidFill>
-                  <a:srgbClr val="1E2761"/>
+                  <a:srgbClr val="1A1A1A"/>
                 </a:solidFill>
                 <a:latin typeface="Calibri" pitchFamily="34" charset="0"/>
                 <a:ea typeface="Calibri" pitchFamily="34" charset="-122"/>
@@ -11020,7 +11084,7 @@
             <a:r>
               <a:rPr lang="en-US" sz="1000" dirty="0">
                 <a:solidFill>
-                  <a:srgbClr val="242938"/>
+                  <a:srgbClr val="1A1A1A"/>
                 </a:solidFill>
                 <a:latin typeface="Calibri" pitchFamily="34" charset="0"/>
                 <a:ea typeface="Calibri" pitchFamily="34" charset="-122"/>
@@ -11051,7 +11115,7 @@
           </a:solidFill>
           <a:ln w="12700">
             <a:solidFill>
-              <a:srgbClr val="B87333"/>
+              <a:srgbClr val="C8102E"/>
             </a:solidFill>
             <a:prstDash val="solid"/>
           </a:ln>
@@ -11084,7 +11148,7 @@
             <a:r>
               <a:rPr lang="en-US" sz="3600" b="1" dirty="0">
                 <a:solidFill>
-                  <a:srgbClr val="B87333"/>
+                  <a:srgbClr val="C8102E"/>
                 </a:solidFill>
                 <a:latin typeface="Calibri" pitchFamily="34" charset="0"/>
                 <a:ea typeface="Calibri" pitchFamily="34" charset="-122"/>
@@ -11123,7 +11187,7 @@
             <a:r>
               <a:rPr lang="en-US" sz="1300" b="1" dirty="0">
                 <a:solidFill>
-                  <a:srgbClr val="1E2761"/>
+                  <a:srgbClr val="1A1A1A"/>
                 </a:solidFill>
                 <a:latin typeface="Calibri" pitchFamily="34" charset="0"/>
                 <a:ea typeface="Calibri" pitchFamily="34" charset="-122"/>
@@ -11162,7 +11226,7 @@
             <a:r>
               <a:rPr lang="en-US" sz="1000" dirty="0">
                 <a:solidFill>
-                  <a:srgbClr val="242938"/>
+                  <a:srgbClr val="1A1A1A"/>
                 </a:solidFill>
                 <a:latin typeface="Calibri" pitchFamily="34" charset="0"/>
                 <a:ea typeface="Calibri" pitchFamily="34" charset="-122"/>
@@ -11189,11 +11253,11 @@
             <a:avLst/>
           </a:prstGeom>
           <a:solidFill>
-            <a:srgbClr val="1E2761"/>
+            <a:srgbClr val="1A1A1A"/>
           </a:solidFill>
           <a:ln w="12700">
             <a:solidFill>
-              <a:srgbClr val="1E2761"/>
+              <a:srgbClr val="1A1A1A"/>
             </a:solidFill>
             <a:prstDash val="solid"/>
           </a:ln>
@@ -11226,7 +11290,7 @@
             <a:r>
               <a:rPr lang="en-US" sz="1400" b="1" dirty="0">
                 <a:solidFill>
-                  <a:srgbClr val="E8A87C"/>
+                  <a:srgbClr val="F08080"/>
                 </a:solidFill>
                 <a:latin typeface="Calibri" pitchFamily="34" charset="0"/>
                 <a:ea typeface="Calibri" pitchFamily="34" charset="-122"/>
@@ -11269,7 +11333,7 @@
             <a:r>
               <a:rPr lang="en-US" sz="1200" dirty="0">
                 <a:solidFill>
-                  <a:srgbClr val="242938"/>
+                  <a:srgbClr val="1A1A1A"/>
                 </a:solidFill>
                 <a:latin typeface="Calibri" pitchFamily="34" charset="0"/>
                 <a:ea typeface="Calibri" pitchFamily="34" charset="-122"/>
@@ -11290,7 +11354,7 @@
             <a:r>
               <a:rPr lang="en-US" sz="1200" dirty="0">
                 <a:solidFill>
-                  <a:srgbClr val="242938"/>
+                  <a:srgbClr val="1A1A1A"/>
                 </a:solidFill>
                 <a:latin typeface="Calibri" pitchFamily="34" charset="0"/>
                 <a:ea typeface="Calibri" pitchFamily="34" charset="-122"/>
@@ -11311,7 +11375,7 @@
             <a:r>
               <a:rPr lang="en-US" sz="1200" dirty="0">
                 <a:solidFill>
-                  <a:srgbClr val="242938"/>
+                  <a:srgbClr val="1A1A1A"/>
                 </a:solidFill>
                 <a:latin typeface="Calibri" pitchFamily="34" charset="0"/>
                 <a:ea typeface="Calibri" pitchFamily="34" charset="-122"/>
@@ -11332,7 +11396,7 @@
             <a:r>
               <a:rPr lang="en-US" sz="1200" dirty="0">
                 <a:solidFill>
-                  <a:srgbClr val="242938"/>
+                  <a:srgbClr val="1A1A1A"/>
                 </a:solidFill>
                 <a:latin typeface="Calibri" pitchFamily="34" charset="0"/>
                 <a:ea typeface="Calibri" pitchFamily="34" charset="-122"/>
@@ -11359,11 +11423,11 @@
             <a:avLst/>
           </a:prstGeom>
           <a:solidFill>
-            <a:srgbClr val="1E2761"/>
+            <a:srgbClr val="1A1A1A"/>
           </a:solidFill>
           <a:ln w="12700">
             <a:solidFill>
-              <a:srgbClr val="1E2761"/>
+              <a:srgbClr val="1A1A1A"/>
             </a:solidFill>
             <a:prstDash val="solid"/>
           </a:ln>
@@ -11502,7 +11566,7 @@
             <a:r>
               <a:rPr lang="en-US" sz="900" dirty="0">
                 <a:solidFill>
-                  <a:srgbClr val="5A6378"/>
+                  <a:srgbClr val="5C5C5C"/>
                 </a:solidFill>
                 <a:latin typeface="Calibri" pitchFamily="34" charset="0"/>
                 <a:ea typeface="Calibri" pitchFamily="34" charset="-122"/>
@@ -11541,7 +11605,7 @@
             <a:r>
               <a:rPr lang="en-US" sz="900" dirty="0">
                 <a:solidFill>
-                  <a:srgbClr val="5A6378"/>
+                  <a:srgbClr val="5C5C5C"/>
                 </a:solidFill>
                 <a:latin typeface="Calibri" pitchFamily="34" charset="0"/>
                 <a:ea typeface="Calibri" pitchFamily="34" charset="-122"/>
@@ -11600,11 +11664,11 @@
             <a:avLst/>
           </a:prstGeom>
           <a:solidFill>
-            <a:srgbClr val="B87333"/>
+            <a:srgbClr val="C8102E"/>
           </a:solidFill>
           <a:ln w="12700">
             <a:solidFill>
-              <a:srgbClr val="B87333"/>
+              <a:srgbClr val="C8102E"/>
             </a:solidFill>
             <a:prstDash val="solid"/>
           </a:ln>
@@ -11637,7 +11701,7 @@
             <a:r>
               <a:rPr lang="en-US" sz="3000" b="1" dirty="0">
                 <a:solidFill>
-                  <a:srgbClr val="1E2761"/>
+                  <a:srgbClr val="1A1A1A"/>
                 </a:solidFill>
                 <a:latin typeface="Calibri" pitchFamily="34" charset="0"/>
                 <a:ea typeface="Calibri" pitchFamily="34" charset="-122"/>
@@ -11676,7 +11740,7 @@
             <a:r>
               <a:rPr lang="en-US" sz="1400" i="1" dirty="0">
                 <a:solidFill>
-                  <a:srgbClr val="5A6378"/>
+                  <a:srgbClr val="5C5C5C"/>
                 </a:solidFill>
                 <a:latin typeface="Calibri" pitchFamily="34" charset="0"/>
                 <a:ea typeface="Calibri" pitchFamily="34" charset="-122"/>
@@ -11703,11 +11767,11 @@
             <a:avLst/>
           </a:prstGeom>
           <a:solidFill>
-            <a:srgbClr val="F7F8FB"/>
+            <a:srgbClr val="F5F5F5"/>
           </a:solidFill>
           <a:ln w="12700">
             <a:solidFill>
-              <a:srgbClr val="CADCFC"/>
+              <a:srgbClr val="E0E0E0"/>
             </a:solidFill>
             <a:prstDash val="solid"/>
           </a:ln>
@@ -11728,11 +11792,11 @@
             <a:avLst/>
           </a:prstGeom>
           <a:solidFill>
-            <a:srgbClr val="B87333"/>
+            <a:srgbClr val="C8102E"/>
           </a:solidFill>
           <a:ln w="12700">
             <a:solidFill>
-              <a:srgbClr val="B87333"/>
+              <a:srgbClr val="C8102E"/>
             </a:solidFill>
             <a:prstDash val="solid"/>
           </a:ln>
@@ -11765,7 +11829,7 @@
             <a:r>
               <a:rPr lang="en-US" sz="2400" b="1" dirty="0">
                 <a:solidFill>
-                  <a:srgbClr val="B87333"/>
+                  <a:srgbClr val="C8102E"/>
                 </a:solidFill>
                 <a:latin typeface="Calibri" pitchFamily="34" charset="0"/>
                 <a:ea typeface="Calibri" pitchFamily="34" charset="-122"/>
@@ -11804,7 +11868,7 @@
             <a:r>
               <a:rPr lang="en-US" sz="1600" b="1" dirty="0">
                 <a:solidFill>
-                  <a:srgbClr val="B87333"/>
+                  <a:srgbClr val="C8102E"/>
                 </a:solidFill>
                 <a:latin typeface="Calibri" pitchFamily="34" charset="0"/>
                 <a:ea typeface="Calibri" pitchFamily="34" charset="-122"/>
@@ -11843,7 +11907,7 @@
             <a:r>
               <a:rPr lang="en-US" sz="1300" b="1" dirty="0">
                 <a:solidFill>
-                  <a:srgbClr val="1E2761"/>
+                  <a:srgbClr val="1A1A1A"/>
                 </a:solidFill>
                 <a:latin typeface="Calibri" pitchFamily="34" charset="0"/>
                 <a:ea typeface="Calibri" pitchFamily="34" charset="-122"/>
@@ -11882,7 +11946,7 @@
             <a:r>
               <a:rPr lang="en-US" sz="1000" i="1" dirty="0">
                 <a:solidFill>
-                  <a:srgbClr val="5A6378"/>
+                  <a:srgbClr val="5C5C5C"/>
                 </a:solidFill>
                 <a:latin typeface="Calibri" pitchFamily="34" charset="0"/>
                 <a:ea typeface="Calibri" pitchFamily="34" charset="-122"/>
@@ -11909,11 +11973,11 @@
             <a:avLst/>
           </a:prstGeom>
           <a:solidFill>
-            <a:srgbClr val="F7F8FB"/>
+            <a:srgbClr val="F5F5F5"/>
           </a:solidFill>
           <a:ln w="12700">
             <a:solidFill>
-              <a:srgbClr val="CADCFC"/>
+              <a:srgbClr val="E0E0E0"/>
             </a:solidFill>
             <a:prstDash val="solid"/>
           </a:ln>
@@ -11934,11 +11998,11 @@
             <a:avLst/>
           </a:prstGeom>
           <a:solidFill>
-            <a:srgbClr val="1E2761"/>
+            <a:srgbClr val="1A1A1A"/>
           </a:solidFill>
           <a:ln w="12700">
             <a:solidFill>
-              <a:srgbClr val="1E2761"/>
+              <a:srgbClr val="1A1A1A"/>
             </a:solidFill>
             <a:prstDash val="solid"/>
           </a:ln>
@@ -11971,7 +12035,7 @@
             <a:r>
               <a:rPr lang="en-US" sz="2400" b="1" dirty="0">
                 <a:solidFill>
-                  <a:srgbClr val="1E2761"/>
+                  <a:srgbClr val="1A1A1A"/>
                 </a:solidFill>
                 <a:latin typeface="Calibri" pitchFamily="34" charset="0"/>
                 <a:ea typeface="Calibri" pitchFamily="34" charset="-122"/>
@@ -12010,7 +12074,7 @@
             <a:r>
               <a:rPr lang="en-US" sz="1600" b="1" dirty="0">
                 <a:solidFill>
-                  <a:srgbClr val="1E2761"/>
+                  <a:srgbClr val="1A1A1A"/>
                 </a:solidFill>
                 <a:latin typeface="Calibri" pitchFamily="34" charset="0"/>
                 <a:ea typeface="Calibri" pitchFamily="34" charset="-122"/>
@@ -12049,7 +12113,7 @@
             <a:r>
               <a:rPr lang="en-US" sz="1300" b="1" dirty="0">
                 <a:solidFill>
-                  <a:srgbClr val="1E2761"/>
+                  <a:srgbClr val="1A1A1A"/>
                 </a:solidFill>
                 <a:latin typeface="Calibri" pitchFamily="34" charset="0"/>
                 <a:ea typeface="Calibri" pitchFamily="34" charset="-122"/>
@@ -12088,7 +12152,7 @@
             <a:r>
               <a:rPr lang="en-US" sz="1000" i="1" dirty="0">
                 <a:solidFill>
-                  <a:srgbClr val="5A6378"/>
+                  <a:srgbClr val="5C5C5C"/>
                 </a:solidFill>
                 <a:latin typeface="Calibri" pitchFamily="34" charset="0"/>
                 <a:ea typeface="Calibri" pitchFamily="34" charset="-122"/>
@@ -12115,11 +12179,11 @@
             <a:avLst/>
           </a:prstGeom>
           <a:solidFill>
-            <a:srgbClr val="F7F8FB"/>
+            <a:srgbClr val="F5F5F5"/>
           </a:solidFill>
           <a:ln w="12700">
             <a:solidFill>
-              <a:srgbClr val="CADCFC"/>
+              <a:srgbClr val="E0E0E0"/>
             </a:solidFill>
             <a:prstDash val="solid"/>
           </a:ln>
@@ -12140,11 +12204,11 @@
             <a:avLst/>
           </a:prstGeom>
           <a:solidFill>
-            <a:srgbClr val="B87333"/>
+            <a:srgbClr val="C8102E"/>
           </a:solidFill>
           <a:ln w="12700">
             <a:solidFill>
-              <a:srgbClr val="B87333"/>
+              <a:srgbClr val="C8102E"/>
             </a:solidFill>
             <a:prstDash val="solid"/>
           </a:ln>
@@ -12177,7 +12241,7 @@
             <a:r>
               <a:rPr lang="en-US" sz="2400" b="1" dirty="0">
                 <a:solidFill>
-                  <a:srgbClr val="B87333"/>
+                  <a:srgbClr val="C8102E"/>
                 </a:solidFill>
                 <a:latin typeface="Calibri" pitchFamily="34" charset="0"/>
                 <a:ea typeface="Calibri" pitchFamily="34" charset="-122"/>
@@ -12216,7 +12280,7 @@
             <a:r>
               <a:rPr lang="en-US" sz="1600" b="1" dirty="0">
                 <a:solidFill>
-                  <a:srgbClr val="B87333"/>
+                  <a:srgbClr val="C8102E"/>
                 </a:solidFill>
                 <a:latin typeface="Calibri" pitchFamily="34" charset="0"/>
                 <a:ea typeface="Calibri" pitchFamily="34" charset="-122"/>
@@ -12255,7 +12319,7 @@
             <a:r>
               <a:rPr lang="en-US" sz="1300" b="1" dirty="0">
                 <a:solidFill>
-                  <a:srgbClr val="1E2761"/>
+                  <a:srgbClr val="1A1A1A"/>
                 </a:solidFill>
                 <a:latin typeface="Calibri" pitchFamily="34" charset="0"/>
                 <a:ea typeface="Calibri" pitchFamily="34" charset="-122"/>
@@ -12294,7 +12358,7 @@
             <a:r>
               <a:rPr lang="en-US" sz="1000" i="1" dirty="0">
                 <a:solidFill>
-                  <a:srgbClr val="5A6378"/>
+                  <a:srgbClr val="5C5C5C"/>
                 </a:solidFill>
                 <a:latin typeface="Calibri" pitchFamily="34" charset="0"/>
                 <a:ea typeface="Calibri" pitchFamily="34" charset="-122"/>
@@ -12321,11 +12385,11 @@
             <a:avLst/>
           </a:prstGeom>
           <a:solidFill>
-            <a:srgbClr val="F7F8FB"/>
+            <a:srgbClr val="F5F5F5"/>
           </a:solidFill>
           <a:ln w="12700">
             <a:solidFill>
-              <a:srgbClr val="CADCFC"/>
+              <a:srgbClr val="E0E0E0"/>
             </a:solidFill>
             <a:prstDash val="solid"/>
           </a:ln>
@@ -12346,11 +12410,11 @@
             <a:avLst/>
           </a:prstGeom>
           <a:solidFill>
-            <a:srgbClr val="B87333"/>
+            <a:srgbClr val="C8102E"/>
           </a:solidFill>
           <a:ln w="12700">
             <a:solidFill>
-              <a:srgbClr val="B87333"/>
+              <a:srgbClr val="C8102E"/>
             </a:solidFill>
             <a:prstDash val="solid"/>
           </a:ln>
@@ -12383,7 +12447,7 @@
             <a:r>
               <a:rPr lang="en-US" sz="2400" b="1" dirty="0">
                 <a:solidFill>
-                  <a:srgbClr val="B87333"/>
+                  <a:srgbClr val="C8102E"/>
                 </a:solidFill>
                 <a:latin typeface="Calibri" pitchFamily="34" charset="0"/>
                 <a:ea typeface="Calibri" pitchFamily="34" charset="-122"/>
@@ -12422,7 +12486,7 @@
             <a:r>
               <a:rPr lang="en-US" sz="1600" b="1" dirty="0">
                 <a:solidFill>
-                  <a:srgbClr val="B87333"/>
+                  <a:srgbClr val="C8102E"/>
                 </a:solidFill>
                 <a:latin typeface="Calibri" pitchFamily="34" charset="0"/>
                 <a:ea typeface="Calibri" pitchFamily="34" charset="-122"/>
@@ -12461,7 +12525,7 @@
             <a:r>
               <a:rPr lang="en-US" sz="1300" b="1" dirty="0">
                 <a:solidFill>
-                  <a:srgbClr val="1E2761"/>
+                  <a:srgbClr val="1A1A1A"/>
                 </a:solidFill>
                 <a:latin typeface="Calibri" pitchFamily="34" charset="0"/>
                 <a:ea typeface="Calibri" pitchFamily="34" charset="-122"/>
@@ -12500,7 +12564,7 @@
             <a:r>
               <a:rPr lang="en-US" sz="1000" i="1" dirty="0">
                 <a:solidFill>
-                  <a:srgbClr val="5A6378"/>
+                  <a:srgbClr val="5C5C5C"/>
                 </a:solidFill>
                 <a:latin typeface="Calibri" pitchFamily="34" charset="0"/>
                 <a:ea typeface="Calibri" pitchFamily="34" charset="-122"/>
@@ -12527,11 +12591,11 @@
             <a:avLst/>
           </a:prstGeom>
           <a:solidFill>
-            <a:srgbClr val="F7F8FB"/>
+            <a:srgbClr val="F5F5F5"/>
           </a:solidFill>
           <a:ln w="12700">
             <a:solidFill>
-              <a:srgbClr val="CADCFC"/>
+              <a:srgbClr val="E0E0E0"/>
             </a:solidFill>
             <a:prstDash val="solid"/>
           </a:ln>
@@ -12552,11 +12616,11 @@
             <a:avLst/>
           </a:prstGeom>
           <a:solidFill>
-            <a:srgbClr val="1E2761"/>
+            <a:srgbClr val="1A1A1A"/>
           </a:solidFill>
           <a:ln w="12700">
             <a:solidFill>
-              <a:srgbClr val="1E2761"/>
+              <a:srgbClr val="1A1A1A"/>
             </a:solidFill>
             <a:prstDash val="solid"/>
           </a:ln>
@@ -12589,7 +12653,7 @@
             <a:r>
               <a:rPr lang="en-US" sz="2400" b="1" dirty="0">
                 <a:solidFill>
-                  <a:srgbClr val="1E2761"/>
+                  <a:srgbClr val="1A1A1A"/>
                 </a:solidFill>
                 <a:latin typeface="Calibri" pitchFamily="34" charset="0"/>
                 <a:ea typeface="Calibri" pitchFamily="34" charset="-122"/>
@@ -12628,7 +12692,7 @@
             <a:r>
               <a:rPr lang="en-US" sz="1600" b="1" dirty="0">
                 <a:solidFill>
-                  <a:srgbClr val="1E2761"/>
+                  <a:srgbClr val="1A1A1A"/>
                 </a:solidFill>
                 <a:latin typeface="Calibri" pitchFamily="34" charset="0"/>
                 <a:ea typeface="Calibri" pitchFamily="34" charset="-122"/>
@@ -12667,7 +12731,7 @@
             <a:r>
               <a:rPr lang="en-US" sz="1300" b="1" dirty="0">
                 <a:solidFill>
-                  <a:srgbClr val="1E2761"/>
+                  <a:srgbClr val="1A1A1A"/>
                 </a:solidFill>
                 <a:latin typeface="Calibri" pitchFamily="34" charset="0"/>
                 <a:ea typeface="Calibri" pitchFamily="34" charset="-122"/>
@@ -12706,7 +12770,7 @@
             <a:r>
               <a:rPr lang="en-US" sz="1000" i="1" dirty="0">
                 <a:solidFill>
-                  <a:srgbClr val="5A6378"/>
+                  <a:srgbClr val="5C5C5C"/>
                 </a:solidFill>
                 <a:latin typeface="Calibri" pitchFamily="34" charset="0"/>
                 <a:ea typeface="Calibri" pitchFamily="34" charset="-122"/>
@@ -12733,11 +12797,11 @@
             <a:avLst/>
           </a:prstGeom>
           <a:solidFill>
-            <a:srgbClr val="F7F8FB"/>
+            <a:srgbClr val="F5F5F5"/>
           </a:solidFill>
           <a:ln w="12700">
             <a:solidFill>
-              <a:srgbClr val="CADCFC"/>
+              <a:srgbClr val="E0E0E0"/>
             </a:solidFill>
             <a:prstDash val="solid"/>
           </a:ln>
@@ -12758,11 +12822,11 @@
             <a:avLst/>
           </a:prstGeom>
           <a:solidFill>
-            <a:srgbClr val="1E2761"/>
+            <a:srgbClr val="1A1A1A"/>
           </a:solidFill>
           <a:ln w="12700">
             <a:solidFill>
-              <a:srgbClr val="1E2761"/>
+              <a:srgbClr val="1A1A1A"/>
             </a:solidFill>
             <a:prstDash val="solid"/>
           </a:ln>
@@ -12795,7 +12859,7 @@
             <a:r>
               <a:rPr lang="en-US" sz="2400" b="1" dirty="0">
                 <a:solidFill>
-                  <a:srgbClr val="1E2761"/>
+                  <a:srgbClr val="1A1A1A"/>
                 </a:solidFill>
                 <a:latin typeface="Calibri" pitchFamily="34" charset="0"/>
                 <a:ea typeface="Calibri" pitchFamily="34" charset="-122"/>
@@ -12834,7 +12898,7 @@
             <a:r>
               <a:rPr lang="en-US" sz="1600" b="1" dirty="0">
                 <a:solidFill>
-                  <a:srgbClr val="1E2761"/>
+                  <a:srgbClr val="1A1A1A"/>
                 </a:solidFill>
                 <a:latin typeface="Calibri" pitchFamily="34" charset="0"/>
                 <a:ea typeface="Calibri" pitchFamily="34" charset="-122"/>
@@ -12873,7 +12937,7 @@
             <a:r>
               <a:rPr lang="en-US" sz="1300" b="1" dirty="0">
                 <a:solidFill>
-                  <a:srgbClr val="1E2761"/>
+                  <a:srgbClr val="1A1A1A"/>
                 </a:solidFill>
                 <a:latin typeface="Calibri" pitchFamily="34" charset="0"/>
                 <a:ea typeface="Calibri" pitchFamily="34" charset="-122"/>
@@ -12912,7 +12976,7 @@
             <a:r>
               <a:rPr lang="en-US" sz="1000" i="1" dirty="0">
                 <a:solidFill>
-                  <a:srgbClr val="5A6378"/>
+                  <a:srgbClr val="5C5C5C"/>
                 </a:solidFill>
                 <a:latin typeface="Calibri" pitchFamily="34" charset="0"/>
                 <a:ea typeface="Calibri" pitchFamily="34" charset="-122"/>
@@ -12939,11 +13003,11 @@
             <a:avLst/>
           </a:prstGeom>
           <a:solidFill>
-            <a:srgbClr val="F7F8FB"/>
+            <a:srgbClr val="F5F5F5"/>
           </a:solidFill>
           <a:ln w="12700">
             <a:solidFill>
-              <a:srgbClr val="CADCFC"/>
+              <a:srgbClr val="E0E0E0"/>
             </a:solidFill>
             <a:prstDash val="solid"/>
           </a:ln>
@@ -12964,11 +13028,11 @@
             <a:avLst/>
           </a:prstGeom>
           <a:solidFill>
-            <a:srgbClr val="B87333"/>
+            <a:srgbClr val="C8102E"/>
           </a:solidFill>
           <a:ln w="12700">
             <a:solidFill>
-              <a:srgbClr val="B87333"/>
+              <a:srgbClr val="C8102E"/>
             </a:solidFill>
             <a:prstDash val="solid"/>
           </a:ln>
@@ -13001,7 +13065,7 @@
             <a:r>
               <a:rPr lang="en-US" sz="2400" b="1" dirty="0">
                 <a:solidFill>
-                  <a:srgbClr val="B87333"/>
+                  <a:srgbClr val="C8102E"/>
                 </a:solidFill>
                 <a:latin typeface="Calibri" pitchFamily="34" charset="0"/>
                 <a:ea typeface="Calibri" pitchFamily="34" charset="-122"/>
@@ -13040,7 +13104,7 @@
             <a:r>
               <a:rPr lang="en-US" sz="1600" b="1" dirty="0">
                 <a:solidFill>
-                  <a:srgbClr val="B87333"/>
+                  <a:srgbClr val="C8102E"/>
                 </a:solidFill>
                 <a:latin typeface="Calibri" pitchFamily="34" charset="0"/>
                 <a:ea typeface="Calibri" pitchFamily="34" charset="-122"/>
@@ -13079,7 +13143,7 @@
             <a:r>
               <a:rPr lang="en-US" sz="1300" b="1" dirty="0">
                 <a:solidFill>
-                  <a:srgbClr val="1E2761"/>
+                  <a:srgbClr val="1A1A1A"/>
                 </a:solidFill>
                 <a:latin typeface="Calibri" pitchFamily="34" charset="0"/>
                 <a:ea typeface="Calibri" pitchFamily="34" charset="-122"/>
@@ -13118,7 +13182,7 @@
             <a:r>
               <a:rPr lang="en-US" sz="1000" i="1" dirty="0">
                 <a:solidFill>
-                  <a:srgbClr val="5A6378"/>
+                  <a:srgbClr val="5C5C5C"/>
                 </a:solidFill>
                 <a:latin typeface="Calibri" pitchFamily="34" charset="0"/>
                 <a:ea typeface="Calibri" pitchFamily="34" charset="-122"/>
@@ -13145,11 +13209,11 @@
             <a:avLst/>
           </a:prstGeom>
           <a:solidFill>
-            <a:srgbClr val="F7F8FB"/>
+            <a:srgbClr val="F5F5F5"/>
           </a:solidFill>
           <a:ln w="12700">
             <a:solidFill>
-              <a:srgbClr val="CADCFC"/>
+              <a:srgbClr val="E0E0E0"/>
             </a:solidFill>
             <a:prstDash val="solid"/>
           </a:ln>
@@ -13170,11 +13234,11 @@
             <a:avLst/>
           </a:prstGeom>
           <a:solidFill>
-            <a:srgbClr val="1E2761"/>
+            <a:srgbClr val="1A1A1A"/>
           </a:solidFill>
           <a:ln w="12700">
             <a:solidFill>
-              <a:srgbClr val="1E2761"/>
+              <a:srgbClr val="1A1A1A"/>
             </a:solidFill>
             <a:prstDash val="solid"/>
           </a:ln>
@@ -13207,7 +13271,7 @@
             <a:r>
               <a:rPr lang="en-US" sz="2400" b="1" dirty="0">
                 <a:solidFill>
-                  <a:srgbClr val="1E2761"/>
+                  <a:srgbClr val="1A1A1A"/>
                 </a:solidFill>
                 <a:latin typeface="Calibri" pitchFamily="34" charset="0"/>
                 <a:ea typeface="Calibri" pitchFamily="34" charset="-122"/>
@@ -13246,7 +13310,7 @@
             <a:r>
               <a:rPr lang="en-US" sz="1600" b="1" dirty="0">
                 <a:solidFill>
-                  <a:srgbClr val="1E2761"/>
+                  <a:srgbClr val="1A1A1A"/>
                 </a:solidFill>
                 <a:latin typeface="Calibri" pitchFamily="34" charset="0"/>
                 <a:ea typeface="Calibri" pitchFamily="34" charset="-122"/>
@@ -13285,7 +13349,7 @@
             <a:r>
               <a:rPr lang="en-US" sz="1300" b="1" dirty="0">
                 <a:solidFill>
-                  <a:srgbClr val="1E2761"/>
+                  <a:srgbClr val="1A1A1A"/>
                 </a:solidFill>
                 <a:latin typeface="Calibri" pitchFamily="34" charset="0"/>
                 <a:ea typeface="Calibri" pitchFamily="34" charset="-122"/>
@@ -13324,7 +13388,7 @@
             <a:r>
               <a:rPr lang="en-US" sz="1000" i="1" dirty="0">
                 <a:solidFill>
-                  <a:srgbClr val="5A6378"/>
+                  <a:srgbClr val="5C5C5C"/>
                 </a:solidFill>
                 <a:latin typeface="Calibri" pitchFamily="34" charset="0"/>
                 <a:ea typeface="Calibri" pitchFamily="34" charset="-122"/>
@@ -13363,7 +13427,7 @@
             <a:r>
               <a:rPr lang="en-US" sz="1100" i="1" dirty="0">
                 <a:solidFill>
-                  <a:srgbClr val="5A6378"/>
+                  <a:srgbClr val="5C5C5C"/>
                 </a:solidFill>
                 <a:latin typeface="Calibri" pitchFamily="34" charset="0"/>
                 <a:ea typeface="Calibri" pitchFamily="34" charset="-122"/>
@@ -13402,7 +13466,7 @@
             <a:r>
               <a:rPr lang="en-US" sz="900" dirty="0">
                 <a:solidFill>
-                  <a:srgbClr val="5A6378"/>
+                  <a:srgbClr val="5C5C5C"/>
                 </a:solidFill>
                 <a:latin typeface="Calibri" pitchFamily="34" charset="0"/>
                 <a:ea typeface="Calibri" pitchFamily="34" charset="-122"/>
@@ -13441,7 +13505,7 @@
             <a:r>
               <a:rPr lang="en-US" sz="900" dirty="0">
                 <a:solidFill>
-                  <a:srgbClr val="5A6378"/>
+                  <a:srgbClr val="5C5C5C"/>
                 </a:solidFill>
                 <a:latin typeface="Calibri" pitchFamily="34" charset="0"/>
                 <a:ea typeface="Calibri" pitchFamily="34" charset="-122"/>
@@ -13500,11 +13564,11 @@
             <a:avLst/>
           </a:prstGeom>
           <a:solidFill>
-            <a:srgbClr val="B87333"/>
+            <a:srgbClr val="C8102E"/>
           </a:solidFill>
           <a:ln w="12700">
             <a:solidFill>
-              <a:srgbClr val="B87333"/>
+              <a:srgbClr val="C8102E"/>
             </a:solidFill>
             <a:prstDash val="solid"/>
           </a:ln>
@@ -13537,7 +13601,7 @@
             <a:r>
               <a:rPr lang="en-US" sz="3000" b="1" dirty="0">
                 <a:solidFill>
-                  <a:srgbClr val="1E2761"/>
+                  <a:srgbClr val="1A1A1A"/>
                 </a:solidFill>
                 <a:latin typeface="Calibri" pitchFamily="34" charset="0"/>
                 <a:ea typeface="Calibri" pitchFamily="34" charset="-122"/>
@@ -13576,7 +13640,7 @@
             <a:r>
               <a:rPr lang="en-US" sz="1400" i="1" dirty="0">
                 <a:solidFill>
-                  <a:srgbClr val="5A6378"/>
+                  <a:srgbClr val="5C5C5C"/>
                 </a:solidFill>
                 <a:latin typeface="Calibri" pitchFamily="34" charset="0"/>
                 <a:ea typeface="Calibri" pitchFamily="34" charset="-122"/>
@@ -13615,7 +13679,7 @@
             <a:r>
               <a:rPr lang="en-US" sz="1600" b="1" dirty="0">
                 <a:solidFill>
-                  <a:srgbClr val="1E2761"/>
+                  <a:srgbClr val="1A1A1A"/>
                 </a:solidFill>
                 <a:latin typeface="Calibri" pitchFamily="34" charset="0"/>
                 <a:ea typeface="Calibri" pitchFamily="34" charset="-122"/>
@@ -13658,7 +13722,7 @@
             <a:r>
               <a:rPr lang="en-US" sz="1300" dirty="0">
                 <a:solidFill>
-                  <a:srgbClr val="242938"/>
+                  <a:srgbClr val="1A1A1A"/>
                 </a:solidFill>
                 <a:latin typeface="Calibri" pitchFamily="34" charset="0"/>
                 <a:ea typeface="Calibri" pitchFamily="34" charset="-122"/>
@@ -13679,7 +13743,7 @@
             <a:r>
               <a:rPr lang="en-US" sz="1300" dirty="0">
                 <a:solidFill>
-                  <a:srgbClr val="242938"/>
+                  <a:srgbClr val="1A1A1A"/>
                 </a:solidFill>
                 <a:latin typeface="Calibri" pitchFamily="34" charset="0"/>
                 <a:ea typeface="Calibri" pitchFamily="34" charset="-122"/>
@@ -13700,7 +13764,7 @@
             <a:r>
               <a:rPr lang="en-US" sz="1300" dirty="0">
                 <a:solidFill>
-                  <a:srgbClr val="242938"/>
+                  <a:srgbClr val="1A1A1A"/>
                 </a:solidFill>
                 <a:latin typeface="Calibri" pitchFamily="34" charset="0"/>
                 <a:ea typeface="Calibri" pitchFamily="34" charset="-122"/>
@@ -13721,7 +13785,7 @@
             <a:r>
               <a:rPr lang="en-US" sz="1300" dirty="0">
                 <a:solidFill>
-                  <a:srgbClr val="242938"/>
+                  <a:srgbClr val="1A1A1A"/>
                 </a:solidFill>
                 <a:latin typeface="Calibri" pitchFamily="34" charset="0"/>
                 <a:ea typeface="Calibri" pitchFamily="34" charset="-122"/>
@@ -13742,7 +13806,7 @@
             <a:r>
               <a:rPr lang="en-US" sz="1300" dirty="0">
                 <a:solidFill>
-                  <a:srgbClr val="242938"/>
+                  <a:srgbClr val="1A1A1A"/>
                 </a:solidFill>
                 <a:latin typeface="Calibri" pitchFamily="34" charset="0"/>
                 <a:ea typeface="Calibri" pitchFamily="34" charset="-122"/>
@@ -13769,11 +13833,11 @@
             <a:avLst/>
           </a:prstGeom>
           <a:solidFill>
-            <a:srgbClr val="F7F8FB"/>
+            <a:srgbClr val="F5F5F5"/>
           </a:solidFill>
           <a:ln w="12700">
             <a:solidFill>
-              <a:srgbClr val="B87333"/>
+              <a:srgbClr val="C8102E"/>
             </a:solidFill>
             <a:prstDash val="solid"/>
           </a:ln>
@@ -13806,7 +13870,7 @@
             <a:r>
               <a:rPr lang="en-US" sz="1400" b="1" dirty="0">
                 <a:solidFill>
-                  <a:srgbClr val="B87333"/>
+                  <a:srgbClr val="C8102E"/>
                 </a:solidFill>
                 <a:latin typeface="Calibri" pitchFamily="34" charset="0"/>
                 <a:ea typeface="Calibri" pitchFamily="34" charset="-122"/>
@@ -13845,7 +13909,7 @@
             <a:r>
               <a:rPr lang="en-US" sz="1200" dirty="0">
                 <a:solidFill>
-                  <a:srgbClr val="242938"/>
+                  <a:srgbClr val="1A1A1A"/>
                 </a:solidFill>
                 <a:latin typeface="Calibri" pitchFamily="34" charset="0"/>
                 <a:ea typeface="Calibri" pitchFamily="34" charset="-122"/>
@@ -13884,7 +13948,7 @@
             <a:r>
               <a:rPr lang="en-US" sz="1200" dirty="0">
                 <a:solidFill>
-                  <a:srgbClr val="242938"/>
+                  <a:srgbClr val="1A1A1A"/>
                 </a:solidFill>
                 <a:latin typeface="Calibri" pitchFamily="34" charset="0"/>
                 <a:ea typeface="Calibri" pitchFamily="34" charset="-122"/>
@@ -13923,7 +13987,7 @@
             <a:r>
               <a:rPr lang="en-US" sz="1200" dirty="0">
                 <a:solidFill>
-                  <a:srgbClr val="242938"/>
+                  <a:srgbClr val="1A1A1A"/>
                 </a:solidFill>
                 <a:latin typeface="Calibri" pitchFamily="34" charset="0"/>
                 <a:ea typeface="Calibri" pitchFamily="34" charset="-122"/>
@@ -13962,7 +14026,7 @@
             <a:r>
               <a:rPr lang="en-US" sz="1100" i="1" dirty="0">
                 <a:solidFill>
-                  <a:srgbClr val="5A6378"/>
+                  <a:srgbClr val="5C5C5C"/>
                 </a:solidFill>
                 <a:latin typeface="Calibri" pitchFamily="34" charset="0"/>
                 <a:ea typeface="Calibri" pitchFamily="34" charset="-122"/>
@@ -14001,7 +14065,7 @@
             <a:r>
               <a:rPr lang="en-US" sz="900" dirty="0">
                 <a:solidFill>
-                  <a:srgbClr val="5A6378"/>
+                  <a:srgbClr val="5C5C5C"/>
                 </a:solidFill>
                 <a:latin typeface="Calibri" pitchFamily="34" charset="0"/>
                 <a:ea typeface="Calibri" pitchFamily="34" charset="-122"/>
@@ -14040,7 +14104,7 @@
             <a:r>
               <a:rPr lang="en-US" sz="900" dirty="0">
                 <a:solidFill>
-                  <a:srgbClr val="5A6378"/>
+                  <a:srgbClr val="5C5C5C"/>
                 </a:solidFill>
                 <a:latin typeface="Calibri" pitchFamily="34" charset="0"/>
                 <a:ea typeface="Calibri" pitchFamily="34" charset="-122"/>
@@ -14099,11 +14163,11 @@
             <a:avLst/>
           </a:prstGeom>
           <a:solidFill>
-            <a:srgbClr val="B87333"/>
+            <a:srgbClr val="C8102E"/>
           </a:solidFill>
           <a:ln w="12700">
             <a:solidFill>
-              <a:srgbClr val="B87333"/>
+              <a:srgbClr val="C8102E"/>
             </a:solidFill>
             <a:prstDash val="solid"/>
           </a:ln>
@@ -14136,7 +14200,7 @@
             <a:r>
               <a:rPr lang="en-US" sz="3000" b="1" dirty="0">
                 <a:solidFill>
-                  <a:srgbClr val="1E2761"/>
+                  <a:srgbClr val="1A1A1A"/>
                 </a:solidFill>
                 <a:latin typeface="Calibri" pitchFamily="34" charset="0"/>
                 <a:ea typeface="Calibri" pitchFamily="34" charset="-122"/>
@@ -14175,7 +14239,7 @@
             <a:r>
               <a:rPr lang="en-US" sz="1400" i="1" dirty="0">
                 <a:solidFill>
-                  <a:srgbClr val="5A6378"/>
+                  <a:srgbClr val="5C5C5C"/>
                 </a:solidFill>
                 <a:latin typeface="Calibri" pitchFamily="34" charset="0"/>
                 <a:ea typeface="Calibri" pitchFamily="34" charset="-122"/>
@@ -14214,7 +14278,7 @@
             <a:r>
               <a:rPr lang="en-US" sz="1400" b="1" dirty="0">
                 <a:solidFill>
-                  <a:srgbClr val="1E2761"/>
+                  <a:srgbClr val="1A1A1A"/>
                 </a:solidFill>
                 <a:latin typeface="Calibri" pitchFamily="34" charset="0"/>
                 <a:ea typeface="Calibri" pitchFamily="34" charset="-122"/>
@@ -14253,7 +14317,7 @@
             <a:r>
               <a:rPr lang="en-US" sz="1200" dirty="0">
                 <a:solidFill>
-                  <a:srgbClr val="242938"/>
+                  <a:srgbClr val="1A1A1A"/>
                 </a:solidFill>
                 <a:latin typeface="Calibri" pitchFamily="34" charset="0"/>
                 <a:ea typeface="Calibri" pitchFamily="34" charset="-122"/>
@@ -14292,7 +14356,7 @@
             <a:r>
               <a:rPr lang="en-US" sz="1400" b="1" dirty="0">
                 <a:solidFill>
-                  <a:srgbClr val="1E2761"/>
+                  <a:srgbClr val="1A1A1A"/>
                 </a:solidFill>
                 <a:latin typeface="Calibri" pitchFamily="34" charset="0"/>
                 <a:ea typeface="Calibri" pitchFamily="34" charset="-122"/>
@@ -14331,7 +14395,7 @@
             <a:r>
               <a:rPr lang="en-US" sz="1200" dirty="0">
                 <a:solidFill>
-                  <a:srgbClr val="242938"/>
+                  <a:srgbClr val="1A1A1A"/>
                 </a:solidFill>
                 <a:latin typeface="Calibri" pitchFamily="34" charset="0"/>
                 <a:ea typeface="Calibri" pitchFamily="34" charset="-122"/>
@@ -14358,11 +14422,11 @@
             <a:avLst/>
           </a:prstGeom>
           <a:solidFill>
-            <a:srgbClr val="F7F8FB"/>
+            <a:srgbClr val="F5F5F5"/>
           </a:solidFill>
           <a:ln w="12700">
             <a:solidFill>
-              <a:srgbClr val="B87333"/>
+              <a:srgbClr val="C8102E"/>
             </a:solidFill>
             <a:prstDash val="solid"/>
           </a:ln>
@@ -14395,7 +14459,7 @@
             <a:r>
               <a:rPr lang="en-US" sz="1200" b="1" dirty="0">
                 <a:solidFill>
-                  <a:srgbClr val="B87333"/>
+                  <a:srgbClr val="C8102E"/>
                 </a:solidFill>
                 <a:latin typeface="Calibri" pitchFamily="34" charset="0"/>
                 <a:ea typeface="Calibri" pitchFamily="34" charset="-122"/>
@@ -14434,7 +14498,7 @@
             <a:r>
               <a:rPr lang="en-US" sz="2800" b="1" dirty="0">
                 <a:solidFill>
-                  <a:srgbClr val="B87333"/>
+                  <a:srgbClr val="C8102E"/>
                 </a:solidFill>
                 <a:latin typeface="Calibri" pitchFamily="34" charset="0"/>
                 <a:ea typeface="Calibri" pitchFamily="34" charset="-122"/>
@@ -14473,7 +14537,7 @@
             <a:r>
               <a:rPr lang="en-US" sz="1100" i="1" dirty="0">
                 <a:solidFill>
-                  <a:srgbClr val="5A6378"/>
+                  <a:srgbClr val="5C5C5C"/>
                 </a:solidFill>
                 <a:latin typeface="Calibri" pitchFamily="34" charset="0"/>
                 <a:ea typeface="Calibri" pitchFamily="34" charset="-122"/>
@@ -14500,11 +14564,11 @@
             <a:avLst/>
           </a:prstGeom>
           <a:solidFill>
-            <a:srgbClr val="F7F8FB"/>
+            <a:srgbClr val="F5F5F5"/>
           </a:solidFill>
           <a:ln w="19050">
             <a:solidFill>
-              <a:srgbClr val="F4B400"/>
+              <a:srgbClr val="C97B00"/>
             </a:solidFill>
             <a:prstDash val="solid"/>
           </a:ln>
@@ -14537,7 +14601,7 @@
             <a:r>
               <a:rPr lang="en-US" sz="1300" b="1" dirty="0">
                 <a:solidFill>
-                  <a:srgbClr val="F4B400"/>
+                  <a:srgbClr val="C97B00"/>
                 </a:solidFill>
                 <a:latin typeface="Calibri" pitchFamily="34" charset="0"/>
                 <a:ea typeface="Calibri" pitchFamily="34" charset="-122"/>
@@ -14576,7 +14640,7 @@
             <a:r>
               <a:rPr lang="en-US" sz="1100" dirty="0">
                 <a:solidFill>
-                  <a:srgbClr val="242938"/>
+                  <a:srgbClr val="1A1A1A"/>
                 </a:solidFill>
                 <a:latin typeface="Calibri" pitchFamily="34" charset="0"/>
                 <a:ea typeface="Calibri" pitchFamily="34" charset="-122"/>
@@ -14615,7 +14679,7 @@
             <a:r>
               <a:rPr lang="en-US" sz="900" dirty="0">
                 <a:solidFill>
-                  <a:srgbClr val="5A6378"/>
+                  <a:srgbClr val="5C5C5C"/>
                 </a:solidFill>
                 <a:latin typeface="Calibri" pitchFamily="34" charset="0"/>
                 <a:ea typeface="Calibri" pitchFamily="34" charset="-122"/>
@@ -14654,7 +14718,7 @@
             <a:r>
               <a:rPr lang="en-US" sz="900" dirty="0">
                 <a:solidFill>
-                  <a:srgbClr val="5A6378"/>
+                  <a:srgbClr val="5C5C5C"/>
                 </a:solidFill>
                 <a:latin typeface="Calibri" pitchFamily="34" charset="0"/>
                 <a:ea typeface="Calibri" pitchFamily="34" charset="-122"/>
@@ -14713,11 +14777,11 @@
             <a:avLst/>
           </a:prstGeom>
           <a:solidFill>
-            <a:srgbClr val="B87333"/>
+            <a:srgbClr val="C8102E"/>
           </a:solidFill>
           <a:ln w="12700">
             <a:solidFill>
-              <a:srgbClr val="B87333"/>
+              <a:srgbClr val="C8102E"/>
             </a:solidFill>
             <a:prstDash val="solid"/>
           </a:ln>
@@ -14750,7 +14814,7 @@
             <a:r>
               <a:rPr lang="en-US" sz="3000" b="1" dirty="0">
                 <a:solidFill>
-                  <a:srgbClr val="1E2761"/>
+                  <a:srgbClr val="1A1A1A"/>
                 </a:solidFill>
                 <a:latin typeface="Calibri" pitchFamily="34" charset="0"/>
                 <a:ea typeface="Calibri" pitchFamily="34" charset="-122"/>
@@ -14789,7 +14853,7 @@
             <a:r>
               <a:rPr lang="en-US" sz="1400" i="1" dirty="0">
                 <a:solidFill>
-                  <a:srgbClr val="5A6378"/>
+                  <a:srgbClr val="5C5C5C"/>
                 </a:solidFill>
                 <a:latin typeface="Calibri" pitchFamily="34" charset="0"/>
                 <a:ea typeface="Calibri" pitchFamily="34" charset="-122"/>
@@ -14816,11 +14880,11 @@
             <a:avLst/>
           </a:prstGeom>
           <a:solidFill>
-            <a:srgbClr val="F7F8FB"/>
+            <a:srgbClr val="F5F5F5"/>
           </a:solidFill>
           <a:ln w="12700">
             <a:solidFill>
-              <a:srgbClr val="CADCFC"/>
+              <a:srgbClr val="E0E0E0"/>
             </a:solidFill>
             <a:prstDash val="solid"/>
           </a:ln>
@@ -14841,11 +14905,11 @@
             <a:avLst/>
           </a:prstGeom>
           <a:solidFill>
-            <a:srgbClr val="0F9D58"/>
+            <a:srgbClr val="2E7D32"/>
           </a:solidFill>
           <a:ln w="12700">
             <a:solidFill>
-              <a:srgbClr val="0F9D58"/>
+              <a:srgbClr val="2E7D32"/>
             </a:solidFill>
             <a:prstDash val="solid"/>
           </a:ln>
@@ -14917,7 +14981,7 @@
             <a:r>
               <a:rPr lang="en-US" sz="1400" b="1" dirty="0">
                 <a:solidFill>
-                  <a:srgbClr val="1E2761"/>
+                  <a:srgbClr val="1A1A1A"/>
                 </a:solidFill>
                 <a:latin typeface="Calibri" pitchFamily="34" charset="0"/>
                 <a:ea typeface="Calibri" pitchFamily="34" charset="-122"/>
@@ -14956,7 +15020,7 @@
             <a:r>
               <a:rPr lang="en-US" sz="1100" dirty="0">
                 <a:solidFill>
-                  <a:srgbClr val="242938"/>
+                  <a:srgbClr val="1A1A1A"/>
                 </a:solidFill>
                 <a:latin typeface="Calibri" pitchFamily="34" charset="0"/>
                 <a:ea typeface="Calibri" pitchFamily="34" charset="-122"/>
@@ -14983,11 +15047,11 @@
             <a:avLst/>
           </a:prstGeom>
           <a:solidFill>
-            <a:srgbClr val="F7F8FB"/>
+            <a:srgbClr val="F5F5F5"/>
           </a:solidFill>
           <a:ln w="12700">
             <a:solidFill>
-              <a:srgbClr val="CADCFC"/>
+              <a:srgbClr val="E0E0E0"/>
             </a:solidFill>
             <a:prstDash val="solid"/>
           </a:ln>
@@ -15008,11 +15072,11 @@
             <a:avLst/>
           </a:prstGeom>
           <a:solidFill>
-            <a:srgbClr val="0F9D58"/>
+            <a:srgbClr val="2E7D32"/>
           </a:solidFill>
           <a:ln w="12700">
             <a:solidFill>
-              <a:srgbClr val="0F9D58"/>
+              <a:srgbClr val="2E7D32"/>
             </a:solidFill>
             <a:prstDash val="solid"/>
           </a:ln>
@@ -15084,7 +15148,7 @@
             <a:r>
               <a:rPr lang="en-US" sz="1400" b="1" dirty="0">
                 <a:solidFill>
-                  <a:srgbClr val="1E2761"/>
+                  <a:srgbClr val="1A1A1A"/>
                 </a:solidFill>
                 <a:latin typeface="Calibri" pitchFamily="34" charset="0"/>
                 <a:ea typeface="Calibri" pitchFamily="34" charset="-122"/>
@@ -15123,7 +15187,7 @@
             <a:r>
               <a:rPr lang="en-US" sz="1100" dirty="0">
                 <a:solidFill>
-                  <a:srgbClr val="242938"/>
+                  <a:srgbClr val="1A1A1A"/>
                 </a:solidFill>
                 <a:latin typeface="Calibri" pitchFamily="34" charset="0"/>
                 <a:ea typeface="Calibri" pitchFamily="34" charset="-122"/>
@@ -15150,11 +15214,11 @@
             <a:avLst/>
           </a:prstGeom>
           <a:solidFill>
-            <a:srgbClr val="F7F8FB"/>
+            <a:srgbClr val="F5F5F5"/>
           </a:solidFill>
           <a:ln w="12700">
             <a:solidFill>
-              <a:srgbClr val="CADCFC"/>
+              <a:srgbClr val="E0E0E0"/>
             </a:solidFill>
             <a:prstDash val="solid"/>
           </a:ln>
@@ -15175,11 +15239,11 @@
             <a:avLst/>
           </a:prstGeom>
           <a:solidFill>
-            <a:srgbClr val="0F9D58"/>
+            <a:srgbClr val="2E7D32"/>
           </a:solidFill>
           <a:ln w="12700">
             <a:solidFill>
-              <a:srgbClr val="0F9D58"/>
+              <a:srgbClr val="2E7D32"/>
             </a:solidFill>
             <a:prstDash val="solid"/>
           </a:ln>
@@ -15251,7 +15315,7 @@
             <a:r>
               <a:rPr lang="en-US" sz="1400" b="1" dirty="0">
                 <a:solidFill>
-                  <a:srgbClr val="1E2761"/>
+                  <a:srgbClr val="1A1A1A"/>
                 </a:solidFill>
                 <a:latin typeface="Calibri" pitchFamily="34" charset="0"/>
                 <a:ea typeface="Calibri" pitchFamily="34" charset="-122"/>
@@ -15290,7 +15354,7 @@
             <a:r>
               <a:rPr lang="en-US" sz="1100" dirty="0">
                 <a:solidFill>
-                  <a:srgbClr val="242938"/>
+                  <a:srgbClr val="1A1A1A"/>
                 </a:solidFill>
                 <a:latin typeface="Calibri" pitchFamily="34" charset="0"/>
                 <a:ea typeface="Calibri" pitchFamily="34" charset="-122"/>
@@ -15317,11 +15381,11 @@
             <a:avLst/>
           </a:prstGeom>
           <a:solidFill>
-            <a:srgbClr val="F7F8FB"/>
+            <a:srgbClr val="F5F5F5"/>
           </a:solidFill>
           <a:ln w="12700">
             <a:solidFill>
-              <a:srgbClr val="CADCFC"/>
+              <a:srgbClr val="E0E0E0"/>
             </a:solidFill>
             <a:prstDash val="solid"/>
           </a:ln>
@@ -15342,11 +15406,11 @@
             <a:avLst/>
           </a:prstGeom>
           <a:solidFill>
-            <a:srgbClr val="0F9D58"/>
+            <a:srgbClr val="2E7D32"/>
           </a:solidFill>
           <a:ln w="12700">
             <a:solidFill>
-              <a:srgbClr val="0F9D58"/>
+              <a:srgbClr val="2E7D32"/>
             </a:solidFill>
             <a:prstDash val="solid"/>
           </a:ln>
@@ -15418,7 +15482,7 @@
             <a:r>
               <a:rPr lang="en-US" sz="1400" b="1" dirty="0">
                 <a:solidFill>
-                  <a:srgbClr val="1E2761"/>
+                  <a:srgbClr val="1A1A1A"/>
                 </a:solidFill>
                 <a:latin typeface="Calibri" pitchFamily="34" charset="0"/>
                 <a:ea typeface="Calibri" pitchFamily="34" charset="-122"/>
@@ -15457,7 +15521,7 @@
             <a:r>
               <a:rPr lang="en-US" sz="1100" dirty="0">
                 <a:solidFill>
-                  <a:srgbClr val="242938"/>
+                  <a:srgbClr val="1A1A1A"/>
                 </a:solidFill>
                 <a:latin typeface="Calibri" pitchFamily="34" charset="0"/>
                 <a:ea typeface="Calibri" pitchFamily="34" charset="-122"/>
@@ -15484,11 +15548,11 @@
             <a:avLst/>
           </a:prstGeom>
           <a:solidFill>
-            <a:srgbClr val="F7F8FB"/>
+            <a:srgbClr val="F5F5F5"/>
           </a:solidFill>
           <a:ln w="12700">
             <a:solidFill>
-              <a:srgbClr val="CADCFC"/>
+              <a:srgbClr val="E0E0E0"/>
             </a:solidFill>
             <a:prstDash val="solid"/>
           </a:ln>
@@ -15509,11 +15573,11 @@
             <a:avLst/>
           </a:prstGeom>
           <a:solidFill>
-            <a:srgbClr val="D93025"/>
+            <a:srgbClr val="C8102E"/>
           </a:solidFill>
           <a:ln w="12700">
             <a:solidFill>
-              <a:srgbClr val="D93025"/>
+              <a:srgbClr val="C8102E"/>
             </a:solidFill>
             <a:prstDash val="solid"/>
           </a:ln>
@@ -15585,7 +15649,7 @@
             <a:r>
               <a:rPr lang="en-US" sz="1400" b="1" dirty="0">
                 <a:solidFill>
-                  <a:srgbClr val="1E2761"/>
+                  <a:srgbClr val="1A1A1A"/>
                 </a:solidFill>
                 <a:latin typeface="Calibri" pitchFamily="34" charset="0"/>
                 <a:ea typeface="Calibri" pitchFamily="34" charset="-122"/>
@@ -15624,7 +15688,7 @@
             <a:r>
               <a:rPr lang="en-US" sz="1100" dirty="0">
                 <a:solidFill>
-                  <a:srgbClr val="242938"/>
+                  <a:srgbClr val="1A1A1A"/>
                 </a:solidFill>
                 <a:latin typeface="Calibri" pitchFamily="34" charset="0"/>
                 <a:ea typeface="Calibri" pitchFamily="34" charset="-122"/>
@@ -15663,7 +15727,7 @@
             <a:r>
               <a:rPr lang="en-US" sz="1100" i="1" dirty="0">
                 <a:solidFill>
-                  <a:srgbClr val="5A6378"/>
+                  <a:srgbClr val="5C5C5C"/>
                 </a:solidFill>
                 <a:latin typeface="Calibri" pitchFamily="34" charset="0"/>
                 <a:ea typeface="Calibri" pitchFamily="34" charset="-122"/>
@@ -15702,7 +15766,7 @@
             <a:r>
               <a:rPr lang="en-US" sz="900" dirty="0">
                 <a:solidFill>
-                  <a:srgbClr val="5A6378"/>
+                  <a:srgbClr val="5C5C5C"/>
                 </a:solidFill>
                 <a:latin typeface="Calibri" pitchFamily="34" charset="0"/>
                 <a:ea typeface="Calibri" pitchFamily="34" charset="-122"/>
@@ -15741,7 +15805,7 @@
             <a:r>
               <a:rPr lang="en-US" sz="900" dirty="0">
                 <a:solidFill>
-                  <a:srgbClr val="5A6378"/>
+                  <a:srgbClr val="5C5C5C"/>
                 </a:solidFill>
                 <a:latin typeface="Calibri" pitchFamily="34" charset="0"/>
                 <a:ea typeface="Calibri" pitchFamily="34" charset="-122"/>
@@ -15800,11 +15864,11 @@
             <a:avLst/>
           </a:prstGeom>
           <a:solidFill>
-            <a:srgbClr val="B87333"/>
+            <a:srgbClr val="C8102E"/>
           </a:solidFill>
           <a:ln w="12700">
             <a:solidFill>
-              <a:srgbClr val="B87333"/>
+              <a:srgbClr val="C8102E"/>
             </a:solidFill>
             <a:prstDash val="solid"/>
           </a:ln>
@@ -15837,7 +15901,7 @@
             <a:r>
               <a:rPr lang="en-US" sz="3000" b="1" dirty="0">
                 <a:solidFill>
-                  <a:srgbClr val="1E2761"/>
+                  <a:srgbClr val="1A1A1A"/>
                 </a:solidFill>
                 <a:latin typeface="Calibri" pitchFamily="34" charset="0"/>
                 <a:ea typeface="Calibri" pitchFamily="34" charset="-122"/>
@@ -15876,7 +15940,7 @@
             <a:r>
               <a:rPr lang="en-US" sz="1400" i="1" dirty="0">
                 <a:solidFill>
-                  <a:srgbClr val="5A6378"/>
+                  <a:srgbClr val="5C5C5C"/>
                 </a:solidFill>
                 <a:latin typeface="Calibri" pitchFamily="34" charset="0"/>
                 <a:ea typeface="Calibri" pitchFamily="34" charset="-122"/>
@@ -15915,7 +15979,7 @@
             <a:r>
               <a:rPr lang="en-US" sz="1400" b="1" dirty="0">
                 <a:solidFill>
-                  <a:srgbClr val="1E2761"/>
+                  <a:srgbClr val="1A1A1A"/>
                 </a:solidFill>
                 <a:latin typeface="Calibri" pitchFamily="34" charset="0"/>
                 <a:ea typeface="Calibri" pitchFamily="34" charset="-122"/>
@@ -15954,7 +16018,7 @@
             <a:r>
               <a:rPr lang="en-US" sz="1200" dirty="0">
                 <a:solidFill>
-                  <a:srgbClr val="242938"/>
+                  <a:srgbClr val="1A1A1A"/>
                 </a:solidFill>
                 <a:latin typeface="Calibri" pitchFamily="34" charset="0"/>
                 <a:ea typeface="Calibri" pitchFamily="34" charset="-122"/>
@@ -15993,7 +16057,7 @@
             <a:r>
               <a:rPr lang="en-US" sz="1400" b="1" dirty="0">
                 <a:solidFill>
-                  <a:srgbClr val="1E2761"/>
+                  <a:srgbClr val="1A1A1A"/>
                 </a:solidFill>
                 <a:latin typeface="Calibri" pitchFamily="34" charset="0"/>
                 <a:ea typeface="Calibri" pitchFamily="34" charset="-122"/>
@@ -16036,7 +16100,7 @@
             <a:r>
               <a:rPr lang="en-US" sz="1100" dirty="0">
                 <a:solidFill>
-                  <a:srgbClr val="242938"/>
+                  <a:srgbClr val="1A1A1A"/>
                 </a:solidFill>
                 <a:latin typeface="Calibri" pitchFamily="34" charset="0"/>
                 <a:ea typeface="Calibri" pitchFamily="34" charset="-122"/>
@@ -16057,7 +16121,7 @@
             <a:r>
               <a:rPr lang="en-US" sz="1100" dirty="0">
                 <a:solidFill>
-                  <a:srgbClr val="242938"/>
+                  <a:srgbClr val="1A1A1A"/>
                 </a:solidFill>
                 <a:latin typeface="Calibri" pitchFamily="34" charset="0"/>
                 <a:ea typeface="Calibri" pitchFamily="34" charset="-122"/>
@@ -16078,7 +16142,7 @@
             <a:r>
               <a:rPr lang="en-US" sz="1100" dirty="0">
                 <a:solidFill>
-                  <a:srgbClr val="242938"/>
+                  <a:srgbClr val="1A1A1A"/>
                 </a:solidFill>
                 <a:latin typeface="Calibri" pitchFamily="34" charset="0"/>
                 <a:ea typeface="Calibri" pitchFamily="34" charset="-122"/>
@@ -16099,7 +16163,7 @@
             <a:r>
               <a:rPr lang="en-US" sz="1100" dirty="0">
                 <a:solidFill>
-                  <a:srgbClr val="242938"/>
+                  <a:srgbClr val="1A1A1A"/>
                 </a:solidFill>
                 <a:latin typeface="Calibri" pitchFamily="34" charset="0"/>
                 <a:ea typeface="Calibri" pitchFamily="34" charset="-122"/>
@@ -16126,11 +16190,11 @@
             <a:avLst/>
           </a:prstGeom>
           <a:solidFill>
-            <a:srgbClr val="F7F8FB"/>
+            <a:srgbClr val="F5F5F5"/>
           </a:solidFill>
           <a:ln w="12700">
             <a:solidFill>
-              <a:srgbClr val="B87333"/>
+              <a:srgbClr val="C8102E"/>
             </a:solidFill>
             <a:prstDash val="solid"/>
           </a:ln>
@@ -16163,7 +16227,7 @@
             <a:r>
               <a:rPr lang="en-US" sz="1400" b="1" dirty="0">
                 <a:solidFill>
-                  <a:srgbClr val="B87333"/>
+                  <a:srgbClr val="C8102E"/>
                 </a:solidFill>
                 <a:latin typeface="Calibri" pitchFamily="34" charset="0"/>
                 <a:ea typeface="Calibri" pitchFamily="34" charset="-122"/>
@@ -16202,7 +16266,7 @@
             <a:r>
               <a:rPr lang="en-US" sz="1100" dirty="0">
                 <a:solidFill>
-                  <a:srgbClr val="242938"/>
+                  <a:srgbClr val="1A1A1A"/>
                 </a:solidFill>
                 <a:latin typeface="Calibri" pitchFamily="34" charset="0"/>
                 <a:ea typeface="Calibri" pitchFamily="34" charset="-122"/>
@@ -16241,7 +16305,7 @@
             <a:r>
               <a:rPr lang="en-US" sz="1200" b="1" dirty="0">
                 <a:solidFill>
-                  <a:srgbClr val="1E2761"/>
+                  <a:srgbClr val="1A1A1A"/>
                 </a:solidFill>
                 <a:latin typeface="Calibri" pitchFamily="34" charset="0"/>
                 <a:ea typeface="Calibri" pitchFamily="34" charset="-122"/>
@@ -16280,7 +16344,7 @@
             <a:r>
               <a:rPr lang="en-US" sz="1100" dirty="0">
                 <a:solidFill>
-                  <a:srgbClr val="242938"/>
+                  <a:srgbClr val="1A1A1A"/>
                 </a:solidFill>
                 <a:latin typeface="Calibri" pitchFamily="34" charset="0"/>
                 <a:ea typeface="Calibri" pitchFamily="34" charset="-122"/>
@@ -16319,7 +16383,7 @@
             <a:r>
               <a:rPr lang="en-US" sz="1200" b="1" dirty="0">
                 <a:solidFill>
-                  <a:srgbClr val="1E2761"/>
+                  <a:srgbClr val="1A1A1A"/>
                 </a:solidFill>
                 <a:latin typeface="Calibri" pitchFamily="34" charset="0"/>
                 <a:ea typeface="Calibri" pitchFamily="34" charset="-122"/>
@@ -16358,7 +16422,7 @@
             <a:r>
               <a:rPr lang="en-US" sz="1100" dirty="0">
                 <a:solidFill>
-                  <a:srgbClr val="B87333"/>
+                  <a:srgbClr val="C8102E"/>
                 </a:solidFill>
                 <a:latin typeface="Calibri" pitchFamily="34" charset="0"/>
                 <a:ea typeface="Calibri" pitchFamily="34" charset="-122"/>
@@ -16397,7 +16461,7 @@
             <a:r>
               <a:rPr lang="en-US" sz="900" dirty="0">
                 <a:solidFill>
-                  <a:srgbClr val="5A6378"/>
+                  <a:srgbClr val="5C5C5C"/>
                 </a:solidFill>
                 <a:latin typeface="Calibri" pitchFamily="34" charset="0"/>
                 <a:ea typeface="Calibri" pitchFamily="34" charset="-122"/>
@@ -16436,7 +16500,7 @@
             <a:r>
               <a:rPr lang="en-US" sz="900" dirty="0">
                 <a:solidFill>
-                  <a:srgbClr val="5A6378"/>
+                  <a:srgbClr val="5C5C5C"/>
                 </a:solidFill>
                 <a:latin typeface="Calibri" pitchFamily="34" charset="0"/>
                 <a:ea typeface="Calibri" pitchFamily="34" charset="-122"/>
@@ -16495,11 +16559,11 @@
             <a:avLst/>
           </a:prstGeom>
           <a:solidFill>
-            <a:srgbClr val="B87333"/>
+            <a:srgbClr val="C8102E"/>
           </a:solidFill>
           <a:ln w="12700">
             <a:solidFill>
-              <a:srgbClr val="B87333"/>
+              <a:srgbClr val="C8102E"/>
             </a:solidFill>
             <a:prstDash val="solid"/>
           </a:ln>
@@ -16532,7 +16596,7 @@
             <a:r>
               <a:rPr lang="en-US" sz="3000" b="1" dirty="0">
                 <a:solidFill>
-                  <a:srgbClr val="1E2761"/>
+                  <a:srgbClr val="1A1A1A"/>
                 </a:solidFill>
                 <a:latin typeface="Calibri" pitchFamily="34" charset="0"/>
                 <a:ea typeface="Calibri" pitchFamily="34" charset="-122"/>
@@ -16571,7 +16635,7 @@
             <a:r>
               <a:rPr lang="en-US" sz="1400" i="1" dirty="0">
                 <a:solidFill>
-                  <a:srgbClr val="5A6378"/>
+                  <a:srgbClr val="5C5C5C"/>
                 </a:solidFill>
                 <a:latin typeface="Calibri" pitchFamily="34" charset="0"/>
                 <a:ea typeface="Calibri" pitchFamily="34" charset="-122"/>
@@ -16610,7 +16674,7 @@
             <a:r>
               <a:rPr lang="en-US" sz="1400" b="1" dirty="0">
                 <a:solidFill>
-                  <a:srgbClr val="1E2761"/>
+                  <a:srgbClr val="1A1A1A"/>
                 </a:solidFill>
                 <a:latin typeface="Calibri" pitchFamily="34" charset="0"/>
                 <a:ea typeface="Calibri" pitchFamily="34" charset="-122"/>
@@ -16649,7 +16713,7 @@
             <a:r>
               <a:rPr lang="en-US" sz="1200" dirty="0">
                 <a:solidFill>
-                  <a:srgbClr val="242938"/>
+                  <a:srgbClr val="1A1A1A"/>
                 </a:solidFill>
                 <a:latin typeface="Calibri" pitchFamily="34" charset="0"/>
                 <a:ea typeface="Calibri" pitchFamily="34" charset="-122"/>
@@ -16688,7 +16752,7 @@
             <a:r>
               <a:rPr lang="en-US" sz="1400" b="1" dirty="0">
                 <a:solidFill>
-                  <a:srgbClr val="1E2761"/>
+                  <a:srgbClr val="1A1A1A"/>
                 </a:solidFill>
                 <a:latin typeface="Calibri" pitchFamily="34" charset="0"/>
                 <a:ea typeface="Calibri" pitchFamily="34" charset="-122"/>
@@ -16731,7 +16795,7 @@
             <a:r>
               <a:rPr lang="en-US" sz="1200" dirty="0">
                 <a:solidFill>
-                  <a:srgbClr val="242938"/>
+                  <a:srgbClr val="1A1A1A"/>
                 </a:solidFill>
                 <a:latin typeface="Calibri" pitchFamily="34" charset="0"/>
                 <a:ea typeface="Calibri" pitchFamily="34" charset="-122"/>
@@ -16752,7 +16816,7 @@
             <a:r>
               <a:rPr lang="en-US" sz="1200" dirty="0">
                 <a:solidFill>
-                  <a:srgbClr val="242938"/>
+                  <a:srgbClr val="1A1A1A"/>
                 </a:solidFill>
                 <a:latin typeface="Calibri" pitchFamily="34" charset="0"/>
                 <a:ea typeface="Calibri" pitchFamily="34" charset="-122"/>
@@ -16773,7 +16837,7 @@
             <a:r>
               <a:rPr lang="en-US" sz="1200" dirty="0">
                 <a:solidFill>
-                  <a:srgbClr val="242938"/>
+                  <a:srgbClr val="1A1A1A"/>
                 </a:solidFill>
                 <a:latin typeface="Calibri" pitchFamily="34" charset="0"/>
                 <a:ea typeface="Calibri" pitchFamily="34" charset="-122"/>
@@ -16800,11 +16864,11 @@
             <a:avLst/>
           </a:prstGeom>
           <a:solidFill>
-            <a:srgbClr val="F7F8FB"/>
+            <a:srgbClr val="F5F5F5"/>
           </a:solidFill>
           <a:ln w="12700">
             <a:solidFill>
-              <a:srgbClr val="B87333"/>
+              <a:srgbClr val="C8102E"/>
             </a:solidFill>
             <a:prstDash val="solid"/>
           </a:ln>
@@ -16837,7 +16901,7 @@
             <a:r>
               <a:rPr lang="en-US" sz="1200" i="1" dirty="0">
                 <a:solidFill>
-                  <a:srgbClr val="5A6378"/>
+                  <a:srgbClr val="5C5C5C"/>
                 </a:solidFill>
                 <a:latin typeface="Calibri" pitchFamily="34" charset="0"/>
                 <a:ea typeface="Calibri" pitchFamily="34" charset="-122"/>
@@ -16876,7 +16940,7 @@
             <a:r>
               <a:rPr lang="en-US" sz="3600" b="1" dirty="0">
                 <a:solidFill>
-                  <a:srgbClr val="B87333"/>
+                  <a:srgbClr val="C8102E"/>
                 </a:solidFill>
                 <a:latin typeface="Calibri" pitchFamily="34" charset="0"/>
                 <a:ea typeface="Calibri" pitchFamily="34" charset="-122"/>
@@ -16915,7 +16979,7 @@
             <a:r>
               <a:rPr lang="en-US" sz="1100" dirty="0">
                 <a:solidFill>
-                  <a:srgbClr val="D93025"/>
+                  <a:srgbClr val="C8102E"/>
                 </a:solidFill>
                 <a:latin typeface="Calibri" pitchFamily="34" charset="0"/>
                 <a:ea typeface="Calibri" pitchFamily="34" charset="-122"/>
@@ -16954,7 +17018,7 @@
             <a:r>
               <a:rPr lang="en-US" sz="900" i="1" dirty="0">
                 <a:solidFill>
-                  <a:srgbClr val="5A6378"/>
+                  <a:srgbClr val="5C5C5C"/>
                 </a:solidFill>
                 <a:latin typeface="Calibri" pitchFamily="34" charset="0"/>
                 <a:ea typeface="Calibri" pitchFamily="34" charset="-122"/>
@@ -16981,11 +17045,11 @@
             <a:avLst/>
           </a:prstGeom>
           <a:solidFill>
-            <a:srgbClr val="F7F8FB"/>
+            <a:srgbClr val="F5F5F5"/>
           </a:solidFill>
           <a:ln w="19050">
             <a:solidFill>
-              <a:srgbClr val="F4B400"/>
+              <a:srgbClr val="C97B00"/>
             </a:solidFill>
             <a:prstDash val="solid"/>
           </a:ln>
@@ -17018,7 +17082,7 @@
             <a:r>
               <a:rPr lang="en-US" sz="1200" b="1" dirty="0">
                 <a:solidFill>
-                  <a:srgbClr val="F4B400"/>
+                  <a:srgbClr val="C97B00"/>
                 </a:solidFill>
                 <a:latin typeface="Calibri" pitchFamily="34" charset="0"/>
                 <a:ea typeface="Calibri" pitchFamily="34" charset="-122"/>
@@ -17057,7 +17121,7 @@
             <a:r>
               <a:rPr lang="en-US" sz="1100" dirty="0">
                 <a:solidFill>
-                  <a:srgbClr val="242938"/>
+                  <a:srgbClr val="1A1A1A"/>
                 </a:solidFill>
                 <a:latin typeface="Calibri" pitchFamily="34" charset="0"/>
                 <a:ea typeface="Calibri" pitchFamily="34" charset="-122"/>
@@ -17096,7 +17160,7 @@
             <a:r>
               <a:rPr lang="en-US" sz="900" dirty="0">
                 <a:solidFill>
-                  <a:srgbClr val="5A6378"/>
+                  <a:srgbClr val="5C5C5C"/>
                 </a:solidFill>
                 <a:latin typeface="Calibri" pitchFamily="34" charset="0"/>
                 <a:ea typeface="Calibri" pitchFamily="34" charset="-122"/>
@@ -17135,7 +17199,7 @@
             <a:r>
               <a:rPr lang="en-US" sz="900" dirty="0">
                 <a:solidFill>
-                  <a:srgbClr val="5A6378"/>
+                  <a:srgbClr val="5C5C5C"/>
                 </a:solidFill>
                 <a:latin typeface="Calibri" pitchFamily="34" charset="0"/>
                 <a:ea typeface="Calibri" pitchFamily="34" charset="-122"/>

--- a/presentation/Copper_Forecast_For_Director.pptx
+++ b/presentation/Copper_Forecast_For_Director.pptx
@@ -8077,7 +8077,7 @@
                 <a:ea typeface="Calibri" pitchFamily="34" charset="-122"/>
                 <a:cs typeface="Calibri" pitchFamily="34" charset="-120"/>
               </a:rPr>
-              <a:t>Что улучшать дальше</a:t>
+              <a:t>Что улучшать дальше + бюджет</a:t>
             </a:r>
             <a:endParaRPr lang="en-US" sz="3000" dirty="0"/>
           </a:p>
@@ -8116,7 +8116,7 @@
                 <a:ea typeface="Calibri" pitchFamily="34" charset="-122"/>
                 <a:cs typeface="Calibri" pitchFamily="34" charset="-120"/>
               </a:rPr>
-              <a:t>Roadmap на 6-12 месяцев</a:t>
+              <a:t>Roadmap синхронизирован с документом «Платные сервисы»</a:t>
             </a:r>
             <a:endParaRPr lang="en-US" sz="1400" dirty="0"/>
           </a:p>
@@ -8353,7 +8353,7 @@
                 <a:ea typeface="Calibri" pitchFamily="34" charset="-122"/>
                 <a:cs typeface="Calibri" pitchFamily="34" charset="-120"/>
               </a:rPr>
-              <a:t>+8 источников: AUD/CLP/CNY, Mining ETFs, VIX</a:t>
+              <a:t>+8 источников: валюты, Mining ETFs, VIX</a:t>
             </a:r>
             <a:endParaRPr lang="en-US" sz="1050" dirty="0"/>
           </a:p>
@@ -8442,7 +8442,7 @@
                 <a:ea typeface="Calibri" pitchFamily="34" charset="-122"/>
                 <a:cs typeface="Calibri" pitchFamily="34" charset="-120"/>
               </a:rPr>
-              <a:t>БЛИЖАЙШИЕ 3-6 мес</a:t>
+              <a:t>🟢 ~30 тыс. ₽/мес</a:t>
             </a:r>
             <a:endParaRPr lang="en-US" sz="1400" dirty="0"/>
           </a:p>
@@ -8485,7 +8485,7 @@
                 <a:ea typeface="Calibri" pitchFamily="34" charset="-122"/>
                 <a:cs typeface="Calibri" pitchFamily="34" charset="-120"/>
               </a:rPr>
-              <a:t>Накопить историю LME 3M (3-6 мес ежедневных запусков)</a:t>
+              <a:t>VPS (1 тыс. ₽): быстрый старт, свой домен</a:t>
             </a:r>
             <a:endParaRPr lang="en-US" sz="1050" dirty="0"/>
           </a:p>
@@ -8506,7 +8506,7 @@
                 <a:ea typeface="Calibri" pitchFamily="34" charset="-122"/>
                 <a:cs typeface="Calibri" pitchFamily="34" charset="-120"/>
               </a:rPr>
-              <a:t>FRED API: добавить Caixin PMI, IPI, ставки</a:t>
+              <a:t>Trading Economics (9 тыс. ₽): авто-календарь</a:t>
             </a:r>
             <a:endParaRPr lang="en-US" sz="1050" dirty="0"/>
           </a:p>
@@ -8527,7 +8527,7 @@
                 <a:ea typeface="Calibri" pitchFamily="34" charset="-122"/>
                 <a:cs typeface="Calibri" pitchFamily="34" charset="-120"/>
               </a:rPr>
-              <a:t>ERP-интеграция: привязка прогноза к плану закупок</a:t>
+              <a:t>ICSG Bulletin (20 тыс. ₽): баланс рынка</a:t>
             </a:r>
             <a:endParaRPr lang="en-US" sz="1050" dirty="0"/>
           </a:p>
@@ -8548,7 +8548,7 @@
                 <a:ea typeface="Calibri" pitchFamily="34" charset="-122"/>
                 <a:cs typeface="Calibri" pitchFamily="34" charset="-120"/>
               </a:rPr>
-              <a:t>Прогноз цены в рублях (курс ЦБ + хедж)</a:t>
+              <a:t>→ +5-7 % точности прогноза</a:t>
             </a:r>
             <a:endParaRPr lang="en-US" sz="1050" dirty="0"/>
           </a:p>
@@ -8569,7 +8569,28 @@
                 <a:ea typeface="Calibri" pitchFamily="34" charset="-122"/>
                 <a:cs typeface="Calibri" pitchFamily="34" charset="-120"/>
               </a:rPr>
-              <a:t>Telegram-алерты на смену режима и critical-новости</a:t>
+              <a:t>→ освобождает 25 ч аналитика в мес.</a:t>
+            </a:r>
+            <a:endParaRPr lang="en-US" sz="1050" dirty="0"/>
+          </a:p>
+          <a:p>
+            <a:pPr marL="342900" indent="-342900">
+              <a:spcAft>
+                <a:spcPts val="600"/>
+              </a:spcAft>
+              <a:buSzPct val="100000"/>
+              <a:buChar char="■"/>
+            </a:pPr>
+            <a:r>
+              <a:rPr lang="en-US" sz="1050" dirty="0">
+                <a:solidFill>
+                  <a:srgbClr val="1A1A1A"/>
+                </a:solidFill>
+                <a:latin typeface="Calibri" pitchFamily="34" charset="0"/>
+                <a:ea typeface="Calibri" pitchFamily="34" charset="-122"/>
+                <a:cs typeface="Calibri" pitchFamily="34" charset="-120"/>
+              </a:rPr>
+              <a:t>Окупается при закупках от 50 млн ₽/год</a:t>
             </a:r>
             <a:endParaRPr lang="en-US" sz="1050" dirty="0"/>
           </a:p>
@@ -8658,7 +8679,7 @@
                 <a:ea typeface="Calibri" pitchFamily="34" charset="-122"/>
                 <a:cs typeface="Calibri" pitchFamily="34" charset="-120"/>
               </a:rPr>
-              <a:t>6 → 12 мес</a:t>
+              <a:t>🟡 ~150 тыс. ₽/мес</a:t>
             </a:r>
             <a:endParaRPr lang="en-US" sz="1400" dirty="0"/>
           </a:p>
@@ -8701,7 +8722,7 @@
                 <a:ea typeface="Calibri" pitchFamily="34" charset="-122"/>
                 <a:cs typeface="Calibri" pitchFamily="34" charset="-120"/>
               </a:rPr>
-              <a:t>Платные источники: ICSG Bulletin, LMEsource, SMM</a:t>
+              <a:t>Всё из минимального пакета +</a:t>
             </a:r>
             <a:endParaRPr lang="en-US" sz="1050" dirty="0"/>
           </a:p>
@@ -8722,7 +8743,7 @@
                 <a:ea typeface="Calibri" pitchFamily="34" charset="-122"/>
                 <a:cs typeface="Calibri" pitchFamily="34" charset="-120"/>
               </a:rPr>
-              <a:t>Deep models: LSTM, Temporal Fusion Transformer</a:t>
+              <a:t>S&amp;P Platts (100 тыс. ₽): TC/RC, концентраты</a:t>
             </a:r>
             <a:endParaRPr lang="en-US" sz="1050" dirty="0"/>
           </a:p>
@@ -8743,7 +8764,7 @@
                 <a:ea typeface="Calibri" pitchFamily="34" charset="-122"/>
                 <a:cs typeface="Calibri" pitchFamily="34" charset="-120"/>
               </a:rPr>
-              <a:t>Event study: автопривязка новостей к движениям</a:t>
+              <a:t>SMM (50 тыс. ₽): китайский физ. рынок</a:t>
             </a:r>
             <a:endParaRPr lang="en-US" sz="1050" dirty="0"/>
           </a:p>
@@ -8764,7 +8785,7 @@
                 <a:ea typeface="Calibri" pitchFamily="34" charset="-122"/>
                 <a:cs typeface="Calibri" pitchFamily="34" charset="-120"/>
               </a:rPr>
-              <a:t>FinBERT для NLP-сентимента (точнее VADER)</a:t>
+              <a:t>Claude API (10 тыс. ₽): умный NLP новостей</a:t>
             </a:r>
             <a:endParaRPr lang="en-US" sz="1050" dirty="0"/>
           </a:p>
@@ -8785,10 +8806,31 @@
                 <a:ea typeface="Calibri" pitchFamily="34" charset="-122"/>
                 <a:cs typeface="Calibri" pitchFamily="34" charset="-120"/>
               </a:rPr>
-              <a:t>Оптимизация портфеля: хедж + спот + контракты</a:t>
+              <a:t>→ +10-15 % точности на длинных горизонтах</a:t>
             </a:r>
             <a:endParaRPr lang="en-US" sz="1050" dirty="0"/>
           </a:p>
+          <a:p>
+            <a:pPr marL="342900" indent="-342900">
+              <a:spcAft>
+                <a:spcPts val="600"/>
+              </a:spcAft>
+              <a:buSzPct val="100000"/>
+              <a:buChar char="■"/>
+            </a:pPr>
+            <a:r>
+              <a:rPr lang="en-US" sz="1050" dirty="0">
+                <a:solidFill>
+                  <a:srgbClr val="1A1A1A"/>
+                </a:solidFill>
+                <a:latin typeface="Calibri" pitchFamily="34" charset="0"/>
+                <a:ea typeface="Calibri" pitchFamily="34" charset="-122"/>
+                <a:cs typeface="Calibri" pitchFamily="34" charset="-120"/>
+              </a:rPr>
+              <a:t>Для закупок от 500 млн ₽/год</a:t>
+            </a:r>
+            <a:endParaRPr lang="en-US" sz="1050" dirty="0"/>
+          </a:p>
         </p:txBody>
       </p:sp>
       <p:sp>
@@ -8799,24 +8841,24 @@
         </p:nvSpPr>
         <p:spPr>
           <a:xfrm>
-            <a:off x="457200" y="4617720"/>
-            <a:ext cx="8229600" cy="365760"/>
-          </a:xfrm>
-          <a:prstGeom prst="rect">
-            <a:avLst/>
-          </a:prstGeom>
-          <a:noFill/>
-          <a:ln/>
-        </p:spPr>
-        <p:txBody>
-          <a:bodyPr wrap="square" lIns="0" tIns="0" rIns="0" bIns="0" rtlCol="0" anchor="ctr"/>
-          <a:lstStyle/>
-          <a:p>
-            <a:pPr indent="0" marL="0">
-              <a:buNone/>
-            </a:pPr>
-            <a:r>
-              <a:rPr lang="en-US" sz="1100" i="1" dirty="0">
+            <a:off x="457200" y="4572000"/>
+            <a:ext cx="8229600" cy="457200"/>
+          </a:xfrm>
+          <a:prstGeom prst="rect">
+            <a:avLst/>
+          </a:prstGeom>
+          <a:noFill/>
+          <a:ln/>
+        </p:spPr>
+        <p:txBody>
+          <a:bodyPr wrap="square" lIns="0" tIns="0" rIns="0" bIns="0" rtlCol="0" anchor="ctr"/>
+          <a:lstStyle/>
+          <a:p>
+            <a:pPr indent="0" marL="0">
+              <a:buNone/>
+            </a:pPr>
+            <a:r>
+              <a:rPr lang="en-US" sz="1000" i="1" dirty="0">
                 <a:solidFill>
                   <a:srgbClr val="5C5C5C"/>
                 </a:solidFill>
@@ -8824,9 +8866,9 @@
                 <a:ea typeface="Calibri" pitchFamily="34" charset="-122"/>
                 <a:cs typeface="Calibri" pitchFamily="34" charset="-120"/>
               </a:rPr>
-              <a:t>Бюджет: первая фаза — без затрат (опираемся на бесплатные данные). Платные источники — со второй половины года.</a:t>
-            </a:r>
-            <a:endParaRPr lang="en-US" sz="1100" dirty="0"/>
+              <a:t>Рекомендация: начать с зелёного пакета (~30 тыс. ₽/мес). Через 6 месяцев — оценить эффект в реальных деньгах и решить про жёлтый пакет. Подробности — в документе «Платные сервисы».</a:t>
+            </a:r>
+            <a:endParaRPr lang="en-US" sz="1000" dirty="0"/>
           </a:p>
         </p:txBody>
       </p:sp>
@@ -9375,7 +9417,7 @@
               <a:buNone/>
             </a:pPr>
             <a:r>
-              <a:rPr lang="en-US" sz="1100" dirty="0">
+              <a:rPr lang="en-US" sz="1000" dirty="0">
                 <a:solidFill>
                   <a:srgbClr val="1A1A1A"/>
                 </a:solidFill>
@@ -9385,14 +9427,31 @@
               </a:rPr>
               <a:t>Эксперт-куратор системы (1 человек, 0.5 FTE)</a:t>
             </a:r>
-            <a:endParaRPr lang="en-US" sz="1100" dirty="0"/>
-          </a:p>
-          <a:p>
-            <a:pPr indent="0" marL="0">
-              <a:buNone/>
-            </a:pPr>
-            <a:r>
-              <a:rPr lang="en-US" sz="1100" dirty="0">
+            <a:endParaRPr lang="en-US" sz="1000" dirty="0"/>
+          </a:p>
+          <a:p>
+            <a:pPr indent="0" marL="0">
+              <a:buNone/>
+            </a:pPr>
+            <a:r>
+              <a:rPr lang="en-US" sz="1000" dirty="0">
+                <a:solidFill>
+                  <a:srgbClr val="1A1A1A"/>
+                </a:solidFill>
+                <a:latin typeface="Calibri" pitchFamily="34" charset="0"/>
+                <a:ea typeface="Calibri" pitchFamily="34" charset="-122"/>
+                <a:cs typeface="Calibri" pitchFamily="34" charset="-120"/>
+              </a:rPr>
+              <a:t>Бюджет на подписки: ~30 тыс. ₽/мес (старт)</a:t>
+            </a:r>
+            <a:endParaRPr lang="en-US" sz="1000" dirty="0"/>
+          </a:p>
+          <a:p>
+            <a:pPr indent="0" marL="0">
+              <a:buNone/>
+            </a:pPr>
+            <a:r>
+              <a:rPr lang="en-US" sz="1000" dirty="0">
                 <a:solidFill>
                   <a:srgbClr val="1A1A1A"/>
                 </a:solidFill>
@@ -9402,24 +9461,24 @@
               </a:rPr>
               <a:t>Доступ к данным закупок для калибровки</a:t>
             </a:r>
-            <a:endParaRPr lang="en-US" sz="1100" dirty="0"/>
-          </a:p>
-          <a:p>
-            <a:pPr indent="0" marL="0">
-              <a:buNone/>
-            </a:pPr>
-            <a:r>
-              <a:rPr lang="en-US" sz="1100" dirty="0">
-                <a:solidFill>
-                  <a:srgbClr val="1A1A1A"/>
-                </a:solidFill>
-                <a:latin typeface="Calibri" pitchFamily="34" charset="0"/>
-                <a:ea typeface="Calibri" pitchFamily="34" charset="-122"/>
-                <a:cs typeface="Calibri" pitchFamily="34" charset="-120"/>
-              </a:rPr>
-              <a:t>Решение по платным источникам в Q3 2026</a:t>
-            </a:r>
-            <a:endParaRPr lang="en-US" sz="1100" dirty="0"/>
+            <a:endParaRPr lang="en-US" sz="1000" dirty="0"/>
+          </a:p>
+          <a:p>
+            <a:pPr indent="0" marL="0">
+              <a:buNone/>
+            </a:pPr>
+            <a:r>
+              <a:rPr lang="en-US" sz="1000" dirty="0">
+                <a:solidFill>
+                  <a:srgbClr val="1A1A1A"/>
+                </a:solidFill>
+                <a:latin typeface="Calibri" pitchFamily="34" charset="0"/>
+                <a:ea typeface="Calibri" pitchFamily="34" charset="-122"/>
+                <a:cs typeface="Calibri" pitchFamily="34" charset="-120"/>
+              </a:rPr>
+              <a:t>Через 6 мес — решение о расширении пакета</a:t>
+            </a:r>
+            <a:endParaRPr lang="en-US" sz="1000" dirty="0"/>
           </a:p>
         </p:txBody>
       </p:sp>

--- a/presentation/Copper_Forecast_For_Director.pptx
+++ b/presentation/Copper_Forecast_For_Director.pptx
@@ -5377,7 +5377,7 @@
         <p:spPr>
           <a:xfrm>
             <a:off x="365760" y="1280160"/>
-            <a:ext cx="4023360" cy="1554480"/>
+            <a:ext cx="2743200" cy="1554480"/>
           </a:xfrm>
           <a:prstGeom prst="rect">
             <a:avLst/>
@@ -5427,23 +5427,23 @@
         <p:spPr>
           <a:xfrm>
             <a:off x="530352" y="1389888"/>
-            <a:ext cx="3749040" cy="320040"/>
-          </a:xfrm>
-          <a:prstGeom prst="rect">
-            <a:avLst/>
-          </a:prstGeom>
-          <a:noFill/>
-          <a:ln/>
-        </p:spPr>
-        <p:txBody>
-          <a:bodyPr wrap="square" lIns="0" tIns="0" rIns="0" bIns="0" rtlCol="0" anchor="ctr"/>
-          <a:lstStyle/>
-          <a:p>
-            <a:pPr indent="0" marL="0">
-              <a:buNone/>
-            </a:pPr>
-            <a:r>
-              <a:rPr lang="en-US" sz="1400" b="1" dirty="0">
+            <a:ext cx="2468880" cy="457200"/>
+          </a:xfrm>
+          <a:prstGeom prst="rect">
+            <a:avLst/>
+          </a:prstGeom>
+          <a:noFill/>
+          <a:ln/>
+        </p:spPr>
+        <p:txBody>
+          <a:bodyPr wrap="square" lIns="0" tIns="0" rIns="0" bIns="0" rtlCol="0" anchor="ctr"/>
+          <a:lstStyle/>
+          <a:p>
+            <a:pPr indent="0" marL="0">
+              <a:buNone/>
+            </a:pPr>
+            <a:r>
+              <a:rPr lang="en-US" sz="1200" b="1" dirty="0">
                 <a:solidFill>
                   <a:srgbClr val="1A1A1A"/>
                 </a:solidFill>
@@ -5453,7 +5453,7 @@
               </a:rPr>
               <a:t>🔍 SHAP: почему такой прогноз?</a:t>
             </a:r>
-            <a:endParaRPr lang="en-US" sz="1400" dirty="0"/>
+            <a:endParaRPr lang="en-US" sz="1200" dirty="0"/>
           </a:p>
         </p:txBody>
       </p:sp>
@@ -5465,71 +5465,32 @@
         </p:nvSpPr>
         <p:spPr>
           <a:xfrm>
-            <a:off x="530352" y="1737360"/>
-            <a:ext cx="3749040" cy="640080"/>
-          </a:xfrm>
-          <a:prstGeom prst="rect">
-            <a:avLst/>
-          </a:prstGeom>
-          <a:noFill/>
-          <a:ln/>
-        </p:spPr>
-        <p:txBody>
-          <a:bodyPr wrap="square" lIns="0" tIns="0" rIns="0" bIns="0" rtlCol="0" anchor="ctr"/>
-          <a:lstStyle/>
-          <a:p>
-            <a:pPr indent="0" marL="0">
-              <a:buNone/>
-            </a:pPr>
-            <a:r>
-              <a:rPr lang="en-US" sz="1000" dirty="0">
-                <a:solidFill>
-                  <a:srgbClr val="1A1A1A"/>
-                </a:solidFill>
-                <a:latin typeface="Calibri" pitchFamily="34" charset="0"/>
-                <a:ea typeface="Calibri" pitchFamily="34" charset="-122"/>
-                <a:cs typeface="Calibri" pitchFamily="34" charset="-120"/>
-              </a:rPr>
-              <a:t>На любой прогноз модель показывает топ-10 факторов, которые тянут цену вверх (зелёные) или вниз (красные). Видно вклад каждого: DXY, COT, RSI, корреляции.</a:t>
-            </a:r>
-            <a:endParaRPr lang="en-US" sz="1000" dirty="0"/>
-          </a:p>
-        </p:txBody>
-      </p:sp>
-      <p:sp>
-        <p:nvSpPr>
-          <p:cNvPr id="9" name="Text 7"/>
-          <p:cNvSpPr/>
-          <p:nvPr/>
-        </p:nvSpPr>
-        <p:spPr>
-          <a:xfrm>
-            <a:off x="530352" y="2395728"/>
-            <a:ext cx="3749040" cy="365760"/>
-          </a:xfrm>
-          <a:prstGeom prst="rect">
-            <a:avLst/>
-          </a:prstGeom>
-          <a:noFill/>
-          <a:ln/>
-        </p:spPr>
-        <p:txBody>
-          <a:bodyPr wrap="square" lIns="0" tIns="0" rIns="0" bIns="0" rtlCol="0" anchor="ctr"/>
-          <a:lstStyle/>
-          <a:p>
-            <a:pPr indent="0" marL="0">
-              <a:buNone/>
-            </a:pPr>
-            <a:r>
-              <a:rPr lang="en-US" sz="950" i="1" dirty="0">
-                <a:solidFill>
-                  <a:srgbClr val="C8102E"/>
-                </a:solidFill>
-                <a:latin typeface="Calibri" pitchFamily="34" charset="0"/>
-                <a:ea typeface="Calibri" pitchFamily="34" charset="-122"/>
-                <a:cs typeface="Calibri" pitchFamily="34" charset="-120"/>
-              </a:rPr>
-              <a:t>💡 Перестали верить «вслепую» — теперь решение опирается на видимые причины.</a:t>
+            <a:off x="530352" y="1874520"/>
+            <a:ext cx="2468880" cy="868680"/>
+          </a:xfrm>
+          <a:prstGeom prst="rect">
+            <a:avLst/>
+          </a:prstGeom>
+          <a:noFill/>
+          <a:ln/>
+        </p:spPr>
+        <p:txBody>
+          <a:bodyPr wrap="square" lIns="0" tIns="0" rIns="0" bIns="0" rtlCol="0" anchor="ctr"/>
+          <a:lstStyle/>
+          <a:p>
+            <a:pPr indent="0" marL="0">
+              <a:buNone/>
+            </a:pPr>
+            <a:r>
+              <a:rPr lang="en-US" sz="950" dirty="0">
+                <a:solidFill>
+                  <a:srgbClr val="1A1A1A"/>
+                </a:solidFill>
+                <a:latin typeface="Calibri" pitchFamily="34" charset="0"/>
+                <a:ea typeface="Calibri" pitchFamily="34" charset="-122"/>
+                <a:cs typeface="Calibri" pitchFamily="34" charset="-120"/>
+              </a:rPr>
+              <a:t>Показывает топ-10 факторов, тянущих цену вверх/вниз: DXY, COT, RSI, корреляции. Не нужно верить «вслепую».</a:t>
             </a:r>
             <a:endParaRPr lang="en-US" sz="950" dirty="0"/>
           </a:p>
@@ -5537,14 +5498,14 @@
       </p:sp>
       <p:sp>
         <p:nvSpPr>
-          <p:cNvPr id="10" name="Shape 8"/>
-          <p:cNvSpPr/>
-          <p:nvPr/>
-        </p:nvSpPr>
-        <p:spPr>
-          <a:xfrm>
-            <a:off x="4663440" y="1280160"/>
-            <a:ext cx="4023360" cy="1554480"/>
+          <p:cNvPr id="9" name="Shape 7"/>
+          <p:cNvSpPr/>
+          <p:nvPr/>
+        </p:nvSpPr>
+        <p:spPr>
+          <a:xfrm>
+            <a:off x="3291840" y="1280160"/>
+            <a:ext cx="2743200" cy="1554480"/>
           </a:xfrm>
           <a:prstGeom prst="rect">
             <a:avLst/>
@@ -5562,13 +5523,13 @@
       </p:sp>
       <p:sp>
         <p:nvSpPr>
-          <p:cNvPr id="11" name="Shape 9"/>
-          <p:cNvSpPr/>
-          <p:nvPr/>
-        </p:nvSpPr>
-        <p:spPr>
-          <a:xfrm>
-            <a:off x="4663440" y="1280160"/>
+          <p:cNvPr id="10" name="Shape 8"/>
+          <p:cNvSpPr/>
+          <p:nvPr/>
+        </p:nvSpPr>
+        <p:spPr>
+          <a:xfrm>
+            <a:off x="3291840" y="1280160"/>
             <a:ext cx="73152" cy="1554480"/>
           </a:xfrm>
           <a:prstGeom prst="rect">
@@ -5587,116 +5548,77 @@
       </p:sp>
       <p:sp>
         <p:nvSpPr>
+          <p:cNvPr id="11" name="Text 9"/>
+          <p:cNvSpPr/>
+          <p:nvPr/>
+        </p:nvSpPr>
+        <p:spPr>
+          <a:xfrm>
+            <a:off x="3456432" y="1389888"/>
+            <a:ext cx="2468880" cy="457200"/>
+          </a:xfrm>
+          <a:prstGeom prst="rect">
+            <a:avLst/>
+          </a:prstGeom>
+          <a:noFill/>
+          <a:ln/>
+        </p:spPr>
+        <p:txBody>
+          <a:bodyPr wrap="square" lIns="0" tIns="0" rIns="0" bIns="0" rtlCol="0" anchor="ctr"/>
+          <a:lstStyle/>
+          <a:p>
+            <a:pPr indent="0" marL="0">
+              <a:buNone/>
+            </a:pPr>
+            <a:r>
+              <a:rPr lang="en-US" sz="1200" b="1" dirty="0">
+                <a:solidFill>
+                  <a:srgbClr val="1A1A1A"/>
+                </a:solidFill>
+                <a:latin typeface="Calibri" pitchFamily="34" charset="0"/>
+                <a:ea typeface="Calibri" pitchFamily="34" charset="-122"/>
+                <a:cs typeface="Calibri" pitchFamily="34" charset="-120"/>
+              </a:rPr>
+              <a:t>🔮 What-if: симуляция сценариев</a:t>
+            </a:r>
+            <a:endParaRPr lang="en-US" sz="1200" dirty="0"/>
+          </a:p>
+        </p:txBody>
+      </p:sp>
+      <p:sp>
+        <p:nvSpPr>
           <p:cNvPr id="12" name="Text 10"/>
           <p:cNvSpPr/>
           <p:nvPr/>
         </p:nvSpPr>
         <p:spPr>
           <a:xfrm>
-            <a:off x="4828032" y="1389888"/>
-            <a:ext cx="3749040" cy="320040"/>
-          </a:xfrm>
-          <a:prstGeom prst="rect">
-            <a:avLst/>
-          </a:prstGeom>
-          <a:noFill/>
-          <a:ln/>
-        </p:spPr>
-        <p:txBody>
-          <a:bodyPr wrap="square" lIns="0" tIns="0" rIns="0" bIns="0" rtlCol="0" anchor="ctr"/>
-          <a:lstStyle/>
-          <a:p>
-            <a:pPr indent="0" marL="0">
-              <a:buNone/>
-            </a:pPr>
-            <a:r>
-              <a:rPr lang="en-US" sz="1400" b="1" dirty="0">
-                <a:solidFill>
-                  <a:srgbClr val="1A1A1A"/>
-                </a:solidFill>
-                <a:latin typeface="Calibri" pitchFamily="34" charset="0"/>
-                <a:ea typeface="Calibri" pitchFamily="34" charset="-122"/>
-                <a:cs typeface="Calibri" pitchFamily="34" charset="-120"/>
-              </a:rPr>
-              <a:t>🔮 What-if: симуляция сценариев</a:t>
-            </a:r>
-            <a:endParaRPr lang="en-US" sz="1400" dirty="0"/>
-          </a:p>
-        </p:txBody>
-      </p:sp>
-      <p:sp>
-        <p:nvSpPr>
-          <p:cNvPr id="13" name="Text 11"/>
-          <p:cNvSpPr/>
-          <p:nvPr/>
-        </p:nvSpPr>
-        <p:spPr>
-          <a:xfrm>
-            <a:off x="4828032" y="1737360"/>
-            <a:ext cx="3749040" cy="640080"/>
-          </a:xfrm>
-          <a:prstGeom prst="rect">
-            <a:avLst/>
-          </a:prstGeom>
-          <a:noFill/>
-          <a:ln/>
-        </p:spPr>
-        <p:txBody>
-          <a:bodyPr wrap="square" lIns="0" tIns="0" rIns="0" bIns="0" rtlCol="0" anchor="ctr"/>
-          <a:lstStyle/>
-          <a:p>
-            <a:pPr indent="0" marL="0">
-              <a:buNone/>
-            </a:pPr>
-            <a:r>
-              <a:rPr lang="en-US" sz="1000" dirty="0">
-                <a:solidFill>
-                  <a:srgbClr val="1A1A1A"/>
-                </a:solidFill>
-                <a:latin typeface="Calibri" pitchFamily="34" charset="0"/>
-                <a:ea typeface="Calibri" pitchFamily="34" charset="-122"/>
-                <a:cs typeface="Calibri" pitchFamily="34" charset="-120"/>
-              </a:rPr>
-              <a:t>6 слайдеров: DXY, нефть, VIX, Mining ETFs, юань, позиции хедж-фондов. Сдвиг — мгновенный пересчёт прогноза.</a:t>
-            </a:r>
-            <a:endParaRPr lang="en-US" sz="1000" dirty="0"/>
-          </a:p>
-        </p:txBody>
-      </p:sp>
-      <p:sp>
-        <p:nvSpPr>
-          <p:cNvPr id="14" name="Text 12"/>
-          <p:cNvSpPr/>
-          <p:nvPr/>
-        </p:nvSpPr>
-        <p:spPr>
-          <a:xfrm>
-            <a:off x="4828032" y="2395728"/>
-            <a:ext cx="3749040" cy="365760"/>
-          </a:xfrm>
-          <a:prstGeom prst="rect">
-            <a:avLst/>
-          </a:prstGeom>
-          <a:noFill/>
-          <a:ln/>
-        </p:spPr>
-        <p:txBody>
-          <a:bodyPr wrap="square" lIns="0" tIns="0" rIns="0" bIns="0" rtlCol="0" anchor="ctr"/>
-          <a:lstStyle/>
-          <a:p>
-            <a:pPr indent="0" marL="0">
-              <a:buNone/>
-            </a:pPr>
-            <a:r>
-              <a:rPr lang="en-US" sz="950" i="1" dirty="0">
-                <a:solidFill>
-                  <a:srgbClr val="C8102E"/>
-                </a:solidFill>
-                <a:latin typeface="Calibri" pitchFamily="34" charset="0"/>
-                <a:ea typeface="Calibri" pitchFamily="34" charset="-122"/>
-                <a:cs typeface="Calibri" pitchFamily="34" charset="-120"/>
-              </a:rPr>
-              <a:t>💡 Проигрывайте «что если CPI выйдет горячее на 0.3 %» прямо в окне.</a:t>
+            <a:off x="3456432" y="1874520"/>
+            <a:ext cx="2468880" cy="868680"/>
+          </a:xfrm>
+          <a:prstGeom prst="rect">
+            <a:avLst/>
+          </a:prstGeom>
+          <a:noFill/>
+          <a:ln/>
+        </p:spPr>
+        <p:txBody>
+          <a:bodyPr wrap="square" lIns="0" tIns="0" rIns="0" bIns="0" rtlCol="0" anchor="ctr"/>
+          <a:lstStyle/>
+          <a:p>
+            <a:pPr indent="0" marL="0">
+              <a:buNone/>
+            </a:pPr>
+            <a:r>
+              <a:rPr lang="en-US" sz="950" dirty="0">
+                <a:solidFill>
+                  <a:srgbClr val="1A1A1A"/>
+                </a:solidFill>
+                <a:latin typeface="Calibri" pitchFamily="34" charset="0"/>
+                <a:ea typeface="Calibri" pitchFamily="34" charset="-122"/>
+                <a:cs typeface="Calibri" pitchFamily="34" charset="-120"/>
+              </a:rPr>
+              <a:t>6 слайдеров: DXY, нефть, VIX, Mining ETFs, юань, COT. Мгновенный пересчёт прогноза при сдвиге.</a:t>
             </a:r>
             <a:endParaRPr lang="en-US" sz="950" dirty="0"/>
           </a:p>
@@ -5704,14 +5626,14 @@
       </p:sp>
       <p:sp>
         <p:nvSpPr>
-          <p:cNvPr id="15" name="Shape 13"/>
-          <p:cNvSpPr/>
-          <p:nvPr/>
-        </p:nvSpPr>
-        <p:spPr>
-          <a:xfrm>
-            <a:off x="365760" y="2971800"/>
-            <a:ext cx="4023360" cy="1554480"/>
+          <p:cNvPr id="13" name="Shape 11"/>
+          <p:cNvSpPr/>
+          <p:nvPr/>
+        </p:nvSpPr>
+        <p:spPr>
+          <a:xfrm>
+            <a:off x="6217920" y="1280160"/>
+            <a:ext cx="2743200" cy="1554480"/>
           </a:xfrm>
           <a:prstGeom prst="rect">
             <a:avLst/>
@@ -5729,13 +5651,13 @@
       </p:sp>
       <p:sp>
         <p:nvSpPr>
-          <p:cNvPr id="16" name="Shape 14"/>
-          <p:cNvSpPr/>
-          <p:nvPr/>
-        </p:nvSpPr>
-        <p:spPr>
-          <a:xfrm>
-            <a:off x="365760" y="2971800"/>
+          <p:cNvPr id="14" name="Shape 12"/>
+          <p:cNvSpPr/>
+          <p:nvPr/>
+        </p:nvSpPr>
+        <p:spPr>
+          <a:xfrm>
+            <a:off x="6217920" y="1280160"/>
             <a:ext cx="73152" cy="1554480"/>
           </a:xfrm>
           <a:prstGeom prst="rect">
@@ -5754,30 +5676,30 @@
       </p:sp>
       <p:sp>
         <p:nvSpPr>
-          <p:cNvPr id="17" name="Text 15"/>
-          <p:cNvSpPr/>
-          <p:nvPr/>
-        </p:nvSpPr>
-        <p:spPr>
-          <a:xfrm>
-            <a:off x="530352" y="3081528"/>
-            <a:ext cx="3749040" cy="320040"/>
-          </a:xfrm>
-          <a:prstGeom prst="rect">
-            <a:avLst/>
-          </a:prstGeom>
-          <a:noFill/>
-          <a:ln/>
-        </p:spPr>
-        <p:txBody>
-          <a:bodyPr wrap="square" lIns="0" tIns="0" rIns="0" bIns="0" rtlCol="0" anchor="ctr"/>
-          <a:lstStyle/>
-          <a:p>
-            <a:pPr indent="0" marL="0">
-              <a:buNone/>
-            </a:pPr>
-            <a:r>
-              <a:rPr lang="en-US" sz="1400" b="1" dirty="0">
+          <p:cNvPr id="15" name="Text 13"/>
+          <p:cNvSpPr/>
+          <p:nvPr/>
+        </p:nvSpPr>
+        <p:spPr>
+          <a:xfrm>
+            <a:off x="6382512" y="1389888"/>
+            <a:ext cx="2468880" cy="457200"/>
+          </a:xfrm>
+          <a:prstGeom prst="rect">
+            <a:avLst/>
+          </a:prstGeom>
+          <a:noFill/>
+          <a:ln/>
+        </p:spPr>
+        <p:txBody>
+          <a:bodyPr wrap="square" lIns="0" tIns="0" rIns="0" bIns="0" rtlCol="0" anchor="ctr"/>
+          <a:lstStyle/>
+          <a:p>
+            <a:pPr indent="0" marL="0">
+              <a:buNone/>
+            </a:pPr>
+            <a:r>
+              <a:rPr lang="en-US" sz="1200" b="1" dirty="0">
                 <a:solidFill>
                   <a:srgbClr val="1A1A1A"/>
                 </a:solidFill>
@@ -5787,83 +5709,44 @@
               </a:rPr>
               <a:t>🔥 Стресс-тесты</a:t>
             </a:r>
-            <a:endParaRPr lang="en-US" sz="1400" dirty="0"/>
-          </a:p>
-        </p:txBody>
-      </p:sp>
-      <p:sp>
-        <p:nvSpPr>
-          <p:cNvPr id="18" name="Text 16"/>
-          <p:cNvSpPr/>
-          <p:nvPr/>
-        </p:nvSpPr>
-        <p:spPr>
-          <a:xfrm>
-            <a:off x="530352" y="3429000"/>
-            <a:ext cx="3749040" cy="640080"/>
-          </a:xfrm>
-          <a:prstGeom prst="rect">
-            <a:avLst/>
-          </a:prstGeom>
-          <a:noFill/>
-          <a:ln/>
-        </p:spPr>
-        <p:txBody>
-          <a:bodyPr wrap="square" lIns="0" tIns="0" rIns="0" bIns="0" rtlCol="0" anchor="ctr"/>
-          <a:lstStyle/>
-          <a:p>
-            <a:pPr indent="0" marL="0">
-              <a:buNone/>
-            </a:pPr>
-            <a:r>
-              <a:rPr lang="en-US" sz="1000" dirty="0">
-                <a:solidFill>
-                  <a:srgbClr val="1A1A1A"/>
-                </a:solidFill>
-                <a:latin typeface="Calibri" pitchFamily="34" charset="0"/>
-                <a:ea typeface="Calibri" pitchFamily="34" charset="-122"/>
-                <a:cs typeface="Calibri" pitchFamily="34" charset="-120"/>
-              </a:rPr>
-              <a:t>5 готовых сценариев: Cobre Panamá, Escondida, тариф 30 %, COVID, China stimulus. Накладываем шок на текущий прогноз — видим downside.</a:t>
-            </a:r>
-            <a:endParaRPr lang="en-US" sz="1000" dirty="0"/>
-          </a:p>
-        </p:txBody>
-      </p:sp>
-      <p:sp>
-        <p:nvSpPr>
-          <p:cNvPr id="19" name="Text 17"/>
-          <p:cNvSpPr/>
-          <p:nvPr/>
-        </p:nvSpPr>
-        <p:spPr>
-          <a:xfrm>
-            <a:off x="530352" y="4087368"/>
-            <a:ext cx="3749040" cy="365760"/>
-          </a:xfrm>
-          <a:prstGeom prst="rect">
-            <a:avLst/>
-          </a:prstGeom>
-          <a:noFill/>
-          <a:ln/>
-        </p:spPr>
-        <p:txBody>
-          <a:bodyPr wrap="square" lIns="0" tIns="0" rIns="0" bIns="0" rtlCol="0" anchor="ctr"/>
-          <a:lstStyle/>
-          <a:p>
-            <a:pPr indent="0" marL="0">
-              <a:buNone/>
-            </a:pPr>
-            <a:r>
-              <a:rPr lang="en-US" sz="950" i="1" dirty="0">
-                <a:solidFill>
-                  <a:srgbClr val="C8102E"/>
-                </a:solidFill>
-                <a:latin typeface="Calibri" pitchFamily="34" charset="0"/>
-                <a:ea typeface="Calibri" pitchFamily="34" charset="-122"/>
-                <a:cs typeface="Calibri" pitchFamily="34" charset="-120"/>
-              </a:rPr>
-              <a:t>💡 Перед крупной закупкой — сразу видно худший сценарий.</a:t>
+            <a:endParaRPr lang="en-US" sz="1200" dirty="0"/>
+          </a:p>
+        </p:txBody>
+      </p:sp>
+      <p:sp>
+        <p:nvSpPr>
+          <p:cNvPr id="16" name="Text 14"/>
+          <p:cNvSpPr/>
+          <p:nvPr/>
+        </p:nvSpPr>
+        <p:spPr>
+          <a:xfrm>
+            <a:off x="6382512" y="1874520"/>
+            <a:ext cx="2468880" cy="868680"/>
+          </a:xfrm>
+          <a:prstGeom prst="rect">
+            <a:avLst/>
+          </a:prstGeom>
+          <a:noFill/>
+          <a:ln/>
+        </p:spPr>
+        <p:txBody>
+          <a:bodyPr wrap="square" lIns="0" tIns="0" rIns="0" bIns="0" rtlCol="0" anchor="ctr"/>
+          <a:lstStyle/>
+          <a:p>
+            <a:pPr indent="0" marL="0">
+              <a:buNone/>
+            </a:pPr>
+            <a:r>
+              <a:rPr lang="en-US" sz="950" dirty="0">
+                <a:solidFill>
+                  <a:srgbClr val="1A1A1A"/>
+                </a:solidFill>
+                <a:latin typeface="Calibri" pitchFamily="34" charset="0"/>
+                <a:ea typeface="Calibri" pitchFamily="34" charset="-122"/>
+                <a:cs typeface="Calibri" pitchFamily="34" charset="-120"/>
+              </a:rPr>
+              <a:t>5 готовых сценариев из истории: Cobre Panamá, Escondida, тариф 30%, COVID, China stimulus. Сразу видно худший случай.</a:t>
             </a:r>
             <a:endParaRPr lang="en-US" sz="950" dirty="0"/>
           </a:p>
@@ -5871,14 +5754,14 @@
       </p:sp>
       <p:sp>
         <p:nvSpPr>
-          <p:cNvPr id="20" name="Shape 18"/>
-          <p:cNvSpPr/>
-          <p:nvPr/>
-        </p:nvSpPr>
-        <p:spPr>
-          <a:xfrm>
-            <a:off x="4663440" y="2971800"/>
-            <a:ext cx="4023360" cy="1554480"/>
+          <p:cNvPr id="17" name="Shape 15"/>
+          <p:cNvSpPr/>
+          <p:nvPr/>
+        </p:nvSpPr>
+        <p:spPr>
+          <a:xfrm>
+            <a:off x="365760" y="2971800"/>
+            <a:ext cx="2743200" cy="1554480"/>
           </a:xfrm>
           <a:prstGeom prst="rect">
             <a:avLst/>
@@ -5896,13 +5779,13 @@
       </p:sp>
       <p:sp>
         <p:nvSpPr>
-          <p:cNvPr id="21" name="Shape 19"/>
-          <p:cNvSpPr/>
-          <p:nvPr/>
-        </p:nvSpPr>
-        <p:spPr>
-          <a:xfrm>
-            <a:off x="4663440" y="2971800"/>
+          <p:cNvPr id="18" name="Shape 16"/>
+          <p:cNvSpPr/>
+          <p:nvPr/>
+        </p:nvSpPr>
+        <p:spPr>
+          <a:xfrm>
+            <a:off x="365760" y="2971800"/>
             <a:ext cx="73152" cy="1554480"/>
           </a:xfrm>
           <a:prstGeom prst="rect">
@@ -5921,30 +5804,30 @@
       </p:sp>
       <p:sp>
         <p:nvSpPr>
-          <p:cNvPr id="22" name="Text 20"/>
-          <p:cNvSpPr/>
-          <p:nvPr/>
-        </p:nvSpPr>
-        <p:spPr>
-          <a:xfrm>
-            <a:off x="4828032" y="3081528"/>
-            <a:ext cx="3749040" cy="320040"/>
-          </a:xfrm>
-          <a:prstGeom prst="rect">
-            <a:avLst/>
-          </a:prstGeom>
-          <a:noFill/>
-          <a:ln/>
-        </p:spPr>
-        <p:txBody>
-          <a:bodyPr wrap="square" lIns="0" tIns="0" rIns="0" bIns="0" rtlCol="0" anchor="ctr"/>
-          <a:lstStyle/>
-          <a:p>
-            <a:pPr indent="0" marL="0">
-              <a:buNone/>
-            </a:pPr>
-            <a:r>
-              <a:rPr lang="en-US" sz="1400" b="1" dirty="0">
+          <p:cNvPr id="19" name="Text 17"/>
+          <p:cNvSpPr/>
+          <p:nvPr/>
+        </p:nvSpPr>
+        <p:spPr>
+          <a:xfrm>
+            <a:off x="530352" y="3081528"/>
+            <a:ext cx="2468880" cy="457200"/>
+          </a:xfrm>
+          <a:prstGeom prst="rect">
+            <a:avLst/>
+          </a:prstGeom>
+          <a:noFill/>
+          <a:ln/>
+        </p:spPr>
+        <p:txBody>
+          <a:bodyPr wrap="square" lIns="0" tIns="0" rIns="0" bIns="0" rtlCol="0" anchor="ctr"/>
+          <a:lstStyle/>
+          <a:p>
+            <a:pPr indent="0" marL="0">
+              <a:buNone/>
+            </a:pPr>
+            <a:r>
+              <a:rPr lang="en-US" sz="1200" b="1" dirty="0">
                 <a:solidFill>
                   <a:srgbClr val="1A1A1A"/>
                 </a:solidFill>
@@ -5954,9 +5837,98 @@
               </a:rPr>
               <a:t>📄 PDF-отчёт одной кнопкой</a:t>
             </a:r>
-            <a:endParaRPr lang="en-US" sz="1400" dirty="0"/>
-          </a:p>
-        </p:txBody>
+            <a:endParaRPr lang="en-US" sz="1200" dirty="0"/>
+          </a:p>
+        </p:txBody>
+      </p:sp>
+      <p:sp>
+        <p:nvSpPr>
+          <p:cNvPr id="20" name="Text 18"/>
+          <p:cNvSpPr/>
+          <p:nvPr/>
+        </p:nvSpPr>
+        <p:spPr>
+          <a:xfrm>
+            <a:off x="530352" y="3566160"/>
+            <a:ext cx="2468880" cy="868680"/>
+          </a:xfrm>
+          <a:prstGeom prst="rect">
+            <a:avLst/>
+          </a:prstGeom>
+          <a:noFill/>
+          <a:ln/>
+        </p:spPr>
+        <p:txBody>
+          <a:bodyPr wrap="square" lIns="0" tIns="0" rIns="0" bIns="0" rtlCol="0" anchor="ctr"/>
+          <a:lstStyle/>
+          <a:p>
+            <a:pPr indent="0" marL="0">
+              <a:buNone/>
+            </a:pPr>
+            <a:r>
+              <a:rPr lang="en-US" sz="950" dirty="0">
+                <a:solidFill>
+                  <a:srgbClr val="1A1A1A"/>
+                </a:solidFill>
+                <a:latin typeface="Calibri" pitchFamily="34" charset="0"/>
+                <a:ea typeface="Calibri" pitchFamily="34" charset="-122"/>
+                <a:cs typeface="Calibri" pitchFamily="34" charset="-120"/>
+              </a:rPr>
+              <a:t>Ключевые метрики, прогноз на 5 горизонтов, события на месяц — в 1-2 страничный PDF для руководства.</a:t>
+            </a:r>
+            <a:endParaRPr lang="en-US" sz="950" dirty="0"/>
+          </a:p>
+        </p:txBody>
+      </p:sp>
+      <p:sp>
+        <p:nvSpPr>
+          <p:cNvPr id="21" name="Shape 19"/>
+          <p:cNvSpPr/>
+          <p:nvPr/>
+        </p:nvSpPr>
+        <p:spPr>
+          <a:xfrm>
+            <a:off x="3291840" y="2971800"/>
+            <a:ext cx="2743200" cy="1554480"/>
+          </a:xfrm>
+          <a:prstGeom prst="rect">
+            <a:avLst/>
+          </a:prstGeom>
+          <a:solidFill>
+            <a:srgbClr val="F5F5F5"/>
+          </a:solidFill>
+          <a:ln w="12700">
+            <a:solidFill>
+              <a:srgbClr val="E0E0E0"/>
+            </a:solidFill>
+            <a:prstDash val="solid"/>
+          </a:ln>
+        </p:spPr>
+      </p:sp>
+      <p:sp>
+        <p:nvSpPr>
+          <p:cNvPr id="22" name="Shape 20"/>
+          <p:cNvSpPr/>
+          <p:nvPr/>
+        </p:nvSpPr>
+        <p:spPr>
+          <a:xfrm>
+            <a:off x="3291840" y="2971800"/>
+            <a:ext cx="73152" cy="1554480"/>
+          </a:xfrm>
+          <a:prstGeom prst="rect">
+            <a:avLst/>
+          </a:prstGeom>
+          <a:solidFill>
+            <a:srgbClr val="C8102E"/>
+          </a:solidFill>
+          <a:ln w="12700">
+            <a:solidFill>
+              <a:srgbClr val="C8102E"/>
+            </a:solidFill>
+            <a:prstDash val="solid"/>
+          </a:ln>
+        </p:spPr>
       </p:sp>
       <p:sp>
         <p:nvSpPr>
@@ -5966,34 +5938,34 @@
         </p:nvSpPr>
         <p:spPr>
           <a:xfrm>
-            <a:off x="4828032" y="3429000"/>
-            <a:ext cx="3749040" cy="640080"/>
-          </a:xfrm>
-          <a:prstGeom prst="rect">
-            <a:avLst/>
-          </a:prstGeom>
-          <a:noFill/>
-          <a:ln/>
-        </p:spPr>
-        <p:txBody>
-          <a:bodyPr wrap="square" lIns="0" tIns="0" rIns="0" bIns="0" rtlCol="0" anchor="ctr"/>
-          <a:lstStyle/>
-          <a:p>
-            <a:pPr indent="0" marL="0">
-              <a:buNone/>
-            </a:pPr>
-            <a:r>
-              <a:rPr lang="en-US" sz="1000" dirty="0">
-                <a:solidFill>
-                  <a:srgbClr val="1A1A1A"/>
-                </a:solidFill>
-                <a:latin typeface="Calibri" pitchFamily="34" charset="0"/>
-                <a:ea typeface="Calibri" pitchFamily="34" charset="-122"/>
-                <a:cs typeface="Calibri" pitchFamily="34" charset="-120"/>
-              </a:rPr>
-              <a:t>Все ключевые метрики, прогноз на 5 горизонтов, события на месяц — в 1-2 страничном PDF.</a:t>
-            </a:r>
-            <a:endParaRPr lang="en-US" sz="1000" dirty="0"/>
+            <a:off x="3456432" y="3081528"/>
+            <a:ext cx="2468880" cy="457200"/>
+          </a:xfrm>
+          <a:prstGeom prst="rect">
+            <a:avLst/>
+          </a:prstGeom>
+          <a:noFill/>
+          <a:ln/>
+        </p:spPr>
+        <p:txBody>
+          <a:bodyPr wrap="square" lIns="0" tIns="0" rIns="0" bIns="0" rtlCol="0" anchor="ctr"/>
+          <a:lstStyle/>
+          <a:p>
+            <a:pPr indent="0" marL="0">
+              <a:buNone/>
+            </a:pPr>
+            <a:r>
+              <a:rPr lang="en-US" sz="1200" b="1" dirty="0">
+                <a:solidFill>
+                  <a:srgbClr val="1A1A1A"/>
+                </a:solidFill>
+                <a:latin typeface="Calibri" pitchFamily="34" charset="0"/>
+                <a:ea typeface="Calibri" pitchFamily="34" charset="-122"/>
+                <a:cs typeface="Calibri" pitchFamily="34" charset="-120"/>
+              </a:rPr>
+              <a:t>🗓️ Сезонный анализ</a:t>
+            </a:r>
+            <a:endParaRPr lang="en-US" sz="1200" dirty="0"/>
           </a:p>
         </p:txBody>
       </p:sp>
@@ -6005,32 +5977,32 @@
         </p:nvSpPr>
         <p:spPr>
           <a:xfrm>
-            <a:off x="4828032" y="4087368"/>
-            <a:ext cx="3749040" cy="365760"/>
-          </a:xfrm>
-          <a:prstGeom prst="rect">
-            <a:avLst/>
-          </a:prstGeom>
-          <a:noFill/>
-          <a:ln/>
-        </p:spPr>
-        <p:txBody>
-          <a:bodyPr wrap="square" lIns="0" tIns="0" rIns="0" bIns="0" rtlCol="0" anchor="ctr"/>
-          <a:lstStyle/>
-          <a:p>
-            <a:pPr indent="0" marL="0">
-              <a:buNone/>
-            </a:pPr>
-            <a:r>
-              <a:rPr lang="en-US" sz="950" i="1" dirty="0">
-                <a:solidFill>
-                  <a:srgbClr val="C8102E"/>
-                </a:solidFill>
-                <a:latin typeface="Calibri" pitchFamily="34" charset="0"/>
-                <a:ea typeface="Calibri" pitchFamily="34" charset="-122"/>
-                <a:cs typeface="Calibri" pitchFamily="34" charset="-120"/>
-              </a:rPr>
-              <a:t>💡 Еженедельная отправка руководству — больше не задача на полдня.</a:t>
+            <a:off x="3456432" y="3566160"/>
+            <a:ext cx="2468880" cy="868680"/>
+          </a:xfrm>
+          <a:prstGeom prst="rect">
+            <a:avLst/>
+          </a:prstGeom>
+          <a:noFill/>
+          <a:ln/>
+        </p:spPr>
+        <p:txBody>
+          <a:bodyPr wrap="square" lIns="0" tIns="0" rIns="0" bIns="0" rtlCol="0" anchor="ctr"/>
+          <a:lstStyle/>
+          <a:p>
+            <a:pPr indent="0" marL="0">
+              <a:buNone/>
+            </a:pPr>
+            <a:r>
+              <a:rPr lang="en-US" sz="950" dirty="0">
+                <a:solidFill>
+                  <a:srgbClr val="1A1A1A"/>
+                </a:solidFill>
+                <a:latin typeface="Calibri" pitchFamily="34" charset="0"/>
+                <a:ea typeface="Calibri" pitchFamily="34" charset="-122"/>
+                <a:cs typeface="Calibri" pitchFamily="34" charset="-120"/>
+              </a:rPr>
+              <a:t>Heatmap годы×месяцы, STL-декомпозиция, сезонный прогноз. Бесплатная альтернатива Seasonax.</a:t>
             </a:r>
             <a:endParaRPr lang="en-US" sz="950" dirty="0"/>
           </a:p>
@@ -6038,7 +6010,135 @@
       </p:sp>
       <p:sp>
         <p:nvSpPr>
-          <p:cNvPr id="25" name="Text 23"/>
+          <p:cNvPr id="25" name="Shape 23"/>
+          <p:cNvSpPr/>
+          <p:nvPr/>
+        </p:nvSpPr>
+        <p:spPr>
+          <a:xfrm>
+            <a:off x="6217920" y="2971800"/>
+            <a:ext cx="2743200" cy="1554480"/>
+          </a:xfrm>
+          <a:prstGeom prst="rect">
+            <a:avLst/>
+          </a:prstGeom>
+          <a:solidFill>
+            <a:srgbClr val="F5F5F5"/>
+          </a:solidFill>
+          <a:ln w="12700">
+            <a:solidFill>
+              <a:srgbClr val="E0E0E0"/>
+            </a:solidFill>
+            <a:prstDash val="solid"/>
+          </a:ln>
+        </p:spPr>
+      </p:sp>
+      <p:sp>
+        <p:nvSpPr>
+          <p:cNvPr id="26" name="Shape 24"/>
+          <p:cNvSpPr/>
+          <p:nvPr/>
+        </p:nvSpPr>
+        <p:spPr>
+          <a:xfrm>
+            <a:off x="6217920" y="2971800"/>
+            <a:ext cx="73152" cy="1554480"/>
+          </a:xfrm>
+          <a:prstGeom prst="rect">
+            <a:avLst/>
+          </a:prstGeom>
+          <a:solidFill>
+            <a:srgbClr val="C8102E"/>
+          </a:solidFill>
+          <a:ln w="12700">
+            <a:solidFill>
+              <a:srgbClr val="C8102E"/>
+            </a:solidFill>
+            <a:prstDash val="solid"/>
+          </a:ln>
+        </p:spPr>
+      </p:sp>
+      <p:sp>
+        <p:nvSpPr>
+          <p:cNvPr id="27" name="Text 25"/>
+          <p:cNvSpPr/>
+          <p:nvPr/>
+        </p:nvSpPr>
+        <p:spPr>
+          <a:xfrm>
+            <a:off x="6382512" y="3081528"/>
+            <a:ext cx="2468880" cy="457200"/>
+          </a:xfrm>
+          <a:prstGeom prst="rect">
+            <a:avLst/>
+          </a:prstGeom>
+          <a:noFill/>
+          <a:ln/>
+        </p:spPr>
+        <p:txBody>
+          <a:bodyPr wrap="square" lIns="0" tIns="0" rIns="0" bIns="0" rtlCol="0" anchor="ctr"/>
+          <a:lstStyle/>
+          <a:p>
+            <a:pPr indent="0" marL="0">
+              <a:buNone/>
+            </a:pPr>
+            <a:r>
+              <a:rPr lang="en-US" sz="1200" b="1" dirty="0">
+                <a:solidFill>
+                  <a:srgbClr val="1A1A1A"/>
+                </a:solidFill>
+                <a:latin typeface="Calibri" pitchFamily="34" charset="0"/>
+                <a:ea typeface="Calibri" pitchFamily="34" charset="-122"/>
+                <a:cs typeface="Calibri" pitchFamily="34" charset="-120"/>
+              </a:rPr>
+              <a:t>📅 Календарь событий + прогнозы</a:t>
+            </a:r>
+            <a:endParaRPr lang="en-US" sz="1200" dirty="0"/>
+          </a:p>
+        </p:txBody>
+      </p:sp>
+      <p:sp>
+        <p:nvSpPr>
+          <p:cNvPr id="28" name="Text 26"/>
+          <p:cNvSpPr/>
+          <p:nvPr/>
+        </p:nvSpPr>
+        <p:spPr>
+          <a:xfrm>
+            <a:off x="6382512" y="3566160"/>
+            <a:ext cx="2468880" cy="868680"/>
+          </a:xfrm>
+          <a:prstGeom prst="rect">
+            <a:avLst/>
+          </a:prstGeom>
+          <a:noFill/>
+          <a:ln/>
+        </p:spPr>
+        <p:txBody>
+          <a:bodyPr wrap="square" lIns="0" tIns="0" rIns="0" bIns="0" rtlCol="0" anchor="ctr"/>
+          <a:lstStyle/>
+          <a:p>
+            <a:pPr indent="0" marL="0">
+              <a:buNone/>
+            </a:pPr>
+            <a:r>
+              <a:rPr lang="en-US" sz="950" dirty="0">
+                <a:solidFill>
+                  <a:srgbClr val="1A1A1A"/>
+                </a:solidFill>
+                <a:latin typeface="Calibri" pitchFamily="34" charset="0"/>
+                <a:ea typeface="Calibri" pitchFamily="34" charset="-122"/>
+                <a:cs typeface="Calibri" pitchFamily="34" charset="-120"/>
+              </a:rPr>
+              <a:t>FOMC, CPI, PMI с консенсусом аналитиков (CME FedWatch + Reuters). Бейдж влияния на медь — bullish/bearish.</a:t>
+            </a:r>
+            <a:endParaRPr lang="en-US" sz="950" dirty="0"/>
+          </a:p>
+        </p:txBody>
+      </p:sp>
+      <p:sp>
+        <p:nvSpPr>
+          <p:cNvPr id="29" name="Text 27"/>
           <p:cNvSpPr/>
           <p:nvPr/>
         </p:nvSpPr>
@@ -6077,7 +6177,7 @@
       </p:sp>
       <p:sp>
         <p:nvSpPr>
-          <p:cNvPr id="26" name="Text 24"/>
+          <p:cNvPr id="30" name="Text 28"/>
           <p:cNvSpPr/>
           <p:nvPr/>
         </p:nvSpPr>
@@ -9305,7 +9405,7 @@
                 <a:ea typeface="Calibri" pitchFamily="34" charset="-122"/>
                 <a:cs typeface="Calibri" pitchFamily="34" charset="-120"/>
               </a:rPr>
-              <a:t>SHAP-объяснение · What-if · стресс-тесты · PDF</a:t>
+              <a:t>SHAP · What-if · стресс-тесты · PDF · сезонность</a:t>
             </a:r>
             <a:endParaRPr lang="en-US" sz="1000" dirty="0"/>
           </a:p>
@@ -13208,7 +13308,7 @@
                 <a:ea typeface="Calibri" pitchFamily="34" charset="-122"/>
                 <a:cs typeface="Calibri" pitchFamily="34" charset="-120"/>
               </a:rPr>
-              <a:t>Технические индикаторы</a:t>
+              <a:t>Технические + сезонность</a:t>
             </a:r>
             <a:endParaRPr lang="en-US" sz="1300" dirty="0"/>
           </a:p>
@@ -13247,7 +13347,7 @@
                 <a:ea typeface="Calibri" pitchFamily="34" charset="-122"/>
                 <a:cs typeface="Calibri" pitchFamily="34" charset="-120"/>
               </a:rPr>
-              <a:t>RSI/MACD/ATR</a:t>
+              <a:t>RSI/MACD + STL</a:t>
             </a:r>
             <a:endParaRPr lang="en-US" sz="1000" dirty="0"/>
           </a:p>
